--- a/構成図.pptx
+++ b/構成図.pptx
@@ -192,7 +192,7 @@
   <pc:docChgLst>
     <pc:chgData name="城谷 匠" userId="afbae57c-d4ca-4e58-bc9a-6f765e208d89" providerId="ADAL" clId="{FD963559-32B2-43B7-8F97-A1E47AC731FA}"/>
     <pc:docChg chg="undo custSel addSld modSld sldOrd">
-      <pc:chgData name="城谷 匠" userId="afbae57c-d4ca-4e58-bc9a-6f765e208d89" providerId="ADAL" clId="{FD963559-32B2-43B7-8F97-A1E47AC731FA}" dt="2026-06-04T00:36:01.142" v="329" actId="20577"/>
+      <pc:chgData name="城谷 匠" userId="afbae57c-d4ca-4e58-bc9a-6f765e208d89" providerId="ADAL" clId="{FD963559-32B2-43B7-8F97-A1E47AC731FA}" dt="2026-06-04T00:52:46.305" v="354" actId="20577"/>
       <pc:docMkLst>
         <pc:docMk/>
       </pc:docMkLst>
@@ -444,7 +444,7 @@
         </pc:cxnChg>
       </pc:sldChg>
       <pc:sldChg chg="modSp new mod ord">
-        <pc:chgData name="城谷 匠" userId="afbae57c-d4ca-4e58-bc9a-6f765e208d89" providerId="ADAL" clId="{FD963559-32B2-43B7-8F97-A1E47AC731FA}" dt="2026-06-04T00:32:50.313" v="264" actId="20577"/>
+        <pc:chgData name="城谷 匠" userId="afbae57c-d4ca-4e58-bc9a-6f765e208d89" providerId="ADAL" clId="{FD963559-32B2-43B7-8F97-A1E47AC731FA}" dt="2026-06-04T00:52:46.305" v="354" actId="20577"/>
         <pc:sldMkLst>
           <pc:docMk/>
           <pc:sldMk cId="344881896" sldId="257"/>
@@ -458,7 +458,7 @@
           </ac:spMkLst>
         </pc:spChg>
         <pc:spChg chg="mod">
-          <ac:chgData name="城谷 匠" userId="afbae57c-d4ca-4e58-bc9a-6f765e208d89" providerId="ADAL" clId="{FD963559-32B2-43B7-8F97-A1E47AC731FA}" dt="2026-06-04T00:32:50.313" v="264" actId="20577"/>
+          <ac:chgData name="城谷 匠" userId="afbae57c-d4ca-4e58-bc9a-6f765e208d89" providerId="ADAL" clId="{FD963559-32B2-43B7-8F97-A1E47AC731FA}" dt="2026-06-04T00:52:46.305" v="354" actId="20577"/>
           <ac:spMkLst>
             <pc:docMk/>
             <pc:sldMk cId="344881896" sldId="257"/>
@@ -17370,15 +17370,15 @@
           <a:p>
             <a:r>
               <a:rPr lang="ja-JP" altLang="en-US" dirty="0"/>
-              <a:t>録画自動要約</a:t>
+              <a:t>録画自動文字起こし</a:t>
             </a:r>
             <a:r>
               <a:rPr lang="en-US" altLang="ja-JP" dirty="0"/>
               <a:t>&amp;</a:t>
             </a:r>
             <a:r>
-              <a:rPr lang="ja-JP" altLang="en-US" dirty="0"/>
-              <a:t>文字起こし</a:t>
+              <a:rPr lang="ja-JP" altLang="en-US"/>
+              <a:t>要約</a:t>
             </a:r>
             <a:endParaRPr kumimoji="1" lang="ja-JP" altLang="en-US" dirty="0"/>
           </a:p>

--- a/構成図.pptx
+++ b/構成図.pptx
@@ -13,11 +13,12 @@
     <p:sldMasterId id="2147483819" r:id="rId9"/>
   </p:sldMasterIdLst>
   <p:notesMasterIdLst>
-    <p:notesMasterId r:id="rId12"/>
+    <p:notesMasterId r:id="rId13"/>
   </p:notesMasterIdLst>
   <p:sldIdLst>
     <p:sldId id="257" r:id="rId10"/>
-    <p:sldId id="256" r:id="rId11"/>
+    <p:sldId id="258" r:id="rId11"/>
+    <p:sldId id="256" r:id="rId12"/>
   </p:sldIdLst>
   <p:sldSz cx="24382413" cy="13716000"/>
   <p:notesSz cx="6858000" cy="9144000"/>
@@ -182,7 +183,7 @@
 <file path=ppt/revisionInfo.xml><?xml version="1.0" encoding="utf-8"?>
 <p1510:revInfo xmlns:a="http://schemas.openxmlformats.org/drawingml/2006/main" xmlns:r="http://schemas.openxmlformats.org/officeDocument/2006/relationships" xmlns:p1510="http://schemas.microsoft.com/office/powerpoint/2015/10/main">
   <p1510:revLst>
-    <p1510:client id="{37C306CE-836D-479E-BF46-90B4FA3C69C3}" v="34" dt="2026-06-04T00:35:48.728"/>
+    <p1510:client id="{37C306CE-836D-479E-BF46-90B4FA3C69C3}" v="35" dt="2026-06-04T03:44:10.875"/>
   </p1510:revLst>
 </p1510:revInfo>
 </file>
@@ -191,8 +192,8 @@
 <pc:chgInfo xmlns:a="http://schemas.openxmlformats.org/drawingml/2006/main" xmlns:r="http://schemas.openxmlformats.org/officeDocument/2006/relationships" xmlns:ac="http://schemas.microsoft.com/office/drawing/2013/main/command" xmlns:pc="http://schemas.microsoft.com/office/powerpoint/2013/main/command">
   <pc:docChgLst>
     <pc:chgData name="城谷 匠" userId="afbae57c-d4ca-4e58-bc9a-6f765e208d89" providerId="ADAL" clId="{FD963559-32B2-43B7-8F97-A1E47AC731FA}"/>
-    <pc:docChg chg="undo custSel addSld modSld sldOrd">
-      <pc:chgData name="城谷 匠" userId="afbae57c-d4ca-4e58-bc9a-6f765e208d89" providerId="ADAL" clId="{FD963559-32B2-43B7-8F97-A1E47AC731FA}" dt="2026-06-04T00:52:46.305" v="354" actId="20577"/>
+    <pc:docChg chg="undo redo custSel addSld modSld sldOrd">
+      <pc:chgData name="城谷 匠" userId="afbae57c-d4ca-4e58-bc9a-6f765e208d89" providerId="ADAL" clId="{FD963559-32B2-43B7-8F97-A1E47AC731FA}" dt="2026-06-04T03:45:32.328" v="373" actId="1076"/>
       <pc:docMkLst>
         <pc:docMk/>
       </pc:docMkLst>
@@ -465,6 +466,45 @@
             <ac:spMk id="3" creationId="{1BD3B655-6B12-979A-3D9D-DF7E4D17F04B}"/>
           </ac:spMkLst>
         </pc:spChg>
+      </pc:sldChg>
+      <pc:sldChg chg="addSp delSp modSp add mod ord">
+        <pc:chgData name="城谷 匠" userId="afbae57c-d4ca-4e58-bc9a-6f765e208d89" providerId="ADAL" clId="{FD963559-32B2-43B7-8F97-A1E47AC731FA}" dt="2026-06-04T03:45:32.328" v="373" actId="1076"/>
+        <pc:sldMkLst>
+          <pc:docMk/>
+          <pc:sldMk cId="1909664869" sldId="258"/>
+        </pc:sldMkLst>
+        <pc:picChg chg="add del mod">
+          <ac:chgData name="城谷 匠" userId="afbae57c-d4ca-4e58-bc9a-6f765e208d89" providerId="ADAL" clId="{FD963559-32B2-43B7-8F97-A1E47AC731FA}" dt="2026-06-04T03:45:24.339" v="372" actId="478"/>
+          <ac:picMkLst>
+            <pc:docMk/>
+            <pc:sldMk cId="1909664869" sldId="258"/>
+            <ac:picMk id="16" creationId="{C4F70AD1-D4EB-2A2A-68D2-C99C2BEC6761}"/>
+          </ac:picMkLst>
+        </pc:picChg>
+        <pc:picChg chg="add mod">
+          <ac:chgData name="城谷 匠" userId="afbae57c-d4ca-4e58-bc9a-6f765e208d89" providerId="ADAL" clId="{FD963559-32B2-43B7-8F97-A1E47AC731FA}" dt="2026-06-04T03:45:32.328" v="373" actId="1076"/>
+          <ac:picMkLst>
+            <pc:docMk/>
+            <pc:sldMk cId="1909664869" sldId="258"/>
+            <ac:picMk id="35" creationId="{64C8996C-730A-7EAB-9F8B-48B002CCA8D1}"/>
+          </ac:picMkLst>
+        </pc:picChg>
+        <pc:picChg chg="del">
+          <ac:chgData name="城谷 匠" userId="afbae57c-d4ca-4e58-bc9a-6f765e208d89" providerId="ADAL" clId="{FD963559-32B2-43B7-8F97-A1E47AC731FA}" dt="2026-06-04T03:44:13.642" v="358" actId="478"/>
+          <ac:picMkLst>
+            <pc:docMk/>
+            <pc:sldMk cId="1909664869" sldId="258"/>
+            <ac:picMk id="38" creationId="{62A52067-327A-94BF-4E9B-26CE489AFC29}"/>
+          </ac:picMkLst>
+        </pc:picChg>
+        <pc:cxnChg chg="mod">
+          <ac:chgData name="城谷 匠" userId="afbae57c-d4ca-4e58-bc9a-6f765e208d89" providerId="ADAL" clId="{FD963559-32B2-43B7-8F97-A1E47AC731FA}" dt="2026-06-04T03:44:13.642" v="358" actId="478"/>
+          <ac:cxnSpMkLst>
+            <pc:docMk/>
+            <pc:sldMk cId="1909664869" sldId="258"/>
+            <ac:cxnSpMk id="111" creationId="{B573A94C-04DC-C0DF-027A-882B14B6CBD9}"/>
+          </ac:cxnSpMkLst>
+        </pc:cxnChg>
       </pc:sldChg>
     </pc:docChg>
   </pc:docChgLst>
@@ -1278,7 +1318,1379 @@
 </dgm:colorsDef>
 </file>
 
+<file path=ppt/diagrams/colors2.xml><?xml version="1.0" encoding="utf-8"?>
+<dgm:colorsDef xmlns:dgm="http://schemas.openxmlformats.org/drawingml/2006/diagram" xmlns:a="http://schemas.openxmlformats.org/drawingml/2006/main" uniqueId="urn:microsoft.com/office/officeart/2005/8/colors/accent0_1">
+  <dgm:title val=""/>
+  <dgm:desc val=""/>
+  <dgm:catLst>
+    <dgm:cat type="mainScheme" pri="10100"/>
+  </dgm:catLst>
+  <dgm:styleLbl name="node0">
+    <dgm:fillClrLst meth="repeat">
+      <a:schemeClr val="lt1"/>
+    </dgm:fillClrLst>
+    <dgm:linClrLst meth="repeat">
+      <a:schemeClr val="dk1">
+        <a:shade val="80000"/>
+      </a:schemeClr>
+    </dgm:linClrLst>
+    <dgm:effectClrLst/>
+    <dgm:txLinClrLst/>
+    <dgm:txFillClrLst meth="repeat">
+      <a:schemeClr val="dk1"/>
+    </dgm:txFillClrLst>
+    <dgm:txEffectClrLst/>
+  </dgm:styleLbl>
+  <dgm:styleLbl name="node1">
+    <dgm:fillClrLst meth="repeat">
+      <a:schemeClr val="lt1"/>
+    </dgm:fillClrLst>
+    <dgm:linClrLst meth="repeat">
+      <a:schemeClr val="dk1">
+        <a:shade val="80000"/>
+      </a:schemeClr>
+    </dgm:linClrLst>
+    <dgm:effectClrLst/>
+    <dgm:txLinClrLst/>
+    <dgm:txFillClrLst meth="repeat">
+      <a:schemeClr val="dk1"/>
+    </dgm:txFillClrLst>
+    <dgm:txEffectClrLst/>
+  </dgm:styleLbl>
+  <dgm:styleLbl name="alignNode1">
+    <dgm:fillClrLst meth="repeat">
+      <a:schemeClr val="lt1"/>
+    </dgm:fillClrLst>
+    <dgm:linClrLst meth="repeat">
+      <a:schemeClr val="dk1">
+        <a:shade val="80000"/>
+      </a:schemeClr>
+    </dgm:linClrLst>
+    <dgm:effectClrLst/>
+    <dgm:txLinClrLst/>
+    <dgm:txFillClrLst meth="repeat">
+      <a:schemeClr val="dk1"/>
+    </dgm:txFillClrLst>
+    <dgm:txEffectClrLst/>
+  </dgm:styleLbl>
+  <dgm:styleLbl name="lnNode1">
+    <dgm:fillClrLst meth="repeat">
+      <a:schemeClr val="lt1"/>
+    </dgm:fillClrLst>
+    <dgm:linClrLst meth="repeat">
+      <a:schemeClr val="dk1">
+        <a:shade val="80000"/>
+      </a:schemeClr>
+    </dgm:linClrLst>
+    <dgm:effectClrLst/>
+    <dgm:txLinClrLst/>
+    <dgm:txFillClrLst meth="repeat">
+      <a:schemeClr val="dk1"/>
+    </dgm:txFillClrLst>
+    <dgm:txEffectClrLst/>
+  </dgm:styleLbl>
+  <dgm:styleLbl name="vennNode1">
+    <dgm:fillClrLst meth="repeat">
+      <a:schemeClr val="lt1">
+        <a:alpha val="50000"/>
+      </a:schemeClr>
+    </dgm:fillClrLst>
+    <dgm:linClrLst meth="repeat">
+      <a:schemeClr val="dk1">
+        <a:shade val="80000"/>
+      </a:schemeClr>
+    </dgm:linClrLst>
+    <dgm:effectClrLst/>
+    <dgm:txLinClrLst/>
+    <dgm:txFillClrLst/>
+    <dgm:txEffectClrLst/>
+  </dgm:styleLbl>
+  <dgm:styleLbl name="node2">
+    <dgm:fillClrLst meth="repeat">
+      <a:schemeClr val="lt1"/>
+    </dgm:fillClrLst>
+    <dgm:linClrLst meth="repeat">
+      <a:schemeClr val="dk1">
+        <a:shade val="80000"/>
+      </a:schemeClr>
+    </dgm:linClrLst>
+    <dgm:effectClrLst/>
+    <dgm:txLinClrLst/>
+    <dgm:txFillClrLst meth="repeat">
+      <a:schemeClr val="dk1"/>
+    </dgm:txFillClrLst>
+    <dgm:txEffectClrLst/>
+  </dgm:styleLbl>
+  <dgm:styleLbl name="node3">
+    <dgm:fillClrLst meth="repeat">
+      <a:schemeClr val="lt1"/>
+    </dgm:fillClrLst>
+    <dgm:linClrLst meth="repeat">
+      <a:schemeClr val="dk1">
+        <a:shade val="80000"/>
+      </a:schemeClr>
+    </dgm:linClrLst>
+    <dgm:effectClrLst/>
+    <dgm:txLinClrLst/>
+    <dgm:txFillClrLst meth="repeat">
+      <a:schemeClr val="dk1"/>
+    </dgm:txFillClrLst>
+    <dgm:txEffectClrLst/>
+  </dgm:styleLbl>
+  <dgm:styleLbl name="node4">
+    <dgm:fillClrLst meth="repeat">
+      <a:schemeClr val="lt1"/>
+    </dgm:fillClrLst>
+    <dgm:linClrLst meth="repeat">
+      <a:schemeClr val="dk1">
+        <a:shade val="80000"/>
+      </a:schemeClr>
+    </dgm:linClrLst>
+    <dgm:effectClrLst/>
+    <dgm:txLinClrLst/>
+    <dgm:txFillClrLst meth="repeat">
+      <a:schemeClr val="dk1"/>
+    </dgm:txFillClrLst>
+    <dgm:txEffectClrLst/>
+  </dgm:styleLbl>
+  <dgm:styleLbl name="fgImgPlace1">
+    <dgm:fillClrLst meth="repeat">
+      <a:schemeClr val="dk1">
+        <a:tint val="40000"/>
+      </a:schemeClr>
+    </dgm:fillClrLst>
+    <dgm:linClrLst meth="repeat">
+      <a:schemeClr val="dk1">
+        <a:shade val="80000"/>
+      </a:schemeClr>
+    </dgm:linClrLst>
+    <dgm:effectClrLst/>
+    <dgm:txLinClrLst/>
+    <dgm:txFillClrLst meth="repeat">
+      <a:schemeClr val="lt1"/>
+    </dgm:txFillClrLst>
+    <dgm:txEffectClrLst/>
+  </dgm:styleLbl>
+  <dgm:styleLbl name="alignImgPlace1">
+    <dgm:fillClrLst meth="repeat">
+      <a:schemeClr val="dk1">
+        <a:tint val="40000"/>
+      </a:schemeClr>
+    </dgm:fillClrLst>
+    <dgm:linClrLst meth="repeat">
+      <a:schemeClr val="dk1">
+        <a:shade val="80000"/>
+      </a:schemeClr>
+    </dgm:linClrLst>
+    <dgm:effectClrLst/>
+    <dgm:txLinClrLst/>
+    <dgm:txFillClrLst meth="repeat">
+      <a:schemeClr val="lt1"/>
+    </dgm:txFillClrLst>
+    <dgm:txEffectClrLst/>
+  </dgm:styleLbl>
+  <dgm:styleLbl name="bgImgPlace1">
+    <dgm:fillClrLst meth="repeat">
+      <a:schemeClr val="dk1">
+        <a:tint val="40000"/>
+      </a:schemeClr>
+    </dgm:fillClrLst>
+    <dgm:linClrLst meth="repeat">
+      <a:schemeClr val="dk1">
+        <a:shade val="80000"/>
+      </a:schemeClr>
+    </dgm:linClrLst>
+    <dgm:effectClrLst/>
+    <dgm:txLinClrLst/>
+    <dgm:txFillClrLst meth="repeat">
+      <a:schemeClr val="lt1"/>
+    </dgm:txFillClrLst>
+    <dgm:txEffectClrLst/>
+  </dgm:styleLbl>
+  <dgm:styleLbl name="sibTrans2D1">
+    <dgm:fillClrLst meth="repeat">
+      <a:schemeClr val="dk1">
+        <a:tint val="60000"/>
+      </a:schemeClr>
+    </dgm:fillClrLst>
+    <dgm:linClrLst meth="repeat">
+      <a:schemeClr val="dk1">
+        <a:tint val="60000"/>
+      </a:schemeClr>
+    </dgm:linClrLst>
+    <dgm:effectClrLst/>
+    <dgm:txLinClrLst/>
+    <dgm:txFillClrLst meth="repeat">
+      <a:schemeClr val="dk1"/>
+    </dgm:txFillClrLst>
+    <dgm:txEffectClrLst/>
+  </dgm:styleLbl>
+  <dgm:styleLbl name="fgSibTrans2D1">
+    <dgm:fillClrLst meth="repeat">
+      <a:schemeClr val="dk1">
+        <a:tint val="60000"/>
+      </a:schemeClr>
+    </dgm:fillClrLst>
+    <dgm:linClrLst meth="repeat">
+      <a:schemeClr val="dk1">
+        <a:tint val="60000"/>
+      </a:schemeClr>
+    </dgm:linClrLst>
+    <dgm:effectClrLst/>
+    <dgm:txLinClrLst/>
+    <dgm:txFillClrLst meth="repeat">
+      <a:schemeClr val="dk1"/>
+    </dgm:txFillClrLst>
+    <dgm:txEffectClrLst/>
+  </dgm:styleLbl>
+  <dgm:styleLbl name="bgSibTrans2D1">
+    <dgm:fillClrLst meth="repeat">
+      <a:schemeClr val="dk1">
+        <a:tint val="60000"/>
+      </a:schemeClr>
+    </dgm:fillClrLst>
+    <dgm:linClrLst meth="repeat">
+      <a:schemeClr val="dk1">
+        <a:tint val="60000"/>
+      </a:schemeClr>
+    </dgm:linClrLst>
+    <dgm:effectClrLst/>
+    <dgm:txLinClrLst/>
+    <dgm:txFillClrLst meth="repeat">
+      <a:schemeClr val="dk1"/>
+    </dgm:txFillClrLst>
+    <dgm:txEffectClrLst/>
+  </dgm:styleLbl>
+  <dgm:styleLbl name="sibTrans1D1">
+    <dgm:fillClrLst meth="repeat">
+      <a:schemeClr val="dk1"/>
+    </dgm:fillClrLst>
+    <dgm:linClrLst meth="repeat">
+      <a:schemeClr val="dk1"/>
+    </dgm:linClrLst>
+    <dgm:effectClrLst/>
+    <dgm:txLinClrLst/>
+    <dgm:txFillClrLst meth="repeat">
+      <a:schemeClr val="tx1"/>
+    </dgm:txFillClrLst>
+    <dgm:txEffectClrLst/>
+  </dgm:styleLbl>
+  <dgm:styleLbl name="callout">
+    <dgm:fillClrLst meth="repeat">
+      <a:schemeClr val="dk1"/>
+    </dgm:fillClrLst>
+    <dgm:linClrLst meth="repeat">
+      <a:schemeClr val="dk1"/>
+    </dgm:linClrLst>
+    <dgm:effectClrLst/>
+    <dgm:txLinClrLst/>
+    <dgm:txFillClrLst meth="repeat">
+      <a:schemeClr val="tx1"/>
+    </dgm:txFillClrLst>
+    <dgm:txEffectClrLst/>
+  </dgm:styleLbl>
+  <dgm:styleLbl name="asst0">
+    <dgm:fillClrLst meth="repeat">
+      <a:schemeClr val="lt1"/>
+    </dgm:fillClrLst>
+    <dgm:linClrLst meth="repeat">
+      <a:schemeClr val="dk1">
+        <a:shade val="80000"/>
+      </a:schemeClr>
+    </dgm:linClrLst>
+    <dgm:effectClrLst/>
+    <dgm:txLinClrLst/>
+    <dgm:txFillClrLst meth="repeat">
+      <a:schemeClr val="dk1"/>
+    </dgm:txFillClrLst>
+    <dgm:txEffectClrLst/>
+  </dgm:styleLbl>
+  <dgm:styleLbl name="asst1">
+    <dgm:fillClrLst meth="repeat">
+      <a:schemeClr val="lt1"/>
+    </dgm:fillClrLst>
+    <dgm:linClrLst meth="repeat">
+      <a:schemeClr val="dk1">
+        <a:shade val="80000"/>
+      </a:schemeClr>
+    </dgm:linClrLst>
+    <dgm:effectClrLst/>
+    <dgm:txLinClrLst/>
+    <dgm:txFillClrLst meth="repeat">
+      <a:schemeClr val="dk1"/>
+    </dgm:txFillClrLst>
+    <dgm:txEffectClrLst/>
+  </dgm:styleLbl>
+  <dgm:styleLbl name="asst2">
+    <dgm:fillClrLst meth="repeat">
+      <a:schemeClr val="lt1"/>
+    </dgm:fillClrLst>
+    <dgm:linClrLst meth="repeat">
+      <a:schemeClr val="dk1">
+        <a:shade val="80000"/>
+      </a:schemeClr>
+    </dgm:linClrLst>
+    <dgm:effectClrLst/>
+    <dgm:txLinClrLst/>
+    <dgm:txFillClrLst meth="repeat">
+      <a:schemeClr val="dk1"/>
+    </dgm:txFillClrLst>
+    <dgm:txEffectClrLst/>
+  </dgm:styleLbl>
+  <dgm:styleLbl name="asst3">
+    <dgm:fillClrLst meth="repeat">
+      <a:schemeClr val="lt1"/>
+    </dgm:fillClrLst>
+    <dgm:linClrLst meth="repeat">
+      <a:schemeClr val="dk1">
+        <a:shade val="80000"/>
+      </a:schemeClr>
+    </dgm:linClrLst>
+    <dgm:effectClrLst/>
+    <dgm:txLinClrLst/>
+    <dgm:txFillClrLst meth="repeat">
+      <a:schemeClr val="dk1"/>
+    </dgm:txFillClrLst>
+    <dgm:txEffectClrLst/>
+  </dgm:styleLbl>
+  <dgm:styleLbl name="asst4">
+    <dgm:fillClrLst meth="repeat">
+      <a:schemeClr val="lt1"/>
+    </dgm:fillClrLst>
+    <dgm:linClrLst meth="repeat">
+      <a:schemeClr val="dk1">
+        <a:shade val="80000"/>
+      </a:schemeClr>
+    </dgm:linClrLst>
+    <dgm:effectClrLst/>
+    <dgm:txLinClrLst/>
+    <dgm:txFillClrLst meth="repeat">
+      <a:schemeClr val="dk1"/>
+    </dgm:txFillClrLst>
+    <dgm:txEffectClrLst/>
+  </dgm:styleLbl>
+  <dgm:styleLbl name="parChTrans2D1">
+    <dgm:fillClrLst meth="repeat">
+      <a:schemeClr val="dk1">
+        <a:tint val="60000"/>
+      </a:schemeClr>
+    </dgm:fillClrLst>
+    <dgm:linClrLst meth="repeat">
+      <a:schemeClr val="dk1">
+        <a:tint val="60000"/>
+      </a:schemeClr>
+    </dgm:linClrLst>
+    <dgm:effectClrLst/>
+    <dgm:txLinClrLst/>
+    <dgm:txFillClrLst/>
+    <dgm:txEffectClrLst/>
+  </dgm:styleLbl>
+  <dgm:styleLbl name="parChTrans2D2">
+    <dgm:fillClrLst meth="repeat">
+      <a:schemeClr val="dk1"/>
+    </dgm:fillClrLst>
+    <dgm:linClrLst meth="repeat">
+      <a:schemeClr val="dk1"/>
+    </dgm:linClrLst>
+    <dgm:effectClrLst/>
+    <dgm:txLinClrLst/>
+    <dgm:txFillClrLst/>
+    <dgm:txEffectClrLst/>
+  </dgm:styleLbl>
+  <dgm:styleLbl name="parChTrans2D3">
+    <dgm:fillClrLst meth="repeat">
+      <a:schemeClr val="dk1"/>
+    </dgm:fillClrLst>
+    <dgm:linClrLst meth="repeat">
+      <a:schemeClr val="dk1"/>
+    </dgm:linClrLst>
+    <dgm:effectClrLst/>
+    <dgm:txLinClrLst/>
+    <dgm:txFillClrLst/>
+    <dgm:txEffectClrLst/>
+  </dgm:styleLbl>
+  <dgm:styleLbl name="parChTrans2D4">
+    <dgm:fillClrLst meth="repeat">
+      <a:schemeClr val="dk1"/>
+    </dgm:fillClrLst>
+    <dgm:linClrLst meth="repeat">
+      <a:schemeClr val="dk1"/>
+    </dgm:linClrLst>
+    <dgm:effectClrLst/>
+    <dgm:txLinClrLst/>
+    <dgm:txFillClrLst meth="repeat">
+      <a:schemeClr val="lt1"/>
+    </dgm:txFillClrLst>
+    <dgm:txEffectClrLst/>
+  </dgm:styleLbl>
+  <dgm:styleLbl name="parChTrans1D1">
+    <dgm:fillClrLst meth="repeat">
+      <a:schemeClr val="dk1"/>
+    </dgm:fillClrLst>
+    <dgm:linClrLst meth="repeat">
+      <a:schemeClr val="dk1">
+        <a:shade val="60000"/>
+      </a:schemeClr>
+    </dgm:linClrLst>
+    <dgm:effectClrLst/>
+    <dgm:txLinClrLst/>
+    <dgm:txFillClrLst meth="repeat">
+      <a:schemeClr val="tx1"/>
+    </dgm:txFillClrLst>
+    <dgm:txEffectClrLst/>
+  </dgm:styleLbl>
+  <dgm:styleLbl name="parChTrans1D2">
+    <dgm:fillClrLst meth="repeat">
+      <a:schemeClr val="dk1"/>
+    </dgm:fillClrLst>
+    <dgm:linClrLst meth="repeat">
+      <a:schemeClr val="dk1">
+        <a:shade val="60000"/>
+      </a:schemeClr>
+    </dgm:linClrLst>
+    <dgm:effectClrLst/>
+    <dgm:txLinClrLst/>
+    <dgm:txFillClrLst meth="repeat">
+      <a:schemeClr val="tx1"/>
+    </dgm:txFillClrLst>
+    <dgm:txEffectClrLst/>
+  </dgm:styleLbl>
+  <dgm:styleLbl name="parChTrans1D3">
+    <dgm:fillClrLst meth="repeat">
+      <a:schemeClr val="dk1"/>
+    </dgm:fillClrLst>
+    <dgm:linClrLst meth="repeat">
+      <a:schemeClr val="dk1">
+        <a:shade val="80000"/>
+      </a:schemeClr>
+    </dgm:linClrLst>
+    <dgm:effectClrLst/>
+    <dgm:txLinClrLst/>
+    <dgm:txFillClrLst meth="repeat">
+      <a:schemeClr val="tx1"/>
+    </dgm:txFillClrLst>
+    <dgm:txEffectClrLst/>
+  </dgm:styleLbl>
+  <dgm:styleLbl name="parChTrans1D4">
+    <dgm:fillClrLst meth="repeat">
+      <a:schemeClr val="dk1"/>
+    </dgm:fillClrLst>
+    <dgm:linClrLst meth="repeat">
+      <a:schemeClr val="dk1">
+        <a:shade val="80000"/>
+      </a:schemeClr>
+    </dgm:linClrLst>
+    <dgm:effectClrLst/>
+    <dgm:txLinClrLst/>
+    <dgm:txFillClrLst meth="repeat">
+      <a:schemeClr val="tx1"/>
+    </dgm:txFillClrLst>
+    <dgm:txEffectClrLst/>
+  </dgm:styleLbl>
+  <dgm:styleLbl name="fgAcc1">
+    <dgm:fillClrLst meth="repeat">
+      <a:schemeClr val="dk1">
+        <a:alpha val="90000"/>
+        <a:tint val="40000"/>
+      </a:schemeClr>
+    </dgm:fillClrLst>
+    <dgm:linClrLst meth="repeat">
+      <a:schemeClr val="dk1"/>
+    </dgm:linClrLst>
+    <dgm:effectClrLst/>
+    <dgm:txLinClrLst/>
+    <dgm:txFillClrLst meth="repeat">
+      <a:schemeClr val="dk1"/>
+    </dgm:txFillClrLst>
+    <dgm:txEffectClrLst/>
+  </dgm:styleLbl>
+  <dgm:styleLbl name="conFgAcc1">
+    <dgm:fillClrLst meth="repeat">
+      <a:schemeClr val="dk1">
+        <a:alpha val="90000"/>
+        <a:tint val="40000"/>
+      </a:schemeClr>
+    </dgm:fillClrLst>
+    <dgm:linClrLst meth="repeat">
+      <a:schemeClr val="dk1"/>
+    </dgm:linClrLst>
+    <dgm:effectClrLst/>
+    <dgm:txLinClrLst/>
+    <dgm:txFillClrLst meth="repeat">
+      <a:schemeClr val="dk1"/>
+    </dgm:txFillClrLst>
+    <dgm:txEffectClrLst/>
+  </dgm:styleLbl>
+  <dgm:styleLbl name="alignAcc1">
+    <dgm:fillClrLst meth="repeat">
+      <a:schemeClr val="dk1">
+        <a:alpha val="90000"/>
+        <a:tint val="40000"/>
+      </a:schemeClr>
+    </dgm:fillClrLst>
+    <dgm:linClrLst meth="repeat">
+      <a:schemeClr val="dk1"/>
+    </dgm:linClrLst>
+    <dgm:effectClrLst/>
+    <dgm:txLinClrLst/>
+    <dgm:txFillClrLst meth="repeat">
+      <a:schemeClr val="dk1"/>
+    </dgm:txFillClrLst>
+    <dgm:txEffectClrLst/>
+  </dgm:styleLbl>
+  <dgm:styleLbl name="trAlignAcc1">
+    <dgm:fillClrLst meth="repeat">
+      <a:schemeClr val="dk1">
+        <a:alpha val="40000"/>
+        <a:tint val="40000"/>
+      </a:schemeClr>
+    </dgm:fillClrLst>
+    <dgm:linClrLst meth="repeat">
+      <a:schemeClr val="dk1"/>
+    </dgm:linClrLst>
+    <dgm:effectClrLst/>
+    <dgm:txLinClrLst/>
+    <dgm:txFillClrLst meth="repeat">
+      <a:schemeClr val="dk1"/>
+    </dgm:txFillClrLst>
+    <dgm:txEffectClrLst/>
+  </dgm:styleLbl>
+  <dgm:styleLbl name="bgAcc1">
+    <dgm:fillClrLst meth="repeat">
+      <a:schemeClr val="dk1">
+        <a:alpha val="90000"/>
+        <a:tint val="40000"/>
+      </a:schemeClr>
+    </dgm:fillClrLst>
+    <dgm:linClrLst meth="repeat">
+      <a:schemeClr val="dk1"/>
+    </dgm:linClrLst>
+    <dgm:effectClrLst/>
+    <dgm:txLinClrLst/>
+    <dgm:txFillClrLst meth="repeat">
+      <a:schemeClr val="dk1"/>
+    </dgm:txFillClrLst>
+    <dgm:txEffectClrLst/>
+  </dgm:styleLbl>
+  <dgm:styleLbl name="solidFgAcc1">
+    <dgm:fillClrLst meth="repeat">
+      <a:schemeClr val="lt1"/>
+    </dgm:fillClrLst>
+    <dgm:linClrLst meth="repeat">
+      <a:schemeClr val="dk1"/>
+    </dgm:linClrLst>
+    <dgm:effectClrLst/>
+    <dgm:txLinClrLst/>
+    <dgm:txFillClrLst meth="repeat">
+      <a:schemeClr val="dk1"/>
+    </dgm:txFillClrLst>
+    <dgm:txEffectClrLst/>
+  </dgm:styleLbl>
+  <dgm:styleLbl name="solidAlignAcc1">
+    <dgm:fillClrLst meth="repeat">
+      <a:schemeClr val="lt1"/>
+    </dgm:fillClrLst>
+    <dgm:linClrLst meth="repeat">
+      <a:schemeClr val="dk1"/>
+    </dgm:linClrLst>
+    <dgm:effectClrLst/>
+    <dgm:txLinClrLst/>
+    <dgm:txFillClrLst meth="repeat">
+      <a:schemeClr val="dk1"/>
+    </dgm:txFillClrLst>
+    <dgm:txEffectClrLst/>
+  </dgm:styleLbl>
+  <dgm:styleLbl name="solidBgAcc1">
+    <dgm:fillClrLst meth="repeat">
+      <a:schemeClr val="lt1"/>
+    </dgm:fillClrLst>
+    <dgm:linClrLst meth="repeat">
+      <a:schemeClr val="dk1"/>
+    </dgm:linClrLst>
+    <dgm:effectClrLst/>
+    <dgm:txLinClrLst/>
+    <dgm:txFillClrLst meth="repeat">
+      <a:schemeClr val="dk1"/>
+    </dgm:txFillClrLst>
+    <dgm:txEffectClrLst/>
+  </dgm:styleLbl>
+  <dgm:styleLbl name="fgAccFollowNode1">
+    <dgm:fillClrLst meth="repeat">
+      <a:schemeClr val="lt1">
+        <a:alpha val="90000"/>
+        <a:tint val="40000"/>
+      </a:schemeClr>
+    </dgm:fillClrLst>
+    <dgm:linClrLst meth="repeat">
+      <a:schemeClr val="dk1">
+        <a:alpha val="90000"/>
+      </a:schemeClr>
+    </dgm:linClrLst>
+    <dgm:effectClrLst/>
+    <dgm:txLinClrLst/>
+    <dgm:txFillClrLst meth="repeat">
+      <a:schemeClr val="dk1"/>
+    </dgm:txFillClrLst>
+    <dgm:txEffectClrLst/>
+  </dgm:styleLbl>
+  <dgm:styleLbl name="alignAccFollowNode1">
+    <dgm:fillClrLst meth="repeat">
+      <a:schemeClr val="lt1">
+        <a:alpha val="90000"/>
+        <a:tint val="40000"/>
+      </a:schemeClr>
+    </dgm:fillClrLst>
+    <dgm:linClrLst meth="repeat">
+      <a:schemeClr val="dk1">
+        <a:alpha val="90000"/>
+      </a:schemeClr>
+    </dgm:linClrLst>
+    <dgm:effectClrLst/>
+    <dgm:txLinClrLst/>
+    <dgm:txFillClrLst meth="repeat">
+      <a:schemeClr val="dk1"/>
+    </dgm:txFillClrLst>
+    <dgm:txEffectClrLst/>
+  </dgm:styleLbl>
+  <dgm:styleLbl name="bgAccFollowNode1">
+    <dgm:fillClrLst meth="repeat">
+      <a:schemeClr val="lt1">
+        <a:alpha val="90000"/>
+        <a:tint val="40000"/>
+      </a:schemeClr>
+    </dgm:fillClrLst>
+    <dgm:linClrLst meth="repeat">
+      <a:schemeClr val="dk1">
+        <a:alpha val="90000"/>
+      </a:schemeClr>
+    </dgm:linClrLst>
+    <dgm:effectClrLst/>
+    <dgm:txLinClrLst/>
+    <dgm:txFillClrLst meth="repeat">
+      <a:schemeClr val="dk1"/>
+    </dgm:txFillClrLst>
+    <dgm:txEffectClrLst/>
+  </dgm:styleLbl>
+  <dgm:styleLbl name="fgAcc0">
+    <dgm:fillClrLst meth="repeat">
+      <a:schemeClr val="dk1">
+        <a:alpha val="90000"/>
+        <a:tint val="40000"/>
+      </a:schemeClr>
+    </dgm:fillClrLst>
+    <dgm:linClrLst meth="repeat">
+      <a:schemeClr val="dk1"/>
+    </dgm:linClrLst>
+    <dgm:effectClrLst/>
+    <dgm:txLinClrLst/>
+    <dgm:txFillClrLst meth="repeat">
+      <a:schemeClr val="dk1"/>
+    </dgm:txFillClrLst>
+    <dgm:txEffectClrLst/>
+  </dgm:styleLbl>
+  <dgm:styleLbl name="fgAcc2">
+    <dgm:fillClrLst meth="repeat">
+      <a:schemeClr val="dk1">
+        <a:alpha val="90000"/>
+        <a:tint val="40000"/>
+      </a:schemeClr>
+    </dgm:fillClrLst>
+    <dgm:linClrLst meth="repeat">
+      <a:schemeClr val="dk1"/>
+    </dgm:linClrLst>
+    <dgm:effectClrLst/>
+    <dgm:txLinClrLst/>
+    <dgm:txFillClrLst meth="repeat">
+      <a:schemeClr val="dk1"/>
+    </dgm:txFillClrLst>
+    <dgm:txEffectClrLst/>
+  </dgm:styleLbl>
+  <dgm:styleLbl name="fgAcc3">
+    <dgm:fillClrLst meth="repeat">
+      <a:schemeClr val="dk1">
+        <a:alpha val="90000"/>
+        <a:tint val="40000"/>
+      </a:schemeClr>
+    </dgm:fillClrLst>
+    <dgm:linClrLst meth="repeat">
+      <a:schemeClr val="dk1"/>
+    </dgm:linClrLst>
+    <dgm:effectClrLst/>
+    <dgm:txLinClrLst/>
+    <dgm:txFillClrLst meth="repeat">
+      <a:schemeClr val="dk1"/>
+    </dgm:txFillClrLst>
+    <dgm:txEffectClrLst/>
+  </dgm:styleLbl>
+  <dgm:styleLbl name="fgAcc4">
+    <dgm:fillClrLst meth="repeat">
+      <a:schemeClr val="dk1">
+        <a:alpha val="90000"/>
+        <a:tint val="40000"/>
+      </a:schemeClr>
+    </dgm:fillClrLst>
+    <dgm:linClrLst meth="repeat">
+      <a:schemeClr val="dk1"/>
+    </dgm:linClrLst>
+    <dgm:effectClrLst/>
+    <dgm:txLinClrLst/>
+    <dgm:txFillClrLst meth="repeat">
+      <a:schemeClr val="dk1"/>
+    </dgm:txFillClrLst>
+    <dgm:txEffectClrLst/>
+  </dgm:styleLbl>
+  <dgm:styleLbl name="bgShp">
+    <dgm:fillClrLst meth="repeat">
+      <a:schemeClr val="dk1">
+        <a:tint val="40000"/>
+      </a:schemeClr>
+    </dgm:fillClrLst>
+    <dgm:linClrLst meth="repeat">
+      <a:schemeClr val="dk1"/>
+    </dgm:linClrLst>
+    <dgm:effectClrLst/>
+    <dgm:txLinClrLst/>
+    <dgm:txFillClrLst meth="repeat">
+      <a:schemeClr val="dk1"/>
+    </dgm:txFillClrLst>
+    <dgm:txEffectClrLst/>
+  </dgm:styleLbl>
+  <dgm:styleLbl name="dkBgShp">
+    <dgm:fillClrLst meth="repeat">
+      <a:schemeClr val="dk1">
+        <a:shade val="80000"/>
+      </a:schemeClr>
+    </dgm:fillClrLst>
+    <dgm:linClrLst meth="repeat">
+      <a:schemeClr val="dk1"/>
+    </dgm:linClrLst>
+    <dgm:effectClrLst/>
+    <dgm:txLinClrLst/>
+    <dgm:txFillClrLst meth="repeat">
+      <a:schemeClr val="lt1"/>
+    </dgm:txFillClrLst>
+    <dgm:txEffectClrLst/>
+  </dgm:styleLbl>
+  <dgm:styleLbl name="trBgShp">
+    <dgm:fillClrLst meth="repeat">
+      <a:schemeClr val="dk1">
+        <a:tint val="50000"/>
+        <a:alpha val="40000"/>
+      </a:schemeClr>
+    </dgm:fillClrLst>
+    <dgm:linClrLst meth="repeat">
+      <a:schemeClr val="dk1"/>
+    </dgm:linClrLst>
+    <dgm:effectClrLst/>
+    <dgm:txLinClrLst/>
+    <dgm:txFillClrLst meth="repeat">
+      <a:schemeClr val="lt1"/>
+    </dgm:txFillClrLst>
+    <dgm:txEffectClrLst/>
+  </dgm:styleLbl>
+  <dgm:styleLbl name="fgShp">
+    <dgm:fillClrLst meth="repeat">
+      <a:schemeClr val="dk1">
+        <a:tint val="60000"/>
+      </a:schemeClr>
+    </dgm:fillClrLst>
+    <dgm:linClrLst meth="repeat">
+      <a:schemeClr val="lt1"/>
+    </dgm:linClrLst>
+    <dgm:effectClrLst/>
+    <dgm:txLinClrLst/>
+    <dgm:txFillClrLst meth="repeat">
+      <a:schemeClr val="dk1"/>
+    </dgm:txFillClrLst>
+    <dgm:txEffectClrLst/>
+  </dgm:styleLbl>
+  <dgm:styleLbl name="revTx">
+    <dgm:fillClrLst meth="repeat">
+      <a:schemeClr val="lt1">
+        <a:alpha val="0"/>
+      </a:schemeClr>
+    </dgm:fillClrLst>
+    <dgm:linClrLst meth="repeat">
+      <a:schemeClr val="dk1">
+        <a:alpha val="0"/>
+      </a:schemeClr>
+    </dgm:linClrLst>
+    <dgm:effectClrLst/>
+    <dgm:txLinClrLst/>
+    <dgm:txFillClrLst meth="repeat">
+      <a:schemeClr val="tx1"/>
+    </dgm:txFillClrLst>
+    <dgm:txEffectClrLst/>
+  </dgm:styleLbl>
+</dgm:colorsDef>
+</file>
+
 <file path=ppt/diagrams/data1.xml><?xml version="1.0" encoding="utf-8"?>
+<dgm:dataModel xmlns:dgm="http://schemas.openxmlformats.org/drawingml/2006/diagram" xmlns:a="http://schemas.openxmlformats.org/drawingml/2006/main">
+  <dgm:ptLst>
+    <dgm:pt modelId="{D142EE24-A998-424A-BA28-CAF4949ECFAF}" type="doc">
+      <dgm:prSet loTypeId="urn:microsoft.com/office/officeart/2005/8/layout/process2" loCatId="process" qsTypeId="urn:microsoft.com/office/officeart/2005/8/quickstyle/simple1" qsCatId="simple" csTypeId="urn:microsoft.com/office/officeart/2005/8/colors/accent0_1" csCatId="mainScheme" phldr="1"/>
+      <dgm:spPr/>
+      <dgm:t>
+        <a:bodyPr/>
+        <a:lstStyle/>
+        <a:p>
+          <a:endParaRPr kumimoji="1" lang="ja-JP" altLang="en-US"/>
+        </a:p>
+      </dgm:t>
+    </dgm:pt>
+    <dgm:pt modelId="{FCFB28AA-E588-44ED-98EE-784789F81932}">
+      <dgm:prSet phldrT="[テキスト]"/>
+      <dgm:spPr/>
+      <dgm:t>
+        <a:bodyPr/>
+        <a:lstStyle/>
+        <a:p>
+          <a:pPr>
+            <a:buFont typeface="+mj-lt"/>
+            <a:buAutoNum type="arabicPeriod"/>
+          </a:pPr>
+          <a:r>
+            <a:rPr kumimoji="1" lang="en-US" altLang="ja-JP" dirty="0" err="1"/>
+            <a:t>ImageFlux</a:t>
+          </a:r>
+          <a:r>
+            <a:rPr kumimoji="1" lang="ja-JP" altLang="en-US" dirty="0"/>
+            <a:t>が</a:t>
+          </a:r>
+          <a:r>
+            <a:rPr kumimoji="1" lang="en-US" altLang="ja-JP" dirty="0" err="1"/>
+            <a:t>AppRun</a:t>
+          </a:r>
+          <a:r>
+            <a:rPr kumimoji="1" lang="ja-JP" altLang="en-US" dirty="0"/>
+            <a:t>共用型に</a:t>
+          </a:r>
+          <a:br>
+            <a:rPr kumimoji="1" lang="en-US" altLang="ja-JP" dirty="0"/>
+          </a:br>
+          <a:r>
+            <a:rPr kumimoji="1" lang="ja-JP" altLang="en-US" dirty="0"/>
+            <a:t>アーカイブ保存完了のイベント</a:t>
+          </a:r>
+          <a:r>
+            <a:rPr kumimoji="1" lang="en-US" altLang="ja-JP" dirty="0"/>
+            <a:t>Webhook</a:t>
+          </a:r>
+          <a:r>
+            <a:rPr kumimoji="1" lang="ja-JP" altLang="en-US" dirty="0"/>
+            <a:t>通知を送信</a:t>
+          </a:r>
+        </a:p>
+      </dgm:t>
+    </dgm:pt>
+    <dgm:pt modelId="{F618B8E0-D4D3-4E55-B918-6507C8BF99BB}" type="parTrans" cxnId="{CD8DF443-F476-4DD3-BC33-9542B376595F}">
+      <dgm:prSet/>
+      <dgm:spPr/>
+      <dgm:t>
+        <a:bodyPr/>
+        <a:lstStyle/>
+        <a:p>
+          <a:endParaRPr kumimoji="1" lang="ja-JP" altLang="en-US"/>
+        </a:p>
+      </dgm:t>
+    </dgm:pt>
+    <dgm:pt modelId="{0E70C1FF-71B2-424F-B47F-AB7512B0ED18}" type="sibTrans" cxnId="{CD8DF443-F476-4DD3-BC33-9542B376595F}">
+      <dgm:prSet/>
+      <dgm:spPr/>
+      <dgm:t>
+        <a:bodyPr/>
+        <a:lstStyle/>
+        <a:p>
+          <a:endParaRPr kumimoji="1" lang="ja-JP" altLang="en-US"/>
+        </a:p>
+      </dgm:t>
+    </dgm:pt>
+    <dgm:pt modelId="{282C7160-1280-4C38-8D62-C833D2079100}">
+      <dgm:prSet phldrT="[テキスト]"/>
+      <dgm:spPr/>
+      <dgm:t>
+        <a:bodyPr/>
+        <a:lstStyle/>
+        <a:p>
+          <a:pPr>
+            <a:buFont typeface="+mj-lt"/>
+            <a:buAutoNum type="arabicPeriod"/>
+          </a:pPr>
+          <a:r>
+            <a:rPr kumimoji="1" lang="en-US" altLang="ja-JP" dirty="0" err="1"/>
+            <a:t>AppRun</a:t>
+          </a:r>
+          <a:r>
+            <a:rPr kumimoji="1" lang="ja-JP" altLang="en-US" dirty="0"/>
+            <a:t>共用型はシンプル</a:t>
+          </a:r>
+          <a:r>
+            <a:rPr kumimoji="1" lang="en-US" altLang="ja-JP" dirty="0"/>
+            <a:t>MQ</a:t>
+          </a:r>
+          <a:r>
+            <a:rPr kumimoji="1" lang="ja-JP" altLang="en-US" dirty="0"/>
+            <a:t>に</a:t>
+          </a:r>
+          <a:br>
+            <a:rPr kumimoji="1" lang="en-US" altLang="ja-JP" dirty="0"/>
+          </a:br>
+          <a:r>
+            <a:rPr kumimoji="1" lang="en-US" altLang="ja-JP" dirty="0"/>
+            <a:t>.m3u8</a:t>
+          </a:r>
+          <a:r>
+            <a:rPr kumimoji="1" lang="ja-JP" altLang="en-US" dirty="0"/>
+            <a:t>のパスと通知日時を送信</a:t>
+          </a:r>
+          <a:endParaRPr kumimoji="1" lang="en-US" altLang="ja-JP" dirty="0"/>
+        </a:p>
+        <a:p>
+          <a:pPr>
+            <a:buFont typeface="+mj-lt"/>
+            <a:buAutoNum type="arabicPeriod"/>
+          </a:pPr>
+          <a:r>
+            <a:rPr kumimoji="1" lang="ja-JP" altLang="en-US" dirty="0"/>
+            <a:t>（モニタリングスイートにもログ連携）</a:t>
+          </a:r>
+        </a:p>
+      </dgm:t>
+    </dgm:pt>
+    <dgm:pt modelId="{48BA8B2D-B219-40B2-A9C8-AC1FBE7114E7}" type="parTrans" cxnId="{FFFBD641-ABF8-469B-9896-FB642BAD7128}">
+      <dgm:prSet/>
+      <dgm:spPr/>
+      <dgm:t>
+        <a:bodyPr/>
+        <a:lstStyle/>
+        <a:p>
+          <a:endParaRPr kumimoji="1" lang="ja-JP" altLang="en-US"/>
+        </a:p>
+      </dgm:t>
+    </dgm:pt>
+    <dgm:pt modelId="{75AFCF26-CA80-4FDF-B1D0-944AA24934A1}" type="sibTrans" cxnId="{FFFBD641-ABF8-469B-9896-FB642BAD7128}">
+      <dgm:prSet/>
+      <dgm:spPr/>
+      <dgm:t>
+        <a:bodyPr/>
+        <a:lstStyle/>
+        <a:p>
+          <a:endParaRPr kumimoji="1" lang="ja-JP" altLang="en-US"/>
+        </a:p>
+      </dgm:t>
+    </dgm:pt>
+    <dgm:pt modelId="{B3DFF331-5D87-4A57-B8A1-9677CB2F7E3D}">
+      <dgm:prSet phldrT="[テキスト]"/>
+      <dgm:spPr/>
+      <dgm:t>
+        <a:bodyPr/>
+        <a:lstStyle/>
+        <a:p>
+          <a:r>
+            <a:rPr kumimoji="1" lang="ja-JP" altLang="en-US" dirty="0"/>
+            <a:t>サーバの常駐プロセスが順次</a:t>
+          </a:r>
+          <a:br>
+            <a:rPr kumimoji="1" lang="en-US" altLang="ja-JP" dirty="0"/>
+          </a:br>
+          <a:r>
+            <a:rPr kumimoji="1" lang="ja-JP" altLang="en-US" dirty="0"/>
+            <a:t>シンプル</a:t>
+          </a:r>
+          <a:r>
+            <a:rPr kumimoji="1" lang="en-US" altLang="ja-JP" dirty="0"/>
+            <a:t>MQ</a:t>
+          </a:r>
+          <a:r>
+            <a:rPr kumimoji="1" lang="ja-JP" altLang="en-US" dirty="0"/>
+            <a:t>からメッセージを受領</a:t>
+          </a:r>
+        </a:p>
+      </dgm:t>
+    </dgm:pt>
+    <dgm:pt modelId="{097EE1FF-EC01-4E8E-BC06-6070EFCA437D}" type="parTrans" cxnId="{060039CF-A021-42CA-97CB-C5C2ED4819B0}">
+      <dgm:prSet/>
+      <dgm:spPr/>
+      <dgm:t>
+        <a:bodyPr/>
+        <a:lstStyle/>
+        <a:p>
+          <a:endParaRPr kumimoji="1" lang="ja-JP" altLang="en-US"/>
+        </a:p>
+      </dgm:t>
+    </dgm:pt>
+    <dgm:pt modelId="{4ECD1AEB-78AE-4737-9B6F-3BB73DF99A15}" type="sibTrans" cxnId="{060039CF-A021-42CA-97CB-C5C2ED4819B0}">
+      <dgm:prSet/>
+      <dgm:spPr/>
+      <dgm:t>
+        <a:bodyPr/>
+        <a:lstStyle/>
+        <a:p>
+          <a:endParaRPr kumimoji="1" lang="ja-JP" altLang="en-US"/>
+        </a:p>
+      </dgm:t>
+    </dgm:pt>
+    <dgm:pt modelId="{990B93BB-6BE9-4EC9-9698-FEB9E398E329}">
+      <dgm:prSet/>
+      <dgm:spPr/>
+      <dgm:t>
+        <a:bodyPr/>
+        <a:lstStyle/>
+        <a:p>
+          <a:r>
+            <a:rPr kumimoji="1" lang="ja-JP" altLang="en-US" dirty="0"/>
+            <a:t>さくらの</a:t>
+          </a:r>
+          <a:r>
+            <a:rPr kumimoji="1" lang="en-US" altLang="ja-JP" dirty="0"/>
+            <a:t>AI Engine</a:t>
+          </a:r>
+          <a:r>
+            <a:rPr kumimoji="1" lang="ja-JP" altLang="en-US" dirty="0"/>
+            <a:t>は文字起こし・要約を行い、結果をサーバに返却</a:t>
+          </a:r>
+        </a:p>
+      </dgm:t>
+    </dgm:pt>
+    <dgm:pt modelId="{531E1E88-68A7-41D3-83A7-48290602AC12}" type="parTrans" cxnId="{4CA9A1D7-3F76-4E1B-9E2B-585812FA3FF9}">
+      <dgm:prSet/>
+      <dgm:spPr/>
+      <dgm:t>
+        <a:bodyPr/>
+        <a:lstStyle/>
+        <a:p>
+          <a:endParaRPr kumimoji="1" lang="ja-JP" altLang="en-US"/>
+        </a:p>
+      </dgm:t>
+    </dgm:pt>
+    <dgm:pt modelId="{90517755-3A29-42CA-A139-F2A2ABDE6D51}" type="sibTrans" cxnId="{4CA9A1D7-3F76-4E1B-9E2B-585812FA3FF9}">
+      <dgm:prSet/>
+      <dgm:spPr/>
+      <dgm:t>
+        <a:bodyPr/>
+        <a:lstStyle/>
+        <a:p>
+          <a:endParaRPr kumimoji="1" lang="ja-JP" altLang="en-US"/>
+        </a:p>
+      </dgm:t>
+    </dgm:pt>
+    <dgm:pt modelId="{BF9D835E-EA28-4516-AE6A-792A2F646325}">
+      <dgm:prSet/>
+      <dgm:spPr/>
+      <dgm:t>
+        <a:bodyPr/>
+        <a:lstStyle/>
+        <a:p>
+          <a:r>
+            <a:rPr kumimoji="1" lang="ja-JP" altLang="en-US" dirty="0"/>
+            <a:t>サーバの常駐プロセスが録画データを</a:t>
+          </a:r>
+          <a:br>
+            <a:rPr kumimoji="1" lang="en-US" altLang="ja-JP" dirty="0"/>
+          </a:br>
+          <a:r>
+            <a:rPr kumimoji="1" lang="ja-JP" altLang="en-US" dirty="0"/>
+            <a:t>取得＆音声エンコードし、</a:t>
+          </a:r>
+          <a:br>
+            <a:rPr kumimoji="1" lang="en-US" altLang="ja-JP" dirty="0"/>
+          </a:br>
+          <a:r>
+            <a:rPr kumimoji="1" lang="ja-JP" altLang="en-US" dirty="0"/>
+            <a:t>さくらの</a:t>
+          </a:r>
+          <a:r>
+            <a:rPr kumimoji="1" lang="en-US" altLang="ja-JP" dirty="0"/>
+            <a:t>AI Engine</a:t>
+          </a:r>
+          <a:r>
+            <a:rPr kumimoji="1" lang="ja-JP" altLang="en-US" dirty="0"/>
+            <a:t>呼び出し</a:t>
+          </a:r>
+        </a:p>
+      </dgm:t>
+    </dgm:pt>
+    <dgm:pt modelId="{07F76D7C-12F3-4A74-B7B8-54AAFAE3A7EB}" type="parTrans" cxnId="{1FA246A7-D533-451E-8A43-2B5ACBFE7DAA}">
+      <dgm:prSet/>
+      <dgm:spPr/>
+      <dgm:t>
+        <a:bodyPr/>
+        <a:lstStyle/>
+        <a:p>
+          <a:endParaRPr kumimoji="1" lang="ja-JP" altLang="en-US"/>
+        </a:p>
+      </dgm:t>
+    </dgm:pt>
+    <dgm:pt modelId="{BF3901B3-AD6A-471A-AB52-3D67542E3943}" type="sibTrans" cxnId="{1FA246A7-D533-451E-8A43-2B5ACBFE7DAA}">
+      <dgm:prSet/>
+      <dgm:spPr/>
+      <dgm:t>
+        <a:bodyPr/>
+        <a:lstStyle/>
+        <a:p>
+          <a:endParaRPr kumimoji="1" lang="ja-JP" altLang="en-US"/>
+        </a:p>
+      </dgm:t>
+    </dgm:pt>
+    <dgm:pt modelId="{3C921E30-5C7F-42BF-A1B0-80E33D445967}">
+      <dgm:prSet/>
+      <dgm:spPr/>
+      <dgm:t>
+        <a:bodyPr/>
+        <a:lstStyle/>
+        <a:p>
+          <a:r>
+            <a:rPr kumimoji="1" lang="ja-JP" altLang="en-US" dirty="0"/>
+            <a:t>サーバは文字起こしデータを</a:t>
+          </a:r>
+          <a:br>
+            <a:rPr kumimoji="1" lang="en-US" altLang="ja-JP" dirty="0"/>
+          </a:br>
+          <a:r>
+            <a:rPr kumimoji="1" lang="ja-JP" altLang="en-US" dirty="0"/>
+            <a:t>オブジェクトストレージに反映</a:t>
+          </a:r>
+        </a:p>
+      </dgm:t>
+    </dgm:pt>
+    <dgm:pt modelId="{665E943C-0F96-4EF2-BB3F-FDDEC980B70B}" type="parTrans" cxnId="{3533B7B3-4893-47CD-8427-884CF21962CF}">
+      <dgm:prSet/>
+      <dgm:spPr/>
+      <dgm:t>
+        <a:bodyPr/>
+        <a:lstStyle/>
+        <a:p>
+          <a:endParaRPr kumimoji="1" lang="ja-JP" altLang="en-US"/>
+        </a:p>
+      </dgm:t>
+    </dgm:pt>
+    <dgm:pt modelId="{8F37F1D1-EB65-424A-9F2C-5A6C01FF88FD}" type="sibTrans" cxnId="{3533B7B3-4893-47CD-8427-884CF21962CF}">
+      <dgm:prSet/>
+      <dgm:spPr/>
+      <dgm:t>
+        <a:bodyPr/>
+        <a:lstStyle/>
+        <a:p>
+          <a:endParaRPr kumimoji="1" lang="ja-JP" altLang="en-US"/>
+        </a:p>
+      </dgm:t>
+    </dgm:pt>
+    <dgm:pt modelId="{0760C2DF-2177-47DA-855B-8BE580B99E96}">
+      <dgm:prSet/>
+      <dgm:spPr/>
+      <dgm:t>
+        <a:bodyPr/>
+        <a:lstStyle/>
+        <a:p>
+          <a:r>
+            <a:rPr kumimoji="1" lang="ja-JP" altLang="en-US" dirty="0"/>
+            <a:t>サーバはシンプル通知を通じて</a:t>
+          </a:r>
+          <a:br>
+            <a:rPr kumimoji="1" lang="en-US" altLang="ja-JP" dirty="0"/>
+          </a:br>
+          <a:r>
+            <a:rPr kumimoji="1" lang="ja-JP" altLang="en-US" dirty="0"/>
+            <a:t>処理完了を通知</a:t>
+          </a:r>
+        </a:p>
+      </dgm:t>
+    </dgm:pt>
+    <dgm:pt modelId="{C86175C8-6BEE-4233-87A0-AC9D97431754}" type="parTrans" cxnId="{5A1477C0-7BC2-4F7F-A474-3457E0277643}">
+      <dgm:prSet/>
+      <dgm:spPr/>
+      <dgm:t>
+        <a:bodyPr/>
+        <a:lstStyle/>
+        <a:p>
+          <a:endParaRPr kumimoji="1" lang="ja-JP" altLang="en-US"/>
+        </a:p>
+      </dgm:t>
+    </dgm:pt>
+    <dgm:pt modelId="{829E4281-4D91-494B-B459-20A27C7D5AE6}" type="sibTrans" cxnId="{5A1477C0-7BC2-4F7F-A474-3457E0277643}">
+      <dgm:prSet/>
+      <dgm:spPr/>
+      <dgm:t>
+        <a:bodyPr/>
+        <a:lstStyle/>
+        <a:p>
+          <a:endParaRPr kumimoji="1" lang="ja-JP" altLang="en-US"/>
+        </a:p>
+      </dgm:t>
+    </dgm:pt>
+    <dgm:pt modelId="{AAF068EB-C2BA-4E4C-941C-A230B9E551D1}" type="pres">
+      <dgm:prSet presAssocID="{D142EE24-A998-424A-BA28-CAF4949ECFAF}" presName="linearFlow" presStyleCnt="0">
+        <dgm:presLayoutVars>
+          <dgm:resizeHandles val="exact"/>
+        </dgm:presLayoutVars>
+      </dgm:prSet>
+      <dgm:spPr/>
+    </dgm:pt>
+    <dgm:pt modelId="{2E1175F2-C1BC-4312-B787-E37F965D2F17}" type="pres">
+      <dgm:prSet presAssocID="{FCFB28AA-E588-44ED-98EE-784789F81932}" presName="node" presStyleLbl="node1" presStyleIdx="0" presStyleCnt="7">
+        <dgm:presLayoutVars>
+          <dgm:bulletEnabled val="1"/>
+        </dgm:presLayoutVars>
+      </dgm:prSet>
+      <dgm:spPr/>
+    </dgm:pt>
+    <dgm:pt modelId="{EAB550B0-8B66-4FD5-AA39-3877AE739144}" type="pres">
+      <dgm:prSet presAssocID="{0E70C1FF-71B2-424F-B47F-AB7512B0ED18}" presName="sibTrans" presStyleLbl="sibTrans2D1" presStyleIdx="0" presStyleCnt="6"/>
+      <dgm:spPr/>
+    </dgm:pt>
+    <dgm:pt modelId="{EC5E3B44-AFAB-4DD5-839F-051C3DAF6A39}" type="pres">
+      <dgm:prSet presAssocID="{0E70C1FF-71B2-424F-B47F-AB7512B0ED18}" presName="connectorText" presStyleLbl="sibTrans2D1" presStyleIdx="0" presStyleCnt="6"/>
+      <dgm:spPr/>
+    </dgm:pt>
+    <dgm:pt modelId="{39B6DCBB-71CA-4223-B0D3-607C3277F876}" type="pres">
+      <dgm:prSet presAssocID="{282C7160-1280-4C38-8D62-C833D2079100}" presName="node" presStyleLbl="node1" presStyleIdx="1" presStyleCnt="7">
+        <dgm:presLayoutVars>
+          <dgm:bulletEnabled val="1"/>
+        </dgm:presLayoutVars>
+      </dgm:prSet>
+      <dgm:spPr/>
+    </dgm:pt>
+    <dgm:pt modelId="{C064154F-0AF2-4AF0-B11A-FB237C2BF60F}" type="pres">
+      <dgm:prSet presAssocID="{75AFCF26-CA80-4FDF-B1D0-944AA24934A1}" presName="sibTrans" presStyleLbl="sibTrans2D1" presStyleIdx="1" presStyleCnt="6"/>
+      <dgm:spPr/>
+    </dgm:pt>
+    <dgm:pt modelId="{26053658-5444-4A21-8A39-8A85D705578F}" type="pres">
+      <dgm:prSet presAssocID="{75AFCF26-CA80-4FDF-B1D0-944AA24934A1}" presName="connectorText" presStyleLbl="sibTrans2D1" presStyleIdx="1" presStyleCnt="6"/>
+      <dgm:spPr/>
+    </dgm:pt>
+    <dgm:pt modelId="{401DDB35-9780-4897-A309-73A84EABE41F}" type="pres">
+      <dgm:prSet presAssocID="{B3DFF331-5D87-4A57-B8A1-9677CB2F7E3D}" presName="node" presStyleLbl="node1" presStyleIdx="2" presStyleCnt="7">
+        <dgm:presLayoutVars>
+          <dgm:bulletEnabled val="1"/>
+        </dgm:presLayoutVars>
+      </dgm:prSet>
+      <dgm:spPr/>
+    </dgm:pt>
+    <dgm:pt modelId="{3D056114-0484-4EDF-86EC-D5D9428A7BF9}" type="pres">
+      <dgm:prSet presAssocID="{4ECD1AEB-78AE-4737-9B6F-3BB73DF99A15}" presName="sibTrans" presStyleLbl="sibTrans2D1" presStyleIdx="2" presStyleCnt="6"/>
+      <dgm:spPr/>
+    </dgm:pt>
+    <dgm:pt modelId="{892CE5D1-ABBB-48EA-9D08-056C49FF4520}" type="pres">
+      <dgm:prSet presAssocID="{4ECD1AEB-78AE-4737-9B6F-3BB73DF99A15}" presName="connectorText" presStyleLbl="sibTrans2D1" presStyleIdx="2" presStyleCnt="6"/>
+      <dgm:spPr/>
+    </dgm:pt>
+    <dgm:pt modelId="{7253D03E-F494-4FA9-A711-DCC6F06178F0}" type="pres">
+      <dgm:prSet presAssocID="{BF9D835E-EA28-4516-AE6A-792A2F646325}" presName="node" presStyleLbl="node1" presStyleIdx="3" presStyleCnt="7">
+        <dgm:presLayoutVars>
+          <dgm:bulletEnabled val="1"/>
+        </dgm:presLayoutVars>
+      </dgm:prSet>
+      <dgm:spPr/>
+    </dgm:pt>
+    <dgm:pt modelId="{634B6EAC-C545-413B-B32E-0393E60FE0F9}" type="pres">
+      <dgm:prSet presAssocID="{BF3901B3-AD6A-471A-AB52-3D67542E3943}" presName="sibTrans" presStyleLbl="sibTrans2D1" presStyleIdx="3" presStyleCnt="6"/>
+      <dgm:spPr/>
+    </dgm:pt>
+    <dgm:pt modelId="{413DA36F-D69B-4D7C-887F-BA5627E17695}" type="pres">
+      <dgm:prSet presAssocID="{BF3901B3-AD6A-471A-AB52-3D67542E3943}" presName="connectorText" presStyleLbl="sibTrans2D1" presStyleIdx="3" presStyleCnt="6"/>
+      <dgm:spPr/>
+    </dgm:pt>
+    <dgm:pt modelId="{B149C04E-7AEB-4A78-B7D7-AC20C233D7B6}" type="pres">
+      <dgm:prSet presAssocID="{990B93BB-6BE9-4EC9-9698-FEB9E398E329}" presName="node" presStyleLbl="node1" presStyleIdx="4" presStyleCnt="7">
+        <dgm:presLayoutVars>
+          <dgm:bulletEnabled val="1"/>
+        </dgm:presLayoutVars>
+      </dgm:prSet>
+      <dgm:spPr/>
+    </dgm:pt>
+    <dgm:pt modelId="{876973CB-19C6-4A07-8E92-BB7965FAF234}" type="pres">
+      <dgm:prSet presAssocID="{90517755-3A29-42CA-A139-F2A2ABDE6D51}" presName="sibTrans" presStyleLbl="sibTrans2D1" presStyleIdx="4" presStyleCnt="6"/>
+      <dgm:spPr/>
+    </dgm:pt>
+    <dgm:pt modelId="{AF3E0FD6-7AC6-4380-9318-F7806A575B51}" type="pres">
+      <dgm:prSet presAssocID="{90517755-3A29-42CA-A139-F2A2ABDE6D51}" presName="connectorText" presStyleLbl="sibTrans2D1" presStyleIdx="4" presStyleCnt="6"/>
+      <dgm:spPr/>
+    </dgm:pt>
+    <dgm:pt modelId="{23263FBF-5528-4109-B2ED-87E1E7DCEB63}" type="pres">
+      <dgm:prSet presAssocID="{3C921E30-5C7F-42BF-A1B0-80E33D445967}" presName="node" presStyleLbl="node1" presStyleIdx="5" presStyleCnt="7">
+        <dgm:presLayoutVars>
+          <dgm:bulletEnabled val="1"/>
+        </dgm:presLayoutVars>
+      </dgm:prSet>
+      <dgm:spPr/>
+    </dgm:pt>
+    <dgm:pt modelId="{18D4A096-9F13-44E4-A778-EFE42993CB0B}" type="pres">
+      <dgm:prSet presAssocID="{8F37F1D1-EB65-424A-9F2C-5A6C01FF88FD}" presName="sibTrans" presStyleLbl="sibTrans2D1" presStyleIdx="5" presStyleCnt="6"/>
+      <dgm:spPr/>
+    </dgm:pt>
+    <dgm:pt modelId="{2BF24C72-41C7-4320-ABBA-D92FFB025B7F}" type="pres">
+      <dgm:prSet presAssocID="{8F37F1D1-EB65-424A-9F2C-5A6C01FF88FD}" presName="connectorText" presStyleLbl="sibTrans2D1" presStyleIdx="5" presStyleCnt="6"/>
+      <dgm:spPr/>
+    </dgm:pt>
+    <dgm:pt modelId="{A576E462-304F-490D-BE6C-4E5A74D8E0F1}" type="pres">
+      <dgm:prSet presAssocID="{0760C2DF-2177-47DA-855B-8BE580B99E96}" presName="node" presStyleLbl="node1" presStyleIdx="6" presStyleCnt="7">
+        <dgm:presLayoutVars>
+          <dgm:bulletEnabled val="1"/>
+        </dgm:presLayoutVars>
+      </dgm:prSet>
+      <dgm:spPr/>
+    </dgm:pt>
+  </dgm:ptLst>
+  <dgm:cxnLst>
+    <dgm:cxn modelId="{05E23329-57F2-472A-A75C-94A5F74576E6}" type="presOf" srcId="{0E70C1FF-71B2-424F-B47F-AB7512B0ED18}" destId="{EAB550B0-8B66-4FD5-AA39-3877AE739144}" srcOrd="0" destOrd="0" presId="urn:microsoft.com/office/officeart/2005/8/layout/process2"/>
+    <dgm:cxn modelId="{11A9705D-B7EB-4230-B682-B1D3B48A77FD}" type="presOf" srcId="{4ECD1AEB-78AE-4737-9B6F-3BB73DF99A15}" destId="{892CE5D1-ABBB-48EA-9D08-056C49FF4520}" srcOrd="1" destOrd="0" presId="urn:microsoft.com/office/officeart/2005/8/layout/process2"/>
+    <dgm:cxn modelId="{FFFBD641-ABF8-469B-9896-FB642BAD7128}" srcId="{D142EE24-A998-424A-BA28-CAF4949ECFAF}" destId="{282C7160-1280-4C38-8D62-C833D2079100}" srcOrd="1" destOrd="0" parTransId="{48BA8B2D-B219-40B2-A9C8-AC1FBE7114E7}" sibTransId="{75AFCF26-CA80-4FDF-B1D0-944AA24934A1}"/>
+    <dgm:cxn modelId="{CD8DF443-F476-4DD3-BC33-9542B376595F}" srcId="{D142EE24-A998-424A-BA28-CAF4949ECFAF}" destId="{FCFB28AA-E588-44ED-98EE-784789F81932}" srcOrd="0" destOrd="0" parTransId="{F618B8E0-D4D3-4E55-B918-6507C8BF99BB}" sibTransId="{0E70C1FF-71B2-424F-B47F-AB7512B0ED18}"/>
+    <dgm:cxn modelId="{2620F264-3B68-4C2C-B487-B77CF3106862}" type="presOf" srcId="{90517755-3A29-42CA-A139-F2A2ABDE6D51}" destId="{AF3E0FD6-7AC6-4380-9318-F7806A575B51}" srcOrd="1" destOrd="0" presId="urn:microsoft.com/office/officeart/2005/8/layout/process2"/>
+    <dgm:cxn modelId="{C83A4B6A-ADF1-4772-8C76-DC5A1C056673}" type="presOf" srcId="{D142EE24-A998-424A-BA28-CAF4949ECFAF}" destId="{AAF068EB-C2BA-4E4C-941C-A230B9E551D1}" srcOrd="0" destOrd="0" presId="urn:microsoft.com/office/officeart/2005/8/layout/process2"/>
+    <dgm:cxn modelId="{62F2764A-2126-4C6E-B31D-80772F44A88C}" type="presOf" srcId="{8F37F1D1-EB65-424A-9F2C-5A6C01FF88FD}" destId="{2BF24C72-41C7-4320-ABBA-D92FFB025B7F}" srcOrd="1" destOrd="0" presId="urn:microsoft.com/office/officeart/2005/8/layout/process2"/>
+    <dgm:cxn modelId="{CB8A144B-1B5B-40BE-A5E6-DF3603EB6B54}" type="presOf" srcId="{90517755-3A29-42CA-A139-F2A2ABDE6D51}" destId="{876973CB-19C6-4A07-8E92-BB7965FAF234}" srcOrd="0" destOrd="0" presId="urn:microsoft.com/office/officeart/2005/8/layout/process2"/>
+    <dgm:cxn modelId="{4561437A-89D3-49A1-8717-7ECDECDCDF56}" type="presOf" srcId="{282C7160-1280-4C38-8D62-C833D2079100}" destId="{39B6DCBB-71CA-4223-B0D3-607C3277F876}" srcOrd="0" destOrd="0" presId="urn:microsoft.com/office/officeart/2005/8/layout/process2"/>
+    <dgm:cxn modelId="{2410317D-5619-4729-A8A1-27C2E1CAC85C}" type="presOf" srcId="{990B93BB-6BE9-4EC9-9698-FEB9E398E329}" destId="{B149C04E-7AEB-4A78-B7D7-AC20C233D7B6}" srcOrd="0" destOrd="0" presId="urn:microsoft.com/office/officeart/2005/8/layout/process2"/>
+    <dgm:cxn modelId="{CAFE1595-BA33-4153-8650-A4BDF150CB52}" type="presOf" srcId="{BF3901B3-AD6A-471A-AB52-3D67542E3943}" destId="{634B6EAC-C545-413B-B32E-0393E60FE0F9}" srcOrd="0" destOrd="0" presId="urn:microsoft.com/office/officeart/2005/8/layout/process2"/>
+    <dgm:cxn modelId="{2EF438A0-F9B0-4CE0-AA76-DCCA40A047EC}" type="presOf" srcId="{0760C2DF-2177-47DA-855B-8BE580B99E96}" destId="{A576E462-304F-490D-BE6C-4E5A74D8E0F1}" srcOrd="0" destOrd="0" presId="urn:microsoft.com/office/officeart/2005/8/layout/process2"/>
+    <dgm:cxn modelId="{E52515A1-04EA-4176-8778-24C0FE9C5339}" type="presOf" srcId="{BF3901B3-AD6A-471A-AB52-3D67542E3943}" destId="{413DA36F-D69B-4D7C-887F-BA5627E17695}" srcOrd="1" destOrd="0" presId="urn:microsoft.com/office/officeart/2005/8/layout/process2"/>
+    <dgm:cxn modelId="{1FA246A7-D533-451E-8A43-2B5ACBFE7DAA}" srcId="{D142EE24-A998-424A-BA28-CAF4949ECFAF}" destId="{BF9D835E-EA28-4516-AE6A-792A2F646325}" srcOrd="3" destOrd="0" parTransId="{07F76D7C-12F3-4A74-B7B8-54AAFAE3A7EB}" sibTransId="{BF3901B3-AD6A-471A-AB52-3D67542E3943}"/>
+    <dgm:cxn modelId="{014CB6AC-9B21-4B0F-B5D3-1F9731D95D1E}" type="presOf" srcId="{8F37F1D1-EB65-424A-9F2C-5A6C01FF88FD}" destId="{18D4A096-9F13-44E4-A778-EFE42993CB0B}" srcOrd="0" destOrd="0" presId="urn:microsoft.com/office/officeart/2005/8/layout/process2"/>
+    <dgm:cxn modelId="{8A9136AE-F05C-45D7-873E-78DC1EAA1553}" type="presOf" srcId="{BF9D835E-EA28-4516-AE6A-792A2F646325}" destId="{7253D03E-F494-4FA9-A711-DCC6F06178F0}" srcOrd="0" destOrd="0" presId="urn:microsoft.com/office/officeart/2005/8/layout/process2"/>
+    <dgm:cxn modelId="{3533B7B3-4893-47CD-8427-884CF21962CF}" srcId="{D142EE24-A998-424A-BA28-CAF4949ECFAF}" destId="{3C921E30-5C7F-42BF-A1B0-80E33D445967}" srcOrd="5" destOrd="0" parTransId="{665E943C-0F96-4EF2-BB3F-FDDEC980B70B}" sibTransId="{8F37F1D1-EB65-424A-9F2C-5A6C01FF88FD}"/>
+    <dgm:cxn modelId="{DC7812C0-24DF-404C-8B09-6735A909A090}" type="presOf" srcId="{FCFB28AA-E588-44ED-98EE-784789F81932}" destId="{2E1175F2-C1BC-4312-B787-E37F965D2F17}" srcOrd="0" destOrd="0" presId="urn:microsoft.com/office/officeart/2005/8/layout/process2"/>
+    <dgm:cxn modelId="{5A1477C0-7BC2-4F7F-A474-3457E0277643}" srcId="{D142EE24-A998-424A-BA28-CAF4949ECFAF}" destId="{0760C2DF-2177-47DA-855B-8BE580B99E96}" srcOrd="6" destOrd="0" parTransId="{C86175C8-6BEE-4233-87A0-AC9D97431754}" sibTransId="{829E4281-4D91-494B-B459-20A27C7D5AE6}"/>
+    <dgm:cxn modelId="{D1785FC3-5F4B-4E14-B4F6-E6F4FD7865EE}" type="presOf" srcId="{B3DFF331-5D87-4A57-B8A1-9677CB2F7E3D}" destId="{401DDB35-9780-4897-A309-73A84EABE41F}" srcOrd="0" destOrd="0" presId="urn:microsoft.com/office/officeart/2005/8/layout/process2"/>
+    <dgm:cxn modelId="{060039CF-A021-42CA-97CB-C5C2ED4819B0}" srcId="{D142EE24-A998-424A-BA28-CAF4949ECFAF}" destId="{B3DFF331-5D87-4A57-B8A1-9677CB2F7E3D}" srcOrd="2" destOrd="0" parTransId="{097EE1FF-EC01-4E8E-BC06-6070EFCA437D}" sibTransId="{4ECD1AEB-78AE-4737-9B6F-3BB73DF99A15}"/>
+    <dgm:cxn modelId="{BD784ED7-C8E1-40DA-B68D-269C3C574944}" type="presOf" srcId="{75AFCF26-CA80-4FDF-B1D0-944AA24934A1}" destId="{26053658-5444-4A21-8A39-8A85D705578F}" srcOrd="1" destOrd="0" presId="urn:microsoft.com/office/officeart/2005/8/layout/process2"/>
+    <dgm:cxn modelId="{4CA9A1D7-3F76-4E1B-9E2B-585812FA3FF9}" srcId="{D142EE24-A998-424A-BA28-CAF4949ECFAF}" destId="{990B93BB-6BE9-4EC9-9698-FEB9E398E329}" srcOrd="4" destOrd="0" parTransId="{531E1E88-68A7-41D3-83A7-48290602AC12}" sibTransId="{90517755-3A29-42CA-A139-F2A2ABDE6D51}"/>
+    <dgm:cxn modelId="{75A086E2-DC1F-44C8-976C-9E4C64619FCD}" type="presOf" srcId="{4ECD1AEB-78AE-4737-9B6F-3BB73DF99A15}" destId="{3D056114-0484-4EDF-86EC-D5D9428A7BF9}" srcOrd="0" destOrd="0" presId="urn:microsoft.com/office/officeart/2005/8/layout/process2"/>
+    <dgm:cxn modelId="{48E946F8-E6C1-4238-8F07-031EFE928911}" type="presOf" srcId="{75AFCF26-CA80-4FDF-B1D0-944AA24934A1}" destId="{C064154F-0AF2-4AF0-B11A-FB237C2BF60F}" srcOrd="0" destOrd="0" presId="urn:microsoft.com/office/officeart/2005/8/layout/process2"/>
+    <dgm:cxn modelId="{8C0685F8-60B6-401B-A08E-61E99A8E1E47}" type="presOf" srcId="{0E70C1FF-71B2-424F-B47F-AB7512B0ED18}" destId="{EC5E3B44-AFAB-4DD5-839F-051C3DAF6A39}" srcOrd="1" destOrd="0" presId="urn:microsoft.com/office/officeart/2005/8/layout/process2"/>
+    <dgm:cxn modelId="{73671DFC-F6B5-4911-85B8-F2020505D0B5}" type="presOf" srcId="{3C921E30-5C7F-42BF-A1B0-80E33D445967}" destId="{23263FBF-5528-4109-B2ED-87E1E7DCEB63}" srcOrd="0" destOrd="0" presId="urn:microsoft.com/office/officeart/2005/8/layout/process2"/>
+    <dgm:cxn modelId="{B352ACE2-2259-46B4-9685-D95667DBA5DE}" type="presParOf" srcId="{AAF068EB-C2BA-4E4C-941C-A230B9E551D1}" destId="{2E1175F2-C1BC-4312-B787-E37F965D2F17}" srcOrd="0" destOrd="0" presId="urn:microsoft.com/office/officeart/2005/8/layout/process2"/>
+    <dgm:cxn modelId="{6EF519F9-E46A-4B58-BCC8-22D1552CAE81}" type="presParOf" srcId="{AAF068EB-C2BA-4E4C-941C-A230B9E551D1}" destId="{EAB550B0-8B66-4FD5-AA39-3877AE739144}" srcOrd="1" destOrd="0" presId="urn:microsoft.com/office/officeart/2005/8/layout/process2"/>
+    <dgm:cxn modelId="{B8204CC0-7BE6-4122-8924-C5F8D5DF4A24}" type="presParOf" srcId="{EAB550B0-8B66-4FD5-AA39-3877AE739144}" destId="{EC5E3B44-AFAB-4DD5-839F-051C3DAF6A39}" srcOrd="0" destOrd="0" presId="urn:microsoft.com/office/officeart/2005/8/layout/process2"/>
+    <dgm:cxn modelId="{0B8A6702-528C-4C5E-AC55-AE85878E1B81}" type="presParOf" srcId="{AAF068EB-C2BA-4E4C-941C-A230B9E551D1}" destId="{39B6DCBB-71CA-4223-B0D3-607C3277F876}" srcOrd="2" destOrd="0" presId="urn:microsoft.com/office/officeart/2005/8/layout/process2"/>
+    <dgm:cxn modelId="{0DF6D502-BCCA-4646-8E2D-93E465974AC3}" type="presParOf" srcId="{AAF068EB-C2BA-4E4C-941C-A230B9E551D1}" destId="{C064154F-0AF2-4AF0-B11A-FB237C2BF60F}" srcOrd="3" destOrd="0" presId="urn:microsoft.com/office/officeart/2005/8/layout/process2"/>
+    <dgm:cxn modelId="{EEAB82E5-8358-4F79-840A-0D1C154D69D0}" type="presParOf" srcId="{C064154F-0AF2-4AF0-B11A-FB237C2BF60F}" destId="{26053658-5444-4A21-8A39-8A85D705578F}" srcOrd="0" destOrd="0" presId="urn:microsoft.com/office/officeart/2005/8/layout/process2"/>
+    <dgm:cxn modelId="{BC69718C-2763-45D4-A737-C2082B7EE16E}" type="presParOf" srcId="{AAF068EB-C2BA-4E4C-941C-A230B9E551D1}" destId="{401DDB35-9780-4897-A309-73A84EABE41F}" srcOrd="4" destOrd="0" presId="urn:microsoft.com/office/officeart/2005/8/layout/process2"/>
+    <dgm:cxn modelId="{969CACB5-C435-411F-A4EF-C4C1563C40C8}" type="presParOf" srcId="{AAF068EB-C2BA-4E4C-941C-A230B9E551D1}" destId="{3D056114-0484-4EDF-86EC-D5D9428A7BF9}" srcOrd="5" destOrd="0" presId="urn:microsoft.com/office/officeart/2005/8/layout/process2"/>
+    <dgm:cxn modelId="{AB32202E-2FAE-44FD-BE6C-82A214D4D2F3}" type="presParOf" srcId="{3D056114-0484-4EDF-86EC-D5D9428A7BF9}" destId="{892CE5D1-ABBB-48EA-9D08-056C49FF4520}" srcOrd="0" destOrd="0" presId="urn:microsoft.com/office/officeart/2005/8/layout/process2"/>
+    <dgm:cxn modelId="{17F0C14A-34DB-4019-BFAC-55A014719886}" type="presParOf" srcId="{AAF068EB-C2BA-4E4C-941C-A230B9E551D1}" destId="{7253D03E-F494-4FA9-A711-DCC6F06178F0}" srcOrd="6" destOrd="0" presId="urn:microsoft.com/office/officeart/2005/8/layout/process2"/>
+    <dgm:cxn modelId="{2E95F82D-9B16-4EF5-998A-6C0045592B41}" type="presParOf" srcId="{AAF068EB-C2BA-4E4C-941C-A230B9E551D1}" destId="{634B6EAC-C545-413B-B32E-0393E60FE0F9}" srcOrd="7" destOrd="0" presId="urn:microsoft.com/office/officeart/2005/8/layout/process2"/>
+    <dgm:cxn modelId="{7456D71C-3AFF-4CEB-9868-8C9C063AC88E}" type="presParOf" srcId="{634B6EAC-C545-413B-B32E-0393E60FE0F9}" destId="{413DA36F-D69B-4D7C-887F-BA5627E17695}" srcOrd="0" destOrd="0" presId="urn:microsoft.com/office/officeart/2005/8/layout/process2"/>
+    <dgm:cxn modelId="{92E84F24-DA46-44E5-AFAA-7D216D816CE9}" type="presParOf" srcId="{AAF068EB-C2BA-4E4C-941C-A230B9E551D1}" destId="{B149C04E-7AEB-4A78-B7D7-AC20C233D7B6}" srcOrd="8" destOrd="0" presId="urn:microsoft.com/office/officeart/2005/8/layout/process2"/>
+    <dgm:cxn modelId="{ADC66C68-DB4C-4354-8410-2067A0245D51}" type="presParOf" srcId="{AAF068EB-C2BA-4E4C-941C-A230B9E551D1}" destId="{876973CB-19C6-4A07-8E92-BB7965FAF234}" srcOrd="9" destOrd="0" presId="urn:microsoft.com/office/officeart/2005/8/layout/process2"/>
+    <dgm:cxn modelId="{0EEA4ADF-D446-4F40-A763-622D826DA19B}" type="presParOf" srcId="{876973CB-19C6-4A07-8E92-BB7965FAF234}" destId="{AF3E0FD6-7AC6-4380-9318-F7806A575B51}" srcOrd="0" destOrd="0" presId="urn:microsoft.com/office/officeart/2005/8/layout/process2"/>
+    <dgm:cxn modelId="{DF6F6119-D684-4892-9FC3-A2245AC7EB1E}" type="presParOf" srcId="{AAF068EB-C2BA-4E4C-941C-A230B9E551D1}" destId="{23263FBF-5528-4109-B2ED-87E1E7DCEB63}" srcOrd="10" destOrd="0" presId="urn:microsoft.com/office/officeart/2005/8/layout/process2"/>
+    <dgm:cxn modelId="{31B7EA4E-3E09-4018-BF31-2C5625FB986F}" type="presParOf" srcId="{AAF068EB-C2BA-4E4C-941C-A230B9E551D1}" destId="{18D4A096-9F13-44E4-A778-EFE42993CB0B}" srcOrd="11" destOrd="0" presId="urn:microsoft.com/office/officeart/2005/8/layout/process2"/>
+    <dgm:cxn modelId="{FE381250-13D7-496C-8484-2C2EEC48935B}" type="presParOf" srcId="{18D4A096-9F13-44E4-A778-EFE42993CB0B}" destId="{2BF24C72-41C7-4320-ABBA-D92FFB025B7F}" srcOrd="0" destOrd="0" presId="urn:microsoft.com/office/officeart/2005/8/layout/process2"/>
+    <dgm:cxn modelId="{68A457CC-5482-41FF-A1E6-0D8F82C83736}" type="presParOf" srcId="{AAF068EB-C2BA-4E4C-941C-A230B9E551D1}" destId="{A576E462-304F-490D-BE6C-4E5A74D8E0F1}" srcOrd="12" destOrd="0" presId="urn:microsoft.com/office/officeart/2005/8/layout/process2"/>
+  </dgm:cxnLst>
+  <dgm:bg/>
+  <dgm:whole/>
+  <dgm:extLst>
+    <a:ext uri="http://schemas.microsoft.com/office/drawing/2008/diagram">
+      <dsp:dataModelExt xmlns:dsp="http://schemas.microsoft.com/office/drawing/2008/diagram" relId="rId6" minVer="http://schemas.openxmlformats.org/drawingml/2006/diagram"/>
+    </a:ext>
+  </dgm:extLst>
+</dgm:dataModel>
+</file>
+
+<file path=ppt/diagrams/data2.xml><?xml version="1.0" encoding="utf-8"?>
 <dgm:dataModel xmlns:dgm="http://schemas.openxmlformats.org/drawingml/2006/diagram" xmlns:a="http://schemas.openxmlformats.org/drawingml/2006/main">
   <dgm:ptLst>
     <dgm:pt modelId="{D142EE24-A998-424A-BA28-CAF4949ECFAF}" type="doc">
@@ -2973,6 +4385,1136 @@
 </dsp:drawing>
 </file>
 
+<file path=ppt/diagrams/drawing2.xml><?xml version="1.0" encoding="utf-8"?>
+<dsp:drawing xmlns:dgm="http://schemas.openxmlformats.org/drawingml/2006/diagram" xmlns:dsp="http://schemas.microsoft.com/office/drawing/2008/diagram" xmlns:a="http://schemas.openxmlformats.org/drawingml/2006/main">
+  <dsp:spTree>
+    <dsp:nvGrpSpPr>
+      <dsp:cNvPr id="0" name=""/>
+      <dsp:cNvGrpSpPr/>
+    </dsp:nvGrpSpPr>
+    <dsp:grpSpPr/>
+    <dsp:sp modelId="{2E1175F2-C1BC-4312-B787-E37F965D2F17}">
+      <dsp:nvSpPr>
+        <dsp:cNvPr id="0" name=""/>
+        <dsp:cNvSpPr/>
+      </dsp:nvSpPr>
+      <dsp:spPr>
+        <a:xfrm>
+          <a:off x="1335195" y="1674"/>
+          <a:ext cx="3655546" cy="1371265"/>
+        </a:xfrm>
+        <a:prstGeom prst="roundRect">
+          <a:avLst>
+            <a:gd name="adj" fmla="val 10000"/>
+          </a:avLst>
+        </a:prstGeom>
+        <a:solidFill>
+          <a:schemeClr val="lt1">
+            <a:hueOff val="0"/>
+            <a:satOff val="0"/>
+            <a:lumOff val="0"/>
+            <a:alphaOff val="0"/>
+          </a:schemeClr>
+        </a:solidFill>
+        <a:ln w="12700" cap="flat" cmpd="sng" algn="ctr">
+          <a:solidFill>
+            <a:schemeClr val="dk1">
+              <a:shade val="80000"/>
+              <a:hueOff val="0"/>
+              <a:satOff val="0"/>
+              <a:lumOff val="0"/>
+              <a:alphaOff val="0"/>
+            </a:schemeClr>
+          </a:solidFill>
+          <a:prstDash val="solid"/>
+          <a:miter lim="800000"/>
+        </a:ln>
+        <a:effectLst/>
+      </dsp:spPr>
+      <dsp:style>
+        <a:lnRef idx="2">
+          <a:scrgbClr r="0" g="0" b="0"/>
+        </a:lnRef>
+        <a:fillRef idx="1">
+          <a:scrgbClr r="0" g="0" b="0"/>
+        </a:fillRef>
+        <a:effectRef idx="0">
+          <a:scrgbClr r="0" g="0" b="0"/>
+        </a:effectRef>
+        <a:fontRef idx="minor">
+          <a:schemeClr val="lt1"/>
+        </a:fontRef>
+      </dsp:style>
+      <dsp:txBody>
+        <a:bodyPr spcFirstLastPara="0" vert="horz" wrap="square" lIns="57150" tIns="57150" rIns="57150" bIns="57150" numCol="1" spcCol="1270" anchor="ctr" anchorCtr="0">
+          <a:noAutofit/>
+        </a:bodyPr>
+        <a:lstStyle/>
+        <a:p>
+          <a:pPr marL="0" lvl="0" indent="0" algn="ctr" defTabSz="666750">
+            <a:lnSpc>
+              <a:spcPct val="90000"/>
+            </a:lnSpc>
+            <a:spcBef>
+              <a:spcPct val="0"/>
+            </a:spcBef>
+            <a:spcAft>
+              <a:spcPct val="35000"/>
+            </a:spcAft>
+            <a:buFont typeface="+mj-lt"/>
+            <a:buNone/>
+          </a:pPr>
+          <a:r>
+            <a:rPr kumimoji="1" lang="en-US" altLang="ja-JP" sz="1500" kern="1200" dirty="0" err="1"/>
+            <a:t>ImageFlux</a:t>
+          </a:r>
+          <a:r>
+            <a:rPr kumimoji="1" lang="ja-JP" altLang="en-US" sz="1500" kern="1200" dirty="0"/>
+            <a:t>が</a:t>
+          </a:r>
+          <a:r>
+            <a:rPr kumimoji="1" lang="en-US" altLang="ja-JP" sz="1500" kern="1200" dirty="0" err="1"/>
+            <a:t>AppRun</a:t>
+          </a:r>
+          <a:r>
+            <a:rPr kumimoji="1" lang="ja-JP" altLang="en-US" sz="1500" kern="1200" dirty="0"/>
+            <a:t>共用型に</a:t>
+          </a:r>
+          <a:br>
+            <a:rPr kumimoji="1" lang="en-US" altLang="ja-JP" sz="1500" kern="1200" dirty="0"/>
+          </a:br>
+          <a:r>
+            <a:rPr kumimoji="1" lang="ja-JP" altLang="en-US" sz="1500" kern="1200" dirty="0"/>
+            <a:t>アーカイブ保存完了のイベント</a:t>
+          </a:r>
+          <a:r>
+            <a:rPr kumimoji="1" lang="en-US" altLang="ja-JP" sz="1500" kern="1200" dirty="0"/>
+            <a:t>Webhook</a:t>
+          </a:r>
+          <a:r>
+            <a:rPr kumimoji="1" lang="ja-JP" altLang="en-US" sz="1500" kern="1200" dirty="0"/>
+            <a:t>通知を送信</a:t>
+          </a:r>
+        </a:p>
+      </dsp:txBody>
+      <dsp:txXfrm>
+        <a:off x="1375358" y="41837"/>
+        <a:ext cx="3575220" cy="1290939"/>
+      </dsp:txXfrm>
+    </dsp:sp>
+    <dsp:sp modelId="{EAB550B0-8B66-4FD5-AA39-3877AE739144}">
+      <dsp:nvSpPr>
+        <dsp:cNvPr id="0" name=""/>
+        <dsp:cNvSpPr/>
+      </dsp:nvSpPr>
+      <dsp:spPr>
+        <a:xfrm rot="5400000">
+          <a:off x="2905856" y="1407221"/>
+          <a:ext cx="514224" cy="617069"/>
+        </a:xfrm>
+        <a:prstGeom prst="rightArrow">
+          <a:avLst>
+            <a:gd name="adj1" fmla="val 60000"/>
+            <a:gd name="adj2" fmla="val 50000"/>
+          </a:avLst>
+        </a:prstGeom>
+        <a:solidFill>
+          <a:schemeClr val="dk1">
+            <a:tint val="60000"/>
+            <a:hueOff val="0"/>
+            <a:satOff val="0"/>
+            <a:lumOff val="0"/>
+            <a:alphaOff val="0"/>
+          </a:schemeClr>
+        </a:solidFill>
+        <a:ln>
+          <a:noFill/>
+        </a:ln>
+        <a:effectLst/>
+      </dsp:spPr>
+      <dsp:style>
+        <a:lnRef idx="0">
+          <a:scrgbClr r="0" g="0" b="0"/>
+        </a:lnRef>
+        <a:fillRef idx="1">
+          <a:scrgbClr r="0" g="0" b="0"/>
+        </a:fillRef>
+        <a:effectRef idx="0">
+          <a:scrgbClr r="0" g="0" b="0"/>
+        </a:effectRef>
+        <a:fontRef idx="minor">
+          <a:schemeClr val="lt1"/>
+        </a:fontRef>
+      </dsp:style>
+      <dsp:txBody>
+        <a:bodyPr spcFirstLastPara="0" vert="horz" wrap="square" lIns="0" tIns="0" rIns="0" bIns="0" numCol="1" spcCol="1270" anchor="ctr" anchorCtr="0">
+          <a:noAutofit/>
+        </a:bodyPr>
+        <a:lstStyle/>
+        <a:p>
+          <a:pPr marL="0" lvl="0" indent="0" algn="ctr" defTabSz="533400">
+            <a:lnSpc>
+              <a:spcPct val="90000"/>
+            </a:lnSpc>
+            <a:spcBef>
+              <a:spcPct val="0"/>
+            </a:spcBef>
+            <a:spcAft>
+              <a:spcPct val="35000"/>
+            </a:spcAft>
+            <a:buNone/>
+          </a:pPr>
+          <a:endParaRPr kumimoji="1" lang="ja-JP" altLang="en-US" sz="1200" kern="1200"/>
+        </a:p>
+      </dsp:txBody>
+      <dsp:txXfrm rot="-5400000">
+        <a:off x="2977848" y="1458644"/>
+        <a:ext cx="370241" cy="359957"/>
+      </dsp:txXfrm>
+    </dsp:sp>
+    <dsp:sp modelId="{39B6DCBB-71CA-4223-B0D3-607C3277F876}">
+      <dsp:nvSpPr>
+        <dsp:cNvPr id="0" name=""/>
+        <dsp:cNvSpPr/>
+      </dsp:nvSpPr>
+      <dsp:spPr>
+        <a:xfrm>
+          <a:off x="1335195" y="2058572"/>
+          <a:ext cx="3655546" cy="1371265"/>
+        </a:xfrm>
+        <a:prstGeom prst="roundRect">
+          <a:avLst>
+            <a:gd name="adj" fmla="val 10000"/>
+          </a:avLst>
+        </a:prstGeom>
+        <a:solidFill>
+          <a:schemeClr val="lt1">
+            <a:hueOff val="0"/>
+            <a:satOff val="0"/>
+            <a:lumOff val="0"/>
+            <a:alphaOff val="0"/>
+          </a:schemeClr>
+        </a:solidFill>
+        <a:ln w="12700" cap="flat" cmpd="sng" algn="ctr">
+          <a:solidFill>
+            <a:schemeClr val="dk1">
+              <a:shade val="80000"/>
+              <a:hueOff val="0"/>
+              <a:satOff val="0"/>
+              <a:lumOff val="0"/>
+              <a:alphaOff val="0"/>
+            </a:schemeClr>
+          </a:solidFill>
+          <a:prstDash val="solid"/>
+          <a:miter lim="800000"/>
+        </a:ln>
+        <a:effectLst/>
+      </dsp:spPr>
+      <dsp:style>
+        <a:lnRef idx="2">
+          <a:scrgbClr r="0" g="0" b="0"/>
+        </a:lnRef>
+        <a:fillRef idx="1">
+          <a:scrgbClr r="0" g="0" b="0"/>
+        </a:fillRef>
+        <a:effectRef idx="0">
+          <a:scrgbClr r="0" g="0" b="0"/>
+        </a:effectRef>
+        <a:fontRef idx="minor">
+          <a:schemeClr val="lt1"/>
+        </a:fontRef>
+      </dsp:style>
+      <dsp:txBody>
+        <a:bodyPr spcFirstLastPara="0" vert="horz" wrap="square" lIns="57150" tIns="57150" rIns="57150" bIns="57150" numCol="1" spcCol="1270" anchor="ctr" anchorCtr="0">
+          <a:noAutofit/>
+        </a:bodyPr>
+        <a:lstStyle/>
+        <a:p>
+          <a:pPr marL="0" lvl="0" indent="0" algn="ctr" defTabSz="666750">
+            <a:lnSpc>
+              <a:spcPct val="90000"/>
+            </a:lnSpc>
+            <a:spcBef>
+              <a:spcPct val="0"/>
+            </a:spcBef>
+            <a:spcAft>
+              <a:spcPct val="35000"/>
+            </a:spcAft>
+            <a:buFont typeface="+mj-lt"/>
+            <a:buNone/>
+          </a:pPr>
+          <a:r>
+            <a:rPr kumimoji="1" lang="en-US" altLang="ja-JP" sz="1500" kern="1200" dirty="0" err="1"/>
+            <a:t>AppRun</a:t>
+          </a:r>
+          <a:r>
+            <a:rPr kumimoji="1" lang="ja-JP" altLang="en-US" sz="1500" kern="1200" dirty="0"/>
+            <a:t>共用型はシンプル</a:t>
+          </a:r>
+          <a:r>
+            <a:rPr kumimoji="1" lang="en-US" altLang="ja-JP" sz="1500" kern="1200" dirty="0"/>
+            <a:t>MQ</a:t>
+          </a:r>
+          <a:r>
+            <a:rPr kumimoji="1" lang="ja-JP" altLang="en-US" sz="1500" kern="1200" dirty="0"/>
+            <a:t>に</a:t>
+          </a:r>
+          <a:br>
+            <a:rPr kumimoji="1" lang="en-US" altLang="ja-JP" sz="1500" kern="1200" dirty="0"/>
+          </a:br>
+          <a:r>
+            <a:rPr kumimoji="1" lang="en-US" altLang="ja-JP" sz="1500" kern="1200" dirty="0"/>
+            <a:t>.m3u8</a:t>
+          </a:r>
+          <a:r>
+            <a:rPr kumimoji="1" lang="ja-JP" altLang="en-US" sz="1500" kern="1200" dirty="0"/>
+            <a:t>のパスと通知日時を送信</a:t>
+          </a:r>
+          <a:endParaRPr kumimoji="1" lang="en-US" altLang="ja-JP" sz="1500" kern="1200" dirty="0"/>
+        </a:p>
+        <a:p>
+          <a:pPr marL="0" lvl="0" indent="0" algn="ctr" defTabSz="666750">
+            <a:lnSpc>
+              <a:spcPct val="90000"/>
+            </a:lnSpc>
+            <a:spcBef>
+              <a:spcPct val="0"/>
+            </a:spcBef>
+            <a:spcAft>
+              <a:spcPct val="35000"/>
+            </a:spcAft>
+            <a:buFont typeface="+mj-lt"/>
+            <a:buNone/>
+          </a:pPr>
+          <a:r>
+            <a:rPr kumimoji="1" lang="ja-JP" altLang="en-US" sz="1500" kern="1200" dirty="0"/>
+            <a:t>（モニタリングスイートにもログ連携）</a:t>
+          </a:r>
+        </a:p>
+      </dsp:txBody>
+      <dsp:txXfrm>
+        <a:off x="1375358" y="2098735"/>
+        <a:ext cx="3575220" cy="1290939"/>
+      </dsp:txXfrm>
+    </dsp:sp>
+    <dsp:sp modelId="{C064154F-0AF2-4AF0-B11A-FB237C2BF60F}">
+      <dsp:nvSpPr>
+        <dsp:cNvPr id="0" name=""/>
+        <dsp:cNvSpPr/>
+      </dsp:nvSpPr>
+      <dsp:spPr>
+        <a:xfrm rot="5400000">
+          <a:off x="2905856" y="3464118"/>
+          <a:ext cx="514224" cy="617069"/>
+        </a:xfrm>
+        <a:prstGeom prst="rightArrow">
+          <a:avLst>
+            <a:gd name="adj1" fmla="val 60000"/>
+            <a:gd name="adj2" fmla="val 50000"/>
+          </a:avLst>
+        </a:prstGeom>
+        <a:solidFill>
+          <a:schemeClr val="dk1">
+            <a:tint val="60000"/>
+            <a:hueOff val="0"/>
+            <a:satOff val="0"/>
+            <a:lumOff val="0"/>
+            <a:alphaOff val="0"/>
+          </a:schemeClr>
+        </a:solidFill>
+        <a:ln>
+          <a:noFill/>
+        </a:ln>
+        <a:effectLst/>
+      </dsp:spPr>
+      <dsp:style>
+        <a:lnRef idx="0">
+          <a:scrgbClr r="0" g="0" b="0"/>
+        </a:lnRef>
+        <a:fillRef idx="1">
+          <a:scrgbClr r="0" g="0" b="0"/>
+        </a:fillRef>
+        <a:effectRef idx="0">
+          <a:scrgbClr r="0" g="0" b="0"/>
+        </a:effectRef>
+        <a:fontRef idx="minor">
+          <a:schemeClr val="lt1"/>
+        </a:fontRef>
+      </dsp:style>
+      <dsp:txBody>
+        <a:bodyPr spcFirstLastPara="0" vert="horz" wrap="square" lIns="0" tIns="0" rIns="0" bIns="0" numCol="1" spcCol="1270" anchor="ctr" anchorCtr="0">
+          <a:noAutofit/>
+        </a:bodyPr>
+        <a:lstStyle/>
+        <a:p>
+          <a:pPr marL="0" lvl="0" indent="0" algn="ctr" defTabSz="533400">
+            <a:lnSpc>
+              <a:spcPct val="90000"/>
+            </a:lnSpc>
+            <a:spcBef>
+              <a:spcPct val="0"/>
+            </a:spcBef>
+            <a:spcAft>
+              <a:spcPct val="35000"/>
+            </a:spcAft>
+            <a:buNone/>
+          </a:pPr>
+          <a:endParaRPr kumimoji="1" lang="ja-JP" altLang="en-US" sz="1200" kern="1200"/>
+        </a:p>
+      </dsp:txBody>
+      <dsp:txXfrm rot="-5400000">
+        <a:off x="2977848" y="3515541"/>
+        <a:ext cx="370241" cy="359957"/>
+      </dsp:txXfrm>
+    </dsp:sp>
+    <dsp:sp modelId="{401DDB35-9780-4897-A309-73A84EABE41F}">
+      <dsp:nvSpPr>
+        <dsp:cNvPr id="0" name=""/>
+        <dsp:cNvSpPr/>
+      </dsp:nvSpPr>
+      <dsp:spPr>
+        <a:xfrm>
+          <a:off x="1335195" y="4115469"/>
+          <a:ext cx="3655546" cy="1371265"/>
+        </a:xfrm>
+        <a:prstGeom prst="roundRect">
+          <a:avLst>
+            <a:gd name="adj" fmla="val 10000"/>
+          </a:avLst>
+        </a:prstGeom>
+        <a:solidFill>
+          <a:schemeClr val="lt1">
+            <a:hueOff val="0"/>
+            <a:satOff val="0"/>
+            <a:lumOff val="0"/>
+            <a:alphaOff val="0"/>
+          </a:schemeClr>
+        </a:solidFill>
+        <a:ln w="12700" cap="flat" cmpd="sng" algn="ctr">
+          <a:solidFill>
+            <a:schemeClr val="dk1">
+              <a:shade val="80000"/>
+              <a:hueOff val="0"/>
+              <a:satOff val="0"/>
+              <a:lumOff val="0"/>
+              <a:alphaOff val="0"/>
+            </a:schemeClr>
+          </a:solidFill>
+          <a:prstDash val="solid"/>
+          <a:miter lim="800000"/>
+        </a:ln>
+        <a:effectLst/>
+      </dsp:spPr>
+      <dsp:style>
+        <a:lnRef idx="2">
+          <a:scrgbClr r="0" g="0" b="0"/>
+        </a:lnRef>
+        <a:fillRef idx="1">
+          <a:scrgbClr r="0" g="0" b="0"/>
+        </a:fillRef>
+        <a:effectRef idx="0">
+          <a:scrgbClr r="0" g="0" b="0"/>
+        </a:effectRef>
+        <a:fontRef idx="minor">
+          <a:schemeClr val="lt1"/>
+        </a:fontRef>
+      </dsp:style>
+      <dsp:txBody>
+        <a:bodyPr spcFirstLastPara="0" vert="horz" wrap="square" lIns="57150" tIns="57150" rIns="57150" bIns="57150" numCol="1" spcCol="1270" anchor="ctr" anchorCtr="0">
+          <a:noAutofit/>
+        </a:bodyPr>
+        <a:lstStyle/>
+        <a:p>
+          <a:pPr marL="0" lvl="0" indent="0" algn="ctr" defTabSz="666750">
+            <a:lnSpc>
+              <a:spcPct val="90000"/>
+            </a:lnSpc>
+            <a:spcBef>
+              <a:spcPct val="0"/>
+            </a:spcBef>
+            <a:spcAft>
+              <a:spcPct val="35000"/>
+            </a:spcAft>
+            <a:buNone/>
+          </a:pPr>
+          <a:r>
+            <a:rPr kumimoji="1" lang="ja-JP" altLang="en-US" sz="1500" kern="1200" dirty="0"/>
+            <a:t>サーバの常駐プロセスが順次</a:t>
+          </a:r>
+          <a:br>
+            <a:rPr kumimoji="1" lang="en-US" altLang="ja-JP" sz="1500" kern="1200" dirty="0"/>
+          </a:br>
+          <a:r>
+            <a:rPr kumimoji="1" lang="ja-JP" altLang="en-US" sz="1500" kern="1200" dirty="0"/>
+            <a:t>シンプル</a:t>
+          </a:r>
+          <a:r>
+            <a:rPr kumimoji="1" lang="en-US" altLang="ja-JP" sz="1500" kern="1200" dirty="0"/>
+            <a:t>MQ</a:t>
+          </a:r>
+          <a:r>
+            <a:rPr kumimoji="1" lang="ja-JP" altLang="en-US" sz="1500" kern="1200" dirty="0"/>
+            <a:t>からメッセージを受領</a:t>
+          </a:r>
+        </a:p>
+      </dsp:txBody>
+      <dsp:txXfrm>
+        <a:off x="1375358" y="4155632"/>
+        <a:ext cx="3575220" cy="1290939"/>
+      </dsp:txXfrm>
+    </dsp:sp>
+    <dsp:sp modelId="{3D056114-0484-4EDF-86EC-D5D9428A7BF9}">
+      <dsp:nvSpPr>
+        <dsp:cNvPr id="0" name=""/>
+        <dsp:cNvSpPr/>
+      </dsp:nvSpPr>
+      <dsp:spPr>
+        <a:xfrm rot="5400000">
+          <a:off x="2905856" y="5521016"/>
+          <a:ext cx="514224" cy="617069"/>
+        </a:xfrm>
+        <a:prstGeom prst="rightArrow">
+          <a:avLst>
+            <a:gd name="adj1" fmla="val 60000"/>
+            <a:gd name="adj2" fmla="val 50000"/>
+          </a:avLst>
+        </a:prstGeom>
+        <a:solidFill>
+          <a:schemeClr val="dk1">
+            <a:tint val="60000"/>
+            <a:hueOff val="0"/>
+            <a:satOff val="0"/>
+            <a:lumOff val="0"/>
+            <a:alphaOff val="0"/>
+          </a:schemeClr>
+        </a:solidFill>
+        <a:ln>
+          <a:noFill/>
+        </a:ln>
+        <a:effectLst/>
+      </dsp:spPr>
+      <dsp:style>
+        <a:lnRef idx="0">
+          <a:scrgbClr r="0" g="0" b="0"/>
+        </a:lnRef>
+        <a:fillRef idx="1">
+          <a:scrgbClr r="0" g="0" b="0"/>
+        </a:fillRef>
+        <a:effectRef idx="0">
+          <a:scrgbClr r="0" g="0" b="0"/>
+        </a:effectRef>
+        <a:fontRef idx="minor">
+          <a:schemeClr val="lt1"/>
+        </a:fontRef>
+      </dsp:style>
+      <dsp:txBody>
+        <a:bodyPr spcFirstLastPara="0" vert="horz" wrap="square" lIns="0" tIns="0" rIns="0" bIns="0" numCol="1" spcCol="1270" anchor="ctr" anchorCtr="0">
+          <a:noAutofit/>
+        </a:bodyPr>
+        <a:lstStyle/>
+        <a:p>
+          <a:pPr marL="0" lvl="0" indent="0" algn="ctr" defTabSz="533400">
+            <a:lnSpc>
+              <a:spcPct val="90000"/>
+            </a:lnSpc>
+            <a:spcBef>
+              <a:spcPct val="0"/>
+            </a:spcBef>
+            <a:spcAft>
+              <a:spcPct val="35000"/>
+            </a:spcAft>
+            <a:buNone/>
+          </a:pPr>
+          <a:endParaRPr kumimoji="1" lang="ja-JP" altLang="en-US" sz="1200" kern="1200"/>
+        </a:p>
+      </dsp:txBody>
+      <dsp:txXfrm rot="-5400000">
+        <a:off x="2977848" y="5572439"/>
+        <a:ext cx="370241" cy="359957"/>
+      </dsp:txXfrm>
+    </dsp:sp>
+    <dsp:sp modelId="{7253D03E-F494-4FA9-A711-DCC6F06178F0}">
+      <dsp:nvSpPr>
+        <dsp:cNvPr id="0" name=""/>
+        <dsp:cNvSpPr/>
+      </dsp:nvSpPr>
+      <dsp:spPr>
+        <a:xfrm>
+          <a:off x="1335195" y="6172367"/>
+          <a:ext cx="3655546" cy="1371265"/>
+        </a:xfrm>
+        <a:prstGeom prst="roundRect">
+          <a:avLst>
+            <a:gd name="adj" fmla="val 10000"/>
+          </a:avLst>
+        </a:prstGeom>
+        <a:solidFill>
+          <a:schemeClr val="lt1">
+            <a:hueOff val="0"/>
+            <a:satOff val="0"/>
+            <a:lumOff val="0"/>
+            <a:alphaOff val="0"/>
+          </a:schemeClr>
+        </a:solidFill>
+        <a:ln w="12700" cap="flat" cmpd="sng" algn="ctr">
+          <a:solidFill>
+            <a:schemeClr val="dk1">
+              <a:shade val="80000"/>
+              <a:hueOff val="0"/>
+              <a:satOff val="0"/>
+              <a:lumOff val="0"/>
+              <a:alphaOff val="0"/>
+            </a:schemeClr>
+          </a:solidFill>
+          <a:prstDash val="solid"/>
+          <a:miter lim="800000"/>
+        </a:ln>
+        <a:effectLst/>
+      </dsp:spPr>
+      <dsp:style>
+        <a:lnRef idx="2">
+          <a:scrgbClr r="0" g="0" b="0"/>
+        </a:lnRef>
+        <a:fillRef idx="1">
+          <a:scrgbClr r="0" g="0" b="0"/>
+        </a:fillRef>
+        <a:effectRef idx="0">
+          <a:scrgbClr r="0" g="0" b="0"/>
+        </a:effectRef>
+        <a:fontRef idx="minor">
+          <a:schemeClr val="lt1"/>
+        </a:fontRef>
+      </dsp:style>
+      <dsp:txBody>
+        <a:bodyPr spcFirstLastPara="0" vert="horz" wrap="square" lIns="57150" tIns="57150" rIns="57150" bIns="57150" numCol="1" spcCol="1270" anchor="ctr" anchorCtr="0">
+          <a:noAutofit/>
+        </a:bodyPr>
+        <a:lstStyle/>
+        <a:p>
+          <a:pPr marL="0" lvl="0" indent="0" algn="ctr" defTabSz="666750">
+            <a:lnSpc>
+              <a:spcPct val="90000"/>
+            </a:lnSpc>
+            <a:spcBef>
+              <a:spcPct val="0"/>
+            </a:spcBef>
+            <a:spcAft>
+              <a:spcPct val="35000"/>
+            </a:spcAft>
+            <a:buNone/>
+          </a:pPr>
+          <a:r>
+            <a:rPr kumimoji="1" lang="ja-JP" altLang="en-US" sz="1500" kern="1200" dirty="0"/>
+            <a:t>サーバの常駐プロセスが録画データを</a:t>
+          </a:r>
+          <a:br>
+            <a:rPr kumimoji="1" lang="en-US" altLang="ja-JP" sz="1500" kern="1200" dirty="0"/>
+          </a:br>
+          <a:r>
+            <a:rPr kumimoji="1" lang="ja-JP" altLang="en-US" sz="1500" kern="1200" dirty="0"/>
+            <a:t>取得＆音声エンコードし、</a:t>
+          </a:r>
+          <a:br>
+            <a:rPr kumimoji="1" lang="en-US" altLang="ja-JP" sz="1500" kern="1200" dirty="0"/>
+          </a:br>
+          <a:r>
+            <a:rPr kumimoji="1" lang="ja-JP" altLang="en-US" sz="1500" kern="1200" dirty="0"/>
+            <a:t>さくらの</a:t>
+          </a:r>
+          <a:r>
+            <a:rPr kumimoji="1" lang="en-US" altLang="ja-JP" sz="1500" kern="1200" dirty="0"/>
+            <a:t>AI Engine</a:t>
+          </a:r>
+          <a:r>
+            <a:rPr kumimoji="1" lang="ja-JP" altLang="en-US" sz="1500" kern="1200" dirty="0"/>
+            <a:t>呼び出し</a:t>
+          </a:r>
+        </a:p>
+      </dsp:txBody>
+      <dsp:txXfrm>
+        <a:off x="1375358" y="6212530"/>
+        <a:ext cx="3575220" cy="1290939"/>
+      </dsp:txXfrm>
+    </dsp:sp>
+    <dsp:sp modelId="{634B6EAC-C545-413B-B32E-0393E60FE0F9}">
+      <dsp:nvSpPr>
+        <dsp:cNvPr id="0" name=""/>
+        <dsp:cNvSpPr/>
+      </dsp:nvSpPr>
+      <dsp:spPr>
+        <a:xfrm rot="5400000">
+          <a:off x="2905856" y="7577914"/>
+          <a:ext cx="514224" cy="617069"/>
+        </a:xfrm>
+        <a:prstGeom prst="rightArrow">
+          <a:avLst>
+            <a:gd name="adj1" fmla="val 60000"/>
+            <a:gd name="adj2" fmla="val 50000"/>
+          </a:avLst>
+        </a:prstGeom>
+        <a:solidFill>
+          <a:schemeClr val="dk1">
+            <a:tint val="60000"/>
+            <a:hueOff val="0"/>
+            <a:satOff val="0"/>
+            <a:lumOff val="0"/>
+            <a:alphaOff val="0"/>
+          </a:schemeClr>
+        </a:solidFill>
+        <a:ln>
+          <a:noFill/>
+        </a:ln>
+        <a:effectLst/>
+      </dsp:spPr>
+      <dsp:style>
+        <a:lnRef idx="0">
+          <a:scrgbClr r="0" g="0" b="0"/>
+        </a:lnRef>
+        <a:fillRef idx="1">
+          <a:scrgbClr r="0" g="0" b="0"/>
+        </a:fillRef>
+        <a:effectRef idx="0">
+          <a:scrgbClr r="0" g="0" b="0"/>
+        </a:effectRef>
+        <a:fontRef idx="minor">
+          <a:schemeClr val="lt1"/>
+        </a:fontRef>
+      </dsp:style>
+      <dsp:txBody>
+        <a:bodyPr spcFirstLastPara="0" vert="horz" wrap="square" lIns="0" tIns="0" rIns="0" bIns="0" numCol="1" spcCol="1270" anchor="ctr" anchorCtr="0">
+          <a:noAutofit/>
+        </a:bodyPr>
+        <a:lstStyle/>
+        <a:p>
+          <a:pPr marL="0" lvl="0" indent="0" algn="ctr" defTabSz="533400">
+            <a:lnSpc>
+              <a:spcPct val="90000"/>
+            </a:lnSpc>
+            <a:spcBef>
+              <a:spcPct val="0"/>
+            </a:spcBef>
+            <a:spcAft>
+              <a:spcPct val="35000"/>
+            </a:spcAft>
+            <a:buNone/>
+          </a:pPr>
+          <a:endParaRPr kumimoji="1" lang="ja-JP" altLang="en-US" sz="1200" kern="1200"/>
+        </a:p>
+      </dsp:txBody>
+      <dsp:txXfrm rot="-5400000">
+        <a:off x="2977848" y="7629337"/>
+        <a:ext cx="370241" cy="359957"/>
+      </dsp:txXfrm>
+    </dsp:sp>
+    <dsp:sp modelId="{B149C04E-7AEB-4A78-B7D7-AC20C233D7B6}">
+      <dsp:nvSpPr>
+        <dsp:cNvPr id="0" name=""/>
+        <dsp:cNvSpPr/>
+      </dsp:nvSpPr>
+      <dsp:spPr>
+        <a:xfrm>
+          <a:off x="1335195" y="8229265"/>
+          <a:ext cx="3655546" cy="1371265"/>
+        </a:xfrm>
+        <a:prstGeom prst="roundRect">
+          <a:avLst>
+            <a:gd name="adj" fmla="val 10000"/>
+          </a:avLst>
+        </a:prstGeom>
+        <a:solidFill>
+          <a:schemeClr val="lt1">
+            <a:hueOff val="0"/>
+            <a:satOff val="0"/>
+            <a:lumOff val="0"/>
+            <a:alphaOff val="0"/>
+          </a:schemeClr>
+        </a:solidFill>
+        <a:ln w="12700" cap="flat" cmpd="sng" algn="ctr">
+          <a:solidFill>
+            <a:schemeClr val="dk1">
+              <a:shade val="80000"/>
+              <a:hueOff val="0"/>
+              <a:satOff val="0"/>
+              <a:lumOff val="0"/>
+              <a:alphaOff val="0"/>
+            </a:schemeClr>
+          </a:solidFill>
+          <a:prstDash val="solid"/>
+          <a:miter lim="800000"/>
+        </a:ln>
+        <a:effectLst/>
+      </dsp:spPr>
+      <dsp:style>
+        <a:lnRef idx="2">
+          <a:scrgbClr r="0" g="0" b="0"/>
+        </a:lnRef>
+        <a:fillRef idx="1">
+          <a:scrgbClr r="0" g="0" b="0"/>
+        </a:fillRef>
+        <a:effectRef idx="0">
+          <a:scrgbClr r="0" g="0" b="0"/>
+        </a:effectRef>
+        <a:fontRef idx="minor">
+          <a:schemeClr val="lt1"/>
+        </a:fontRef>
+      </dsp:style>
+      <dsp:txBody>
+        <a:bodyPr spcFirstLastPara="0" vert="horz" wrap="square" lIns="57150" tIns="57150" rIns="57150" bIns="57150" numCol="1" spcCol="1270" anchor="ctr" anchorCtr="0">
+          <a:noAutofit/>
+        </a:bodyPr>
+        <a:lstStyle/>
+        <a:p>
+          <a:pPr marL="0" lvl="0" indent="0" algn="ctr" defTabSz="666750">
+            <a:lnSpc>
+              <a:spcPct val="90000"/>
+            </a:lnSpc>
+            <a:spcBef>
+              <a:spcPct val="0"/>
+            </a:spcBef>
+            <a:spcAft>
+              <a:spcPct val="35000"/>
+            </a:spcAft>
+            <a:buNone/>
+          </a:pPr>
+          <a:r>
+            <a:rPr kumimoji="1" lang="ja-JP" altLang="en-US" sz="1500" kern="1200" dirty="0"/>
+            <a:t>さくらの</a:t>
+          </a:r>
+          <a:r>
+            <a:rPr kumimoji="1" lang="en-US" altLang="ja-JP" sz="1500" kern="1200" dirty="0"/>
+            <a:t>AI Engine</a:t>
+          </a:r>
+          <a:r>
+            <a:rPr kumimoji="1" lang="ja-JP" altLang="en-US" sz="1500" kern="1200" dirty="0"/>
+            <a:t>は文字起こし・要約を行い、結果をサーバに返却</a:t>
+          </a:r>
+        </a:p>
+      </dsp:txBody>
+      <dsp:txXfrm>
+        <a:off x="1375358" y="8269428"/>
+        <a:ext cx="3575220" cy="1290939"/>
+      </dsp:txXfrm>
+    </dsp:sp>
+    <dsp:sp modelId="{876973CB-19C6-4A07-8E92-BB7965FAF234}">
+      <dsp:nvSpPr>
+        <dsp:cNvPr id="0" name=""/>
+        <dsp:cNvSpPr/>
+      </dsp:nvSpPr>
+      <dsp:spPr>
+        <a:xfrm rot="5400000">
+          <a:off x="2905856" y="9634811"/>
+          <a:ext cx="514224" cy="617069"/>
+        </a:xfrm>
+        <a:prstGeom prst="rightArrow">
+          <a:avLst>
+            <a:gd name="adj1" fmla="val 60000"/>
+            <a:gd name="adj2" fmla="val 50000"/>
+          </a:avLst>
+        </a:prstGeom>
+        <a:solidFill>
+          <a:schemeClr val="dk1">
+            <a:tint val="60000"/>
+            <a:hueOff val="0"/>
+            <a:satOff val="0"/>
+            <a:lumOff val="0"/>
+            <a:alphaOff val="0"/>
+          </a:schemeClr>
+        </a:solidFill>
+        <a:ln>
+          <a:noFill/>
+        </a:ln>
+        <a:effectLst/>
+      </dsp:spPr>
+      <dsp:style>
+        <a:lnRef idx="0">
+          <a:scrgbClr r="0" g="0" b="0"/>
+        </a:lnRef>
+        <a:fillRef idx="1">
+          <a:scrgbClr r="0" g="0" b="0"/>
+        </a:fillRef>
+        <a:effectRef idx="0">
+          <a:scrgbClr r="0" g="0" b="0"/>
+        </a:effectRef>
+        <a:fontRef idx="minor">
+          <a:schemeClr val="lt1"/>
+        </a:fontRef>
+      </dsp:style>
+      <dsp:txBody>
+        <a:bodyPr spcFirstLastPara="0" vert="horz" wrap="square" lIns="0" tIns="0" rIns="0" bIns="0" numCol="1" spcCol="1270" anchor="ctr" anchorCtr="0">
+          <a:noAutofit/>
+        </a:bodyPr>
+        <a:lstStyle/>
+        <a:p>
+          <a:pPr marL="0" lvl="0" indent="0" algn="ctr" defTabSz="533400">
+            <a:lnSpc>
+              <a:spcPct val="90000"/>
+            </a:lnSpc>
+            <a:spcBef>
+              <a:spcPct val="0"/>
+            </a:spcBef>
+            <a:spcAft>
+              <a:spcPct val="35000"/>
+            </a:spcAft>
+            <a:buNone/>
+          </a:pPr>
+          <a:endParaRPr kumimoji="1" lang="ja-JP" altLang="en-US" sz="1200" kern="1200"/>
+        </a:p>
+      </dsp:txBody>
+      <dsp:txXfrm rot="-5400000">
+        <a:off x="2977848" y="9686234"/>
+        <a:ext cx="370241" cy="359957"/>
+      </dsp:txXfrm>
+    </dsp:sp>
+    <dsp:sp modelId="{23263FBF-5528-4109-B2ED-87E1E7DCEB63}">
+      <dsp:nvSpPr>
+        <dsp:cNvPr id="0" name=""/>
+        <dsp:cNvSpPr/>
+      </dsp:nvSpPr>
+      <dsp:spPr>
+        <a:xfrm>
+          <a:off x="1335195" y="10286162"/>
+          <a:ext cx="3655546" cy="1371265"/>
+        </a:xfrm>
+        <a:prstGeom prst="roundRect">
+          <a:avLst>
+            <a:gd name="adj" fmla="val 10000"/>
+          </a:avLst>
+        </a:prstGeom>
+        <a:solidFill>
+          <a:schemeClr val="lt1">
+            <a:hueOff val="0"/>
+            <a:satOff val="0"/>
+            <a:lumOff val="0"/>
+            <a:alphaOff val="0"/>
+          </a:schemeClr>
+        </a:solidFill>
+        <a:ln w="12700" cap="flat" cmpd="sng" algn="ctr">
+          <a:solidFill>
+            <a:schemeClr val="dk1">
+              <a:shade val="80000"/>
+              <a:hueOff val="0"/>
+              <a:satOff val="0"/>
+              <a:lumOff val="0"/>
+              <a:alphaOff val="0"/>
+            </a:schemeClr>
+          </a:solidFill>
+          <a:prstDash val="solid"/>
+          <a:miter lim="800000"/>
+        </a:ln>
+        <a:effectLst/>
+      </dsp:spPr>
+      <dsp:style>
+        <a:lnRef idx="2">
+          <a:scrgbClr r="0" g="0" b="0"/>
+        </a:lnRef>
+        <a:fillRef idx="1">
+          <a:scrgbClr r="0" g="0" b="0"/>
+        </a:fillRef>
+        <a:effectRef idx="0">
+          <a:scrgbClr r="0" g="0" b="0"/>
+        </a:effectRef>
+        <a:fontRef idx="minor">
+          <a:schemeClr val="lt1"/>
+        </a:fontRef>
+      </dsp:style>
+      <dsp:txBody>
+        <a:bodyPr spcFirstLastPara="0" vert="horz" wrap="square" lIns="57150" tIns="57150" rIns="57150" bIns="57150" numCol="1" spcCol="1270" anchor="ctr" anchorCtr="0">
+          <a:noAutofit/>
+        </a:bodyPr>
+        <a:lstStyle/>
+        <a:p>
+          <a:pPr marL="0" lvl="0" indent="0" algn="ctr" defTabSz="666750">
+            <a:lnSpc>
+              <a:spcPct val="90000"/>
+            </a:lnSpc>
+            <a:spcBef>
+              <a:spcPct val="0"/>
+            </a:spcBef>
+            <a:spcAft>
+              <a:spcPct val="35000"/>
+            </a:spcAft>
+            <a:buNone/>
+          </a:pPr>
+          <a:r>
+            <a:rPr kumimoji="1" lang="ja-JP" altLang="en-US" sz="1500" kern="1200" dirty="0"/>
+            <a:t>サーバは文字起こしデータを</a:t>
+          </a:r>
+          <a:br>
+            <a:rPr kumimoji="1" lang="en-US" altLang="ja-JP" sz="1500" kern="1200" dirty="0"/>
+          </a:br>
+          <a:r>
+            <a:rPr kumimoji="1" lang="ja-JP" altLang="en-US" sz="1500" kern="1200" dirty="0"/>
+            <a:t>オブジェクトストレージに反映</a:t>
+          </a:r>
+        </a:p>
+      </dsp:txBody>
+      <dsp:txXfrm>
+        <a:off x="1375358" y="10326325"/>
+        <a:ext cx="3575220" cy="1290939"/>
+      </dsp:txXfrm>
+    </dsp:sp>
+    <dsp:sp modelId="{18D4A096-9F13-44E4-A778-EFE42993CB0B}">
+      <dsp:nvSpPr>
+        <dsp:cNvPr id="0" name=""/>
+        <dsp:cNvSpPr/>
+      </dsp:nvSpPr>
+      <dsp:spPr>
+        <a:xfrm rot="5400000">
+          <a:off x="2905856" y="11691709"/>
+          <a:ext cx="514224" cy="617069"/>
+        </a:xfrm>
+        <a:prstGeom prst="rightArrow">
+          <a:avLst>
+            <a:gd name="adj1" fmla="val 60000"/>
+            <a:gd name="adj2" fmla="val 50000"/>
+          </a:avLst>
+        </a:prstGeom>
+        <a:solidFill>
+          <a:schemeClr val="dk1">
+            <a:tint val="60000"/>
+            <a:hueOff val="0"/>
+            <a:satOff val="0"/>
+            <a:lumOff val="0"/>
+            <a:alphaOff val="0"/>
+          </a:schemeClr>
+        </a:solidFill>
+        <a:ln>
+          <a:noFill/>
+        </a:ln>
+        <a:effectLst/>
+      </dsp:spPr>
+      <dsp:style>
+        <a:lnRef idx="0">
+          <a:scrgbClr r="0" g="0" b="0"/>
+        </a:lnRef>
+        <a:fillRef idx="1">
+          <a:scrgbClr r="0" g="0" b="0"/>
+        </a:fillRef>
+        <a:effectRef idx="0">
+          <a:scrgbClr r="0" g="0" b="0"/>
+        </a:effectRef>
+        <a:fontRef idx="minor">
+          <a:schemeClr val="lt1"/>
+        </a:fontRef>
+      </dsp:style>
+      <dsp:txBody>
+        <a:bodyPr spcFirstLastPara="0" vert="horz" wrap="square" lIns="0" tIns="0" rIns="0" bIns="0" numCol="1" spcCol="1270" anchor="ctr" anchorCtr="0">
+          <a:noAutofit/>
+        </a:bodyPr>
+        <a:lstStyle/>
+        <a:p>
+          <a:pPr marL="0" lvl="0" indent="0" algn="ctr" defTabSz="533400">
+            <a:lnSpc>
+              <a:spcPct val="90000"/>
+            </a:lnSpc>
+            <a:spcBef>
+              <a:spcPct val="0"/>
+            </a:spcBef>
+            <a:spcAft>
+              <a:spcPct val="35000"/>
+            </a:spcAft>
+            <a:buNone/>
+          </a:pPr>
+          <a:endParaRPr kumimoji="1" lang="ja-JP" altLang="en-US" sz="1200" kern="1200"/>
+        </a:p>
+      </dsp:txBody>
+      <dsp:txXfrm rot="-5400000">
+        <a:off x="2977848" y="11743132"/>
+        <a:ext cx="370241" cy="359957"/>
+      </dsp:txXfrm>
+    </dsp:sp>
+    <dsp:sp modelId="{A576E462-304F-490D-BE6C-4E5A74D8E0F1}">
+      <dsp:nvSpPr>
+        <dsp:cNvPr id="0" name=""/>
+        <dsp:cNvSpPr/>
+      </dsp:nvSpPr>
+      <dsp:spPr>
+        <a:xfrm>
+          <a:off x="1335195" y="12343060"/>
+          <a:ext cx="3655546" cy="1371265"/>
+        </a:xfrm>
+        <a:prstGeom prst="roundRect">
+          <a:avLst>
+            <a:gd name="adj" fmla="val 10000"/>
+          </a:avLst>
+        </a:prstGeom>
+        <a:solidFill>
+          <a:schemeClr val="lt1">
+            <a:hueOff val="0"/>
+            <a:satOff val="0"/>
+            <a:lumOff val="0"/>
+            <a:alphaOff val="0"/>
+          </a:schemeClr>
+        </a:solidFill>
+        <a:ln w="12700" cap="flat" cmpd="sng" algn="ctr">
+          <a:solidFill>
+            <a:schemeClr val="dk1">
+              <a:shade val="80000"/>
+              <a:hueOff val="0"/>
+              <a:satOff val="0"/>
+              <a:lumOff val="0"/>
+              <a:alphaOff val="0"/>
+            </a:schemeClr>
+          </a:solidFill>
+          <a:prstDash val="solid"/>
+          <a:miter lim="800000"/>
+        </a:ln>
+        <a:effectLst/>
+      </dsp:spPr>
+      <dsp:style>
+        <a:lnRef idx="2">
+          <a:scrgbClr r="0" g="0" b="0"/>
+        </a:lnRef>
+        <a:fillRef idx="1">
+          <a:scrgbClr r="0" g="0" b="0"/>
+        </a:fillRef>
+        <a:effectRef idx="0">
+          <a:scrgbClr r="0" g="0" b="0"/>
+        </a:effectRef>
+        <a:fontRef idx="minor">
+          <a:schemeClr val="lt1"/>
+        </a:fontRef>
+      </dsp:style>
+      <dsp:txBody>
+        <a:bodyPr spcFirstLastPara="0" vert="horz" wrap="square" lIns="57150" tIns="57150" rIns="57150" bIns="57150" numCol="1" spcCol="1270" anchor="ctr" anchorCtr="0">
+          <a:noAutofit/>
+        </a:bodyPr>
+        <a:lstStyle/>
+        <a:p>
+          <a:pPr marL="0" lvl="0" indent="0" algn="ctr" defTabSz="666750">
+            <a:lnSpc>
+              <a:spcPct val="90000"/>
+            </a:lnSpc>
+            <a:spcBef>
+              <a:spcPct val="0"/>
+            </a:spcBef>
+            <a:spcAft>
+              <a:spcPct val="35000"/>
+            </a:spcAft>
+            <a:buNone/>
+          </a:pPr>
+          <a:r>
+            <a:rPr kumimoji="1" lang="ja-JP" altLang="en-US" sz="1500" kern="1200" dirty="0"/>
+            <a:t>サーバはシンプル通知を通じて</a:t>
+          </a:r>
+          <a:br>
+            <a:rPr kumimoji="1" lang="en-US" altLang="ja-JP" sz="1500" kern="1200" dirty="0"/>
+          </a:br>
+          <a:r>
+            <a:rPr kumimoji="1" lang="ja-JP" altLang="en-US" sz="1500" kern="1200" dirty="0"/>
+            <a:t>処理完了を通知</a:t>
+          </a:r>
+        </a:p>
+      </dsp:txBody>
+      <dsp:txXfrm>
+        <a:off x="1375358" y="12383223"/>
+        <a:ext cx="3575220" cy="1290939"/>
+      </dsp:txXfrm>
+    </dsp:sp>
+  </dsp:spTree>
+</dsp:drawing>
+</file>
+
 <file path=ppt/diagrams/layout1.xml><?xml version="1.0" encoding="utf-8"?>
 <dgm:layoutDef xmlns:dgm="http://schemas.openxmlformats.org/drawingml/2006/diagram" xmlns:a="http://schemas.openxmlformats.org/drawingml/2006/main" uniqueId="urn:microsoft.com/office/officeart/2005/8/layout/process2">
   <dgm:title val=""/>
@@ -3122,7 +5664,1190 @@
 </dgm:layoutDef>
 </file>
 
+<file path=ppt/diagrams/layout2.xml><?xml version="1.0" encoding="utf-8"?>
+<dgm:layoutDef xmlns:dgm="http://schemas.openxmlformats.org/drawingml/2006/diagram" xmlns:a="http://schemas.openxmlformats.org/drawingml/2006/main" uniqueId="urn:microsoft.com/office/officeart/2005/8/layout/process2">
+  <dgm:title val=""/>
+  <dgm:desc val=""/>
+  <dgm:catLst>
+    <dgm:cat type="process" pri="13000"/>
+  </dgm:catLst>
+  <dgm:sampData useDef="1">
+    <dgm:dataModel>
+      <dgm:ptLst/>
+      <dgm:bg/>
+      <dgm:whole/>
+    </dgm:dataModel>
+  </dgm:sampData>
+  <dgm:styleData>
+    <dgm:dataModel>
+      <dgm:ptLst>
+        <dgm:pt modelId="0" type="doc"/>
+        <dgm:pt modelId="1"/>
+        <dgm:pt modelId="2"/>
+      </dgm:ptLst>
+      <dgm:cxnLst>
+        <dgm:cxn modelId="3" srcId="0" destId="1" srcOrd="0" destOrd="0"/>
+        <dgm:cxn modelId="4" srcId="0" destId="2" srcOrd="1" destOrd="0"/>
+      </dgm:cxnLst>
+      <dgm:bg/>
+      <dgm:whole/>
+    </dgm:dataModel>
+  </dgm:styleData>
+  <dgm:clrData>
+    <dgm:dataModel>
+      <dgm:ptLst>
+        <dgm:pt modelId="0" type="doc"/>
+        <dgm:pt modelId="1"/>
+        <dgm:pt modelId="2"/>
+        <dgm:pt modelId="3"/>
+        <dgm:pt modelId="4"/>
+      </dgm:ptLst>
+      <dgm:cxnLst>
+        <dgm:cxn modelId="5" srcId="0" destId="1" srcOrd="0" destOrd="0"/>
+        <dgm:cxn modelId="6" srcId="0" destId="2" srcOrd="1" destOrd="0"/>
+        <dgm:cxn modelId="7" srcId="0" destId="3" srcOrd="2" destOrd="0"/>
+        <dgm:cxn modelId="8" srcId="0" destId="4" srcOrd="3" destOrd="0"/>
+      </dgm:cxnLst>
+      <dgm:bg/>
+      <dgm:whole/>
+    </dgm:dataModel>
+  </dgm:clrData>
+  <dgm:layoutNode name="linearFlow">
+    <dgm:varLst>
+      <dgm:resizeHandles val="exact"/>
+    </dgm:varLst>
+    <dgm:alg type="lin">
+      <dgm:param type="linDir" val="fromT"/>
+    </dgm:alg>
+    <dgm:shape xmlns:r="http://schemas.openxmlformats.org/officeDocument/2006/relationships" r:blip="">
+      <dgm:adjLst/>
+    </dgm:shape>
+    <dgm:presOf/>
+    <dgm:constrLst>
+      <dgm:constr type="h" for="ch" ptType="node" refType="h"/>
+      <dgm:constr type="h" for="ch" ptType="sibTrans" refType="h" refFor="ch" refPtType="node" fact="0.5"/>
+      <dgm:constr type="w" for="ch" ptType="node" op="equ"/>
+      <dgm:constr type="primFontSz" for="ch" ptType="node" op="equ" val="65"/>
+      <dgm:constr type="primFontSz" for="des" forName="connectorText" op="equ" val="55"/>
+      <dgm:constr type="primFontSz" for="des" forName="connectorText" refType="primFontSz" refFor="ch" refPtType="node" op="lte" fact="0.8"/>
+    </dgm:constrLst>
+    <dgm:ruleLst/>
+    <dgm:forEach name="nodesForEach" axis="ch" ptType="node">
+      <dgm:layoutNode name="node">
+        <dgm:varLst>
+          <dgm:bulletEnabled val="1"/>
+        </dgm:varLst>
+        <dgm:choose name="Name0">
+          <dgm:if name="Name1" axis="root des" ptType="all node" func="maxDepth" op="gt" val="1">
+            <dgm:alg type="tx">
+              <dgm:param type="parTxLTRAlign" val="l"/>
+              <dgm:param type="parTxRTLAlign" val="r"/>
+              <dgm:param type="txAnchorVertCh" val="mid"/>
+            </dgm:alg>
+          </dgm:if>
+          <dgm:else name="Name2">
+            <dgm:alg type="tx"/>
+          </dgm:else>
+        </dgm:choose>
+        <dgm:shape xmlns:r="http://schemas.openxmlformats.org/officeDocument/2006/relationships" type="roundRect" r:blip="">
+          <dgm:adjLst>
+            <dgm:adj idx="1" val="0.1"/>
+          </dgm:adjLst>
+        </dgm:shape>
+        <dgm:presOf axis="desOrSelf" ptType="node"/>
+        <dgm:constrLst>
+          <dgm:constr type="w" refType="h" fact="1.8"/>
+          <dgm:constr type="tMarg" refType="primFontSz" fact="0.3"/>
+          <dgm:constr type="bMarg" refType="primFontSz" fact="0.3"/>
+          <dgm:constr type="lMarg" refType="primFontSz" fact="0.3"/>
+          <dgm:constr type="rMarg" refType="primFontSz" fact="0.3"/>
+        </dgm:constrLst>
+        <dgm:ruleLst>
+          <dgm:rule type="primFontSz" val="18" fact="NaN" max="NaN"/>
+          <dgm:rule type="w" val="NaN" fact="4" max="NaN"/>
+          <dgm:rule type="primFontSz" val="5" fact="NaN" max="NaN"/>
+        </dgm:ruleLst>
+      </dgm:layoutNode>
+      <dgm:forEach name="sibTransForEach" axis="followSib" ptType="sibTrans" cnt="1">
+        <dgm:layoutNode name="sibTrans">
+          <dgm:alg type="conn">
+            <dgm:param type="begPts" val="auto"/>
+            <dgm:param type="endPts" val="auto"/>
+          </dgm:alg>
+          <dgm:shape xmlns:r="http://schemas.openxmlformats.org/officeDocument/2006/relationships" type="conn" r:blip="">
+            <dgm:adjLst/>
+          </dgm:shape>
+          <dgm:presOf axis="self"/>
+          <dgm:constrLst>
+            <dgm:constr type="w" refType="h" fact="0.9"/>
+            <dgm:constr type="connDist"/>
+            <dgm:constr type="wArH" refType="w" fact="0.5"/>
+            <dgm:constr type="hArH" refType="w"/>
+            <dgm:constr type="stemThick" refType="w" fact="0.6"/>
+            <dgm:constr type="begPad" refType="connDist" fact="0.125"/>
+            <dgm:constr type="endPad" refType="connDist" fact="0.125"/>
+          </dgm:constrLst>
+          <dgm:ruleLst/>
+          <dgm:layoutNode name="connectorText">
+            <dgm:alg type="tx">
+              <dgm:param type="autoTxRot" val="upr"/>
+            </dgm:alg>
+            <dgm:shape xmlns:r="http://schemas.openxmlformats.org/officeDocument/2006/relationships" type="conn" r:blip="" hideGeom="1">
+              <dgm:adjLst/>
+            </dgm:shape>
+            <dgm:presOf axis="self"/>
+            <dgm:constrLst>
+              <dgm:constr type="lMarg"/>
+              <dgm:constr type="rMarg"/>
+              <dgm:constr type="tMarg"/>
+              <dgm:constr type="bMarg"/>
+            </dgm:constrLst>
+            <dgm:ruleLst>
+              <dgm:rule type="primFontSz" val="5" fact="NaN" max="NaN"/>
+            </dgm:ruleLst>
+          </dgm:layoutNode>
+        </dgm:layoutNode>
+      </dgm:forEach>
+    </dgm:forEach>
+  </dgm:layoutNode>
+</dgm:layoutDef>
+</file>
+
 <file path=ppt/diagrams/quickStyle1.xml><?xml version="1.0" encoding="utf-8"?>
+<dgm:styleDef xmlns:dgm="http://schemas.openxmlformats.org/drawingml/2006/diagram" xmlns:a="http://schemas.openxmlformats.org/drawingml/2006/main" uniqueId="urn:microsoft.com/office/officeart/2005/8/quickstyle/simple1">
+  <dgm:title val=""/>
+  <dgm:desc val=""/>
+  <dgm:catLst>
+    <dgm:cat type="simple" pri="10100"/>
+  </dgm:catLst>
+  <dgm:scene3d>
+    <a:camera prst="orthographicFront"/>
+    <a:lightRig rig="threePt" dir="t"/>
+  </dgm:scene3d>
+  <dgm:styleLbl name="node0">
+    <dgm:scene3d>
+      <a:camera prst="orthographicFront"/>
+      <a:lightRig rig="threePt" dir="t"/>
+    </dgm:scene3d>
+    <dgm:sp3d/>
+    <dgm:txPr/>
+    <dgm:style>
+      <a:lnRef idx="2">
+        <a:scrgbClr r="0" g="0" b="0"/>
+      </a:lnRef>
+      <a:fillRef idx="1">
+        <a:scrgbClr r="0" g="0" b="0"/>
+      </a:fillRef>
+      <a:effectRef idx="0">
+        <a:scrgbClr r="0" g="0" b="0"/>
+      </a:effectRef>
+      <a:fontRef idx="minor">
+        <a:schemeClr val="lt1"/>
+      </a:fontRef>
+    </dgm:style>
+  </dgm:styleLbl>
+  <dgm:styleLbl name="lnNode1">
+    <dgm:scene3d>
+      <a:camera prst="orthographicFront"/>
+      <a:lightRig rig="threePt" dir="t"/>
+    </dgm:scene3d>
+    <dgm:sp3d/>
+    <dgm:txPr/>
+    <dgm:style>
+      <a:lnRef idx="2">
+        <a:scrgbClr r="0" g="0" b="0"/>
+      </a:lnRef>
+      <a:fillRef idx="1">
+        <a:scrgbClr r="0" g="0" b="0"/>
+      </a:fillRef>
+      <a:effectRef idx="0">
+        <a:scrgbClr r="0" g="0" b="0"/>
+      </a:effectRef>
+      <a:fontRef idx="minor">
+        <a:schemeClr val="lt1"/>
+      </a:fontRef>
+    </dgm:style>
+  </dgm:styleLbl>
+  <dgm:styleLbl name="vennNode1">
+    <dgm:scene3d>
+      <a:camera prst="orthographicFront"/>
+      <a:lightRig rig="threePt" dir="t"/>
+    </dgm:scene3d>
+    <dgm:sp3d/>
+    <dgm:txPr/>
+    <dgm:style>
+      <a:lnRef idx="2">
+        <a:scrgbClr r="0" g="0" b="0"/>
+      </a:lnRef>
+      <a:fillRef idx="1">
+        <a:scrgbClr r="0" g="0" b="0"/>
+      </a:fillRef>
+      <a:effectRef idx="0">
+        <a:scrgbClr r="0" g="0" b="0"/>
+      </a:effectRef>
+      <a:fontRef idx="minor">
+        <a:schemeClr val="tx1"/>
+      </a:fontRef>
+    </dgm:style>
+  </dgm:styleLbl>
+  <dgm:styleLbl name="alignNode1">
+    <dgm:scene3d>
+      <a:camera prst="orthographicFront"/>
+      <a:lightRig rig="threePt" dir="t"/>
+    </dgm:scene3d>
+    <dgm:sp3d/>
+    <dgm:txPr/>
+    <dgm:style>
+      <a:lnRef idx="2">
+        <a:scrgbClr r="0" g="0" b="0"/>
+      </a:lnRef>
+      <a:fillRef idx="1">
+        <a:scrgbClr r="0" g="0" b="0"/>
+      </a:fillRef>
+      <a:effectRef idx="0">
+        <a:scrgbClr r="0" g="0" b="0"/>
+      </a:effectRef>
+      <a:fontRef idx="minor">
+        <a:schemeClr val="lt1"/>
+      </a:fontRef>
+    </dgm:style>
+  </dgm:styleLbl>
+  <dgm:styleLbl name="node1">
+    <dgm:scene3d>
+      <a:camera prst="orthographicFront"/>
+      <a:lightRig rig="threePt" dir="t"/>
+    </dgm:scene3d>
+    <dgm:sp3d/>
+    <dgm:txPr/>
+    <dgm:style>
+      <a:lnRef idx="2">
+        <a:scrgbClr r="0" g="0" b="0"/>
+      </a:lnRef>
+      <a:fillRef idx="1">
+        <a:scrgbClr r="0" g="0" b="0"/>
+      </a:fillRef>
+      <a:effectRef idx="0">
+        <a:scrgbClr r="0" g="0" b="0"/>
+      </a:effectRef>
+      <a:fontRef idx="minor">
+        <a:schemeClr val="lt1"/>
+      </a:fontRef>
+    </dgm:style>
+  </dgm:styleLbl>
+  <dgm:styleLbl name="node2">
+    <dgm:scene3d>
+      <a:camera prst="orthographicFront"/>
+      <a:lightRig rig="threePt" dir="t"/>
+    </dgm:scene3d>
+    <dgm:sp3d/>
+    <dgm:txPr/>
+    <dgm:style>
+      <a:lnRef idx="2">
+        <a:scrgbClr r="0" g="0" b="0"/>
+      </a:lnRef>
+      <a:fillRef idx="1">
+        <a:scrgbClr r="0" g="0" b="0"/>
+      </a:fillRef>
+      <a:effectRef idx="0">
+        <a:scrgbClr r="0" g="0" b="0"/>
+      </a:effectRef>
+      <a:fontRef idx="minor">
+        <a:schemeClr val="lt1"/>
+      </a:fontRef>
+    </dgm:style>
+  </dgm:styleLbl>
+  <dgm:styleLbl name="node3">
+    <dgm:scene3d>
+      <a:camera prst="orthographicFront"/>
+      <a:lightRig rig="threePt" dir="t"/>
+    </dgm:scene3d>
+    <dgm:sp3d/>
+    <dgm:txPr/>
+    <dgm:style>
+      <a:lnRef idx="2">
+        <a:scrgbClr r="0" g="0" b="0"/>
+      </a:lnRef>
+      <a:fillRef idx="1">
+        <a:scrgbClr r="0" g="0" b="0"/>
+      </a:fillRef>
+      <a:effectRef idx="0">
+        <a:scrgbClr r="0" g="0" b="0"/>
+      </a:effectRef>
+      <a:fontRef idx="minor">
+        <a:schemeClr val="lt1"/>
+      </a:fontRef>
+    </dgm:style>
+  </dgm:styleLbl>
+  <dgm:styleLbl name="node4">
+    <dgm:scene3d>
+      <a:camera prst="orthographicFront"/>
+      <a:lightRig rig="threePt" dir="t"/>
+    </dgm:scene3d>
+    <dgm:sp3d/>
+    <dgm:txPr/>
+    <dgm:style>
+      <a:lnRef idx="2">
+        <a:scrgbClr r="0" g="0" b="0"/>
+      </a:lnRef>
+      <a:fillRef idx="1">
+        <a:scrgbClr r="0" g="0" b="0"/>
+      </a:fillRef>
+      <a:effectRef idx="0">
+        <a:scrgbClr r="0" g="0" b="0"/>
+      </a:effectRef>
+      <a:fontRef idx="minor">
+        <a:schemeClr val="lt1"/>
+      </a:fontRef>
+    </dgm:style>
+  </dgm:styleLbl>
+  <dgm:styleLbl name="fgImgPlace1">
+    <dgm:scene3d>
+      <a:camera prst="orthographicFront"/>
+      <a:lightRig rig="threePt" dir="t"/>
+    </dgm:scene3d>
+    <dgm:sp3d/>
+    <dgm:txPr/>
+    <dgm:style>
+      <a:lnRef idx="2">
+        <a:scrgbClr r="0" g="0" b="0"/>
+      </a:lnRef>
+      <a:fillRef idx="1">
+        <a:scrgbClr r="0" g="0" b="0"/>
+      </a:fillRef>
+      <a:effectRef idx="0">
+        <a:scrgbClr r="0" g="0" b="0"/>
+      </a:effectRef>
+      <a:fontRef idx="minor"/>
+    </dgm:style>
+  </dgm:styleLbl>
+  <dgm:styleLbl name="alignImgPlace1">
+    <dgm:scene3d>
+      <a:camera prst="orthographicFront"/>
+      <a:lightRig rig="threePt" dir="t"/>
+    </dgm:scene3d>
+    <dgm:sp3d/>
+    <dgm:txPr/>
+    <dgm:style>
+      <a:lnRef idx="2">
+        <a:scrgbClr r="0" g="0" b="0"/>
+      </a:lnRef>
+      <a:fillRef idx="1">
+        <a:scrgbClr r="0" g="0" b="0"/>
+      </a:fillRef>
+      <a:effectRef idx="0">
+        <a:scrgbClr r="0" g="0" b="0"/>
+      </a:effectRef>
+      <a:fontRef idx="minor"/>
+    </dgm:style>
+  </dgm:styleLbl>
+  <dgm:styleLbl name="bgImgPlace1">
+    <dgm:scene3d>
+      <a:camera prst="orthographicFront"/>
+      <a:lightRig rig="threePt" dir="t"/>
+    </dgm:scene3d>
+    <dgm:sp3d/>
+    <dgm:txPr/>
+    <dgm:style>
+      <a:lnRef idx="2">
+        <a:scrgbClr r="0" g="0" b="0"/>
+      </a:lnRef>
+      <a:fillRef idx="1">
+        <a:scrgbClr r="0" g="0" b="0"/>
+      </a:fillRef>
+      <a:effectRef idx="0">
+        <a:scrgbClr r="0" g="0" b="0"/>
+      </a:effectRef>
+      <a:fontRef idx="minor"/>
+    </dgm:style>
+  </dgm:styleLbl>
+  <dgm:styleLbl name="sibTrans2D1">
+    <dgm:scene3d>
+      <a:camera prst="orthographicFront"/>
+      <a:lightRig rig="threePt" dir="t"/>
+    </dgm:scene3d>
+    <dgm:sp3d/>
+    <dgm:txPr/>
+    <dgm:style>
+      <a:lnRef idx="0">
+        <a:scrgbClr r="0" g="0" b="0"/>
+      </a:lnRef>
+      <a:fillRef idx="1">
+        <a:scrgbClr r="0" g="0" b="0"/>
+      </a:fillRef>
+      <a:effectRef idx="0">
+        <a:scrgbClr r="0" g="0" b="0"/>
+      </a:effectRef>
+      <a:fontRef idx="minor">
+        <a:schemeClr val="lt1"/>
+      </a:fontRef>
+    </dgm:style>
+  </dgm:styleLbl>
+  <dgm:styleLbl name="fgSibTrans2D1">
+    <dgm:scene3d>
+      <a:camera prst="orthographicFront"/>
+      <a:lightRig rig="threePt" dir="t"/>
+    </dgm:scene3d>
+    <dgm:sp3d/>
+    <dgm:txPr/>
+    <dgm:style>
+      <a:lnRef idx="0">
+        <a:scrgbClr r="0" g="0" b="0"/>
+      </a:lnRef>
+      <a:fillRef idx="1">
+        <a:scrgbClr r="0" g="0" b="0"/>
+      </a:fillRef>
+      <a:effectRef idx="0">
+        <a:scrgbClr r="0" g="0" b="0"/>
+      </a:effectRef>
+      <a:fontRef idx="minor">
+        <a:schemeClr val="lt1"/>
+      </a:fontRef>
+    </dgm:style>
+  </dgm:styleLbl>
+  <dgm:styleLbl name="bgSibTrans2D1">
+    <dgm:scene3d>
+      <a:camera prst="orthographicFront"/>
+      <a:lightRig rig="threePt" dir="t"/>
+    </dgm:scene3d>
+    <dgm:sp3d/>
+    <dgm:txPr/>
+    <dgm:style>
+      <a:lnRef idx="0">
+        <a:scrgbClr r="0" g="0" b="0"/>
+      </a:lnRef>
+      <a:fillRef idx="1">
+        <a:scrgbClr r="0" g="0" b="0"/>
+      </a:fillRef>
+      <a:effectRef idx="0">
+        <a:scrgbClr r="0" g="0" b="0"/>
+      </a:effectRef>
+      <a:fontRef idx="minor">
+        <a:schemeClr val="lt1"/>
+      </a:fontRef>
+    </dgm:style>
+  </dgm:styleLbl>
+  <dgm:styleLbl name="sibTrans1D1">
+    <dgm:scene3d>
+      <a:camera prst="orthographicFront"/>
+      <a:lightRig rig="threePt" dir="t"/>
+    </dgm:scene3d>
+    <dgm:sp3d/>
+    <dgm:txPr/>
+    <dgm:style>
+      <a:lnRef idx="1">
+        <a:scrgbClr r="0" g="0" b="0"/>
+      </a:lnRef>
+      <a:fillRef idx="0">
+        <a:scrgbClr r="0" g="0" b="0"/>
+      </a:fillRef>
+      <a:effectRef idx="0">
+        <a:scrgbClr r="0" g="0" b="0"/>
+      </a:effectRef>
+      <a:fontRef idx="minor"/>
+    </dgm:style>
+  </dgm:styleLbl>
+  <dgm:styleLbl name="callout">
+    <dgm:scene3d>
+      <a:camera prst="orthographicFront"/>
+      <a:lightRig rig="threePt" dir="t"/>
+    </dgm:scene3d>
+    <dgm:sp3d/>
+    <dgm:txPr/>
+    <dgm:style>
+      <a:lnRef idx="2">
+        <a:scrgbClr r="0" g="0" b="0"/>
+      </a:lnRef>
+      <a:fillRef idx="1">
+        <a:scrgbClr r="0" g="0" b="0"/>
+      </a:fillRef>
+      <a:effectRef idx="0">
+        <a:scrgbClr r="0" g="0" b="0"/>
+      </a:effectRef>
+      <a:fontRef idx="minor"/>
+    </dgm:style>
+  </dgm:styleLbl>
+  <dgm:styleLbl name="asst0">
+    <dgm:scene3d>
+      <a:camera prst="orthographicFront"/>
+      <a:lightRig rig="threePt" dir="t"/>
+    </dgm:scene3d>
+    <dgm:sp3d/>
+    <dgm:txPr/>
+    <dgm:style>
+      <a:lnRef idx="2">
+        <a:scrgbClr r="0" g="0" b="0"/>
+      </a:lnRef>
+      <a:fillRef idx="1">
+        <a:scrgbClr r="0" g="0" b="0"/>
+      </a:fillRef>
+      <a:effectRef idx="0">
+        <a:scrgbClr r="0" g="0" b="0"/>
+      </a:effectRef>
+      <a:fontRef idx="minor">
+        <a:schemeClr val="lt1"/>
+      </a:fontRef>
+    </dgm:style>
+  </dgm:styleLbl>
+  <dgm:styleLbl name="asst1">
+    <dgm:scene3d>
+      <a:camera prst="orthographicFront"/>
+      <a:lightRig rig="threePt" dir="t"/>
+    </dgm:scene3d>
+    <dgm:sp3d/>
+    <dgm:txPr/>
+    <dgm:style>
+      <a:lnRef idx="2">
+        <a:scrgbClr r="0" g="0" b="0"/>
+      </a:lnRef>
+      <a:fillRef idx="1">
+        <a:scrgbClr r="0" g="0" b="0"/>
+      </a:fillRef>
+      <a:effectRef idx="0">
+        <a:scrgbClr r="0" g="0" b="0"/>
+      </a:effectRef>
+      <a:fontRef idx="minor">
+        <a:schemeClr val="lt1"/>
+      </a:fontRef>
+    </dgm:style>
+  </dgm:styleLbl>
+  <dgm:styleLbl name="asst2">
+    <dgm:scene3d>
+      <a:camera prst="orthographicFront"/>
+      <a:lightRig rig="threePt" dir="t"/>
+    </dgm:scene3d>
+    <dgm:sp3d/>
+    <dgm:txPr/>
+    <dgm:style>
+      <a:lnRef idx="2">
+        <a:scrgbClr r="0" g="0" b="0"/>
+      </a:lnRef>
+      <a:fillRef idx="1">
+        <a:scrgbClr r="0" g="0" b="0"/>
+      </a:fillRef>
+      <a:effectRef idx="0">
+        <a:scrgbClr r="0" g="0" b="0"/>
+      </a:effectRef>
+      <a:fontRef idx="minor">
+        <a:schemeClr val="lt1"/>
+      </a:fontRef>
+    </dgm:style>
+  </dgm:styleLbl>
+  <dgm:styleLbl name="asst3">
+    <dgm:scene3d>
+      <a:camera prst="orthographicFront"/>
+      <a:lightRig rig="threePt" dir="t"/>
+    </dgm:scene3d>
+    <dgm:sp3d/>
+    <dgm:txPr/>
+    <dgm:style>
+      <a:lnRef idx="2">
+        <a:scrgbClr r="0" g="0" b="0"/>
+      </a:lnRef>
+      <a:fillRef idx="1">
+        <a:scrgbClr r="0" g="0" b="0"/>
+      </a:fillRef>
+      <a:effectRef idx="0">
+        <a:scrgbClr r="0" g="0" b="0"/>
+      </a:effectRef>
+      <a:fontRef idx="minor">
+        <a:schemeClr val="lt1"/>
+      </a:fontRef>
+    </dgm:style>
+  </dgm:styleLbl>
+  <dgm:styleLbl name="asst4">
+    <dgm:scene3d>
+      <a:camera prst="orthographicFront"/>
+      <a:lightRig rig="threePt" dir="t"/>
+    </dgm:scene3d>
+    <dgm:sp3d/>
+    <dgm:txPr/>
+    <dgm:style>
+      <a:lnRef idx="2">
+        <a:scrgbClr r="0" g="0" b="0"/>
+      </a:lnRef>
+      <a:fillRef idx="1">
+        <a:scrgbClr r="0" g="0" b="0"/>
+      </a:fillRef>
+      <a:effectRef idx="0">
+        <a:scrgbClr r="0" g="0" b="0"/>
+      </a:effectRef>
+      <a:fontRef idx="minor">
+        <a:schemeClr val="lt1"/>
+      </a:fontRef>
+    </dgm:style>
+  </dgm:styleLbl>
+  <dgm:styleLbl name="parChTrans2D1">
+    <dgm:scene3d>
+      <a:camera prst="orthographicFront"/>
+      <a:lightRig rig="threePt" dir="t"/>
+    </dgm:scene3d>
+    <dgm:sp3d/>
+    <dgm:txPr/>
+    <dgm:style>
+      <a:lnRef idx="2">
+        <a:scrgbClr r="0" g="0" b="0"/>
+      </a:lnRef>
+      <a:fillRef idx="1">
+        <a:scrgbClr r="0" g="0" b="0"/>
+      </a:fillRef>
+      <a:effectRef idx="0">
+        <a:scrgbClr r="0" g="0" b="0"/>
+      </a:effectRef>
+      <a:fontRef idx="minor">
+        <a:schemeClr val="lt1"/>
+      </a:fontRef>
+    </dgm:style>
+  </dgm:styleLbl>
+  <dgm:styleLbl name="parChTrans2D2">
+    <dgm:scene3d>
+      <a:camera prst="orthographicFront"/>
+      <a:lightRig rig="threePt" dir="t"/>
+    </dgm:scene3d>
+    <dgm:sp3d/>
+    <dgm:txPr/>
+    <dgm:style>
+      <a:lnRef idx="2">
+        <a:scrgbClr r="0" g="0" b="0"/>
+      </a:lnRef>
+      <a:fillRef idx="1">
+        <a:scrgbClr r="0" g="0" b="0"/>
+      </a:fillRef>
+      <a:effectRef idx="0">
+        <a:scrgbClr r="0" g="0" b="0"/>
+      </a:effectRef>
+      <a:fontRef idx="minor">
+        <a:schemeClr val="lt1"/>
+      </a:fontRef>
+    </dgm:style>
+  </dgm:styleLbl>
+  <dgm:styleLbl name="parChTrans2D3">
+    <dgm:scene3d>
+      <a:camera prst="orthographicFront"/>
+      <a:lightRig rig="threePt" dir="t"/>
+    </dgm:scene3d>
+    <dgm:sp3d/>
+    <dgm:txPr/>
+    <dgm:style>
+      <a:lnRef idx="2">
+        <a:scrgbClr r="0" g="0" b="0"/>
+      </a:lnRef>
+      <a:fillRef idx="1">
+        <a:scrgbClr r="0" g="0" b="0"/>
+      </a:fillRef>
+      <a:effectRef idx="0">
+        <a:scrgbClr r="0" g="0" b="0"/>
+      </a:effectRef>
+      <a:fontRef idx="minor">
+        <a:schemeClr val="lt1"/>
+      </a:fontRef>
+    </dgm:style>
+  </dgm:styleLbl>
+  <dgm:styleLbl name="parChTrans2D4">
+    <dgm:scene3d>
+      <a:camera prst="orthographicFront"/>
+      <a:lightRig rig="threePt" dir="t"/>
+    </dgm:scene3d>
+    <dgm:sp3d/>
+    <dgm:txPr/>
+    <dgm:style>
+      <a:lnRef idx="2">
+        <a:scrgbClr r="0" g="0" b="0"/>
+      </a:lnRef>
+      <a:fillRef idx="1">
+        <a:scrgbClr r="0" g="0" b="0"/>
+      </a:fillRef>
+      <a:effectRef idx="0">
+        <a:scrgbClr r="0" g="0" b="0"/>
+      </a:effectRef>
+      <a:fontRef idx="minor">
+        <a:schemeClr val="lt1"/>
+      </a:fontRef>
+    </dgm:style>
+  </dgm:styleLbl>
+  <dgm:styleLbl name="parChTrans1D1">
+    <dgm:scene3d>
+      <a:camera prst="orthographicFront"/>
+      <a:lightRig rig="threePt" dir="t"/>
+    </dgm:scene3d>
+    <dgm:sp3d/>
+    <dgm:txPr/>
+    <dgm:style>
+      <a:lnRef idx="2">
+        <a:scrgbClr r="0" g="0" b="0"/>
+      </a:lnRef>
+      <a:fillRef idx="0">
+        <a:scrgbClr r="0" g="0" b="0"/>
+      </a:fillRef>
+      <a:effectRef idx="0">
+        <a:scrgbClr r="0" g="0" b="0"/>
+      </a:effectRef>
+      <a:fontRef idx="minor"/>
+    </dgm:style>
+  </dgm:styleLbl>
+  <dgm:styleLbl name="parChTrans1D2">
+    <dgm:scene3d>
+      <a:camera prst="orthographicFront"/>
+      <a:lightRig rig="threePt" dir="t"/>
+    </dgm:scene3d>
+    <dgm:sp3d/>
+    <dgm:txPr/>
+    <dgm:style>
+      <a:lnRef idx="2">
+        <a:scrgbClr r="0" g="0" b="0"/>
+      </a:lnRef>
+      <a:fillRef idx="0">
+        <a:scrgbClr r="0" g="0" b="0"/>
+      </a:fillRef>
+      <a:effectRef idx="0">
+        <a:scrgbClr r="0" g="0" b="0"/>
+      </a:effectRef>
+      <a:fontRef idx="minor"/>
+    </dgm:style>
+  </dgm:styleLbl>
+  <dgm:styleLbl name="parChTrans1D3">
+    <dgm:scene3d>
+      <a:camera prst="orthographicFront"/>
+      <a:lightRig rig="threePt" dir="t"/>
+    </dgm:scene3d>
+    <dgm:sp3d/>
+    <dgm:txPr/>
+    <dgm:style>
+      <a:lnRef idx="2">
+        <a:scrgbClr r="0" g="0" b="0"/>
+      </a:lnRef>
+      <a:fillRef idx="0">
+        <a:scrgbClr r="0" g="0" b="0"/>
+      </a:fillRef>
+      <a:effectRef idx="0">
+        <a:scrgbClr r="0" g="0" b="0"/>
+      </a:effectRef>
+      <a:fontRef idx="minor"/>
+    </dgm:style>
+  </dgm:styleLbl>
+  <dgm:styleLbl name="parChTrans1D4">
+    <dgm:scene3d>
+      <a:camera prst="orthographicFront"/>
+      <a:lightRig rig="threePt" dir="t"/>
+    </dgm:scene3d>
+    <dgm:sp3d/>
+    <dgm:txPr/>
+    <dgm:style>
+      <a:lnRef idx="2">
+        <a:scrgbClr r="0" g="0" b="0"/>
+      </a:lnRef>
+      <a:fillRef idx="0">
+        <a:scrgbClr r="0" g="0" b="0"/>
+      </a:fillRef>
+      <a:effectRef idx="0">
+        <a:scrgbClr r="0" g="0" b="0"/>
+      </a:effectRef>
+      <a:fontRef idx="minor"/>
+    </dgm:style>
+  </dgm:styleLbl>
+  <dgm:styleLbl name="fgAcc1">
+    <dgm:scene3d>
+      <a:camera prst="orthographicFront"/>
+      <a:lightRig rig="threePt" dir="t"/>
+    </dgm:scene3d>
+    <dgm:sp3d/>
+    <dgm:txPr/>
+    <dgm:style>
+      <a:lnRef idx="2">
+        <a:scrgbClr r="0" g="0" b="0"/>
+      </a:lnRef>
+      <a:fillRef idx="1">
+        <a:scrgbClr r="0" g="0" b="0"/>
+      </a:fillRef>
+      <a:effectRef idx="0">
+        <a:scrgbClr r="0" g="0" b="0"/>
+      </a:effectRef>
+      <a:fontRef idx="minor"/>
+    </dgm:style>
+  </dgm:styleLbl>
+  <dgm:styleLbl name="conFgAcc1">
+    <dgm:scene3d>
+      <a:camera prst="orthographicFront"/>
+      <a:lightRig rig="threePt" dir="t"/>
+    </dgm:scene3d>
+    <dgm:sp3d/>
+    <dgm:txPr/>
+    <dgm:style>
+      <a:lnRef idx="2">
+        <a:scrgbClr r="0" g="0" b="0"/>
+      </a:lnRef>
+      <a:fillRef idx="1">
+        <a:scrgbClr r="0" g="0" b="0"/>
+      </a:fillRef>
+      <a:effectRef idx="0">
+        <a:scrgbClr r="0" g="0" b="0"/>
+      </a:effectRef>
+      <a:fontRef idx="minor"/>
+    </dgm:style>
+  </dgm:styleLbl>
+  <dgm:styleLbl name="alignAcc1">
+    <dgm:scene3d>
+      <a:camera prst="orthographicFront"/>
+      <a:lightRig rig="threePt" dir="t"/>
+    </dgm:scene3d>
+    <dgm:sp3d/>
+    <dgm:txPr/>
+    <dgm:style>
+      <a:lnRef idx="2">
+        <a:scrgbClr r="0" g="0" b="0"/>
+      </a:lnRef>
+      <a:fillRef idx="1">
+        <a:scrgbClr r="0" g="0" b="0"/>
+      </a:fillRef>
+      <a:effectRef idx="0">
+        <a:scrgbClr r="0" g="0" b="0"/>
+      </a:effectRef>
+      <a:fontRef idx="minor"/>
+    </dgm:style>
+  </dgm:styleLbl>
+  <dgm:styleLbl name="trAlignAcc1">
+    <dgm:scene3d>
+      <a:camera prst="orthographicFront"/>
+      <a:lightRig rig="threePt" dir="t"/>
+    </dgm:scene3d>
+    <dgm:sp3d/>
+    <dgm:txPr/>
+    <dgm:style>
+      <a:lnRef idx="1">
+        <a:scrgbClr r="0" g="0" b="0"/>
+      </a:lnRef>
+      <a:fillRef idx="1">
+        <a:scrgbClr r="0" g="0" b="0"/>
+      </a:fillRef>
+      <a:effectRef idx="0">
+        <a:scrgbClr r="0" g="0" b="0"/>
+      </a:effectRef>
+      <a:fontRef idx="minor"/>
+    </dgm:style>
+  </dgm:styleLbl>
+  <dgm:styleLbl name="bgAcc1">
+    <dgm:scene3d>
+      <a:camera prst="orthographicFront"/>
+      <a:lightRig rig="threePt" dir="t"/>
+    </dgm:scene3d>
+    <dgm:sp3d/>
+    <dgm:txPr/>
+    <dgm:style>
+      <a:lnRef idx="2">
+        <a:scrgbClr r="0" g="0" b="0"/>
+      </a:lnRef>
+      <a:fillRef idx="1">
+        <a:scrgbClr r="0" g="0" b="0"/>
+      </a:fillRef>
+      <a:effectRef idx="0">
+        <a:scrgbClr r="0" g="0" b="0"/>
+      </a:effectRef>
+      <a:fontRef idx="minor"/>
+    </dgm:style>
+  </dgm:styleLbl>
+  <dgm:styleLbl name="solidFgAcc1">
+    <dgm:scene3d>
+      <a:camera prst="orthographicFront"/>
+      <a:lightRig rig="threePt" dir="t"/>
+    </dgm:scene3d>
+    <dgm:sp3d/>
+    <dgm:txPr/>
+    <dgm:style>
+      <a:lnRef idx="2">
+        <a:scrgbClr r="0" g="0" b="0"/>
+      </a:lnRef>
+      <a:fillRef idx="1">
+        <a:scrgbClr r="0" g="0" b="0"/>
+      </a:fillRef>
+      <a:effectRef idx="0">
+        <a:scrgbClr r="0" g="0" b="0"/>
+      </a:effectRef>
+      <a:fontRef idx="minor"/>
+    </dgm:style>
+  </dgm:styleLbl>
+  <dgm:styleLbl name="solidAlignAcc1">
+    <dgm:scene3d>
+      <a:camera prst="orthographicFront"/>
+      <a:lightRig rig="threePt" dir="t"/>
+    </dgm:scene3d>
+    <dgm:sp3d/>
+    <dgm:txPr/>
+    <dgm:style>
+      <a:lnRef idx="2">
+        <a:scrgbClr r="0" g="0" b="0"/>
+      </a:lnRef>
+      <a:fillRef idx="1">
+        <a:scrgbClr r="0" g="0" b="0"/>
+      </a:fillRef>
+      <a:effectRef idx="0">
+        <a:scrgbClr r="0" g="0" b="0"/>
+      </a:effectRef>
+      <a:fontRef idx="minor"/>
+    </dgm:style>
+  </dgm:styleLbl>
+  <dgm:styleLbl name="solidBgAcc1">
+    <dgm:scene3d>
+      <a:camera prst="orthographicFront"/>
+      <a:lightRig rig="threePt" dir="t"/>
+    </dgm:scene3d>
+    <dgm:sp3d/>
+    <dgm:txPr/>
+    <dgm:style>
+      <a:lnRef idx="2">
+        <a:scrgbClr r="0" g="0" b="0"/>
+      </a:lnRef>
+      <a:fillRef idx="1">
+        <a:scrgbClr r="0" g="0" b="0"/>
+      </a:fillRef>
+      <a:effectRef idx="0">
+        <a:scrgbClr r="0" g="0" b="0"/>
+      </a:effectRef>
+      <a:fontRef idx="minor"/>
+    </dgm:style>
+  </dgm:styleLbl>
+  <dgm:styleLbl name="fgAccFollowNode1">
+    <dgm:scene3d>
+      <a:camera prst="orthographicFront"/>
+      <a:lightRig rig="threePt" dir="t"/>
+    </dgm:scene3d>
+    <dgm:sp3d/>
+    <dgm:txPr/>
+    <dgm:style>
+      <a:lnRef idx="2">
+        <a:scrgbClr r="0" g="0" b="0"/>
+      </a:lnRef>
+      <a:fillRef idx="1">
+        <a:scrgbClr r="0" g="0" b="0"/>
+      </a:fillRef>
+      <a:effectRef idx="0">
+        <a:scrgbClr r="0" g="0" b="0"/>
+      </a:effectRef>
+      <a:fontRef idx="minor"/>
+    </dgm:style>
+  </dgm:styleLbl>
+  <dgm:styleLbl name="alignAccFollowNode1">
+    <dgm:scene3d>
+      <a:camera prst="orthographicFront"/>
+      <a:lightRig rig="threePt" dir="t"/>
+    </dgm:scene3d>
+    <dgm:sp3d/>
+    <dgm:txPr/>
+    <dgm:style>
+      <a:lnRef idx="2">
+        <a:scrgbClr r="0" g="0" b="0"/>
+      </a:lnRef>
+      <a:fillRef idx="1">
+        <a:scrgbClr r="0" g="0" b="0"/>
+      </a:fillRef>
+      <a:effectRef idx="0">
+        <a:scrgbClr r="0" g="0" b="0"/>
+      </a:effectRef>
+      <a:fontRef idx="minor"/>
+    </dgm:style>
+  </dgm:styleLbl>
+  <dgm:styleLbl name="bgAccFollowNode1">
+    <dgm:scene3d>
+      <a:camera prst="orthographicFront"/>
+      <a:lightRig rig="threePt" dir="t"/>
+    </dgm:scene3d>
+    <dgm:sp3d/>
+    <dgm:txPr/>
+    <dgm:style>
+      <a:lnRef idx="2">
+        <a:scrgbClr r="0" g="0" b="0"/>
+      </a:lnRef>
+      <a:fillRef idx="1">
+        <a:scrgbClr r="0" g="0" b="0"/>
+      </a:fillRef>
+      <a:effectRef idx="0">
+        <a:scrgbClr r="0" g="0" b="0"/>
+      </a:effectRef>
+      <a:fontRef idx="minor"/>
+    </dgm:style>
+  </dgm:styleLbl>
+  <dgm:styleLbl name="fgAcc0">
+    <dgm:scene3d>
+      <a:camera prst="orthographicFront"/>
+      <a:lightRig rig="threePt" dir="t"/>
+    </dgm:scene3d>
+    <dgm:sp3d/>
+    <dgm:txPr/>
+    <dgm:style>
+      <a:lnRef idx="2">
+        <a:scrgbClr r="0" g="0" b="0"/>
+      </a:lnRef>
+      <a:fillRef idx="1">
+        <a:scrgbClr r="0" g="0" b="0"/>
+      </a:fillRef>
+      <a:effectRef idx="0">
+        <a:scrgbClr r="0" g="0" b="0"/>
+      </a:effectRef>
+      <a:fontRef idx="minor"/>
+    </dgm:style>
+  </dgm:styleLbl>
+  <dgm:styleLbl name="fgAcc2">
+    <dgm:scene3d>
+      <a:camera prst="orthographicFront"/>
+      <a:lightRig rig="threePt" dir="t"/>
+    </dgm:scene3d>
+    <dgm:sp3d/>
+    <dgm:txPr/>
+    <dgm:style>
+      <a:lnRef idx="2">
+        <a:scrgbClr r="0" g="0" b="0"/>
+      </a:lnRef>
+      <a:fillRef idx="1">
+        <a:scrgbClr r="0" g="0" b="0"/>
+      </a:fillRef>
+      <a:effectRef idx="0">
+        <a:scrgbClr r="0" g="0" b="0"/>
+      </a:effectRef>
+      <a:fontRef idx="minor"/>
+    </dgm:style>
+  </dgm:styleLbl>
+  <dgm:styleLbl name="fgAcc3">
+    <dgm:scene3d>
+      <a:camera prst="orthographicFront"/>
+      <a:lightRig rig="threePt" dir="t"/>
+    </dgm:scene3d>
+    <dgm:sp3d/>
+    <dgm:txPr/>
+    <dgm:style>
+      <a:lnRef idx="2">
+        <a:scrgbClr r="0" g="0" b="0"/>
+      </a:lnRef>
+      <a:fillRef idx="1">
+        <a:scrgbClr r="0" g="0" b="0"/>
+      </a:fillRef>
+      <a:effectRef idx="0">
+        <a:scrgbClr r="0" g="0" b="0"/>
+      </a:effectRef>
+      <a:fontRef idx="minor"/>
+    </dgm:style>
+  </dgm:styleLbl>
+  <dgm:styleLbl name="fgAcc4">
+    <dgm:scene3d>
+      <a:camera prst="orthographicFront"/>
+      <a:lightRig rig="threePt" dir="t"/>
+    </dgm:scene3d>
+    <dgm:sp3d/>
+    <dgm:txPr/>
+    <dgm:style>
+      <a:lnRef idx="2">
+        <a:scrgbClr r="0" g="0" b="0"/>
+      </a:lnRef>
+      <a:fillRef idx="1">
+        <a:scrgbClr r="0" g="0" b="0"/>
+      </a:fillRef>
+      <a:effectRef idx="0">
+        <a:scrgbClr r="0" g="0" b="0"/>
+      </a:effectRef>
+      <a:fontRef idx="minor"/>
+    </dgm:style>
+  </dgm:styleLbl>
+  <dgm:styleLbl name="bgShp">
+    <dgm:scene3d>
+      <a:camera prst="orthographicFront"/>
+      <a:lightRig rig="threePt" dir="t"/>
+    </dgm:scene3d>
+    <dgm:sp3d/>
+    <dgm:txPr/>
+    <dgm:style>
+      <a:lnRef idx="0">
+        <a:scrgbClr r="0" g="0" b="0"/>
+      </a:lnRef>
+      <a:fillRef idx="1">
+        <a:scrgbClr r="0" g="0" b="0"/>
+      </a:fillRef>
+      <a:effectRef idx="0">
+        <a:scrgbClr r="0" g="0" b="0"/>
+      </a:effectRef>
+      <a:fontRef idx="minor"/>
+    </dgm:style>
+  </dgm:styleLbl>
+  <dgm:styleLbl name="dkBgShp">
+    <dgm:scene3d>
+      <a:camera prst="orthographicFront"/>
+      <a:lightRig rig="threePt" dir="t"/>
+    </dgm:scene3d>
+    <dgm:sp3d/>
+    <dgm:txPr/>
+    <dgm:style>
+      <a:lnRef idx="0">
+        <a:scrgbClr r="0" g="0" b="0"/>
+      </a:lnRef>
+      <a:fillRef idx="1">
+        <a:scrgbClr r="0" g="0" b="0"/>
+      </a:fillRef>
+      <a:effectRef idx="0">
+        <a:scrgbClr r="0" g="0" b="0"/>
+      </a:effectRef>
+      <a:fontRef idx="minor"/>
+    </dgm:style>
+  </dgm:styleLbl>
+  <dgm:styleLbl name="trBgShp">
+    <dgm:scene3d>
+      <a:camera prst="orthographicFront"/>
+      <a:lightRig rig="threePt" dir="t"/>
+    </dgm:scene3d>
+    <dgm:sp3d/>
+    <dgm:txPr/>
+    <dgm:style>
+      <a:lnRef idx="0">
+        <a:scrgbClr r="0" g="0" b="0"/>
+      </a:lnRef>
+      <a:fillRef idx="1">
+        <a:scrgbClr r="0" g="0" b="0"/>
+      </a:fillRef>
+      <a:effectRef idx="0">
+        <a:scrgbClr r="0" g="0" b="0"/>
+      </a:effectRef>
+      <a:fontRef idx="minor"/>
+    </dgm:style>
+  </dgm:styleLbl>
+  <dgm:styleLbl name="fgShp">
+    <dgm:scene3d>
+      <a:camera prst="orthographicFront"/>
+      <a:lightRig rig="threePt" dir="t"/>
+    </dgm:scene3d>
+    <dgm:sp3d/>
+    <dgm:txPr/>
+    <dgm:style>
+      <a:lnRef idx="2">
+        <a:scrgbClr r="0" g="0" b="0"/>
+      </a:lnRef>
+      <a:fillRef idx="1">
+        <a:scrgbClr r="0" g="0" b="0"/>
+      </a:fillRef>
+      <a:effectRef idx="0">
+        <a:scrgbClr r="0" g="0" b="0"/>
+      </a:effectRef>
+      <a:fontRef idx="minor"/>
+    </dgm:style>
+  </dgm:styleLbl>
+  <dgm:styleLbl name="revTx">
+    <dgm:scene3d>
+      <a:camera prst="orthographicFront"/>
+      <a:lightRig rig="threePt" dir="t"/>
+    </dgm:scene3d>
+    <dgm:sp3d/>
+    <dgm:txPr/>
+    <dgm:style>
+      <a:lnRef idx="0">
+        <a:scrgbClr r="0" g="0" b="0"/>
+      </a:lnRef>
+      <a:fillRef idx="0">
+        <a:scrgbClr r="0" g="0" b="0"/>
+      </a:fillRef>
+      <a:effectRef idx="0">
+        <a:scrgbClr r="0" g="0" b="0"/>
+      </a:effectRef>
+      <a:fontRef idx="minor"/>
+    </dgm:style>
+  </dgm:styleLbl>
+</dgm:styleDef>
+</file>
+
+<file path=ppt/diagrams/quickStyle2.xml><?xml version="1.0" encoding="utf-8"?>
 <dgm:styleDef xmlns:dgm="http://schemas.openxmlformats.org/drawingml/2006/diagram" xmlns:a="http://schemas.openxmlformats.org/drawingml/2006/main" uniqueId="urn:microsoft.com/office/officeart/2005/8/quickstyle/simple1">
   <dgm:title val=""/>
   <dgm:desc val=""/>
@@ -17398,6 +21123,2253 @@
 </file>
 
 <file path=ppt/slides/slide2.xml><?xml version="1.0" encoding="utf-8"?>
+<p:sld xmlns:a="http://schemas.openxmlformats.org/drawingml/2006/main" xmlns:r="http://schemas.openxmlformats.org/officeDocument/2006/relationships" xmlns:p="http://schemas.openxmlformats.org/presentationml/2006/main">
+  <p:cSld>
+    <p:spTree>
+      <p:nvGrpSpPr>
+        <p:cNvPr id="1" name="">
+          <a:extLst>
+            <a:ext uri="{FF2B5EF4-FFF2-40B4-BE49-F238E27FC236}">
+              <a16:creationId xmlns:a16="http://schemas.microsoft.com/office/drawing/2014/main" id="{A559A39B-3CF4-3462-23E5-BF20A359AA9D}"/>
+            </a:ext>
+          </a:extLst>
+        </p:cNvPr>
+        <p:cNvGrpSpPr/>
+        <p:nvPr/>
+      </p:nvGrpSpPr>
+      <p:grpSpPr>
+        <a:xfrm>
+          <a:off x="0" y="0"/>
+          <a:ext cx="0" cy="0"/>
+          <a:chOff x="0" y="0"/>
+          <a:chExt cx="0" cy="0"/>
+        </a:xfrm>
+      </p:grpSpPr>
+      <p:sp>
+        <p:nvSpPr>
+          <p:cNvPr id="2" name="テキスト プレースホルダー 1">
+            <a:extLst>
+              <a:ext uri="{FF2B5EF4-FFF2-40B4-BE49-F238E27FC236}">
+                <a16:creationId xmlns:a16="http://schemas.microsoft.com/office/drawing/2014/main" id="{CFDE4087-BABD-119D-FA7E-37FE939D52C9}"/>
+              </a:ext>
+            </a:extLst>
+          </p:cNvPr>
+          <p:cNvSpPr>
+            <a:spLocks noGrp="1"/>
+          </p:cNvSpPr>
+          <p:nvPr>
+            <p:ph type="body" sz="quarter" idx="14"/>
+          </p:nvPr>
+        </p:nvSpPr>
+        <p:spPr/>
+        <p:txBody>
+          <a:bodyPr/>
+          <a:lstStyle/>
+          <a:p>
+            <a:r>
+              <a:rPr kumimoji="1" lang="en-US" altLang="ja-JP" dirty="0" err="1"/>
+              <a:t>ImageFlux</a:t>
+            </a:r>
+            <a:r>
+              <a:rPr kumimoji="1" lang="en-US" altLang="ja-JP" dirty="0"/>
+              <a:t> Live Streaming × </a:t>
+            </a:r>
+            <a:r>
+              <a:rPr kumimoji="1" lang="ja-JP" altLang="en-US" dirty="0"/>
+              <a:t>さくらの</a:t>
+            </a:r>
+            <a:r>
+              <a:rPr kumimoji="1" lang="en-US" altLang="ja-JP" dirty="0"/>
+              <a:t>AI Engine</a:t>
+            </a:r>
+            <a:r>
+              <a:rPr kumimoji="1" lang="ja-JP" altLang="en-US"/>
+              <a:t>構成図</a:t>
+            </a:r>
+            <a:endParaRPr kumimoji="1" lang="ja-JP" altLang="en-US" dirty="0"/>
+          </a:p>
+        </p:txBody>
+      </p:sp>
+      <p:graphicFrame>
+        <p:nvGraphicFramePr>
+          <p:cNvPr id="106" name="図表 105">
+            <a:extLst>
+              <a:ext uri="{FF2B5EF4-FFF2-40B4-BE49-F238E27FC236}">
+                <a16:creationId xmlns:a16="http://schemas.microsoft.com/office/drawing/2014/main" id="{5BF50787-5C3B-B46C-8F8C-78D7E531CC6B}"/>
+              </a:ext>
+            </a:extLst>
+          </p:cNvPr>
+          <p:cNvGraphicFramePr/>
+          <p:nvPr/>
+        </p:nvGraphicFramePr>
+        <p:xfrm>
+          <a:off x="18056475" y="0"/>
+          <a:ext cx="6325938" cy="13716000"/>
+        </p:xfrm>
+        <a:graphic>
+          <a:graphicData uri="http://schemas.openxmlformats.org/drawingml/2006/diagram">
+            <dgm:relIds xmlns:dgm="http://schemas.openxmlformats.org/drawingml/2006/diagram" xmlns:r="http://schemas.openxmlformats.org/officeDocument/2006/relationships" r:dm="rId2" r:lo="rId3" r:qs="rId4" r:cs="rId5"/>
+          </a:graphicData>
+        </a:graphic>
+      </p:graphicFrame>
+      <p:grpSp>
+        <p:nvGrpSpPr>
+          <p:cNvPr id="102" name="グループ化 101">
+            <a:extLst>
+              <a:ext uri="{FF2B5EF4-FFF2-40B4-BE49-F238E27FC236}">
+                <a16:creationId xmlns:a16="http://schemas.microsoft.com/office/drawing/2014/main" id="{05A97D7E-972A-E2DF-E32C-E5E2C3839F9C}"/>
+              </a:ext>
+            </a:extLst>
+          </p:cNvPr>
+          <p:cNvGrpSpPr/>
+          <p:nvPr/>
+        </p:nvGrpSpPr>
+        <p:grpSpPr>
+          <a:xfrm>
+            <a:off x="3653159" y="1690687"/>
+            <a:ext cx="5764036" cy="5552628"/>
+            <a:chOff x="6153581" y="2196378"/>
+            <a:chExt cx="5764036" cy="5552628"/>
+          </a:xfrm>
+        </p:grpSpPr>
+        <p:sp>
+          <p:nvSpPr>
+            <p:cNvPr id="101" name="四角形: 角を丸くする 100">
+              <a:extLst>
+                <a:ext uri="{FF2B5EF4-FFF2-40B4-BE49-F238E27FC236}">
+                  <a16:creationId xmlns:a16="http://schemas.microsoft.com/office/drawing/2014/main" id="{FB81BE53-C9F2-95A0-EAA6-43A8486335F2}"/>
+                </a:ext>
+              </a:extLst>
+            </p:cNvPr>
+            <p:cNvSpPr/>
+            <p:nvPr/>
+          </p:nvSpPr>
+          <p:spPr>
+            <a:xfrm>
+              <a:off x="6153581" y="2348778"/>
+              <a:ext cx="2880000" cy="5400228"/>
+            </a:xfrm>
+            <a:prstGeom prst="roundRect">
+              <a:avLst/>
+            </a:prstGeom>
+            <a:solidFill>
+              <a:schemeClr val="bg2"/>
+            </a:solidFill>
+            <a:ln>
+              <a:noFill/>
+            </a:ln>
+          </p:spPr>
+          <p:style>
+            <a:lnRef idx="2">
+              <a:schemeClr val="dk1"/>
+            </a:lnRef>
+            <a:fillRef idx="1">
+              <a:schemeClr val="lt1"/>
+            </a:fillRef>
+            <a:effectRef idx="0">
+              <a:schemeClr val="dk1"/>
+            </a:effectRef>
+            <a:fontRef idx="minor">
+              <a:schemeClr val="dk1"/>
+            </a:fontRef>
+          </p:style>
+          <p:txBody>
+            <a:bodyPr rtlCol="0" anchor="ctr"/>
+            <a:lstStyle/>
+            <a:p>
+              <a:pPr algn="ctr"/>
+              <a:endParaRPr kumimoji="1" lang="ja-JP" altLang="en-US"/>
+            </a:p>
+          </p:txBody>
+        </p:sp>
+        <p:sp>
+          <p:nvSpPr>
+            <p:cNvPr id="100" name="四角形: 角を丸くする 99">
+              <a:extLst>
+                <a:ext uri="{FF2B5EF4-FFF2-40B4-BE49-F238E27FC236}">
+                  <a16:creationId xmlns:a16="http://schemas.microsoft.com/office/drawing/2014/main" id="{AF543F81-D9BF-D69B-FA4C-BDB3FEE32445}"/>
+                </a:ext>
+              </a:extLst>
+            </p:cNvPr>
+            <p:cNvSpPr/>
+            <p:nvPr/>
+          </p:nvSpPr>
+          <p:spPr>
+            <a:xfrm>
+              <a:off x="6157617" y="2196378"/>
+              <a:ext cx="5760000" cy="2880000"/>
+            </a:xfrm>
+            <a:prstGeom prst="roundRect">
+              <a:avLst/>
+            </a:prstGeom>
+            <a:solidFill>
+              <a:schemeClr val="bg2"/>
+            </a:solidFill>
+            <a:ln>
+              <a:noFill/>
+            </a:ln>
+          </p:spPr>
+          <p:style>
+            <a:lnRef idx="2">
+              <a:schemeClr val="dk1"/>
+            </a:lnRef>
+            <a:fillRef idx="1">
+              <a:schemeClr val="lt1"/>
+            </a:fillRef>
+            <a:effectRef idx="0">
+              <a:schemeClr val="dk1"/>
+            </a:effectRef>
+            <a:fontRef idx="minor">
+              <a:schemeClr val="dk1"/>
+            </a:fontRef>
+          </p:style>
+          <p:txBody>
+            <a:bodyPr rtlCol="0" anchor="ctr"/>
+            <a:lstStyle/>
+            <a:p>
+              <a:pPr algn="ctr"/>
+              <a:endParaRPr kumimoji="1" lang="ja-JP" altLang="en-US"/>
+            </a:p>
+          </p:txBody>
+        </p:sp>
+      </p:grpSp>
+      <p:pic>
+        <p:nvPicPr>
+          <p:cNvPr id="5" name="グラフィックス 4">
+            <a:extLst>
+              <a:ext uri="{FF2B5EF4-FFF2-40B4-BE49-F238E27FC236}">
+                <a16:creationId xmlns:a16="http://schemas.microsoft.com/office/drawing/2014/main" id="{77824A3B-F8D8-6E3C-FB33-38CF316E08CD}"/>
+              </a:ext>
+            </a:extLst>
+          </p:cNvPr>
+          <p:cNvPicPr>
+            <a:picLocks noChangeAspect="1"/>
+          </p:cNvPicPr>
+          <p:nvPr/>
+        </p:nvPicPr>
+        <p:blipFill>
+          <a:blip>
+            <a:extLst>
+              <a:ext uri="{96DAC541-7B7A-43D3-8B79-37D633B846F1}">
+                <asvg:svgBlip xmlns:asvg="http://schemas.microsoft.com/office/drawing/2016/SVG/main" r:embed="rId7"/>
+              </a:ext>
+            </a:extLst>
+          </a:blip>
+          <a:stretch>
+            <a:fillRect/>
+          </a:stretch>
+        </p:blipFill>
+        <p:spPr>
+          <a:xfrm>
+            <a:off x="7255177" y="2190910"/>
+            <a:ext cx="1440000" cy="1440000"/>
+          </a:xfrm>
+          <a:prstGeom prst="rect">
+            <a:avLst/>
+          </a:prstGeom>
+        </p:spPr>
+      </p:pic>
+      <p:pic>
+        <p:nvPicPr>
+          <p:cNvPr id="7" name="グラフィックス 6">
+            <a:extLst>
+              <a:ext uri="{FF2B5EF4-FFF2-40B4-BE49-F238E27FC236}">
+                <a16:creationId xmlns:a16="http://schemas.microsoft.com/office/drawing/2014/main" id="{6322CC85-7C6F-C344-53D3-EB3CF294F670}"/>
+              </a:ext>
+            </a:extLst>
+          </p:cNvPr>
+          <p:cNvPicPr>
+            <a:picLocks noChangeAspect="1"/>
+          </p:cNvPicPr>
+          <p:nvPr/>
+        </p:nvPicPr>
+        <p:blipFill>
+          <a:blip>
+            <a:extLst>
+              <a:ext uri="{96DAC541-7B7A-43D3-8B79-37D633B846F1}">
+                <asvg:svgBlip xmlns:asvg="http://schemas.microsoft.com/office/drawing/2016/SVG/main" r:embed="rId8"/>
+              </a:ext>
+            </a:extLst>
+          </a:blip>
+          <a:stretch>
+            <a:fillRect/>
+          </a:stretch>
+        </p:blipFill>
+        <p:spPr>
+          <a:xfrm>
+            <a:off x="4375177" y="2190910"/>
+            <a:ext cx="1440000" cy="1440000"/>
+          </a:xfrm>
+          <a:prstGeom prst="rect">
+            <a:avLst/>
+          </a:prstGeom>
+        </p:spPr>
+      </p:pic>
+      <p:pic>
+        <p:nvPicPr>
+          <p:cNvPr id="9" name="グラフィックス 8">
+            <a:extLst>
+              <a:ext uri="{FF2B5EF4-FFF2-40B4-BE49-F238E27FC236}">
+                <a16:creationId xmlns:a16="http://schemas.microsoft.com/office/drawing/2014/main" id="{C80B71F2-6F4D-AF7B-FC08-255F44BFF20A}"/>
+              </a:ext>
+            </a:extLst>
+          </p:cNvPr>
+          <p:cNvPicPr>
+            <a:picLocks noChangeAspect="1"/>
+          </p:cNvPicPr>
+          <p:nvPr/>
+        </p:nvPicPr>
+        <p:blipFill>
+          <a:blip>
+            <a:extLst>
+              <a:ext uri="{96DAC541-7B7A-43D3-8B79-37D633B846F1}">
+                <asvg:svgBlip xmlns:asvg="http://schemas.microsoft.com/office/drawing/2016/SVG/main" r:embed="rId9"/>
+              </a:ext>
+            </a:extLst>
+          </a:blip>
+          <a:stretch>
+            <a:fillRect/>
+          </a:stretch>
+        </p:blipFill>
+        <p:spPr>
+          <a:xfrm>
+            <a:off x="4375177" y="5077848"/>
+            <a:ext cx="1440000" cy="1440000"/>
+          </a:xfrm>
+          <a:prstGeom prst="rect">
+            <a:avLst/>
+          </a:prstGeom>
+        </p:spPr>
+      </p:pic>
+      <p:pic>
+        <p:nvPicPr>
+          <p:cNvPr id="11" name="図 10">
+            <a:extLst>
+              <a:ext uri="{FF2B5EF4-FFF2-40B4-BE49-F238E27FC236}">
+                <a16:creationId xmlns:a16="http://schemas.microsoft.com/office/drawing/2014/main" id="{20E4E288-C0FD-089A-E32E-A92D8CDD8D24}"/>
+              </a:ext>
+            </a:extLst>
+          </p:cNvPr>
+          <p:cNvPicPr>
+            <a:picLocks noChangeAspect="1"/>
+          </p:cNvPicPr>
+          <p:nvPr/>
+        </p:nvPicPr>
+        <p:blipFill>
+          <a:blip r:embed="rId10"/>
+          <a:stretch>
+            <a:fillRect/>
+          </a:stretch>
+        </p:blipFill>
+        <p:spPr>
+          <a:xfrm>
+            <a:off x="4375177" y="10851724"/>
+            <a:ext cx="1440000" cy="1440000"/>
+          </a:xfrm>
+          <a:prstGeom prst="rect">
+            <a:avLst/>
+          </a:prstGeom>
+        </p:spPr>
+      </p:pic>
+      <p:pic>
+        <p:nvPicPr>
+          <p:cNvPr id="13" name="グラフィックス 12">
+            <a:extLst>
+              <a:ext uri="{FF2B5EF4-FFF2-40B4-BE49-F238E27FC236}">
+                <a16:creationId xmlns:a16="http://schemas.microsoft.com/office/drawing/2014/main" id="{CAA73903-6DC5-5A9A-5575-4A5B5014F68D}"/>
+              </a:ext>
+            </a:extLst>
+          </p:cNvPr>
+          <p:cNvPicPr>
+            <a:picLocks noChangeAspect="1"/>
+          </p:cNvPicPr>
+          <p:nvPr/>
+        </p:nvPicPr>
+        <p:blipFill>
+          <a:blip>
+            <a:extLst>
+              <a:ext uri="{96DAC541-7B7A-43D3-8B79-37D633B846F1}">
+                <asvg:svgBlip xmlns:asvg="http://schemas.microsoft.com/office/drawing/2016/SVG/main" r:embed="rId11"/>
+              </a:ext>
+            </a:extLst>
+          </a:blip>
+          <a:stretch>
+            <a:fillRect/>
+          </a:stretch>
+        </p:blipFill>
+        <p:spPr>
+          <a:xfrm>
+            <a:off x="7255177" y="7964786"/>
+            <a:ext cx="1440000" cy="1440000"/>
+          </a:xfrm>
+          <a:prstGeom prst="rect">
+            <a:avLst/>
+          </a:prstGeom>
+        </p:spPr>
+      </p:pic>
+      <p:pic>
+        <p:nvPicPr>
+          <p:cNvPr id="15" name="グラフィックス 14">
+            <a:extLst>
+              <a:ext uri="{FF2B5EF4-FFF2-40B4-BE49-F238E27FC236}">
+                <a16:creationId xmlns:a16="http://schemas.microsoft.com/office/drawing/2014/main" id="{EA4C139C-91C7-DCD3-1BF8-0123A103F721}"/>
+              </a:ext>
+            </a:extLst>
+          </p:cNvPr>
+          <p:cNvPicPr>
+            <a:picLocks noChangeAspect="1"/>
+          </p:cNvPicPr>
+          <p:nvPr/>
+        </p:nvPicPr>
+        <p:blipFill>
+          <a:blip>
+            <a:extLst>
+              <a:ext uri="{96DAC541-7B7A-43D3-8B79-37D633B846F1}">
+                <asvg:svgBlip xmlns:asvg="http://schemas.microsoft.com/office/drawing/2016/SVG/main" r:embed="rId12"/>
+              </a:ext>
+            </a:extLst>
+          </a:blip>
+          <a:stretch>
+            <a:fillRect/>
+          </a:stretch>
+        </p:blipFill>
+        <p:spPr>
+          <a:xfrm>
+            <a:off x="13015177" y="7964786"/>
+            <a:ext cx="1440000" cy="1440000"/>
+          </a:xfrm>
+          <a:prstGeom prst="rect">
+            <a:avLst/>
+          </a:prstGeom>
+        </p:spPr>
+      </p:pic>
+      <p:pic>
+        <p:nvPicPr>
+          <p:cNvPr id="17" name="グラフィックス 16">
+            <a:extLst>
+              <a:ext uri="{FF2B5EF4-FFF2-40B4-BE49-F238E27FC236}">
+                <a16:creationId xmlns:a16="http://schemas.microsoft.com/office/drawing/2014/main" id="{9D32E244-8CDC-F016-F926-1E83A37B3CDC}"/>
+              </a:ext>
+            </a:extLst>
+          </p:cNvPr>
+          <p:cNvPicPr>
+            <a:picLocks noChangeAspect="1"/>
+          </p:cNvPicPr>
+          <p:nvPr/>
+        </p:nvPicPr>
+        <p:blipFill>
+          <a:blip>
+            <a:extLst>
+              <a:ext uri="{96DAC541-7B7A-43D3-8B79-37D633B846F1}">
+                <asvg:svgBlip xmlns:asvg="http://schemas.microsoft.com/office/drawing/2016/SVG/main" r:embed="rId13"/>
+              </a:ext>
+            </a:extLst>
+          </a:blip>
+          <a:stretch>
+            <a:fillRect/>
+          </a:stretch>
+        </p:blipFill>
+        <p:spPr>
+          <a:xfrm>
+            <a:off x="10135177" y="7964786"/>
+            <a:ext cx="1440000" cy="1440000"/>
+          </a:xfrm>
+          <a:prstGeom prst="rect">
+            <a:avLst/>
+          </a:prstGeom>
+        </p:spPr>
+      </p:pic>
+      <p:pic>
+        <p:nvPicPr>
+          <p:cNvPr id="19" name="グラフィックス 18">
+            <a:extLst>
+              <a:ext uri="{FF2B5EF4-FFF2-40B4-BE49-F238E27FC236}">
+                <a16:creationId xmlns:a16="http://schemas.microsoft.com/office/drawing/2014/main" id="{66893F6A-A25D-BBDB-1EBC-A519B40F2CA0}"/>
+              </a:ext>
+            </a:extLst>
+          </p:cNvPr>
+          <p:cNvPicPr>
+            <a:picLocks noChangeAspect="1"/>
+          </p:cNvPicPr>
+          <p:nvPr/>
+        </p:nvPicPr>
+        <p:blipFill>
+          <a:blip>
+            <a:extLst>
+              <a:ext uri="{96DAC541-7B7A-43D3-8B79-37D633B846F1}">
+                <asvg:svgBlip xmlns:asvg="http://schemas.microsoft.com/office/drawing/2016/SVG/main" r:embed="rId9"/>
+              </a:ext>
+            </a:extLst>
+          </a:blip>
+          <a:stretch>
+            <a:fillRect/>
+          </a:stretch>
+        </p:blipFill>
+        <p:spPr>
+          <a:xfrm>
+            <a:off x="4375177" y="7964786"/>
+            <a:ext cx="1440000" cy="1440000"/>
+          </a:xfrm>
+          <a:prstGeom prst="rect">
+            <a:avLst/>
+          </a:prstGeom>
+        </p:spPr>
+      </p:pic>
+      <p:pic>
+        <p:nvPicPr>
+          <p:cNvPr id="21" name="グラフィックス 20">
+            <a:extLst>
+              <a:ext uri="{FF2B5EF4-FFF2-40B4-BE49-F238E27FC236}">
+                <a16:creationId xmlns:a16="http://schemas.microsoft.com/office/drawing/2014/main" id="{5BEC8362-2568-AE45-99B1-EC9756C2E1CD}"/>
+              </a:ext>
+            </a:extLst>
+          </p:cNvPr>
+          <p:cNvPicPr>
+            <a:picLocks noChangeAspect="1"/>
+          </p:cNvPicPr>
+          <p:nvPr/>
+        </p:nvPicPr>
+        <p:blipFill>
+          <a:blip>
+            <a:extLst>
+              <a:ext uri="{96DAC541-7B7A-43D3-8B79-37D633B846F1}">
+                <asvg:svgBlip xmlns:asvg="http://schemas.microsoft.com/office/drawing/2016/SVG/main" r:embed="rId14"/>
+              </a:ext>
+            </a:extLst>
+          </a:blip>
+          <a:stretch>
+            <a:fillRect/>
+          </a:stretch>
+        </p:blipFill>
+        <p:spPr>
+          <a:xfrm>
+            <a:off x="13015177" y="2190910"/>
+            <a:ext cx="1440000" cy="1440000"/>
+          </a:xfrm>
+          <a:prstGeom prst="rect">
+            <a:avLst/>
+          </a:prstGeom>
+        </p:spPr>
+      </p:pic>
+      <p:pic>
+        <p:nvPicPr>
+          <p:cNvPr id="23" name="グラフィックス 22">
+            <a:extLst>
+              <a:ext uri="{FF2B5EF4-FFF2-40B4-BE49-F238E27FC236}">
+                <a16:creationId xmlns:a16="http://schemas.microsoft.com/office/drawing/2014/main" id="{CD0630F9-056F-5C59-00D8-FE1C3B25C3E3}"/>
+              </a:ext>
+            </a:extLst>
+          </p:cNvPr>
+          <p:cNvPicPr>
+            <a:picLocks noChangeAspect="1"/>
+          </p:cNvPicPr>
+          <p:nvPr/>
+        </p:nvPicPr>
+        <p:blipFill>
+          <a:blip>
+            <a:extLst>
+              <a:ext uri="{96DAC541-7B7A-43D3-8B79-37D633B846F1}">
+                <asvg:svgBlip xmlns:asvg="http://schemas.microsoft.com/office/drawing/2016/SVG/main" r:embed="rId15"/>
+              </a:ext>
+            </a:extLst>
+          </a:blip>
+          <a:stretch>
+            <a:fillRect/>
+          </a:stretch>
+        </p:blipFill>
+        <p:spPr>
+          <a:xfrm>
+            <a:off x="7255177" y="10851724"/>
+            <a:ext cx="1440000" cy="1440000"/>
+          </a:xfrm>
+          <a:prstGeom prst="rect">
+            <a:avLst/>
+          </a:prstGeom>
+        </p:spPr>
+      </p:pic>
+      <p:sp>
+        <p:nvSpPr>
+          <p:cNvPr id="26" name="テキスト ボックス 25">
+            <a:extLst>
+              <a:ext uri="{FF2B5EF4-FFF2-40B4-BE49-F238E27FC236}">
+                <a16:creationId xmlns:a16="http://schemas.microsoft.com/office/drawing/2014/main" id="{DBBBAD40-DC74-53AF-B1A6-61EC5FB79F42}"/>
+              </a:ext>
+            </a:extLst>
+          </p:cNvPr>
+          <p:cNvSpPr txBox="1"/>
+          <p:nvPr/>
+        </p:nvSpPr>
+        <p:spPr>
+          <a:xfrm>
+            <a:off x="4015177" y="3630910"/>
+            <a:ext cx="2160000" cy="646331"/>
+          </a:xfrm>
+          <a:prstGeom prst="rect">
+            <a:avLst/>
+          </a:prstGeom>
+          <a:noFill/>
+        </p:spPr>
+        <p:txBody>
+          <a:bodyPr wrap="square" rtlCol="0">
+            <a:spAutoFit/>
+          </a:bodyPr>
+          <a:lstStyle/>
+          <a:p>
+            <a:pPr algn="ctr"/>
+            <a:r>
+              <a:rPr kumimoji="1" lang="ja-JP" altLang="en-US" dirty="0">
+                <a:solidFill>
+                  <a:schemeClr val="bg1"/>
+                </a:solidFill>
+              </a:rPr>
+              <a:t>さくらのウェブ</a:t>
+            </a:r>
+            <a:br>
+              <a:rPr kumimoji="1" lang="en-US" altLang="ja-JP" dirty="0">
+                <a:solidFill>
+                  <a:schemeClr val="bg1"/>
+                </a:solidFill>
+              </a:rPr>
+            </a:br>
+            <a:r>
+              <a:rPr kumimoji="1" lang="ja-JP" altLang="en-US" dirty="0">
+                <a:solidFill>
+                  <a:schemeClr val="bg1"/>
+                </a:solidFill>
+              </a:rPr>
+              <a:t>アクセラレータ</a:t>
+            </a:r>
+          </a:p>
+        </p:txBody>
+      </p:sp>
+      <p:sp>
+        <p:nvSpPr>
+          <p:cNvPr id="27" name="テキスト ボックス 26">
+            <a:extLst>
+              <a:ext uri="{FF2B5EF4-FFF2-40B4-BE49-F238E27FC236}">
+                <a16:creationId xmlns:a16="http://schemas.microsoft.com/office/drawing/2014/main" id="{0F5FDAE2-B63B-58C4-B283-5A0508D901CA}"/>
+              </a:ext>
+            </a:extLst>
+          </p:cNvPr>
+          <p:cNvSpPr txBox="1"/>
+          <p:nvPr/>
+        </p:nvSpPr>
+        <p:spPr>
+          <a:xfrm>
+            <a:off x="4015177" y="6517848"/>
+            <a:ext cx="2160000" cy="369332"/>
+          </a:xfrm>
+          <a:prstGeom prst="rect">
+            <a:avLst/>
+          </a:prstGeom>
+          <a:noFill/>
+        </p:spPr>
+        <p:txBody>
+          <a:bodyPr wrap="square" rtlCol="0">
+            <a:spAutoFit/>
+          </a:bodyPr>
+          <a:lstStyle/>
+          <a:p>
+            <a:pPr algn="ctr"/>
+            <a:r>
+              <a:rPr kumimoji="1" lang="en-US" altLang="ja-JP" dirty="0" err="1">
+                <a:solidFill>
+                  <a:schemeClr val="bg1"/>
+                </a:solidFill>
+              </a:rPr>
+              <a:t>AppRun</a:t>
+            </a:r>
+            <a:r>
+              <a:rPr kumimoji="1" lang="ja-JP" altLang="en-US" dirty="0">
+                <a:solidFill>
+                  <a:schemeClr val="bg1"/>
+                </a:solidFill>
+              </a:rPr>
+              <a:t>共用型</a:t>
+            </a:r>
+          </a:p>
+        </p:txBody>
+      </p:sp>
+      <p:sp>
+        <p:nvSpPr>
+          <p:cNvPr id="28" name="テキスト ボックス 27">
+            <a:extLst>
+              <a:ext uri="{FF2B5EF4-FFF2-40B4-BE49-F238E27FC236}">
+                <a16:creationId xmlns:a16="http://schemas.microsoft.com/office/drawing/2014/main" id="{1B6BEC9D-6B9D-E86A-3B91-FCA50E9DEC75}"/>
+              </a:ext>
+            </a:extLst>
+          </p:cNvPr>
+          <p:cNvSpPr txBox="1"/>
+          <p:nvPr/>
+        </p:nvSpPr>
+        <p:spPr>
+          <a:xfrm>
+            <a:off x="4015177" y="9404786"/>
+            <a:ext cx="2160000" cy="369332"/>
+          </a:xfrm>
+          <a:prstGeom prst="rect">
+            <a:avLst/>
+          </a:prstGeom>
+          <a:noFill/>
+        </p:spPr>
+        <p:txBody>
+          <a:bodyPr wrap="square" rtlCol="0">
+            <a:spAutoFit/>
+          </a:bodyPr>
+          <a:lstStyle/>
+          <a:p>
+            <a:pPr algn="ctr"/>
+            <a:r>
+              <a:rPr kumimoji="1" lang="en-US" altLang="ja-JP" dirty="0" err="1"/>
+              <a:t>AppRun</a:t>
+            </a:r>
+            <a:r>
+              <a:rPr kumimoji="1" lang="ja-JP" altLang="en-US" dirty="0"/>
+              <a:t>共用型</a:t>
+            </a:r>
+          </a:p>
+        </p:txBody>
+      </p:sp>
+      <p:sp>
+        <p:nvSpPr>
+          <p:cNvPr id="29" name="テキスト ボックス 28">
+            <a:extLst>
+              <a:ext uri="{FF2B5EF4-FFF2-40B4-BE49-F238E27FC236}">
+                <a16:creationId xmlns:a16="http://schemas.microsoft.com/office/drawing/2014/main" id="{963A4C2B-2838-D764-29F6-476B6196C6FD}"/>
+              </a:ext>
+            </a:extLst>
+          </p:cNvPr>
+          <p:cNvSpPr txBox="1"/>
+          <p:nvPr/>
+        </p:nvSpPr>
+        <p:spPr>
+          <a:xfrm>
+            <a:off x="6895177" y="3630910"/>
+            <a:ext cx="2160000" cy="646331"/>
+          </a:xfrm>
+          <a:prstGeom prst="rect">
+            <a:avLst/>
+          </a:prstGeom>
+          <a:noFill/>
+        </p:spPr>
+        <p:txBody>
+          <a:bodyPr wrap="square" rtlCol="0">
+            <a:spAutoFit/>
+          </a:bodyPr>
+          <a:lstStyle/>
+          <a:p>
+            <a:pPr algn="ctr"/>
+            <a:r>
+              <a:rPr kumimoji="1" lang="ja-JP" altLang="en-US" dirty="0">
+                <a:solidFill>
+                  <a:schemeClr val="bg1"/>
+                </a:solidFill>
+              </a:rPr>
+              <a:t>オブジェクト</a:t>
+            </a:r>
+            <a:br>
+              <a:rPr kumimoji="1" lang="en-US" altLang="ja-JP" dirty="0">
+                <a:solidFill>
+                  <a:schemeClr val="bg1"/>
+                </a:solidFill>
+              </a:rPr>
+            </a:br>
+            <a:r>
+              <a:rPr kumimoji="1" lang="ja-JP" altLang="en-US" dirty="0">
+                <a:solidFill>
+                  <a:schemeClr val="bg1"/>
+                </a:solidFill>
+              </a:rPr>
+              <a:t>ストレージ</a:t>
+            </a:r>
+          </a:p>
+        </p:txBody>
+      </p:sp>
+      <p:sp>
+        <p:nvSpPr>
+          <p:cNvPr id="30" name="テキスト ボックス 29">
+            <a:extLst>
+              <a:ext uri="{FF2B5EF4-FFF2-40B4-BE49-F238E27FC236}">
+                <a16:creationId xmlns:a16="http://schemas.microsoft.com/office/drawing/2014/main" id="{3F0297FD-681C-56D4-9E51-5FC299D31BB1}"/>
+              </a:ext>
+            </a:extLst>
+          </p:cNvPr>
+          <p:cNvSpPr txBox="1"/>
+          <p:nvPr/>
+        </p:nvSpPr>
+        <p:spPr>
+          <a:xfrm>
+            <a:off x="6895177" y="12291724"/>
+            <a:ext cx="2160000" cy="646331"/>
+          </a:xfrm>
+          <a:prstGeom prst="rect">
+            <a:avLst/>
+          </a:prstGeom>
+          <a:noFill/>
+        </p:spPr>
+        <p:txBody>
+          <a:bodyPr wrap="square" rtlCol="0">
+            <a:spAutoFit/>
+          </a:bodyPr>
+          <a:lstStyle/>
+          <a:p>
+            <a:pPr algn="ctr"/>
+            <a:r>
+              <a:rPr kumimoji="1" lang="ja-JP" altLang="en-US" dirty="0"/>
+              <a:t>モニタリング</a:t>
+            </a:r>
+            <a:br>
+              <a:rPr kumimoji="1" lang="en-US" altLang="ja-JP" dirty="0"/>
+            </a:br>
+            <a:r>
+              <a:rPr kumimoji="1" lang="ja-JP" altLang="en-US" dirty="0"/>
+              <a:t>スイート</a:t>
+            </a:r>
+          </a:p>
+        </p:txBody>
+      </p:sp>
+      <p:sp>
+        <p:nvSpPr>
+          <p:cNvPr id="31" name="テキスト ボックス 30">
+            <a:extLst>
+              <a:ext uri="{FF2B5EF4-FFF2-40B4-BE49-F238E27FC236}">
+                <a16:creationId xmlns:a16="http://schemas.microsoft.com/office/drawing/2014/main" id="{617787D3-9C49-2845-0069-537C6682FAC5}"/>
+              </a:ext>
+            </a:extLst>
+          </p:cNvPr>
+          <p:cNvSpPr txBox="1"/>
+          <p:nvPr/>
+        </p:nvSpPr>
+        <p:spPr>
+          <a:xfrm>
+            <a:off x="6895177" y="9404786"/>
+            <a:ext cx="2160000" cy="369332"/>
+          </a:xfrm>
+          <a:prstGeom prst="rect">
+            <a:avLst/>
+          </a:prstGeom>
+          <a:noFill/>
+        </p:spPr>
+        <p:txBody>
+          <a:bodyPr wrap="square" rtlCol="0">
+            <a:spAutoFit/>
+          </a:bodyPr>
+          <a:lstStyle/>
+          <a:p>
+            <a:pPr algn="ctr"/>
+            <a:r>
+              <a:rPr kumimoji="1" lang="ja-JP" altLang="en-US" dirty="0"/>
+              <a:t>シンプル</a:t>
+            </a:r>
+            <a:r>
+              <a:rPr kumimoji="1" lang="en-US" altLang="ja-JP" dirty="0"/>
+              <a:t>MQ</a:t>
+            </a:r>
+            <a:endParaRPr kumimoji="1" lang="ja-JP" altLang="en-US" dirty="0"/>
+          </a:p>
+        </p:txBody>
+      </p:sp>
+      <p:sp>
+        <p:nvSpPr>
+          <p:cNvPr id="32" name="テキスト ボックス 31">
+            <a:extLst>
+              <a:ext uri="{FF2B5EF4-FFF2-40B4-BE49-F238E27FC236}">
+                <a16:creationId xmlns:a16="http://schemas.microsoft.com/office/drawing/2014/main" id="{EFA36F60-7721-0273-1A40-116E6883381F}"/>
+              </a:ext>
+            </a:extLst>
+          </p:cNvPr>
+          <p:cNvSpPr txBox="1"/>
+          <p:nvPr/>
+        </p:nvSpPr>
+        <p:spPr>
+          <a:xfrm>
+            <a:off x="10951156" y="9411724"/>
+            <a:ext cx="894042" cy="369332"/>
+          </a:xfrm>
+          <a:prstGeom prst="rect">
+            <a:avLst/>
+          </a:prstGeom>
+          <a:noFill/>
+        </p:spPr>
+        <p:txBody>
+          <a:bodyPr wrap="square" rtlCol="0">
+            <a:spAutoFit/>
+          </a:bodyPr>
+          <a:lstStyle/>
+          <a:p>
+            <a:pPr algn="ctr"/>
+            <a:r>
+              <a:rPr kumimoji="1" lang="ja-JP" altLang="en-US" dirty="0"/>
+              <a:t>サーバ</a:t>
+            </a:r>
+          </a:p>
+        </p:txBody>
+      </p:sp>
+      <p:cxnSp>
+        <p:nvCxnSpPr>
+          <p:cNvPr id="40" name="直線矢印コネクタ 39">
+            <a:extLst>
+              <a:ext uri="{FF2B5EF4-FFF2-40B4-BE49-F238E27FC236}">
+                <a16:creationId xmlns:a16="http://schemas.microsoft.com/office/drawing/2014/main" id="{740A3406-464D-CC2F-1C78-F950BF7A9217}"/>
+              </a:ext>
+            </a:extLst>
+          </p:cNvPr>
+          <p:cNvCxnSpPr>
+            <a:cxnSpLocks/>
+            <a:stCxn id="5" idx="1"/>
+            <a:endCxn id="7" idx="3"/>
+          </p:cNvCxnSpPr>
+          <p:nvPr/>
+        </p:nvCxnSpPr>
+        <p:spPr>
+          <a:xfrm flipH="1">
+            <a:off x="5815177" y="2910910"/>
+            <a:ext cx="1440000" cy="0"/>
+          </a:xfrm>
+          <a:prstGeom prst="straightConnector1">
+            <a:avLst/>
+          </a:prstGeom>
+          <a:ln w="76200">
+            <a:solidFill>
+              <a:schemeClr val="bg2"/>
+            </a:solidFill>
+            <a:tailEnd type="triangle"/>
+          </a:ln>
+        </p:spPr>
+        <p:style>
+          <a:lnRef idx="1">
+            <a:schemeClr val="accent1"/>
+          </a:lnRef>
+          <a:fillRef idx="0">
+            <a:schemeClr val="accent1"/>
+          </a:fillRef>
+          <a:effectRef idx="0">
+            <a:schemeClr val="accent1"/>
+          </a:effectRef>
+          <a:fontRef idx="minor">
+            <a:schemeClr val="tx1"/>
+          </a:fontRef>
+        </p:style>
+      </p:cxnSp>
+      <p:grpSp>
+        <p:nvGrpSpPr>
+          <p:cNvPr id="51" name="グループ化 50">
+            <a:extLst>
+              <a:ext uri="{FF2B5EF4-FFF2-40B4-BE49-F238E27FC236}">
+                <a16:creationId xmlns:a16="http://schemas.microsoft.com/office/drawing/2014/main" id="{D7A9C54A-A0A6-003C-45F1-41C1C5DD6CE6}"/>
+              </a:ext>
+            </a:extLst>
+          </p:cNvPr>
+          <p:cNvGrpSpPr/>
+          <p:nvPr/>
+        </p:nvGrpSpPr>
+        <p:grpSpPr>
+          <a:xfrm>
+            <a:off x="6535176" y="4422100"/>
+            <a:ext cx="2880001" cy="2751496"/>
+            <a:chOff x="8814881" y="4699163"/>
+            <a:chExt cx="2880001" cy="2751496"/>
+          </a:xfrm>
+        </p:grpSpPr>
+        <p:pic>
+          <p:nvPicPr>
+            <p:cNvPr id="36" name="グラフィックス 35">
+              <a:extLst>
+                <a:ext uri="{FF2B5EF4-FFF2-40B4-BE49-F238E27FC236}">
+                  <a16:creationId xmlns:a16="http://schemas.microsoft.com/office/drawing/2014/main" id="{15FF285E-E773-4008-AB2D-4D518FA66617}"/>
+                </a:ext>
+              </a:extLst>
+            </p:cNvPr>
+            <p:cNvPicPr>
+              <a:picLocks noChangeAspect="1"/>
+            </p:cNvPicPr>
+            <p:nvPr/>
+          </p:nvPicPr>
+          <p:blipFill>
+            <a:blip>
+              <a:extLst>
+                <a:ext uri="{96DAC541-7B7A-43D3-8B79-37D633B846F1}">
+                  <asvg:svgBlip xmlns:asvg="http://schemas.microsoft.com/office/drawing/2016/SVG/main" r:embed="rId16"/>
+                </a:ext>
+              </a:extLst>
+            </a:blip>
+            <a:stretch>
+              <a:fillRect/>
+            </a:stretch>
+          </p:blipFill>
+          <p:spPr>
+            <a:xfrm>
+              <a:off x="8814881" y="4699163"/>
+              <a:ext cx="2880000" cy="2751496"/>
+            </a:xfrm>
+            <a:prstGeom prst="rect">
+              <a:avLst/>
+            </a:prstGeom>
+          </p:spPr>
+        </p:pic>
+        <p:sp>
+          <p:nvSpPr>
+            <p:cNvPr id="50" name="正方形/長方形 49">
+              <a:extLst>
+                <a:ext uri="{FF2B5EF4-FFF2-40B4-BE49-F238E27FC236}">
+                  <a16:creationId xmlns:a16="http://schemas.microsoft.com/office/drawing/2014/main" id="{30CEB68B-92E1-E184-5343-E6C62C40A6B4}"/>
+                </a:ext>
+              </a:extLst>
+            </p:cNvPr>
+            <p:cNvSpPr/>
+            <p:nvPr/>
+          </p:nvSpPr>
+          <p:spPr>
+            <a:xfrm>
+              <a:off x="8816900" y="4699163"/>
+              <a:ext cx="2877982" cy="2751496"/>
+            </a:xfrm>
+            <a:prstGeom prst="rect">
+              <a:avLst/>
+            </a:prstGeom>
+            <a:noFill/>
+            <a:ln>
+              <a:noFill/>
+            </a:ln>
+          </p:spPr>
+          <p:style>
+            <a:lnRef idx="2">
+              <a:schemeClr val="accent1">
+                <a:shade val="15000"/>
+              </a:schemeClr>
+            </a:lnRef>
+            <a:fillRef idx="1">
+              <a:schemeClr val="accent1"/>
+            </a:fillRef>
+            <a:effectRef idx="0">
+              <a:schemeClr val="accent1"/>
+            </a:effectRef>
+            <a:fontRef idx="minor">
+              <a:schemeClr val="lt1"/>
+            </a:fontRef>
+          </p:style>
+          <p:txBody>
+            <a:bodyPr rtlCol="0" anchor="ctr"/>
+            <a:lstStyle/>
+            <a:p>
+              <a:pPr algn="ctr"/>
+              <a:endParaRPr kumimoji="1" lang="ja-JP" altLang="en-US"/>
+            </a:p>
+          </p:txBody>
+        </p:sp>
+      </p:grpSp>
+      <p:cxnSp>
+        <p:nvCxnSpPr>
+          <p:cNvPr id="57" name="直線矢印コネクタ 56">
+            <a:extLst>
+              <a:ext uri="{FF2B5EF4-FFF2-40B4-BE49-F238E27FC236}">
+                <a16:creationId xmlns:a16="http://schemas.microsoft.com/office/drawing/2014/main" id="{DA42C0A4-377D-5017-E82E-84E10E521FAB}"/>
+              </a:ext>
+            </a:extLst>
+          </p:cNvPr>
+          <p:cNvCxnSpPr>
+            <a:cxnSpLocks/>
+            <a:stCxn id="50" idx="1"/>
+            <a:endCxn id="9" idx="3"/>
+          </p:cNvCxnSpPr>
+          <p:nvPr/>
+        </p:nvCxnSpPr>
+        <p:spPr>
+          <a:xfrm flipH="1">
+            <a:off x="5815177" y="5797848"/>
+            <a:ext cx="722018" cy="0"/>
+          </a:xfrm>
+          <a:prstGeom prst="straightConnector1">
+            <a:avLst/>
+          </a:prstGeom>
+          <a:ln w="76200">
+            <a:solidFill>
+              <a:schemeClr val="bg2"/>
+            </a:solidFill>
+            <a:headEnd type="triangle" w="med" len="med"/>
+            <a:tailEnd type="triangle" w="med" len="med"/>
+          </a:ln>
+        </p:spPr>
+        <p:style>
+          <a:lnRef idx="1">
+            <a:schemeClr val="accent1"/>
+          </a:lnRef>
+          <a:fillRef idx="0">
+            <a:schemeClr val="accent1"/>
+          </a:fillRef>
+          <a:effectRef idx="0">
+            <a:schemeClr val="accent1"/>
+          </a:effectRef>
+          <a:fontRef idx="minor">
+            <a:schemeClr val="tx1"/>
+          </a:fontRef>
+        </p:style>
+      </p:cxnSp>
+      <p:cxnSp>
+        <p:nvCxnSpPr>
+          <p:cNvPr id="62" name="コネクタ: カギ線 61">
+            <a:extLst>
+              <a:ext uri="{FF2B5EF4-FFF2-40B4-BE49-F238E27FC236}">
+                <a16:creationId xmlns:a16="http://schemas.microsoft.com/office/drawing/2014/main" id="{6B57609F-1A3E-D864-7306-0DE0CE8B0F23}"/>
+              </a:ext>
+            </a:extLst>
+          </p:cNvPr>
+          <p:cNvCxnSpPr>
+            <a:cxnSpLocks/>
+            <a:stCxn id="19" idx="0"/>
+            <a:endCxn id="50" idx="2"/>
+          </p:cNvCxnSpPr>
+          <p:nvPr/>
+        </p:nvCxnSpPr>
+        <p:spPr>
+          <a:xfrm rot="5400000" flipH="1" flipV="1">
+            <a:off x="6140086" y="6128687"/>
+            <a:ext cx="791190" cy="2881009"/>
+          </a:xfrm>
+          <a:prstGeom prst="bentConnector3">
+            <a:avLst>
+              <a:gd name="adj1" fmla="val 50000"/>
+            </a:avLst>
+          </a:prstGeom>
+          <a:ln w="76200">
+            <a:solidFill>
+              <a:schemeClr val="bg2"/>
+            </a:solidFill>
+            <a:headEnd type="triangle" w="med" len="med"/>
+            <a:tailEnd type="none" w="med" len="med"/>
+          </a:ln>
+        </p:spPr>
+        <p:style>
+          <a:lnRef idx="1">
+            <a:schemeClr val="accent1"/>
+          </a:lnRef>
+          <a:fillRef idx="0">
+            <a:schemeClr val="accent1"/>
+          </a:fillRef>
+          <a:effectRef idx="0">
+            <a:schemeClr val="accent1"/>
+          </a:effectRef>
+          <a:fontRef idx="minor">
+            <a:schemeClr val="tx1"/>
+          </a:fontRef>
+        </p:style>
+      </p:cxnSp>
+      <p:cxnSp>
+        <p:nvCxnSpPr>
+          <p:cNvPr id="65" name="直線矢印コネクタ 64">
+            <a:extLst>
+              <a:ext uri="{FF2B5EF4-FFF2-40B4-BE49-F238E27FC236}">
+                <a16:creationId xmlns:a16="http://schemas.microsoft.com/office/drawing/2014/main" id="{9273587D-8296-936A-FA54-85CBC2064D24}"/>
+              </a:ext>
+            </a:extLst>
+          </p:cNvPr>
+          <p:cNvCxnSpPr>
+            <a:cxnSpLocks/>
+            <a:stCxn id="19" idx="3"/>
+            <a:endCxn id="13" idx="1"/>
+          </p:cNvCxnSpPr>
+          <p:nvPr/>
+        </p:nvCxnSpPr>
+        <p:spPr>
+          <a:xfrm>
+            <a:off x="5815177" y="8684786"/>
+            <a:ext cx="1440000" cy="0"/>
+          </a:xfrm>
+          <a:prstGeom prst="straightConnector1">
+            <a:avLst/>
+          </a:prstGeom>
+          <a:ln w="76200">
+            <a:solidFill>
+              <a:schemeClr val="bg2"/>
+            </a:solidFill>
+            <a:tailEnd type="triangle"/>
+          </a:ln>
+        </p:spPr>
+        <p:style>
+          <a:lnRef idx="1">
+            <a:schemeClr val="accent1"/>
+          </a:lnRef>
+          <a:fillRef idx="0">
+            <a:schemeClr val="accent1"/>
+          </a:fillRef>
+          <a:effectRef idx="0">
+            <a:schemeClr val="accent1"/>
+          </a:effectRef>
+          <a:fontRef idx="minor">
+            <a:schemeClr val="tx1"/>
+          </a:fontRef>
+        </p:style>
+      </p:cxnSp>
+      <p:cxnSp>
+        <p:nvCxnSpPr>
+          <p:cNvPr id="68" name="直線矢印コネクタ 67">
+            <a:extLst>
+              <a:ext uri="{FF2B5EF4-FFF2-40B4-BE49-F238E27FC236}">
+                <a16:creationId xmlns:a16="http://schemas.microsoft.com/office/drawing/2014/main" id="{ACFAEC49-27BD-A934-CD2E-E0D716A8A215}"/>
+              </a:ext>
+            </a:extLst>
+          </p:cNvPr>
+          <p:cNvCxnSpPr>
+            <a:cxnSpLocks/>
+            <a:stCxn id="13" idx="3"/>
+            <a:endCxn id="17" idx="1"/>
+          </p:cNvCxnSpPr>
+          <p:nvPr/>
+        </p:nvCxnSpPr>
+        <p:spPr>
+          <a:xfrm>
+            <a:off x="8695177" y="8684786"/>
+            <a:ext cx="1440000" cy="0"/>
+          </a:xfrm>
+          <a:prstGeom prst="straightConnector1">
+            <a:avLst/>
+          </a:prstGeom>
+          <a:ln w="76200">
+            <a:solidFill>
+              <a:schemeClr val="bg2"/>
+            </a:solidFill>
+            <a:headEnd type="none" w="med" len="med"/>
+            <a:tailEnd type="triangle" w="med" len="med"/>
+          </a:ln>
+        </p:spPr>
+        <p:style>
+          <a:lnRef idx="1">
+            <a:schemeClr val="accent1"/>
+          </a:lnRef>
+          <a:fillRef idx="0">
+            <a:schemeClr val="accent1"/>
+          </a:fillRef>
+          <a:effectRef idx="0">
+            <a:schemeClr val="accent1"/>
+          </a:effectRef>
+          <a:fontRef idx="minor">
+            <a:schemeClr val="tx1"/>
+          </a:fontRef>
+        </p:style>
+      </p:cxnSp>
+      <p:cxnSp>
+        <p:nvCxnSpPr>
+          <p:cNvPr id="73" name="直線矢印コネクタ 72">
+            <a:extLst>
+              <a:ext uri="{FF2B5EF4-FFF2-40B4-BE49-F238E27FC236}">
+                <a16:creationId xmlns:a16="http://schemas.microsoft.com/office/drawing/2014/main" id="{5691002A-7B92-DA17-A0BB-5A938EB6C5D7}"/>
+              </a:ext>
+            </a:extLst>
+          </p:cNvPr>
+          <p:cNvCxnSpPr>
+            <a:cxnSpLocks/>
+            <a:stCxn id="17" idx="3"/>
+            <a:endCxn id="15" idx="1"/>
+          </p:cNvCxnSpPr>
+          <p:nvPr/>
+        </p:nvCxnSpPr>
+        <p:spPr>
+          <a:xfrm>
+            <a:off x="11575177" y="8684786"/>
+            <a:ext cx="1440000" cy="0"/>
+          </a:xfrm>
+          <a:prstGeom prst="straightConnector1">
+            <a:avLst/>
+          </a:prstGeom>
+          <a:ln w="76200">
+            <a:solidFill>
+              <a:schemeClr val="bg2"/>
+            </a:solidFill>
+            <a:tailEnd type="triangle"/>
+          </a:ln>
+        </p:spPr>
+        <p:style>
+          <a:lnRef idx="1">
+            <a:schemeClr val="accent1"/>
+          </a:lnRef>
+          <a:fillRef idx="0">
+            <a:schemeClr val="accent1"/>
+          </a:fillRef>
+          <a:effectRef idx="0">
+            <a:schemeClr val="accent1"/>
+          </a:effectRef>
+          <a:fontRef idx="minor">
+            <a:schemeClr val="tx1"/>
+          </a:fontRef>
+        </p:style>
+      </p:cxnSp>
+      <p:cxnSp>
+        <p:nvCxnSpPr>
+          <p:cNvPr id="83" name="直線矢印コネクタ 82">
+            <a:extLst>
+              <a:ext uri="{FF2B5EF4-FFF2-40B4-BE49-F238E27FC236}">
+                <a16:creationId xmlns:a16="http://schemas.microsoft.com/office/drawing/2014/main" id="{206DD9F1-E8FB-3460-F11A-99C587F360C1}"/>
+              </a:ext>
+            </a:extLst>
+          </p:cNvPr>
+          <p:cNvCxnSpPr>
+            <a:cxnSpLocks/>
+            <a:endCxn id="17" idx="0"/>
+          </p:cNvCxnSpPr>
+          <p:nvPr/>
+        </p:nvCxnSpPr>
+        <p:spPr>
+          <a:xfrm flipH="1">
+            <a:off x="10855177" y="6517848"/>
+            <a:ext cx="4036" cy="1446938"/>
+          </a:xfrm>
+          <a:prstGeom prst="straightConnector1">
+            <a:avLst/>
+          </a:prstGeom>
+          <a:ln w="76200">
+            <a:solidFill>
+              <a:schemeClr val="bg2"/>
+            </a:solidFill>
+            <a:headEnd type="triangle" w="med" len="med"/>
+            <a:tailEnd type="triangle" w="med" len="med"/>
+          </a:ln>
+        </p:spPr>
+        <p:style>
+          <a:lnRef idx="1">
+            <a:schemeClr val="accent1"/>
+          </a:lnRef>
+          <a:fillRef idx="0">
+            <a:schemeClr val="accent1"/>
+          </a:fillRef>
+          <a:effectRef idx="0">
+            <a:schemeClr val="accent1"/>
+          </a:effectRef>
+          <a:fontRef idx="minor">
+            <a:schemeClr val="tx1"/>
+          </a:fontRef>
+        </p:style>
+      </p:cxnSp>
+      <p:sp>
+        <p:nvSpPr>
+          <p:cNvPr id="86" name="テキスト ボックス 85">
+            <a:extLst>
+              <a:ext uri="{FF2B5EF4-FFF2-40B4-BE49-F238E27FC236}">
+                <a16:creationId xmlns:a16="http://schemas.microsoft.com/office/drawing/2014/main" id="{D31B3E8F-015B-1E00-DF51-DCABEF7E86BB}"/>
+              </a:ext>
+            </a:extLst>
+          </p:cNvPr>
+          <p:cNvSpPr txBox="1"/>
+          <p:nvPr/>
+        </p:nvSpPr>
+        <p:spPr>
+          <a:xfrm>
+            <a:off x="12655177" y="9404786"/>
+            <a:ext cx="2160000" cy="369332"/>
+          </a:xfrm>
+          <a:prstGeom prst="rect">
+            <a:avLst/>
+          </a:prstGeom>
+          <a:noFill/>
+        </p:spPr>
+        <p:txBody>
+          <a:bodyPr wrap="square" rtlCol="0">
+            <a:spAutoFit/>
+          </a:bodyPr>
+          <a:lstStyle/>
+          <a:p>
+            <a:pPr algn="ctr"/>
+            <a:r>
+              <a:rPr kumimoji="1" lang="ja-JP" altLang="en-US" dirty="0"/>
+              <a:t>シンプル通知</a:t>
+            </a:r>
+          </a:p>
+        </p:txBody>
+      </p:sp>
+      <p:sp>
+        <p:nvSpPr>
+          <p:cNvPr id="87" name="テキスト ボックス 86">
+            <a:extLst>
+              <a:ext uri="{FF2B5EF4-FFF2-40B4-BE49-F238E27FC236}">
+                <a16:creationId xmlns:a16="http://schemas.microsoft.com/office/drawing/2014/main" id="{A9CE0208-9D37-2EB0-F5B5-D72984A7A648}"/>
+              </a:ext>
+            </a:extLst>
+          </p:cNvPr>
+          <p:cNvSpPr txBox="1"/>
+          <p:nvPr/>
+        </p:nvSpPr>
+        <p:spPr>
+          <a:xfrm>
+            <a:off x="12655177" y="3630910"/>
+            <a:ext cx="2160000" cy="369332"/>
+          </a:xfrm>
+          <a:prstGeom prst="rect">
+            <a:avLst/>
+          </a:prstGeom>
+          <a:noFill/>
+        </p:spPr>
+        <p:txBody>
+          <a:bodyPr wrap="square" rtlCol="0">
+            <a:spAutoFit/>
+          </a:bodyPr>
+          <a:lstStyle/>
+          <a:p>
+            <a:pPr algn="ctr"/>
+            <a:r>
+              <a:rPr kumimoji="1" lang="en-US" altLang="ja-JP" dirty="0"/>
+              <a:t>IAM</a:t>
+            </a:r>
+            <a:endParaRPr kumimoji="1" lang="ja-JP" altLang="en-US" dirty="0"/>
+          </a:p>
+        </p:txBody>
+      </p:sp>
+      <p:sp>
+        <p:nvSpPr>
+          <p:cNvPr id="88" name="テキスト ボックス 87">
+            <a:extLst>
+              <a:ext uri="{FF2B5EF4-FFF2-40B4-BE49-F238E27FC236}">
+                <a16:creationId xmlns:a16="http://schemas.microsoft.com/office/drawing/2014/main" id="{4E65707F-E5F7-54AF-92AA-3E9350A9E3B9}"/>
+              </a:ext>
+            </a:extLst>
+          </p:cNvPr>
+          <p:cNvSpPr txBox="1"/>
+          <p:nvPr/>
+        </p:nvSpPr>
+        <p:spPr>
+          <a:xfrm>
+            <a:off x="4015176" y="12293195"/>
+            <a:ext cx="2160000" cy="646331"/>
+          </a:xfrm>
+          <a:prstGeom prst="rect">
+            <a:avLst/>
+          </a:prstGeom>
+          <a:noFill/>
+        </p:spPr>
+        <p:txBody>
+          <a:bodyPr wrap="square" rtlCol="0">
+            <a:spAutoFit/>
+          </a:bodyPr>
+          <a:lstStyle/>
+          <a:p>
+            <a:pPr algn="ctr"/>
+            <a:r>
+              <a:rPr kumimoji="1" lang="ja-JP" altLang="en-US" dirty="0"/>
+              <a:t>コンテナ</a:t>
+            </a:r>
+            <a:br>
+              <a:rPr kumimoji="1" lang="en-US" altLang="ja-JP" dirty="0"/>
+            </a:br>
+            <a:r>
+              <a:rPr kumimoji="1" lang="ja-JP" altLang="en-US" dirty="0"/>
+              <a:t>レジストリ</a:t>
+            </a:r>
+          </a:p>
+        </p:txBody>
+      </p:sp>
+      <p:cxnSp>
+        <p:nvCxnSpPr>
+          <p:cNvPr id="89" name="コネクタ: カギ線 88">
+            <a:extLst>
+              <a:ext uri="{FF2B5EF4-FFF2-40B4-BE49-F238E27FC236}">
+                <a16:creationId xmlns:a16="http://schemas.microsoft.com/office/drawing/2014/main" id="{02FD2EE3-D794-C514-1597-0C06E27ABCB3}"/>
+              </a:ext>
+            </a:extLst>
+          </p:cNvPr>
+          <p:cNvCxnSpPr>
+            <a:cxnSpLocks/>
+            <a:stCxn id="19" idx="1"/>
+            <a:endCxn id="11" idx="1"/>
+          </p:cNvCxnSpPr>
+          <p:nvPr/>
+        </p:nvCxnSpPr>
+        <p:spPr>
+          <a:xfrm rot="10800000" flipV="1">
+            <a:off x="4375177" y="8684786"/>
+            <a:ext cx="12700" cy="2886938"/>
+          </a:xfrm>
+          <a:prstGeom prst="bentConnector3">
+            <a:avLst>
+              <a:gd name="adj1" fmla="val 1800000"/>
+            </a:avLst>
+          </a:prstGeom>
+          <a:ln w="76200">
+            <a:solidFill>
+              <a:schemeClr val="bg2"/>
+            </a:solidFill>
+            <a:headEnd type="triangle" w="med" len="med"/>
+            <a:tailEnd type="none" w="med" len="med"/>
+          </a:ln>
+        </p:spPr>
+        <p:style>
+          <a:lnRef idx="1">
+            <a:schemeClr val="accent1"/>
+          </a:lnRef>
+          <a:fillRef idx="0">
+            <a:schemeClr val="accent1"/>
+          </a:fillRef>
+          <a:effectRef idx="0">
+            <a:schemeClr val="accent1"/>
+          </a:effectRef>
+          <a:fontRef idx="minor">
+            <a:schemeClr val="tx1"/>
+          </a:fontRef>
+        </p:style>
+      </p:cxnSp>
+      <p:cxnSp>
+        <p:nvCxnSpPr>
+          <p:cNvPr id="95" name="コネクタ: カギ線 94">
+            <a:extLst>
+              <a:ext uri="{FF2B5EF4-FFF2-40B4-BE49-F238E27FC236}">
+                <a16:creationId xmlns:a16="http://schemas.microsoft.com/office/drawing/2014/main" id="{208A6066-B52F-076E-1108-6283AC27275A}"/>
+              </a:ext>
+            </a:extLst>
+          </p:cNvPr>
+          <p:cNvCxnSpPr>
+            <a:cxnSpLocks/>
+            <a:stCxn id="23" idx="1"/>
+            <a:endCxn id="19" idx="3"/>
+          </p:cNvCxnSpPr>
+          <p:nvPr/>
+        </p:nvCxnSpPr>
+        <p:spPr>
+          <a:xfrm rot="10800000">
+            <a:off x="5815177" y="8684786"/>
+            <a:ext cx="1440000" cy="2886938"/>
+          </a:xfrm>
+          <a:prstGeom prst="bentConnector3">
+            <a:avLst>
+              <a:gd name="adj1" fmla="val 50000"/>
+            </a:avLst>
+          </a:prstGeom>
+          <a:ln w="76200">
+            <a:solidFill>
+              <a:schemeClr val="bg2"/>
+            </a:solidFill>
+            <a:headEnd type="triangle" w="med" len="med"/>
+            <a:tailEnd type="none" w="med" len="med"/>
+          </a:ln>
+        </p:spPr>
+        <p:style>
+          <a:lnRef idx="1">
+            <a:schemeClr val="accent1"/>
+          </a:lnRef>
+          <a:fillRef idx="0">
+            <a:schemeClr val="accent1"/>
+          </a:fillRef>
+          <a:effectRef idx="0">
+            <a:schemeClr val="accent1"/>
+          </a:effectRef>
+          <a:fontRef idx="minor">
+            <a:schemeClr val="tx1"/>
+          </a:fontRef>
+        </p:style>
+      </p:cxnSp>
+      <p:sp>
+        <p:nvSpPr>
+          <p:cNvPr id="103" name="テキスト ボックス 102">
+            <a:extLst>
+              <a:ext uri="{FF2B5EF4-FFF2-40B4-BE49-F238E27FC236}">
+                <a16:creationId xmlns:a16="http://schemas.microsoft.com/office/drawing/2014/main" id="{B37FAB20-063D-9DEB-1A9E-B0A18455C9E4}"/>
+              </a:ext>
+            </a:extLst>
+          </p:cNvPr>
+          <p:cNvSpPr txBox="1"/>
+          <p:nvPr/>
+        </p:nvSpPr>
+        <p:spPr>
+          <a:xfrm>
+            <a:off x="4917195" y="1690687"/>
+            <a:ext cx="3240000" cy="584775"/>
+          </a:xfrm>
+          <a:prstGeom prst="rect">
+            <a:avLst/>
+          </a:prstGeom>
+          <a:noFill/>
+        </p:spPr>
+        <p:txBody>
+          <a:bodyPr wrap="square" rtlCol="0">
+            <a:spAutoFit/>
+          </a:bodyPr>
+          <a:lstStyle/>
+          <a:p>
+            <a:pPr algn="ctr"/>
+            <a:r>
+              <a:rPr kumimoji="1" lang="ja-JP" altLang="en-US" sz="3200" dirty="0">
+                <a:solidFill>
+                  <a:schemeClr val="bg1"/>
+                </a:solidFill>
+              </a:rPr>
+              <a:t>既存デモサイト</a:t>
+            </a:r>
+          </a:p>
+        </p:txBody>
+      </p:sp>
+      <p:pic>
+        <p:nvPicPr>
+          <p:cNvPr id="108" name="グラフィックス 107">
+            <a:extLst>
+              <a:ext uri="{FF2B5EF4-FFF2-40B4-BE49-F238E27FC236}">
+                <a16:creationId xmlns:a16="http://schemas.microsoft.com/office/drawing/2014/main" id="{326915F3-37DE-FDE8-3126-A7B9F180CF56}"/>
+              </a:ext>
+            </a:extLst>
+          </p:cNvPr>
+          <p:cNvPicPr>
+            <a:picLocks noChangeAspect="1"/>
+          </p:cNvPicPr>
+          <p:nvPr/>
+        </p:nvPicPr>
+        <p:blipFill>
+          <a:blip>
+            <a:extLst>
+              <a:ext uri="{96DAC541-7B7A-43D3-8B79-37D633B846F1}">
+                <asvg:svgBlip xmlns:asvg="http://schemas.microsoft.com/office/drawing/2016/SVG/main" r:embed="rId7"/>
+              </a:ext>
+            </a:extLst>
+          </a:blip>
+          <a:stretch>
+            <a:fillRect/>
+          </a:stretch>
+        </p:blipFill>
+        <p:spPr>
+          <a:xfrm>
+            <a:off x="10131140" y="5074379"/>
+            <a:ext cx="1440000" cy="1440000"/>
+          </a:xfrm>
+          <a:prstGeom prst="rect">
+            <a:avLst/>
+          </a:prstGeom>
+        </p:spPr>
+      </p:pic>
+      <p:cxnSp>
+        <p:nvCxnSpPr>
+          <p:cNvPr id="111" name="コネクタ: カギ線 110">
+            <a:extLst>
+              <a:ext uri="{FF2B5EF4-FFF2-40B4-BE49-F238E27FC236}">
+                <a16:creationId xmlns:a16="http://schemas.microsoft.com/office/drawing/2014/main" id="{B573A94C-04DC-C0DF-027A-882B14B6CBD9}"/>
+              </a:ext>
+            </a:extLst>
+          </p:cNvPr>
+          <p:cNvCxnSpPr>
+            <a:cxnSpLocks/>
+            <a:stCxn id="17" idx="0"/>
+          </p:cNvCxnSpPr>
+          <p:nvPr/>
+        </p:nvCxnSpPr>
+        <p:spPr>
+          <a:xfrm rot="5400000" flipH="1" flipV="1">
+            <a:off x="11571708" y="5801317"/>
+            <a:ext cx="1446938" cy="2880000"/>
+          </a:xfrm>
+          <a:prstGeom prst="bentConnector3">
+            <a:avLst>
+              <a:gd name="adj1" fmla="val 50000"/>
+            </a:avLst>
+          </a:prstGeom>
+          <a:ln w="76200">
+            <a:solidFill>
+              <a:schemeClr val="bg2"/>
+            </a:solidFill>
+            <a:headEnd type="none" w="med" len="med"/>
+            <a:tailEnd type="triangle" w="med" len="med"/>
+          </a:ln>
+        </p:spPr>
+        <p:style>
+          <a:lnRef idx="1">
+            <a:schemeClr val="accent1"/>
+          </a:lnRef>
+          <a:fillRef idx="0">
+            <a:schemeClr val="accent1"/>
+          </a:fillRef>
+          <a:effectRef idx="0">
+            <a:schemeClr val="accent1"/>
+          </a:effectRef>
+          <a:fontRef idx="minor">
+            <a:schemeClr val="tx1"/>
+          </a:fontRef>
+        </p:style>
+      </p:cxnSp>
+      <p:cxnSp>
+        <p:nvCxnSpPr>
+          <p:cNvPr id="119" name="直線矢印コネクタ 118">
+            <a:extLst>
+              <a:ext uri="{FF2B5EF4-FFF2-40B4-BE49-F238E27FC236}">
+                <a16:creationId xmlns:a16="http://schemas.microsoft.com/office/drawing/2014/main" id="{AE270587-352B-381E-6B55-8DEC5752122E}"/>
+              </a:ext>
+            </a:extLst>
+          </p:cNvPr>
+          <p:cNvCxnSpPr>
+            <a:cxnSpLocks/>
+            <a:stCxn id="50" idx="3"/>
+            <a:endCxn id="108" idx="1"/>
+          </p:cNvCxnSpPr>
+          <p:nvPr/>
+        </p:nvCxnSpPr>
+        <p:spPr>
+          <a:xfrm flipV="1">
+            <a:off x="9415177" y="5794379"/>
+            <a:ext cx="715963" cy="3469"/>
+          </a:xfrm>
+          <a:prstGeom prst="straightConnector1">
+            <a:avLst/>
+          </a:prstGeom>
+          <a:ln w="76200">
+            <a:solidFill>
+              <a:schemeClr val="bg2"/>
+            </a:solidFill>
+            <a:tailEnd type="triangle"/>
+          </a:ln>
+        </p:spPr>
+        <p:style>
+          <a:lnRef idx="1">
+            <a:schemeClr val="accent1"/>
+          </a:lnRef>
+          <a:fillRef idx="0">
+            <a:schemeClr val="accent1"/>
+          </a:fillRef>
+          <a:effectRef idx="0">
+            <a:schemeClr val="accent1"/>
+          </a:effectRef>
+          <a:fontRef idx="minor">
+            <a:schemeClr val="tx1"/>
+          </a:fontRef>
+        </p:style>
+      </p:cxnSp>
+      <p:pic>
+        <p:nvPicPr>
+          <p:cNvPr id="4" name="グラフィックス 3">
+            <a:extLst>
+              <a:ext uri="{FF2B5EF4-FFF2-40B4-BE49-F238E27FC236}">
+                <a16:creationId xmlns:a16="http://schemas.microsoft.com/office/drawing/2014/main" id="{5A0B0430-3A65-5EE3-CEA1-016EC21B0163}"/>
+              </a:ext>
+            </a:extLst>
+          </p:cNvPr>
+          <p:cNvPicPr>
+            <a:picLocks noChangeAspect="1"/>
+          </p:cNvPicPr>
+          <p:nvPr/>
+        </p:nvPicPr>
+        <p:blipFill>
+          <a:blip>
+            <a:extLst>
+              <a:ext uri="{96DAC541-7B7A-43D3-8B79-37D633B846F1}">
+                <asvg:svgBlip xmlns:asvg="http://schemas.microsoft.com/office/drawing/2016/SVG/main" r:embed="rId17"/>
+              </a:ext>
+            </a:extLst>
+          </a:blip>
+          <a:stretch>
+            <a:fillRect/>
+          </a:stretch>
+        </p:blipFill>
+        <p:spPr>
+          <a:xfrm>
+            <a:off x="10133878" y="10853195"/>
+            <a:ext cx="1440000" cy="1440000"/>
+          </a:xfrm>
+          <a:prstGeom prst="rect">
+            <a:avLst/>
+          </a:prstGeom>
+        </p:spPr>
+      </p:pic>
+      <p:pic>
+        <p:nvPicPr>
+          <p:cNvPr id="8" name="グラフィックス 7">
+            <a:extLst>
+              <a:ext uri="{FF2B5EF4-FFF2-40B4-BE49-F238E27FC236}">
+                <a16:creationId xmlns:a16="http://schemas.microsoft.com/office/drawing/2014/main" id="{18007945-0AF7-1492-7D19-B756EE99DF35}"/>
+              </a:ext>
+            </a:extLst>
+          </p:cNvPr>
+          <p:cNvPicPr>
+            <a:picLocks noChangeAspect="1"/>
+          </p:cNvPicPr>
+          <p:nvPr/>
+        </p:nvPicPr>
+        <p:blipFill>
+          <a:blip>
+            <a:extLst>
+              <a:ext uri="{96DAC541-7B7A-43D3-8B79-37D633B846F1}">
+                <asvg:svgBlip xmlns:asvg="http://schemas.microsoft.com/office/drawing/2016/SVG/main" r:embed="rId18"/>
+              </a:ext>
+            </a:extLst>
+          </a:blip>
+          <a:stretch>
+            <a:fillRect/>
+          </a:stretch>
+        </p:blipFill>
+        <p:spPr>
+          <a:xfrm>
+            <a:off x="13009262" y="10844786"/>
+            <a:ext cx="1440000" cy="1440000"/>
+          </a:xfrm>
+          <a:prstGeom prst="rect">
+            <a:avLst/>
+          </a:prstGeom>
+        </p:spPr>
+      </p:pic>
+      <p:sp>
+        <p:nvSpPr>
+          <p:cNvPr id="10" name="テキスト ボックス 9">
+            <a:extLst>
+              <a:ext uri="{FF2B5EF4-FFF2-40B4-BE49-F238E27FC236}">
+                <a16:creationId xmlns:a16="http://schemas.microsoft.com/office/drawing/2014/main" id="{FC86C299-4742-744B-F2DF-EEB56BD0CFEE}"/>
+              </a:ext>
+            </a:extLst>
+          </p:cNvPr>
+          <p:cNvSpPr txBox="1"/>
+          <p:nvPr/>
+        </p:nvSpPr>
+        <p:spPr>
+          <a:xfrm>
+            <a:off x="9782389" y="12293195"/>
+            <a:ext cx="2160000" cy="369332"/>
+          </a:xfrm>
+          <a:prstGeom prst="rect">
+            <a:avLst/>
+          </a:prstGeom>
+          <a:noFill/>
+        </p:spPr>
+        <p:txBody>
+          <a:bodyPr wrap="square" rtlCol="0">
+            <a:spAutoFit/>
+          </a:bodyPr>
+          <a:lstStyle/>
+          <a:p>
+            <a:pPr algn="ctr"/>
+            <a:r>
+              <a:rPr kumimoji="1" lang="en-US" altLang="ja-JP" dirty="0"/>
+              <a:t>KMS</a:t>
+            </a:r>
+            <a:endParaRPr kumimoji="1" lang="ja-JP" altLang="en-US" dirty="0"/>
+          </a:p>
+        </p:txBody>
+      </p:sp>
+      <p:sp>
+        <p:nvSpPr>
+          <p:cNvPr id="12" name="テキスト ボックス 11">
+            <a:extLst>
+              <a:ext uri="{FF2B5EF4-FFF2-40B4-BE49-F238E27FC236}">
+                <a16:creationId xmlns:a16="http://schemas.microsoft.com/office/drawing/2014/main" id="{04CB0EB4-7CE2-79D5-F5B9-DDB25C330FEC}"/>
+              </a:ext>
+            </a:extLst>
+          </p:cNvPr>
+          <p:cNvSpPr txBox="1"/>
+          <p:nvPr/>
+        </p:nvSpPr>
+        <p:spPr>
+          <a:xfrm>
+            <a:off x="12649262" y="12284786"/>
+            <a:ext cx="2160000" cy="369332"/>
+          </a:xfrm>
+          <a:prstGeom prst="rect">
+            <a:avLst/>
+          </a:prstGeom>
+          <a:noFill/>
+        </p:spPr>
+        <p:txBody>
+          <a:bodyPr wrap="square" rtlCol="0">
+            <a:spAutoFit/>
+          </a:bodyPr>
+          <a:lstStyle/>
+          <a:p>
+            <a:pPr algn="ctr"/>
+            <a:r>
+              <a:rPr kumimoji="1" lang="ja-JP" altLang="en-US" dirty="0"/>
+              <a:t>パケットフィルタ</a:t>
+            </a:r>
+          </a:p>
+        </p:txBody>
+      </p:sp>
+      <p:cxnSp>
+        <p:nvCxnSpPr>
+          <p:cNvPr id="14" name="コネクタ: カギ線 13">
+            <a:extLst>
+              <a:ext uri="{FF2B5EF4-FFF2-40B4-BE49-F238E27FC236}">
+                <a16:creationId xmlns:a16="http://schemas.microsoft.com/office/drawing/2014/main" id="{6E55858D-2BC0-4DB9-3BF6-4D15DF4B3F96}"/>
+              </a:ext>
+            </a:extLst>
+          </p:cNvPr>
+          <p:cNvCxnSpPr>
+            <a:cxnSpLocks/>
+            <a:stCxn id="17" idx="2"/>
+            <a:endCxn id="8" idx="0"/>
+          </p:cNvCxnSpPr>
+          <p:nvPr/>
+        </p:nvCxnSpPr>
+        <p:spPr>
+          <a:xfrm rot="16200000" flipH="1">
+            <a:off x="11572219" y="8687743"/>
+            <a:ext cx="1440000" cy="2874085"/>
+          </a:xfrm>
+          <a:prstGeom prst="bentConnector3">
+            <a:avLst>
+              <a:gd name="adj1" fmla="val 50000"/>
+            </a:avLst>
+          </a:prstGeom>
+          <a:ln w="76200">
+            <a:solidFill>
+              <a:schemeClr val="bg2"/>
+            </a:solidFill>
+            <a:headEnd type="triangle" w="med" len="med"/>
+            <a:tailEnd type="none" w="med" len="med"/>
+          </a:ln>
+        </p:spPr>
+        <p:style>
+          <a:lnRef idx="1">
+            <a:schemeClr val="accent1"/>
+          </a:lnRef>
+          <a:fillRef idx="0">
+            <a:schemeClr val="accent1"/>
+          </a:fillRef>
+          <a:effectRef idx="0">
+            <a:schemeClr val="accent1"/>
+          </a:effectRef>
+          <a:fontRef idx="minor">
+            <a:schemeClr val="tx1"/>
+          </a:fontRef>
+        </p:style>
+      </p:cxnSp>
+      <p:cxnSp>
+        <p:nvCxnSpPr>
+          <p:cNvPr id="33" name="直線矢印コネクタ 32">
+            <a:extLst>
+              <a:ext uri="{FF2B5EF4-FFF2-40B4-BE49-F238E27FC236}">
+                <a16:creationId xmlns:a16="http://schemas.microsoft.com/office/drawing/2014/main" id="{C73639CF-2D01-0008-8E75-F38D6266238B}"/>
+              </a:ext>
+            </a:extLst>
+          </p:cNvPr>
+          <p:cNvCxnSpPr>
+            <a:cxnSpLocks/>
+            <a:stCxn id="4" idx="0"/>
+            <a:endCxn id="17" idx="2"/>
+          </p:cNvCxnSpPr>
+          <p:nvPr/>
+        </p:nvCxnSpPr>
+        <p:spPr>
+          <a:xfrm flipV="1">
+            <a:off x="10853878" y="9404786"/>
+            <a:ext cx="1299" cy="1448409"/>
+          </a:xfrm>
+          <a:prstGeom prst="straightConnector1">
+            <a:avLst/>
+          </a:prstGeom>
+          <a:ln w="76200">
+            <a:solidFill>
+              <a:schemeClr val="bg2"/>
+            </a:solidFill>
+            <a:tailEnd type="triangle"/>
+          </a:ln>
+        </p:spPr>
+        <p:style>
+          <a:lnRef idx="1">
+            <a:schemeClr val="accent1"/>
+          </a:lnRef>
+          <a:fillRef idx="0">
+            <a:schemeClr val="accent1"/>
+          </a:fillRef>
+          <a:effectRef idx="0">
+            <a:schemeClr val="accent1"/>
+          </a:effectRef>
+          <a:fontRef idx="minor">
+            <a:schemeClr val="tx1"/>
+          </a:fontRef>
+        </p:style>
+      </p:cxnSp>
+      <p:sp>
+        <p:nvSpPr>
+          <p:cNvPr id="37" name="テキスト ボックス 36">
+            <a:extLst>
+              <a:ext uri="{FF2B5EF4-FFF2-40B4-BE49-F238E27FC236}">
+                <a16:creationId xmlns:a16="http://schemas.microsoft.com/office/drawing/2014/main" id="{6E228994-29B8-E020-38DE-E12903E82B22}"/>
+              </a:ext>
+            </a:extLst>
+          </p:cNvPr>
+          <p:cNvSpPr txBox="1"/>
+          <p:nvPr/>
+        </p:nvSpPr>
+        <p:spPr>
+          <a:xfrm>
+            <a:off x="11483719" y="10285427"/>
+            <a:ext cx="1617000" cy="369332"/>
+          </a:xfrm>
+          <a:prstGeom prst="rect">
+            <a:avLst/>
+          </a:prstGeom>
+          <a:noFill/>
+        </p:spPr>
+        <p:txBody>
+          <a:bodyPr wrap="square" rtlCol="0">
+            <a:spAutoFit/>
+          </a:bodyPr>
+          <a:lstStyle/>
+          <a:p>
+            <a:r>
+              <a:rPr kumimoji="1" lang="ja-JP" altLang="en-US" dirty="0">
+                <a:solidFill>
+                  <a:schemeClr val="bg2"/>
+                </a:solidFill>
+              </a:rPr>
+              <a:t>暗号化＆保護</a:t>
+            </a:r>
+          </a:p>
+        </p:txBody>
+      </p:sp>
+      <p:sp>
+        <p:nvSpPr>
+          <p:cNvPr id="6" name="テキスト ボックス 5">
+            <a:extLst>
+              <a:ext uri="{FF2B5EF4-FFF2-40B4-BE49-F238E27FC236}">
+                <a16:creationId xmlns:a16="http://schemas.microsoft.com/office/drawing/2014/main" id="{B044DBE5-809F-63BA-0378-C28A6E8EE623}"/>
+              </a:ext>
+            </a:extLst>
+          </p:cNvPr>
+          <p:cNvSpPr txBox="1"/>
+          <p:nvPr/>
+        </p:nvSpPr>
+        <p:spPr>
+          <a:xfrm>
+            <a:off x="9587963" y="5291157"/>
+            <a:ext cx="360000" cy="369332"/>
+          </a:xfrm>
+          <a:prstGeom prst="rect">
+            <a:avLst/>
+          </a:prstGeom>
+          <a:noFill/>
+        </p:spPr>
+        <p:txBody>
+          <a:bodyPr wrap="square" rtlCol="0">
+            <a:spAutoFit/>
+          </a:bodyPr>
+          <a:lstStyle/>
+          <a:p>
+            <a:pPr algn="ctr"/>
+            <a:r>
+              <a:rPr kumimoji="1" lang="ja-JP" altLang="en-US" dirty="0"/>
+              <a:t>①</a:t>
+            </a:r>
+          </a:p>
+        </p:txBody>
+      </p:sp>
+      <p:sp>
+        <p:nvSpPr>
+          <p:cNvPr id="18" name="テキスト ボックス 17">
+            <a:extLst>
+              <a:ext uri="{FF2B5EF4-FFF2-40B4-BE49-F238E27FC236}">
+                <a16:creationId xmlns:a16="http://schemas.microsoft.com/office/drawing/2014/main" id="{1AA59B4F-F387-A470-62B6-17C8011D1D66}"/>
+              </a:ext>
+            </a:extLst>
+          </p:cNvPr>
+          <p:cNvSpPr txBox="1"/>
+          <p:nvPr/>
+        </p:nvSpPr>
+        <p:spPr>
+          <a:xfrm>
+            <a:off x="7492346" y="7144621"/>
+            <a:ext cx="360000" cy="369332"/>
+          </a:xfrm>
+          <a:prstGeom prst="rect">
+            <a:avLst/>
+          </a:prstGeom>
+          <a:noFill/>
+        </p:spPr>
+        <p:txBody>
+          <a:bodyPr wrap="square" rtlCol="0">
+            <a:spAutoFit/>
+          </a:bodyPr>
+          <a:lstStyle/>
+          <a:p>
+            <a:pPr algn="ctr"/>
+            <a:r>
+              <a:rPr kumimoji="1" lang="ja-JP" altLang="en-US" dirty="0"/>
+              <a:t>②</a:t>
+            </a:r>
+          </a:p>
+        </p:txBody>
+      </p:sp>
+      <p:sp>
+        <p:nvSpPr>
+          <p:cNvPr id="20" name="テキスト ボックス 19">
+            <a:extLst>
+              <a:ext uri="{FF2B5EF4-FFF2-40B4-BE49-F238E27FC236}">
+                <a16:creationId xmlns:a16="http://schemas.microsoft.com/office/drawing/2014/main" id="{516F639C-2707-8495-49AC-3CA7F75FA9E7}"/>
+              </a:ext>
+            </a:extLst>
+          </p:cNvPr>
+          <p:cNvSpPr txBox="1"/>
+          <p:nvPr/>
+        </p:nvSpPr>
+        <p:spPr>
+          <a:xfrm>
+            <a:off x="6353159" y="8249730"/>
+            <a:ext cx="360000" cy="369332"/>
+          </a:xfrm>
+          <a:prstGeom prst="rect">
+            <a:avLst/>
+          </a:prstGeom>
+          <a:noFill/>
+        </p:spPr>
+        <p:txBody>
+          <a:bodyPr wrap="square" rtlCol="0">
+            <a:spAutoFit/>
+          </a:bodyPr>
+          <a:lstStyle/>
+          <a:p>
+            <a:pPr algn="ctr"/>
+            <a:r>
+              <a:rPr kumimoji="1" lang="ja-JP" altLang="en-US" dirty="0"/>
+              <a:t>③</a:t>
+            </a:r>
+          </a:p>
+        </p:txBody>
+      </p:sp>
+      <p:sp>
+        <p:nvSpPr>
+          <p:cNvPr id="22" name="テキスト ボックス 21">
+            <a:extLst>
+              <a:ext uri="{FF2B5EF4-FFF2-40B4-BE49-F238E27FC236}">
+                <a16:creationId xmlns:a16="http://schemas.microsoft.com/office/drawing/2014/main" id="{6ABCB7BC-E877-EB24-3EB7-4FE2320BB81C}"/>
+              </a:ext>
+            </a:extLst>
+          </p:cNvPr>
+          <p:cNvSpPr txBox="1"/>
+          <p:nvPr/>
+        </p:nvSpPr>
+        <p:spPr>
+          <a:xfrm>
+            <a:off x="9237195" y="8247733"/>
+            <a:ext cx="360000" cy="369332"/>
+          </a:xfrm>
+          <a:prstGeom prst="rect">
+            <a:avLst/>
+          </a:prstGeom>
+          <a:noFill/>
+        </p:spPr>
+        <p:txBody>
+          <a:bodyPr wrap="square" rtlCol="0">
+            <a:spAutoFit/>
+          </a:bodyPr>
+          <a:lstStyle/>
+          <a:p>
+            <a:pPr algn="ctr"/>
+            <a:r>
+              <a:rPr kumimoji="1" lang="ja-JP" altLang="en-US" dirty="0"/>
+              <a:t>④</a:t>
+            </a:r>
+          </a:p>
+        </p:txBody>
+      </p:sp>
+      <p:sp>
+        <p:nvSpPr>
+          <p:cNvPr id="24" name="テキスト ボックス 23">
+            <a:extLst>
+              <a:ext uri="{FF2B5EF4-FFF2-40B4-BE49-F238E27FC236}">
+                <a16:creationId xmlns:a16="http://schemas.microsoft.com/office/drawing/2014/main" id="{559A6626-25AE-D0F5-88CE-1962050856DD}"/>
+              </a:ext>
+            </a:extLst>
+          </p:cNvPr>
+          <p:cNvSpPr txBox="1"/>
+          <p:nvPr/>
+        </p:nvSpPr>
+        <p:spPr>
+          <a:xfrm>
+            <a:off x="10790322" y="7389751"/>
+            <a:ext cx="854323" cy="369332"/>
+          </a:xfrm>
+          <a:prstGeom prst="rect">
+            <a:avLst/>
+          </a:prstGeom>
+          <a:noFill/>
+        </p:spPr>
+        <p:txBody>
+          <a:bodyPr wrap="square" rtlCol="0">
+            <a:spAutoFit/>
+          </a:bodyPr>
+          <a:lstStyle/>
+          <a:p>
+            <a:pPr algn="ctr"/>
+            <a:r>
+              <a:rPr kumimoji="1" lang="ja-JP" altLang="en-US" dirty="0"/>
+              <a:t>⑤</a:t>
+            </a:r>
+            <a:r>
+              <a:rPr kumimoji="1" lang="en-US" altLang="ja-JP" dirty="0"/>
+              <a:t>-</a:t>
+            </a:r>
+            <a:r>
+              <a:rPr kumimoji="1" lang="ja-JP" altLang="en-US" dirty="0"/>
+              <a:t>⑦</a:t>
+            </a:r>
+          </a:p>
+        </p:txBody>
+      </p:sp>
+      <p:sp>
+        <p:nvSpPr>
+          <p:cNvPr id="25" name="テキスト ボックス 24">
+            <a:extLst>
+              <a:ext uri="{FF2B5EF4-FFF2-40B4-BE49-F238E27FC236}">
+                <a16:creationId xmlns:a16="http://schemas.microsoft.com/office/drawing/2014/main" id="{C1CE3DB8-D1D4-F33C-9DCE-1F34CFBEEA5F}"/>
+              </a:ext>
+            </a:extLst>
+          </p:cNvPr>
+          <p:cNvSpPr txBox="1"/>
+          <p:nvPr/>
+        </p:nvSpPr>
+        <p:spPr>
+          <a:xfrm>
+            <a:off x="12011206" y="8246920"/>
+            <a:ext cx="360000" cy="369332"/>
+          </a:xfrm>
+          <a:prstGeom prst="rect">
+            <a:avLst/>
+          </a:prstGeom>
+          <a:noFill/>
+        </p:spPr>
+        <p:txBody>
+          <a:bodyPr wrap="square" rtlCol="0">
+            <a:spAutoFit/>
+          </a:bodyPr>
+          <a:lstStyle/>
+          <a:p>
+            <a:pPr algn="ctr"/>
+            <a:r>
+              <a:rPr kumimoji="1" lang="ja-JP" altLang="en-US" dirty="0"/>
+              <a:t>⑧</a:t>
+            </a:r>
+          </a:p>
+        </p:txBody>
+      </p:sp>
+      <p:pic>
+        <p:nvPicPr>
+          <p:cNvPr id="35" name="図 34">
+            <a:extLst>
+              <a:ext uri="{FF2B5EF4-FFF2-40B4-BE49-F238E27FC236}">
+                <a16:creationId xmlns:a16="http://schemas.microsoft.com/office/drawing/2014/main" id="{64C8996C-730A-7EAB-9F8B-48B002CCA8D1}"/>
+              </a:ext>
+            </a:extLst>
+          </p:cNvPr>
+          <p:cNvPicPr>
+            <a:picLocks noChangeAspect="1"/>
+          </p:cNvPicPr>
+          <p:nvPr/>
+        </p:nvPicPr>
+        <p:blipFill>
+          <a:blip r:embed="rId19"/>
+          <a:stretch>
+            <a:fillRect/>
+          </a:stretch>
+        </p:blipFill>
+        <p:spPr>
+          <a:xfrm>
+            <a:off x="12839278" y="5077848"/>
+            <a:ext cx="1794392" cy="1440000"/>
+          </a:xfrm>
+          <a:prstGeom prst="rect">
+            <a:avLst/>
+          </a:prstGeom>
+        </p:spPr>
+      </p:pic>
+    </p:spTree>
+    <p:extLst>
+      <p:ext uri="{BB962C8B-B14F-4D97-AF65-F5344CB8AC3E}">
+        <p14:creationId xmlns:p14="http://schemas.microsoft.com/office/powerpoint/2010/main" val="1909664869"/>
+      </p:ext>
+    </p:extLst>
+  </p:cSld>
+  <p:clrMapOvr>
+    <a:masterClrMapping/>
+  </p:clrMapOvr>
+</p:sld>
+</file>
+
+<file path=ppt/slides/slide3.xml><?xml version="1.0" encoding="utf-8"?>
 <p:sld xmlns:a="http://schemas.openxmlformats.org/drawingml/2006/main" xmlns:r="http://schemas.openxmlformats.org/officeDocument/2006/relationships" xmlns:p="http://schemas.openxmlformats.org/presentationml/2006/main">
   <p:cSld>
     <p:spTree>

--- a/構成図.pptx
+++ b/構成図.pptx
@@ -183,7 +183,7 @@
 <file path=ppt/revisionInfo.xml><?xml version="1.0" encoding="utf-8"?>
 <p1510:revInfo xmlns:a="http://schemas.openxmlformats.org/drawingml/2006/main" xmlns:r="http://schemas.openxmlformats.org/officeDocument/2006/relationships" xmlns:p1510="http://schemas.microsoft.com/office/powerpoint/2015/10/main">
   <p1510:revLst>
-    <p1510:client id="{37C306CE-836D-479E-BF46-90B4FA3C69C3}" v="35" dt="2026-06-04T03:44:10.875"/>
+    <p1510:client id="{37C306CE-836D-479E-BF46-90B4FA3C69C3}" v="42" dt="2026-06-04T06:18:58.523"/>
   </p1510:revLst>
 </p1510:revInfo>
 </file>
@@ -193,12 +193,12 @@
   <pc:docChgLst>
     <pc:chgData name="城谷 匠" userId="afbae57c-d4ca-4e58-bc9a-6f765e208d89" providerId="ADAL" clId="{FD963559-32B2-43B7-8F97-A1E47AC731FA}"/>
     <pc:docChg chg="undo redo custSel addSld modSld sldOrd">
-      <pc:chgData name="城谷 匠" userId="afbae57c-d4ca-4e58-bc9a-6f765e208d89" providerId="ADAL" clId="{FD963559-32B2-43B7-8F97-A1E47AC731FA}" dt="2026-06-04T03:45:32.328" v="373" actId="1076"/>
+      <pc:chgData name="城谷 匠" userId="afbae57c-d4ca-4e58-bc9a-6f765e208d89" providerId="ADAL" clId="{FD963559-32B2-43B7-8F97-A1E47AC731FA}" dt="2026-06-04T06:19:26.970" v="414" actId="729"/>
       <pc:docMkLst>
         <pc:docMk/>
       </pc:docMkLst>
-      <pc:sldChg chg="addSp delSp modSp mod">
-        <pc:chgData name="城谷 匠" userId="afbae57c-d4ca-4e58-bc9a-6f765e208d89" providerId="ADAL" clId="{FD963559-32B2-43B7-8F97-A1E47AC731FA}" dt="2026-06-04T00:36:01.142" v="329" actId="20577"/>
+      <pc:sldChg chg="addSp delSp modSp mod modShow">
+        <pc:chgData name="城谷 匠" userId="afbae57c-d4ca-4e58-bc9a-6f765e208d89" providerId="ADAL" clId="{FD963559-32B2-43B7-8F97-A1E47AC731FA}" dt="2026-06-04T06:19:26.970" v="414" actId="729"/>
         <pc:sldMkLst>
           <pc:docMk/>
           <pc:sldMk cId="2769160972" sldId="256"/>
@@ -468,11 +468,163 @@
         </pc:spChg>
       </pc:sldChg>
       <pc:sldChg chg="addSp delSp modSp add mod ord">
-        <pc:chgData name="城谷 匠" userId="afbae57c-d4ca-4e58-bc9a-6f765e208d89" providerId="ADAL" clId="{FD963559-32B2-43B7-8F97-A1E47AC731FA}" dt="2026-06-04T03:45:32.328" v="373" actId="1076"/>
+        <pc:chgData name="城谷 匠" userId="afbae57c-d4ca-4e58-bc9a-6f765e208d89" providerId="ADAL" clId="{FD963559-32B2-43B7-8F97-A1E47AC731FA}" dt="2026-06-04T06:18:58.523" v="413" actId="164"/>
         <pc:sldMkLst>
           <pc:docMk/>
           <pc:sldMk cId="1909664869" sldId="258"/>
         </pc:sldMkLst>
+        <pc:spChg chg="mod">
+          <ac:chgData name="城谷 匠" userId="afbae57c-d4ca-4e58-bc9a-6f765e208d89" providerId="ADAL" clId="{FD963559-32B2-43B7-8F97-A1E47AC731FA}" dt="2026-06-04T06:18:58.523" v="413" actId="164"/>
+          <ac:spMkLst>
+            <pc:docMk/>
+            <pc:sldMk cId="1909664869" sldId="258"/>
+            <ac:spMk id="10" creationId="{FC86C299-4742-744B-F2DF-EEB56BD0CFEE}"/>
+          </ac:spMkLst>
+        </pc:spChg>
+        <pc:spChg chg="mod">
+          <ac:chgData name="城谷 匠" userId="afbae57c-d4ca-4e58-bc9a-6f765e208d89" providerId="ADAL" clId="{FD963559-32B2-43B7-8F97-A1E47AC731FA}" dt="2026-06-04T06:18:58.523" v="413" actId="164"/>
+          <ac:spMkLst>
+            <pc:docMk/>
+            <pc:sldMk cId="1909664869" sldId="258"/>
+            <ac:spMk id="18" creationId="{1AA59B4F-F387-A470-62B6-17C8011D1D66}"/>
+          </ac:spMkLst>
+        </pc:spChg>
+        <pc:spChg chg="mod">
+          <ac:chgData name="城谷 匠" userId="afbae57c-d4ca-4e58-bc9a-6f765e208d89" providerId="ADAL" clId="{FD963559-32B2-43B7-8F97-A1E47AC731FA}" dt="2026-06-04T06:18:56.235" v="412" actId="164"/>
+          <ac:spMkLst>
+            <pc:docMk/>
+            <pc:sldMk cId="1909664869" sldId="258"/>
+            <ac:spMk id="24" creationId="{559A6626-25AE-D0F5-88CE-1962050856DD}"/>
+          </ac:spMkLst>
+        </pc:spChg>
+        <pc:spChg chg="mod">
+          <ac:chgData name="城谷 匠" userId="afbae57c-d4ca-4e58-bc9a-6f765e208d89" providerId="ADAL" clId="{FD963559-32B2-43B7-8F97-A1E47AC731FA}" dt="2026-06-04T06:18:56.235" v="412" actId="164"/>
+          <ac:spMkLst>
+            <pc:docMk/>
+            <pc:sldMk cId="1909664869" sldId="258"/>
+            <ac:spMk id="25" creationId="{C1CE3DB8-D1D4-F33C-9DCE-1F34CFBEEA5F}"/>
+          </ac:spMkLst>
+        </pc:spChg>
+        <pc:spChg chg="mod">
+          <ac:chgData name="城谷 匠" userId="afbae57c-d4ca-4e58-bc9a-6f765e208d89" providerId="ADAL" clId="{FD963559-32B2-43B7-8F97-A1E47AC731FA}" dt="2026-06-04T06:18:58.523" v="413" actId="164"/>
+          <ac:spMkLst>
+            <pc:docMk/>
+            <pc:sldMk cId="1909664869" sldId="258"/>
+            <ac:spMk id="26" creationId="{DBBBAD40-DC74-53AF-B1A6-61EC5FB79F42}"/>
+          </ac:spMkLst>
+        </pc:spChg>
+        <pc:spChg chg="mod">
+          <ac:chgData name="城谷 匠" userId="afbae57c-d4ca-4e58-bc9a-6f765e208d89" providerId="ADAL" clId="{FD963559-32B2-43B7-8F97-A1E47AC731FA}" dt="2026-06-04T06:18:56.235" v="412" actId="164"/>
+          <ac:spMkLst>
+            <pc:docMk/>
+            <pc:sldMk cId="1909664869" sldId="258"/>
+            <ac:spMk id="27" creationId="{0F5FDAE2-B63B-58C4-B283-5A0508D901CA}"/>
+          </ac:spMkLst>
+        </pc:spChg>
+        <pc:spChg chg="mod">
+          <ac:chgData name="城谷 匠" userId="afbae57c-d4ca-4e58-bc9a-6f765e208d89" providerId="ADAL" clId="{FD963559-32B2-43B7-8F97-A1E47AC731FA}" dt="2026-06-04T06:18:58.523" v="413" actId="164"/>
+          <ac:spMkLst>
+            <pc:docMk/>
+            <pc:sldMk cId="1909664869" sldId="258"/>
+            <ac:spMk id="29" creationId="{963A4C2B-2838-D764-29F6-476B6196C6FD}"/>
+          </ac:spMkLst>
+        </pc:spChg>
+        <pc:spChg chg="mod">
+          <ac:chgData name="城谷 匠" userId="afbae57c-d4ca-4e58-bc9a-6f765e208d89" providerId="ADAL" clId="{FD963559-32B2-43B7-8F97-A1E47AC731FA}" dt="2026-06-04T06:18:56.235" v="412" actId="164"/>
+          <ac:spMkLst>
+            <pc:docMk/>
+            <pc:sldMk cId="1909664869" sldId="258"/>
+            <ac:spMk id="30" creationId="{3F0297FD-681C-56D4-9E51-5FC299D31BB1}"/>
+          </ac:spMkLst>
+        </pc:spChg>
+        <pc:spChg chg="mod">
+          <ac:chgData name="城谷 匠" userId="afbae57c-d4ca-4e58-bc9a-6f765e208d89" providerId="ADAL" clId="{FD963559-32B2-43B7-8F97-A1E47AC731FA}" dt="2026-06-04T06:18:58.523" v="413" actId="164"/>
+          <ac:spMkLst>
+            <pc:docMk/>
+            <pc:sldMk cId="1909664869" sldId="258"/>
+            <ac:spMk id="31" creationId="{617787D3-9C49-2845-0069-537C6682FAC5}"/>
+          </ac:spMkLst>
+        </pc:spChg>
+        <pc:spChg chg="mod">
+          <ac:chgData name="城谷 匠" userId="afbae57c-d4ca-4e58-bc9a-6f765e208d89" providerId="ADAL" clId="{FD963559-32B2-43B7-8F97-A1E47AC731FA}" dt="2026-06-04T06:18:58.523" v="413" actId="164"/>
+          <ac:spMkLst>
+            <pc:docMk/>
+            <pc:sldMk cId="1909664869" sldId="258"/>
+            <ac:spMk id="32" creationId="{EFA36F60-7721-0273-1A40-116E6883381F}"/>
+          </ac:spMkLst>
+        </pc:spChg>
+        <pc:spChg chg="add del mod topLvl">
+          <ac:chgData name="城谷 匠" userId="afbae57c-d4ca-4e58-bc9a-6f765e208d89" providerId="ADAL" clId="{FD963559-32B2-43B7-8F97-A1E47AC731FA}" dt="2026-06-04T06:18:58.523" v="413" actId="164"/>
+          <ac:spMkLst>
+            <pc:docMk/>
+            <pc:sldMk cId="1909664869" sldId="258"/>
+            <ac:spMk id="35" creationId="{5A1DAF6F-29E7-954E-7F60-6BE71360E768}"/>
+          </ac:spMkLst>
+        </pc:spChg>
+        <pc:spChg chg="mod">
+          <ac:chgData name="城谷 匠" userId="afbae57c-d4ca-4e58-bc9a-6f765e208d89" providerId="ADAL" clId="{FD963559-32B2-43B7-8F97-A1E47AC731FA}" dt="2026-06-04T06:18:56.235" v="412" actId="164"/>
+          <ac:spMkLst>
+            <pc:docMk/>
+            <pc:sldMk cId="1909664869" sldId="258"/>
+            <ac:spMk id="37" creationId="{6E228994-29B8-E020-38DE-E12903E82B22}"/>
+          </ac:spMkLst>
+        </pc:spChg>
+        <pc:spChg chg="mod">
+          <ac:chgData name="城谷 匠" userId="afbae57c-d4ca-4e58-bc9a-6f765e208d89" providerId="ADAL" clId="{FD963559-32B2-43B7-8F97-A1E47AC731FA}" dt="2026-06-04T06:18:58.523" v="413" actId="164"/>
+          <ac:spMkLst>
+            <pc:docMk/>
+            <pc:sldMk cId="1909664869" sldId="258"/>
+            <ac:spMk id="86" creationId="{D31B3E8F-015B-1E00-DF51-DCABEF7E86BB}"/>
+          </ac:spMkLst>
+        </pc:spChg>
+        <pc:spChg chg="mod">
+          <ac:chgData name="城谷 匠" userId="afbae57c-d4ca-4e58-bc9a-6f765e208d89" providerId="ADAL" clId="{FD963559-32B2-43B7-8F97-A1E47AC731FA}" dt="2026-06-04T06:18:58.523" v="413" actId="164"/>
+          <ac:spMkLst>
+            <pc:docMk/>
+            <pc:sldMk cId="1909664869" sldId="258"/>
+            <ac:spMk id="87" creationId="{A9CE0208-9D37-2EB0-F5B5-D72984A7A648}"/>
+          </ac:spMkLst>
+        </pc:spChg>
+        <pc:spChg chg="mod">
+          <ac:chgData name="城谷 匠" userId="afbae57c-d4ca-4e58-bc9a-6f765e208d89" providerId="ADAL" clId="{FD963559-32B2-43B7-8F97-A1E47AC731FA}" dt="2026-06-04T06:18:58.523" v="413" actId="164"/>
+          <ac:spMkLst>
+            <pc:docMk/>
+            <pc:sldMk cId="1909664869" sldId="258"/>
+            <ac:spMk id="103" creationId="{B37FAB20-063D-9DEB-1A9E-B0A18455C9E4}"/>
+          </ac:spMkLst>
+        </pc:spChg>
+        <pc:grpChg chg="add del mod">
+          <ac:chgData name="城谷 匠" userId="afbae57c-d4ca-4e58-bc9a-6f765e208d89" providerId="ADAL" clId="{FD963559-32B2-43B7-8F97-A1E47AC731FA}" dt="2026-06-04T06:17:34.046" v="402" actId="165"/>
+          <ac:grpSpMkLst>
+            <pc:docMk/>
+            <pc:sldMk cId="1909664869" sldId="258"/>
+            <ac:grpSpMk id="3" creationId="{ACC79E90-2C9B-F87C-64A6-4D52653ECB3F}"/>
+          </ac:grpSpMkLst>
+        </pc:grpChg>
+        <pc:grpChg chg="add mod">
+          <ac:chgData name="城谷 匠" userId="afbae57c-d4ca-4e58-bc9a-6f765e208d89" providerId="ADAL" clId="{FD963559-32B2-43B7-8F97-A1E47AC731FA}" dt="2026-06-04T06:18:26.753" v="409" actId="164"/>
+          <ac:grpSpMkLst>
+            <pc:docMk/>
+            <pc:sldMk cId="1909664869" sldId="258"/>
+            <ac:grpSpMk id="38" creationId="{B9C5C9E4-FACA-F829-1722-53D71918ADCD}"/>
+          </ac:grpSpMkLst>
+        </pc:grpChg>
+        <pc:graphicFrameChg chg="del">
+          <ac:chgData name="城谷 匠" userId="afbae57c-d4ca-4e58-bc9a-6f765e208d89" providerId="ADAL" clId="{FD963559-32B2-43B7-8F97-A1E47AC731FA}" dt="2026-06-04T06:17:39.263" v="404" actId="478"/>
+          <ac:graphicFrameMkLst>
+            <pc:docMk/>
+            <pc:sldMk cId="1909664869" sldId="258"/>
+            <ac:graphicFrameMk id="106" creationId="{5BF50787-5C3B-B46C-8F8C-78D7E531CC6B}"/>
+          </ac:graphicFrameMkLst>
+        </pc:graphicFrameChg>
+        <pc:picChg chg="add mod">
+          <ac:chgData name="城谷 匠" userId="afbae57c-d4ca-4e58-bc9a-6f765e208d89" providerId="ADAL" clId="{FD963559-32B2-43B7-8F97-A1E47AC731FA}" dt="2026-06-04T06:18:26.753" v="409" actId="164"/>
+          <ac:picMkLst>
+            <pc:docMk/>
+            <pc:sldMk cId="1909664869" sldId="258"/>
+            <ac:picMk id="16" creationId="{A26DD222-CDC2-C27B-16F7-6D9A08F52DEF}"/>
+          </ac:picMkLst>
+        </pc:picChg>
         <pc:picChg chg="add del mod">
           <ac:chgData name="城谷 匠" userId="afbae57c-d4ca-4e58-bc9a-6f765e208d89" providerId="ADAL" clId="{FD963559-32B2-43B7-8F97-A1E47AC731FA}" dt="2026-06-04T03:45:24.339" v="372" actId="478"/>
           <ac:picMkLst>
@@ -481,8 +633,16 @@
             <ac:picMk id="16" creationId="{C4F70AD1-D4EB-2A2A-68D2-C99C2BEC6761}"/>
           </ac:picMkLst>
         </pc:picChg>
-        <pc:picChg chg="add mod">
-          <ac:chgData name="城谷 匠" userId="afbae57c-d4ca-4e58-bc9a-6f765e208d89" providerId="ADAL" clId="{FD963559-32B2-43B7-8F97-A1E47AC731FA}" dt="2026-06-04T03:45:32.328" v="373" actId="1076"/>
+        <pc:picChg chg="add del mod topLvl">
+          <ac:chgData name="城谷 匠" userId="afbae57c-d4ca-4e58-bc9a-6f765e208d89" providerId="ADAL" clId="{FD963559-32B2-43B7-8F97-A1E47AC731FA}" dt="2026-06-04T06:17:38.092" v="403" actId="478"/>
+          <ac:picMkLst>
+            <pc:docMk/>
+            <pc:sldMk cId="1909664869" sldId="258"/>
+            <ac:picMk id="34" creationId="{9F8E00C3-C87F-9CE9-D776-69914B98E8BB}"/>
+          </ac:picMkLst>
+        </pc:picChg>
+        <pc:picChg chg="add del mod">
+          <ac:chgData name="城谷 匠" userId="afbae57c-d4ca-4e58-bc9a-6f765e208d89" providerId="ADAL" clId="{FD963559-32B2-43B7-8F97-A1E47AC731FA}" dt="2026-06-04T06:07:37.974" v="374" actId="478"/>
           <ac:picMkLst>
             <pc:docMk/>
             <pc:sldMk cId="1909664869" sldId="258"/>
@@ -498,7 +658,7 @@
           </ac:picMkLst>
         </pc:picChg>
         <pc:cxnChg chg="mod">
-          <ac:chgData name="城谷 匠" userId="afbae57c-d4ca-4e58-bc9a-6f765e208d89" providerId="ADAL" clId="{FD963559-32B2-43B7-8F97-A1E47AC731FA}" dt="2026-06-04T03:44:13.642" v="358" actId="478"/>
+          <ac:chgData name="城谷 匠" userId="afbae57c-d4ca-4e58-bc9a-6f765e208d89" providerId="ADAL" clId="{FD963559-32B2-43B7-8F97-A1E47AC731FA}" dt="2026-06-04T06:18:31.499" v="410" actId="14100"/>
           <ac:cxnSpMkLst>
             <pc:docMk/>
             <pc:sldMk cId="1909664869" sldId="258"/>
@@ -1318,1379 +1478,7 @@
 </dgm:colorsDef>
 </file>
 
-<file path=ppt/diagrams/colors2.xml><?xml version="1.0" encoding="utf-8"?>
-<dgm:colorsDef xmlns:dgm="http://schemas.openxmlformats.org/drawingml/2006/diagram" xmlns:a="http://schemas.openxmlformats.org/drawingml/2006/main" uniqueId="urn:microsoft.com/office/officeart/2005/8/colors/accent0_1">
-  <dgm:title val=""/>
-  <dgm:desc val=""/>
-  <dgm:catLst>
-    <dgm:cat type="mainScheme" pri="10100"/>
-  </dgm:catLst>
-  <dgm:styleLbl name="node0">
-    <dgm:fillClrLst meth="repeat">
-      <a:schemeClr val="lt1"/>
-    </dgm:fillClrLst>
-    <dgm:linClrLst meth="repeat">
-      <a:schemeClr val="dk1">
-        <a:shade val="80000"/>
-      </a:schemeClr>
-    </dgm:linClrLst>
-    <dgm:effectClrLst/>
-    <dgm:txLinClrLst/>
-    <dgm:txFillClrLst meth="repeat">
-      <a:schemeClr val="dk1"/>
-    </dgm:txFillClrLst>
-    <dgm:txEffectClrLst/>
-  </dgm:styleLbl>
-  <dgm:styleLbl name="node1">
-    <dgm:fillClrLst meth="repeat">
-      <a:schemeClr val="lt1"/>
-    </dgm:fillClrLst>
-    <dgm:linClrLst meth="repeat">
-      <a:schemeClr val="dk1">
-        <a:shade val="80000"/>
-      </a:schemeClr>
-    </dgm:linClrLst>
-    <dgm:effectClrLst/>
-    <dgm:txLinClrLst/>
-    <dgm:txFillClrLst meth="repeat">
-      <a:schemeClr val="dk1"/>
-    </dgm:txFillClrLst>
-    <dgm:txEffectClrLst/>
-  </dgm:styleLbl>
-  <dgm:styleLbl name="alignNode1">
-    <dgm:fillClrLst meth="repeat">
-      <a:schemeClr val="lt1"/>
-    </dgm:fillClrLst>
-    <dgm:linClrLst meth="repeat">
-      <a:schemeClr val="dk1">
-        <a:shade val="80000"/>
-      </a:schemeClr>
-    </dgm:linClrLst>
-    <dgm:effectClrLst/>
-    <dgm:txLinClrLst/>
-    <dgm:txFillClrLst meth="repeat">
-      <a:schemeClr val="dk1"/>
-    </dgm:txFillClrLst>
-    <dgm:txEffectClrLst/>
-  </dgm:styleLbl>
-  <dgm:styleLbl name="lnNode1">
-    <dgm:fillClrLst meth="repeat">
-      <a:schemeClr val="lt1"/>
-    </dgm:fillClrLst>
-    <dgm:linClrLst meth="repeat">
-      <a:schemeClr val="dk1">
-        <a:shade val="80000"/>
-      </a:schemeClr>
-    </dgm:linClrLst>
-    <dgm:effectClrLst/>
-    <dgm:txLinClrLst/>
-    <dgm:txFillClrLst meth="repeat">
-      <a:schemeClr val="dk1"/>
-    </dgm:txFillClrLst>
-    <dgm:txEffectClrLst/>
-  </dgm:styleLbl>
-  <dgm:styleLbl name="vennNode1">
-    <dgm:fillClrLst meth="repeat">
-      <a:schemeClr val="lt1">
-        <a:alpha val="50000"/>
-      </a:schemeClr>
-    </dgm:fillClrLst>
-    <dgm:linClrLst meth="repeat">
-      <a:schemeClr val="dk1">
-        <a:shade val="80000"/>
-      </a:schemeClr>
-    </dgm:linClrLst>
-    <dgm:effectClrLst/>
-    <dgm:txLinClrLst/>
-    <dgm:txFillClrLst/>
-    <dgm:txEffectClrLst/>
-  </dgm:styleLbl>
-  <dgm:styleLbl name="node2">
-    <dgm:fillClrLst meth="repeat">
-      <a:schemeClr val="lt1"/>
-    </dgm:fillClrLst>
-    <dgm:linClrLst meth="repeat">
-      <a:schemeClr val="dk1">
-        <a:shade val="80000"/>
-      </a:schemeClr>
-    </dgm:linClrLst>
-    <dgm:effectClrLst/>
-    <dgm:txLinClrLst/>
-    <dgm:txFillClrLst meth="repeat">
-      <a:schemeClr val="dk1"/>
-    </dgm:txFillClrLst>
-    <dgm:txEffectClrLst/>
-  </dgm:styleLbl>
-  <dgm:styleLbl name="node3">
-    <dgm:fillClrLst meth="repeat">
-      <a:schemeClr val="lt1"/>
-    </dgm:fillClrLst>
-    <dgm:linClrLst meth="repeat">
-      <a:schemeClr val="dk1">
-        <a:shade val="80000"/>
-      </a:schemeClr>
-    </dgm:linClrLst>
-    <dgm:effectClrLst/>
-    <dgm:txLinClrLst/>
-    <dgm:txFillClrLst meth="repeat">
-      <a:schemeClr val="dk1"/>
-    </dgm:txFillClrLst>
-    <dgm:txEffectClrLst/>
-  </dgm:styleLbl>
-  <dgm:styleLbl name="node4">
-    <dgm:fillClrLst meth="repeat">
-      <a:schemeClr val="lt1"/>
-    </dgm:fillClrLst>
-    <dgm:linClrLst meth="repeat">
-      <a:schemeClr val="dk1">
-        <a:shade val="80000"/>
-      </a:schemeClr>
-    </dgm:linClrLst>
-    <dgm:effectClrLst/>
-    <dgm:txLinClrLst/>
-    <dgm:txFillClrLst meth="repeat">
-      <a:schemeClr val="dk1"/>
-    </dgm:txFillClrLst>
-    <dgm:txEffectClrLst/>
-  </dgm:styleLbl>
-  <dgm:styleLbl name="fgImgPlace1">
-    <dgm:fillClrLst meth="repeat">
-      <a:schemeClr val="dk1">
-        <a:tint val="40000"/>
-      </a:schemeClr>
-    </dgm:fillClrLst>
-    <dgm:linClrLst meth="repeat">
-      <a:schemeClr val="dk1">
-        <a:shade val="80000"/>
-      </a:schemeClr>
-    </dgm:linClrLst>
-    <dgm:effectClrLst/>
-    <dgm:txLinClrLst/>
-    <dgm:txFillClrLst meth="repeat">
-      <a:schemeClr val="lt1"/>
-    </dgm:txFillClrLst>
-    <dgm:txEffectClrLst/>
-  </dgm:styleLbl>
-  <dgm:styleLbl name="alignImgPlace1">
-    <dgm:fillClrLst meth="repeat">
-      <a:schemeClr val="dk1">
-        <a:tint val="40000"/>
-      </a:schemeClr>
-    </dgm:fillClrLst>
-    <dgm:linClrLst meth="repeat">
-      <a:schemeClr val="dk1">
-        <a:shade val="80000"/>
-      </a:schemeClr>
-    </dgm:linClrLst>
-    <dgm:effectClrLst/>
-    <dgm:txLinClrLst/>
-    <dgm:txFillClrLst meth="repeat">
-      <a:schemeClr val="lt1"/>
-    </dgm:txFillClrLst>
-    <dgm:txEffectClrLst/>
-  </dgm:styleLbl>
-  <dgm:styleLbl name="bgImgPlace1">
-    <dgm:fillClrLst meth="repeat">
-      <a:schemeClr val="dk1">
-        <a:tint val="40000"/>
-      </a:schemeClr>
-    </dgm:fillClrLst>
-    <dgm:linClrLst meth="repeat">
-      <a:schemeClr val="dk1">
-        <a:shade val="80000"/>
-      </a:schemeClr>
-    </dgm:linClrLst>
-    <dgm:effectClrLst/>
-    <dgm:txLinClrLst/>
-    <dgm:txFillClrLst meth="repeat">
-      <a:schemeClr val="lt1"/>
-    </dgm:txFillClrLst>
-    <dgm:txEffectClrLst/>
-  </dgm:styleLbl>
-  <dgm:styleLbl name="sibTrans2D1">
-    <dgm:fillClrLst meth="repeat">
-      <a:schemeClr val="dk1">
-        <a:tint val="60000"/>
-      </a:schemeClr>
-    </dgm:fillClrLst>
-    <dgm:linClrLst meth="repeat">
-      <a:schemeClr val="dk1">
-        <a:tint val="60000"/>
-      </a:schemeClr>
-    </dgm:linClrLst>
-    <dgm:effectClrLst/>
-    <dgm:txLinClrLst/>
-    <dgm:txFillClrLst meth="repeat">
-      <a:schemeClr val="dk1"/>
-    </dgm:txFillClrLst>
-    <dgm:txEffectClrLst/>
-  </dgm:styleLbl>
-  <dgm:styleLbl name="fgSibTrans2D1">
-    <dgm:fillClrLst meth="repeat">
-      <a:schemeClr val="dk1">
-        <a:tint val="60000"/>
-      </a:schemeClr>
-    </dgm:fillClrLst>
-    <dgm:linClrLst meth="repeat">
-      <a:schemeClr val="dk1">
-        <a:tint val="60000"/>
-      </a:schemeClr>
-    </dgm:linClrLst>
-    <dgm:effectClrLst/>
-    <dgm:txLinClrLst/>
-    <dgm:txFillClrLst meth="repeat">
-      <a:schemeClr val="dk1"/>
-    </dgm:txFillClrLst>
-    <dgm:txEffectClrLst/>
-  </dgm:styleLbl>
-  <dgm:styleLbl name="bgSibTrans2D1">
-    <dgm:fillClrLst meth="repeat">
-      <a:schemeClr val="dk1">
-        <a:tint val="60000"/>
-      </a:schemeClr>
-    </dgm:fillClrLst>
-    <dgm:linClrLst meth="repeat">
-      <a:schemeClr val="dk1">
-        <a:tint val="60000"/>
-      </a:schemeClr>
-    </dgm:linClrLst>
-    <dgm:effectClrLst/>
-    <dgm:txLinClrLst/>
-    <dgm:txFillClrLst meth="repeat">
-      <a:schemeClr val="dk1"/>
-    </dgm:txFillClrLst>
-    <dgm:txEffectClrLst/>
-  </dgm:styleLbl>
-  <dgm:styleLbl name="sibTrans1D1">
-    <dgm:fillClrLst meth="repeat">
-      <a:schemeClr val="dk1"/>
-    </dgm:fillClrLst>
-    <dgm:linClrLst meth="repeat">
-      <a:schemeClr val="dk1"/>
-    </dgm:linClrLst>
-    <dgm:effectClrLst/>
-    <dgm:txLinClrLst/>
-    <dgm:txFillClrLst meth="repeat">
-      <a:schemeClr val="tx1"/>
-    </dgm:txFillClrLst>
-    <dgm:txEffectClrLst/>
-  </dgm:styleLbl>
-  <dgm:styleLbl name="callout">
-    <dgm:fillClrLst meth="repeat">
-      <a:schemeClr val="dk1"/>
-    </dgm:fillClrLst>
-    <dgm:linClrLst meth="repeat">
-      <a:schemeClr val="dk1"/>
-    </dgm:linClrLst>
-    <dgm:effectClrLst/>
-    <dgm:txLinClrLst/>
-    <dgm:txFillClrLst meth="repeat">
-      <a:schemeClr val="tx1"/>
-    </dgm:txFillClrLst>
-    <dgm:txEffectClrLst/>
-  </dgm:styleLbl>
-  <dgm:styleLbl name="asst0">
-    <dgm:fillClrLst meth="repeat">
-      <a:schemeClr val="lt1"/>
-    </dgm:fillClrLst>
-    <dgm:linClrLst meth="repeat">
-      <a:schemeClr val="dk1">
-        <a:shade val="80000"/>
-      </a:schemeClr>
-    </dgm:linClrLst>
-    <dgm:effectClrLst/>
-    <dgm:txLinClrLst/>
-    <dgm:txFillClrLst meth="repeat">
-      <a:schemeClr val="dk1"/>
-    </dgm:txFillClrLst>
-    <dgm:txEffectClrLst/>
-  </dgm:styleLbl>
-  <dgm:styleLbl name="asst1">
-    <dgm:fillClrLst meth="repeat">
-      <a:schemeClr val="lt1"/>
-    </dgm:fillClrLst>
-    <dgm:linClrLst meth="repeat">
-      <a:schemeClr val="dk1">
-        <a:shade val="80000"/>
-      </a:schemeClr>
-    </dgm:linClrLst>
-    <dgm:effectClrLst/>
-    <dgm:txLinClrLst/>
-    <dgm:txFillClrLst meth="repeat">
-      <a:schemeClr val="dk1"/>
-    </dgm:txFillClrLst>
-    <dgm:txEffectClrLst/>
-  </dgm:styleLbl>
-  <dgm:styleLbl name="asst2">
-    <dgm:fillClrLst meth="repeat">
-      <a:schemeClr val="lt1"/>
-    </dgm:fillClrLst>
-    <dgm:linClrLst meth="repeat">
-      <a:schemeClr val="dk1">
-        <a:shade val="80000"/>
-      </a:schemeClr>
-    </dgm:linClrLst>
-    <dgm:effectClrLst/>
-    <dgm:txLinClrLst/>
-    <dgm:txFillClrLst meth="repeat">
-      <a:schemeClr val="dk1"/>
-    </dgm:txFillClrLst>
-    <dgm:txEffectClrLst/>
-  </dgm:styleLbl>
-  <dgm:styleLbl name="asst3">
-    <dgm:fillClrLst meth="repeat">
-      <a:schemeClr val="lt1"/>
-    </dgm:fillClrLst>
-    <dgm:linClrLst meth="repeat">
-      <a:schemeClr val="dk1">
-        <a:shade val="80000"/>
-      </a:schemeClr>
-    </dgm:linClrLst>
-    <dgm:effectClrLst/>
-    <dgm:txLinClrLst/>
-    <dgm:txFillClrLst meth="repeat">
-      <a:schemeClr val="dk1"/>
-    </dgm:txFillClrLst>
-    <dgm:txEffectClrLst/>
-  </dgm:styleLbl>
-  <dgm:styleLbl name="asst4">
-    <dgm:fillClrLst meth="repeat">
-      <a:schemeClr val="lt1"/>
-    </dgm:fillClrLst>
-    <dgm:linClrLst meth="repeat">
-      <a:schemeClr val="dk1">
-        <a:shade val="80000"/>
-      </a:schemeClr>
-    </dgm:linClrLst>
-    <dgm:effectClrLst/>
-    <dgm:txLinClrLst/>
-    <dgm:txFillClrLst meth="repeat">
-      <a:schemeClr val="dk1"/>
-    </dgm:txFillClrLst>
-    <dgm:txEffectClrLst/>
-  </dgm:styleLbl>
-  <dgm:styleLbl name="parChTrans2D1">
-    <dgm:fillClrLst meth="repeat">
-      <a:schemeClr val="dk1">
-        <a:tint val="60000"/>
-      </a:schemeClr>
-    </dgm:fillClrLst>
-    <dgm:linClrLst meth="repeat">
-      <a:schemeClr val="dk1">
-        <a:tint val="60000"/>
-      </a:schemeClr>
-    </dgm:linClrLst>
-    <dgm:effectClrLst/>
-    <dgm:txLinClrLst/>
-    <dgm:txFillClrLst/>
-    <dgm:txEffectClrLst/>
-  </dgm:styleLbl>
-  <dgm:styleLbl name="parChTrans2D2">
-    <dgm:fillClrLst meth="repeat">
-      <a:schemeClr val="dk1"/>
-    </dgm:fillClrLst>
-    <dgm:linClrLst meth="repeat">
-      <a:schemeClr val="dk1"/>
-    </dgm:linClrLst>
-    <dgm:effectClrLst/>
-    <dgm:txLinClrLst/>
-    <dgm:txFillClrLst/>
-    <dgm:txEffectClrLst/>
-  </dgm:styleLbl>
-  <dgm:styleLbl name="parChTrans2D3">
-    <dgm:fillClrLst meth="repeat">
-      <a:schemeClr val="dk1"/>
-    </dgm:fillClrLst>
-    <dgm:linClrLst meth="repeat">
-      <a:schemeClr val="dk1"/>
-    </dgm:linClrLst>
-    <dgm:effectClrLst/>
-    <dgm:txLinClrLst/>
-    <dgm:txFillClrLst/>
-    <dgm:txEffectClrLst/>
-  </dgm:styleLbl>
-  <dgm:styleLbl name="parChTrans2D4">
-    <dgm:fillClrLst meth="repeat">
-      <a:schemeClr val="dk1"/>
-    </dgm:fillClrLst>
-    <dgm:linClrLst meth="repeat">
-      <a:schemeClr val="dk1"/>
-    </dgm:linClrLst>
-    <dgm:effectClrLst/>
-    <dgm:txLinClrLst/>
-    <dgm:txFillClrLst meth="repeat">
-      <a:schemeClr val="lt1"/>
-    </dgm:txFillClrLst>
-    <dgm:txEffectClrLst/>
-  </dgm:styleLbl>
-  <dgm:styleLbl name="parChTrans1D1">
-    <dgm:fillClrLst meth="repeat">
-      <a:schemeClr val="dk1"/>
-    </dgm:fillClrLst>
-    <dgm:linClrLst meth="repeat">
-      <a:schemeClr val="dk1">
-        <a:shade val="60000"/>
-      </a:schemeClr>
-    </dgm:linClrLst>
-    <dgm:effectClrLst/>
-    <dgm:txLinClrLst/>
-    <dgm:txFillClrLst meth="repeat">
-      <a:schemeClr val="tx1"/>
-    </dgm:txFillClrLst>
-    <dgm:txEffectClrLst/>
-  </dgm:styleLbl>
-  <dgm:styleLbl name="parChTrans1D2">
-    <dgm:fillClrLst meth="repeat">
-      <a:schemeClr val="dk1"/>
-    </dgm:fillClrLst>
-    <dgm:linClrLst meth="repeat">
-      <a:schemeClr val="dk1">
-        <a:shade val="60000"/>
-      </a:schemeClr>
-    </dgm:linClrLst>
-    <dgm:effectClrLst/>
-    <dgm:txLinClrLst/>
-    <dgm:txFillClrLst meth="repeat">
-      <a:schemeClr val="tx1"/>
-    </dgm:txFillClrLst>
-    <dgm:txEffectClrLst/>
-  </dgm:styleLbl>
-  <dgm:styleLbl name="parChTrans1D3">
-    <dgm:fillClrLst meth="repeat">
-      <a:schemeClr val="dk1"/>
-    </dgm:fillClrLst>
-    <dgm:linClrLst meth="repeat">
-      <a:schemeClr val="dk1">
-        <a:shade val="80000"/>
-      </a:schemeClr>
-    </dgm:linClrLst>
-    <dgm:effectClrLst/>
-    <dgm:txLinClrLst/>
-    <dgm:txFillClrLst meth="repeat">
-      <a:schemeClr val="tx1"/>
-    </dgm:txFillClrLst>
-    <dgm:txEffectClrLst/>
-  </dgm:styleLbl>
-  <dgm:styleLbl name="parChTrans1D4">
-    <dgm:fillClrLst meth="repeat">
-      <a:schemeClr val="dk1"/>
-    </dgm:fillClrLst>
-    <dgm:linClrLst meth="repeat">
-      <a:schemeClr val="dk1">
-        <a:shade val="80000"/>
-      </a:schemeClr>
-    </dgm:linClrLst>
-    <dgm:effectClrLst/>
-    <dgm:txLinClrLst/>
-    <dgm:txFillClrLst meth="repeat">
-      <a:schemeClr val="tx1"/>
-    </dgm:txFillClrLst>
-    <dgm:txEffectClrLst/>
-  </dgm:styleLbl>
-  <dgm:styleLbl name="fgAcc1">
-    <dgm:fillClrLst meth="repeat">
-      <a:schemeClr val="dk1">
-        <a:alpha val="90000"/>
-        <a:tint val="40000"/>
-      </a:schemeClr>
-    </dgm:fillClrLst>
-    <dgm:linClrLst meth="repeat">
-      <a:schemeClr val="dk1"/>
-    </dgm:linClrLst>
-    <dgm:effectClrLst/>
-    <dgm:txLinClrLst/>
-    <dgm:txFillClrLst meth="repeat">
-      <a:schemeClr val="dk1"/>
-    </dgm:txFillClrLst>
-    <dgm:txEffectClrLst/>
-  </dgm:styleLbl>
-  <dgm:styleLbl name="conFgAcc1">
-    <dgm:fillClrLst meth="repeat">
-      <a:schemeClr val="dk1">
-        <a:alpha val="90000"/>
-        <a:tint val="40000"/>
-      </a:schemeClr>
-    </dgm:fillClrLst>
-    <dgm:linClrLst meth="repeat">
-      <a:schemeClr val="dk1"/>
-    </dgm:linClrLst>
-    <dgm:effectClrLst/>
-    <dgm:txLinClrLst/>
-    <dgm:txFillClrLst meth="repeat">
-      <a:schemeClr val="dk1"/>
-    </dgm:txFillClrLst>
-    <dgm:txEffectClrLst/>
-  </dgm:styleLbl>
-  <dgm:styleLbl name="alignAcc1">
-    <dgm:fillClrLst meth="repeat">
-      <a:schemeClr val="dk1">
-        <a:alpha val="90000"/>
-        <a:tint val="40000"/>
-      </a:schemeClr>
-    </dgm:fillClrLst>
-    <dgm:linClrLst meth="repeat">
-      <a:schemeClr val="dk1"/>
-    </dgm:linClrLst>
-    <dgm:effectClrLst/>
-    <dgm:txLinClrLst/>
-    <dgm:txFillClrLst meth="repeat">
-      <a:schemeClr val="dk1"/>
-    </dgm:txFillClrLst>
-    <dgm:txEffectClrLst/>
-  </dgm:styleLbl>
-  <dgm:styleLbl name="trAlignAcc1">
-    <dgm:fillClrLst meth="repeat">
-      <a:schemeClr val="dk1">
-        <a:alpha val="40000"/>
-        <a:tint val="40000"/>
-      </a:schemeClr>
-    </dgm:fillClrLst>
-    <dgm:linClrLst meth="repeat">
-      <a:schemeClr val="dk1"/>
-    </dgm:linClrLst>
-    <dgm:effectClrLst/>
-    <dgm:txLinClrLst/>
-    <dgm:txFillClrLst meth="repeat">
-      <a:schemeClr val="dk1"/>
-    </dgm:txFillClrLst>
-    <dgm:txEffectClrLst/>
-  </dgm:styleLbl>
-  <dgm:styleLbl name="bgAcc1">
-    <dgm:fillClrLst meth="repeat">
-      <a:schemeClr val="dk1">
-        <a:alpha val="90000"/>
-        <a:tint val="40000"/>
-      </a:schemeClr>
-    </dgm:fillClrLst>
-    <dgm:linClrLst meth="repeat">
-      <a:schemeClr val="dk1"/>
-    </dgm:linClrLst>
-    <dgm:effectClrLst/>
-    <dgm:txLinClrLst/>
-    <dgm:txFillClrLst meth="repeat">
-      <a:schemeClr val="dk1"/>
-    </dgm:txFillClrLst>
-    <dgm:txEffectClrLst/>
-  </dgm:styleLbl>
-  <dgm:styleLbl name="solidFgAcc1">
-    <dgm:fillClrLst meth="repeat">
-      <a:schemeClr val="lt1"/>
-    </dgm:fillClrLst>
-    <dgm:linClrLst meth="repeat">
-      <a:schemeClr val="dk1"/>
-    </dgm:linClrLst>
-    <dgm:effectClrLst/>
-    <dgm:txLinClrLst/>
-    <dgm:txFillClrLst meth="repeat">
-      <a:schemeClr val="dk1"/>
-    </dgm:txFillClrLst>
-    <dgm:txEffectClrLst/>
-  </dgm:styleLbl>
-  <dgm:styleLbl name="solidAlignAcc1">
-    <dgm:fillClrLst meth="repeat">
-      <a:schemeClr val="lt1"/>
-    </dgm:fillClrLst>
-    <dgm:linClrLst meth="repeat">
-      <a:schemeClr val="dk1"/>
-    </dgm:linClrLst>
-    <dgm:effectClrLst/>
-    <dgm:txLinClrLst/>
-    <dgm:txFillClrLst meth="repeat">
-      <a:schemeClr val="dk1"/>
-    </dgm:txFillClrLst>
-    <dgm:txEffectClrLst/>
-  </dgm:styleLbl>
-  <dgm:styleLbl name="solidBgAcc1">
-    <dgm:fillClrLst meth="repeat">
-      <a:schemeClr val="lt1"/>
-    </dgm:fillClrLst>
-    <dgm:linClrLst meth="repeat">
-      <a:schemeClr val="dk1"/>
-    </dgm:linClrLst>
-    <dgm:effectClrLst/>
-    <dgm:txLinClrLst/>
-    <dgm:txFillClrLst meth="repeat">
-      <a:schemeClr val="dk1"/>
-    </dgm:txFillClrLst>
-    <dgm:txEffectClrLst/>
-  </dgm:styleLbl>
-  <dgm:styleLbl name="fgAccFollowNode1">
-    <dgm:fillClrLst meth="repeat">
-      <a:schemeClr val="lt1">
-        <a:alpha val="90000"/>
-        <a:tint val="40000"/>
-      </a:schemeClr>
-    </dgm:fillClrLst>
-    <dgm:linClrLst meth="repeat">
-      <a:schemeClr val="dk1">
-        <a:alpha val="90000"/>
-      </a:schemeClr>
-    </dgm:linClrLst>
-    <dgm:effectClrLst/>
-    <dgm:txLinClrLst/>
-    <dgm:txFillClrLst meth="repeat">
-      <a:schemeClr val="dk1"/>
-    </dgm:txFillClrLst>
-    <dgm:txEffectClrLst/>
-  </dgm:styleLbl>
-  <dgm:styleLbl name="alignAccFollowNode1">
-    <dgm:fillClrLst meth="repeat">
-      <a:schemeClr val="lt1">
-        <a:alpha val="90000"/>
-        <a:tint val="40000"/>
-      </a:schemeClr>
-    </dgm:fillClrLst>
-    <dgm:linClrLst meth="repeat">
-      <a:schemeClr val="dk1">
-        <a:alpha val="90000"/>
-      </a:schemeClr>
-    </dgm:linClrLst>
-    <dgm:effectClrLst/>
-    <dgm:txLinClrLst/>
-    <dgm:txFillClrLst meth="repeat">
-      <a:schemeClr val="dk1"/>
-    </dgm:txFillClrLst>
-    <dgm:txEffectClrLst/>
-  </dgm:styleLbl>
-  <dgm:styleLbl name="bgAccFollowNode1">
-    <dgm:fillClrLst meth="repeat">
-      <a:schemeClr val="lt1">
-        <a:alpha val="90000"/>
-        <a:tint val="40000"/>
-      </a:schemeClr>
-    </dgm:fillClrLst>
-    <dgm:linClrLst meth="repeat">
-      <a:schemeClr val="dk1">
-        <a:alpha val="90000"/>
-      </a:schemeClr>
-    </dgm:linClrLst>
-    <dgm:effectClrLst/>
-    <dgm:txLinClrLst/>
-    <dgm:txFillClrLst meth="repeat">
-      <a:schemeClr val="dk1"/>
-    </dgm:txFillClrLst>
-    <dgm:txEffectClrLst/>
-  </dgm:styleLbl>
-  <dgm:styleLbl name="fgAcc0">
-    <dgm:fillClrLst meth="repeat">
-      <a:schemeClr val="dk1">
-        <a:alpha val="90000"/>
-        <a:tint val="40000"/>
-      </a:schemeClr>
-    </dgm:fillClrLst>
-    <dgm:linClrLst meth="repeat">
-      <a:schemeClr val="dk1"/>
-    </dgm:linClrLst>
-    <dgm:effectClrLst/>
-    <dgm:txLinClrLst/>
-    <dgm:txFillClrLst meth="repeat">
-      <a:schemeClr val="dk1"/>
-    </dgm:txFillClrLst>
-    <dgm:txEffectClrLst/>
-  </dgm:styleLbl>
-  <dgm:styleLbl name="fgAcc2">
-    <dgm:fillClrLst meth="repeat">
-      <a:schemeClr val="dk1">
-        <a:alpha val="90000"/>
-        <a:tint val="40000"/>
-      </a:schemeClr>
-    </dgm:fillClrLst>
-    <dgm:linClrLst meth="repeat">
-      <a:schemeClr val="dk1"/>
-    </dgm:linClrLst>
-    <dgm:effectClrLst/>
-    <dgm:txLinClrLst/>
-    <dgm:txFillClrLst meth="repeat">
-      <a:schemeClr val="dk1"/>
-    </dgm:txFillClrLst>
-    <dgm:txEffectClrLst/>
-  </dgm:styleLbl>
-  <dgm:styleLbl name="fgAcc3">
-    <dgm:fillClrLst meth="repeat">
-      <a:schemeClr val="dk1">
-        <a:alpha val="90000"/>
-        <a:tint val="40000"/>
-      </a:schemeClr>
-    </dgm:fillClrLst>
-    <dgm:linClrLst meth="repeat">
-      <a:schemeClr val="dk1"/>
-    </dgm:linClrLst>
-    <dgm:effectClrLst/>
-    <dgm:txLinClrLst/>
-    <dgm:txFillClrLst meth="repeat">
-      <a:schemeClr val="dk1"/>
-    </dgm:txFillClrLst>
-    <dgm:txEffectClrLst/>
-  </dgm:styleLbl>
-  <dgm:styleLbl name="fgAcc4">
-    <dgm:fillClrLst meth="repeat">
-      <a:schemeClr val="dk1">
-        <a:alpha val="90000"/>
-        <a:tint val="40000"/>
-      </a:schemeClr>
-    </dgm:fillClrLst>
-    <dgm:linClrLst meth="repeat">
-      <a:schemeClr val="dk1"/>
-    </dgm:linClrLst>
-    <dgm:effectClrLst/>
-    <dgm:txLinClrLst/>
-    <dgm:txFillClrLst meth="repeat">
-      <a:schemeClr val="dk1"/>
-    </dgm:txFillClrLst>
-    <dgm:txEffectClrLst/>
-  </dgm:styleLbl>
-  <dgm:styleLbl name="bgShp">
-    <dgm:fillClrLst meth="repeat">
-      <a:schemeClr val="dk1">
-        <a:tint val="40000"/>
-      </a:schemeClr>
-    </dgm:fillClrLst>
-    <dgm:linClrLst meth="repeat">
-      <a:schemeClr val="dk1"/>
-    </dgm:linClrLst>
-    <dgm:effectClrLst/>
-    <dgm:txLinClrLst/>
-    <dgm:txFillClrLst meth="repeat">
-      <a:schemeClr val="dk1"/>
-    </dgm:txFillClrLst>
-    <dgm:txEffectClrLst/>
-  </dgm:styleLbl>
-  <dgm:styleLbl name="dkBgShp">
-    <dgm:fillClrLst meth="repeat">
-      <a:schemeClr val="dk1">
-        <a:shade val="80000"/>
-      </a:schemeClr>
-    </dgm:fillClrLst>
-    <dgm:linClrLst meth="repeat">
-      <a:schemeClr val="dk1"/>
-    </dgm:linClrLst>
-    <dgm:effectClrLst/>
-    <dgm:txLinClrLst/>
-    <dgm:txFillClrLst meth="repeat">
-      <a:schemeClr val="lt1"/>
-    </dgm:txFillClrLst>
-    <dgm:txEffectClrLst/>
-  </dgm:styleLbl>
-  <dgm:styleLbl name="trBgShp">
-    <dgm:fillClrLst meth="repeat">
-      <a:schemeClr val="dk1">
-        <a:tint val="50000"/>
-        <a:alpha val="40000"/>
-      </a:schemeClr>
-    </dgm:fillClrLst>
-    <dgm:linClrLst meth="repeat">
-      <a:schemeClr val="dk1"/>
-    </dgm:linClrLst>
-    <dgm:effectClrLst/>
-    <dgm:txLinClrLst/>
-    <dgm:txFillClrLst meth="repeat">
-      <a:schemeClr val="lt1"/>
-    </dgm:txFillClrLst>
-    <dgm:txEffectClrLst/>
-  </dgm:styleLbl>
-  <dgm:styleLbl name="fgShp">
-    <dgm:fillClrLst meth="repeat">
-      <a:schemeClr val="dk1">
-        <a:tint val="60000"/>
-      </a:schemeClr>
-    </dgm:fillClrLst>
-    <dgm:linClrLst meth="repeat">
-      <a:schemeClr val="lt1"/>
-    </dgm:linClrLst>
-    <dgm:effectClrLst/>
-    <dgm:txLinClrLst/>
-    <dgm:txFillClrLst meth="repeat">
-      <a:schemeClr val="dk1"/>
-    </dgm:txFillClrLst>
-    <dgm:txEffectClrLst/>
-  </dgm:styleLbl>
-  <dgm:styleLbl name="revTx">
-    <dgm:fillClrLst meth="repeat">
-      <a:schemeClr val="lt1">
-        <a:alpha val="0"/>
-      </a:schemeClr>
-    </dgm:fillClrLst>
-    <dgm:linClrLst meth="repeat">
-      <a:schemeClr val="dk1">
-        <a:alpha val="0"/>
-      </a:schemeClr>
-    </dgm:linClrLst>
-    <dgm:effectClrLst/>
-    <dgm:txLinClrLst/>
-    <dgm:txFillClrLst meth="repeat">
-      <a:schemeClr val="tx1"/>
-    </dgm:txFillClrLst>
-    <dgm:txEffectClrLst/>
-  </dgm:styleLbl>
-</dgm:colorsDef>
-</file>
-
 <file path=ppt/diagrams/data1.xml><?xml version="1.0" encoding="utf-8"?>
-<dgm:dataModel xmlns:dgm="http://schemas.openxmlformats.org/drawingml/2006/diagram" xmlns:a="http://schemas.openxmlformats.org/drawingml/2006/main">
-  <dgm:ptLst>
-    <dgm:pt modelId="{D142EE24-A998-424A-BA28-CAF4949ECFAF}" type="doc">
-      <dgm:prSet loTypeId="urn:microsoft.com/office/officeart/2005/8/layout/process2" loCatId="process" qsTypeId="urn:microsoft.com/office/officeart/2005/8/quickstyle/simple1" qsCatId="simple" csTypeId="urn:microsoft.com/office/officeart/2005/8/colors/accent0_1" csCatId="mainScheme" phldr="1"/>
-      <dgm:spPr/>
-      <dgm:t>
-        <a:bodyPr/>
-        <a:lstStyle/>
-        <a:p>
-          <a:endParaRPr kumimoji="1" lang="ja-JP" altLang="en-US"/>
-        </a:p>
-      </dgm:t>
-    </dgm:pt>
-    <dgm:pt modelId="{FCFB28AA-E588-44ED-98EE-784789F81932}">
-      <dgm:prSet phldrT="[テキスト]"/>
-      <dgm:spPr/>
-      <dgm:t>
-        <a:bodyPr/>
-        <a:lstStyle/>
-        <a:p>
-          <a:pPr>
-            <a:buFont typeface="+mj-lt"/>
-            <a:buAutoNum type="arabicPeriod"/>
-          </a:pPr>
-          <a:r>
-            <a:rPr kumimoji="1" lang="en-US" altLang="ja-JP" dirty="0" err="1"/>
-            <a:t>ImageFlux</a:t>
-          </a:r>
-          <a:r>
-            <a:rPr kumimoji="1" lang="ja-JP" altLang="en-US" dirty="0"/>
-            <a:t>が</a:t>
-          </a:r>
-          <a:r>
-            <a:rPr kumimoji="1" lang="en-US" altLang="ja-JP" dirty="0" err="1"/>
-            <a:t>AppRun</a:t>
-          </a:r>
-          <a:r>
-            <a:rPr kumimoji="1" lang="ja-JP" altLang="en-US" dirty="0"/>
-            <a:t>共用型に</a:t>
-          </a:r>
-          <a:br>
-            <a:rPr kumimoji="1" lang="en-US" altLang="ja-JP" dirty="0"/>
-          </a:br>
-          <a:r>
-            <a:rPr kumimoji="1" lang="ja-JP" altLang="en-US" dirty="0"/>
-            <a:t>アーカイブ保存完了のイベント</a:t>
-          </a:r>
-          <a:r>
-            <a:rPr kumimoji="1" lang="en-US" altLang="ja-JP" dirty="0"/>
-            <a:t>Webhook</a:t>
-          </a:r>
-          <a:r>
-            <a:rPr kumimoji="1" lang="ja-JP" altLang="en-US" dirty="0"/>
-            <a:t>通知を送信</a:t>
-          </a:r>
-        </a:p>
-      </dgm:t>
-    </dgm:pt>
-    <dgm:pt modelId="{F618B8E0-D4D3-4E55-B918-6507C8BF99BB}" type="parTrans" cxnId="{CD8DF443-F476-4DD3-BC33-9542B376595F}">
-      <dgm:prSet/>
-      <dgm:spPr/>
-      <dgm:t>
-        <a:bodyPr/>
-        <a:lstStyle/>
-        <a:p>
-          <a:endParaRPr kumimoji="1" lang="ja-JP" altLang="en-US"/>
-        </a:p>
-      </dgm:t>
-    </dgm:pt>
-    <dgm:pt modelId="{0E70C1FF-71B2-424F-B47F-AB7512B0ED18}" type="sibTrans" cxnId="{CD8DF443-F476-4DD3-BC33-9542B376595F}">
-      <dgm:prSet/>
-      <dgm:spPr/>
-      <dgm:t>
-        <a:bodyPr/>
-        <a:lstStyle/>
-        <a:p>
-          <a:endParaRPr kumimoji="1" lang="ja-JP" altLang="en-US"/>
-        </a:p>
-      </dgm:t>
-    </dgm:pt>
-    <dgm:pt modelId="{282C7160-1280-4C38-8D62-C833D2079100}">
-      <dgm:prSet phldrT="[テキスト]"/>
-      <dgm:spPr/>
-      <dgm:t>
-        <a:bodyPr/>
-        <a:lstStyle/>
-        <a:p>
-          <a:pPr>
-            <a:buFont typeface="+mj-lt"/>
-            <a:buAutoNum type="arabicPeriod"/>
-          </a:pPr>
-          <a:r>
-            <a:rPr kumimoji="1" lang="en-US" altLang="ja-JP" dirty="0" err="1"/>
-            <a:t>AppRun</a:t>
-          </a:r>
-          <a:r>
-            <a:rPr kumimoji="1" lang="ja-JP" altLang="en-US" dirty="0"/>
-            <a:t>共用型はシンプル</a:t>
-          </a:r>
-          <a:r>
-            <a:rPr kumimoji="1" lang="en-US" altLang="ja-JP" dirty="0"/>
-            <a:t>MQ</a:t>
-          </a:r>
-          <a:r>
-            <a:rPr kumimoji="1" lang="ja-JP" altLang="en-US" dirty="0"/>
-            <a:t>に</a:t>
-          </a:r>
-          <a:br>
-            <a:rPr kumimoji="1" lang="en-US" altLang="ja-JP" dirty="0"/>
-          </a:br>
-          <a:r>
-            <a:rPr kumimoji="1" lang="en-US" altLang="ja-JP" dirty="0"/>
-            <a:t>.m3u8</a:t>
-          </a:r>
-          <a:r>
-            <a:rPr kumimoji="1" lang="ja-JP" altLang="en-US" dirty="0"/>
-            <a:t>のパスと通知日時を送信</a:t>
-          </a:r>
-          <a:endParaRPr kumimoji="1" lang="en-US" altLang="ja-JP" dirty="0"/>
-        </a:p>
-        <a:p>
-          <a:pPr>
-            <a:buFont typeface="+mj-lt"/>
-            <a:buAutoNum type="arabicPeriod"/>
-          </a:pPr>
-          <a:r>
-            <a:rPr kumimoji="1" lang="ja-JP" altLang="en-US" dirty="0"/>
-            <a:t>（モニタリングスイートにもログ連携）</a:t>
-          </a:r>
-        </a:p>
-      </dgm:t>
-    </dgm:pt>
-    <dgm:pt modelId="{48BA8B2D-B219-40B2-A9C8-AC1FBE7114E7}" type="parTrans" cxnId="{FFFBD641-ABF8-469B-9896-FB642BAD7128}">
-      <dgm:prSet/>
-      <dgm:spPr/>
-      <dgm:t>
-        <a:bodyPr/>
-        <a:lstStyle/>
-        <a:p>
-          <a:endParaRPr kumimoji="1" lang="ja-JP" altLang="en-US"/>
-        </a:p>
-      </dgm:t>
-    </dgm:pt>
-    <dgm:pt modelId="{75AFCF26-CA80-4FDF-B1D0-944AA24934A1}" type="sibTrans" cxnId="{FFFBD641-ABF8-469B-9896-FB642BAD7128}">
-      <dgm:prSet/>
-      <dgm:spPr/>
-      <dgm:t>
-        <a:bodyPr/>
-        <a:lstStyle/>
-        <a:p>
-          <a:endParaRPr kumimoji="1" lang="ja-JP" altLang="en-US"/>
-        </a:p>
-      </dgm:t>
-    </dgm:pt>
-    <dgm:pt modelId="{B3DFF331-5D87-4A57-B8A1-9677CB2F7E3D}">
-      <dgm:prSet phldrT="[テキスト]"/>
-      <dgm:spPr/>
-      <dgm:t>
-        <a:bodyPr/>
-        <a:lstStyle/>
-        <a:p>
-          <a:r>
-            <a:rPr kumimoji="1" lang="ja-JP" altLang="en-US" dirty="0"/>
-            <a:t>サーバの常駐プロセスが順次</a:t>
-          </a:r>
-          <a:br>
-            <a:rPr kumimoji="1" lang="en-US" altLang="ja-JP" dirty="0"/>
-          </a:br>
-          <a:r>
-            <a:rPr kumimoji="1" lang="ja-JP" altLang="en-US" dirty="0"/>
-            <a:t>シンプル</a:t>
-          </a:r>
-          <a:r>
-            <a:rPr kumimoji="1" lang="en-US" altLang="ja-JP" dirty="0"/>
-            <a:t>MQ</a:t>
-          </a:r>
-          <a:r>
-            <a:rPr kumimoji="1" lang="ja-JP" altLang="en-US" dirty="0"/>
-            <a:t>からメッセージを受領</a:t>
-          </a:r>
-        </a:p>
-      </dgm:t>
-    </dgm:pt>
-    <dgm:pt modelId="{097EE1FF-EC01-4E8E-BC06-6070EFCA437D}" type="parTrans" cxnId="{060039CF-A021-42CA-97CB-C5C2ED4819B0}">
-      <dgm:prSet/>
-      <dgm:spPr/>
-      <dgm:t>
-        <a:bodyPr/>
-        <a:lstStyle/>
-        <a:p>
-          <a:endParaRPr kumimoji="1" lang="ja-JP" altLang="en-US"/>
-        </a:p>
-      </dgm:t>
-    </dgm:pt>
-    <dgm:pt modelId="{4ECD1AEB-78AE-4737-9B6F-3BB73DF99A15}" type="sibTrans" cxnId="{060039CF-A021-42CA-97CB-C5C2ED4819B0}">
-      <dgm:prSet/>
-      <dgm:spPr/>
-      <dgm:t>
-        <a:bodyPr/>
-        <a:lstStyle/>
-        <a:p>
-          <a:endParaRPr kumimoji="1" lang="ja-JP" altLang="en-US"/>
-        </a:p>
-      </dgm:t>
-    </dgm:pt>
-    <dgm:pt modelId="{990B93BB-6BE9-4EC9-9698-FEB9E398E329}">
-      <dgm:prSet/>
-      <dgm:spPr/>
-      <dgm:t>
-        <a:bodyPr/>
-        <a:lstStyle/>
-        <a:p>
-          <a:r>
-            <a:rPr kumimoji="1" lang="ja-JP" altLang="en-US" dirty="0"/>
-            <a:t>さくらの</a:t>
-          </a:r>
-          <a:r>
-            <a:rPr kumimoji="1" lang="en-US" altLang="ja-JP" dirty="0"/>
-            <a:t>AI Engine</a:t>
-          </a:r>
-          <a:r>
-            <a:rPr kumimoji="1" lang="ja-JP" altLang="en-US" dirty="0"/>
-            <a:t>は文字起こし・要約を行い、結果をサーバに返却</a:t>
-          </a:r>
-        </a:p>
-      </dgm:t>
-    </dgm:pt>
-    <dgm:pt modelId="{531E1E88-68A7-41D3-83A7-48290602AC12}" type="parTrans" cxnId="{4CA9A1D7-3F76-4E1B-9E2B-585812FA3FF9}">
-      <dgm:prSet/>
-      <dgm:spPr/>
-      <dgm:t>
-        <a:bodyPr/>
-        <a:lstStyle/>
-        <a:p>
-          <a:endParaRPr kumimoji="1" lang="ja-JP" altLang="en-US"/>
-        </a:p>
-      </dgm:t>
-    </dgm:pt>
-    <dgm:pt modelId="{90517755-3A29-42CA-A139-F2A2ABDE6D51}" type="sibTrans" cxnId="{4CA9A1D7-3F76-4E1B-9E2B-585812FA3FF9}">
-      <dgm:prSet/>
-      <dgm:spPr/>
-      <dgm:t>
-        <a:bodyPr/>
-        <a:lstStyle/>
-        <a:p>
-          <a:endParaRPr kumimoji="1" lang="ja-JP" altLang="en-US"/>
-        </a:p>
-      </dgm:t>
-    </dgm:pt>
-    <dgm:pt modelId="{BF9D835E-EA28-4516-AE6A-792A2F646325}">
-      <dgm:prSet/>
-      <dgm:spPr/>
-      <dgm:t>
-        <a:bodyPr/>
-        <a:lstStyle/>
-        <a:p>
-          <a:r>
-            <a:rPr kumimoji="1" lang="ja-JP" altLang="en-US" dirty="0"/>
-            <a:t>サーバの常駐プロセスが録画データを</a:t>
-          </a:r>
-          <a:br>
-            <a:rPr kumimoji="1" lang="en-US" altLang="ja-JP" dirty="0"/>
-          </a:br>
-          <a:r>
-            <a:rPr kumimoji="1" lang="ja-JP" altLang="en-US" dirty="0"/>
-            <a:t>取得＆音声エンコードし、</a:t>
-          </a:r>
-          <a:br>
-            <a:rPr kumimoji="1" lang="en-US" altLang="ja-JP" dirty="0"/>
-          </a:br>
-          <a:r>
-            <a:rPr kumimoji="1" lang="ja-JP" altLang="en-US" dirty="0"/>
-            <a:t>さくらの</a:t>
-          </a:r>
-          <a:r>
-            <a:rPr kumimoji="1" lang="en-US" altLang="ja-JP" dirty="0"/>
-            <a:t>AI Engine</a:t>
-          </a:r>
-          <a:r>
-            <a:rPr kumimoji="1" lang="ja-JP" altLang="en-US" dirty="0"/>
-            <a:t>呼び出し</a:t>
-          </a:r>
-        </a:p>
-      </dgm:t>
-    </dgm:pt>
-    <dgm:pt modelId="{07F76D7C-12F3-4A74-B7B8-54AAFAE3A7EB}" type="parTrans" cxnId="{1FA246A7-D533-451E-8A43-2B5ACBFE7DAA}">
-      <dgm:prSet/>
-      <dgm:spPr/>
-      <dgm:t>
-        <a:bodyPr/>
-        <a:lstStyle/>
-        <a:p>
-          <a:endParaRPr kumimoji="1" lang="ja-JP" altLang="en-US"/>
-        </a:p>
-      </dgm:t>
-    </dgm:pt>
-    <dgm:pt modelId="{BF3901B3-AD6A-471A-AB52-3D67542E3943}" type="sibTrans" cxnId="{1FA246A7-D533-451E-8A43-2B5ACBFE7DAA}">
-      <dgm:prSet/>
-      <dgm:spPr/>
-      <dgm:t>
-        <a:bodyPr/>
-        <a:lstStyle/>
-        <a:p>
-          <a:endParaRPr kumimoji="1" lang="ja-JP" altLang="en-US"/>
-        </a:p>
-      </dgm:t>
-    </dgm:pt>
-    <dgm:pt modelId="{3C921E30-5C7F-42BF-A1B0-80E33D445967}">
-      <dgm:prSet/>
-      <dgm:spPr/>
-      <dgm:t>
-        <a:bodyPr/>
-        <a:lstStyle/>
-        <a:p>
-          <a:r>
-            <a:rPr kumimoji="1" lang="ja-JP" altLang="en-US" dirty="0"/>
-            <a:t>サーバは文字起こしデータを</a:t>
-          </a:r>
-          <a:br>
-            <a:rPr kumimoji="1" lang="en-US" altLang="ja-JP" dirty="0"/>
-          </a:br>
-          <a:r>
-            <a:rPr kumimoji="1" lang="ja-JP" altLang="en-US" dirty="0"/>
-            <a:t>オブジェクトストレージに反映</a:t>
-          </a:r>
-        </a:p>
-      </dgm:t>
-    </dgm:pt>
-    <dgm:pt modelId="{665E943C-0F96-4EF2-BB3F-FDDEC980B70B}" type="parTrans" cxnId="{3533B7B3-4893-47CD-8427-884CF21962CF}">
-      <dgm:prSet/>
-      <dgm:spPr/>
-      <dgm:t>
-        <a:bodyPr/>
-        <a:lstStyle/>
-        <a:p>
-          <a:endParaRPr kumimoji="1" lang="ja-JP" altLang="en-US"/>
-        </a:p>
-      </dgm:t>
-    </dgm:pt>
-    <dgm:pt modelId="{8F37F1D1-EB65-424A-9F2C-5A6C01FF88FD}" type="sibTrans" cxnId="{3533B7B3-4893-47CD-8427-884CF21962CF}">
-      <dgm:prSet/>
-      <dgm:spPr/>
-      <dgm:t>
-        <a:bodyPr/>
-        <a:lstStyle/>
-        <a:p>
-          <a:endParaRPr kumimoji="1" lang="ja-JP" altLang="en-US"/>
-        </a:p>
-      </dgm:t>
-    </dgm:pt>
-    <dgm:pt modelId="{0760C2DF-2177-47DA-855B-8BE580B99E96}">
-      <dgm:prSet/>
-      <dgm:spPr/>
-      <dgm:t>
-        <a:bodyPr/>
-        <a:lstStyle/>
-        <a:p>
-          <a:r>
-            <a:rPr kumimoji="1" lang="ja-JP" altLang="en-US" dirty="0"/>
-            <a:t>サーバはシンプル通知を通じて</a:t>
-          </a:r>
-          <a:br>
-            <a:rPr kumimoji="1" lang="en-US" altLang="ja-JP" dirty="0"/>
-          </a:br>
-          <a:r>
-            <a:rPr kumimoji="1" lang="ja-JP" altLang="en-US" dirty="0"/>
-            <a:t>処理完了を通知</a:t>
-          </a:r>
-        </a:p>
-      </dgm:t>
-    </dgm:pt>
-    <dgm:pt modelId="{C86175C8-6BEE-4233-87A0-AC9D97431754}" type="parTrans" cxnId="{5A1477C0-7BC2-4F7F-A474-3457E0277643}">
-      <dgm:prSet/>
-      <dgm:spPr/>
-      <dgm:t>
-        <a:bodyPr/>
-        <a:lstStyle/>
-        <a:p>
-          <a:endParaRPr kumimoji="1" lang="ja-JP" altLang="en-US"/>
-        </a:p>
-      </dgm:t>
-    </dgm:pt>
-    <dgm:pt modelId="{829E4281-4D91-494B-B459-20A27C7D5AE6}" type="sibTrans" cxnId="{5A1477C0-7BC2-4F7F-A474-3457E0277643}">
-      <dgm:prSet/>
-      <dgm:spPr/>
-      <dgm:t>
-        <a:bodyPr/>
-        <a:lstStyle/>
-        <a:p>
-          <a:endParaRPr kumimoji="1" lang="ja-JP" altLang="en-US"/>
-        </a:p>
-      </dgm:t>
-    </dgm:pt>
-    <dgm:pt modelId="{AAF068EB-C2BA-4E4C-941C-A230B9E551D1}" type="pres">
-      <dgm:prSet presAssocID="{D142EE24-A998-424A-BA28-CAF4949ECFAF}" presName="linearFlow" presStyleCnt="0">
-        <dgm:presLayoutVars>
-          <dgm:resizeHandles val="exact"/>
-        </dgm:presLayoutVars>
-      </dgm:prSet>
-      <dgm:spPr/>
-    </dgm:pt>
-    <dgm:pt modelId="{2E1175F2-C1BC-4312-B787-E37F965D2F17}" type="pres">
-      <dgm:prSet presAssocID="{FCFB28AA-E588-44ED-98EE-784789F81932}" presName="node" presStyleLbl="node1" presStyleIdx="0" presStyleCnt="7">
-        <dgm:presLayoutVars>
-          <dgm:bulletEnabled val="1"/>
-        </dgm:presLayoutVars>
-      </dgm:prSet>
-      <dgm:spPr/>
-    </dgm:pt>
-    <dgm:pt modelId="{EAB550B0-8B66-4FD5-AA39-3877AE739144}" type="pres">
-      <dgm:prSet presAssocID="{0E70C1FF-71B2-424F-B47F-AB7512B0ED18}" presName="sibTrans" presStyleLbl="sibTrans2D1" presStyleIdx="0" presStyleCnt="6"/>
-      <dgm:spPr/>
-    </dgm:pt>
-    <dgm:pt modelId="{EC5E3B44-AFAB-4DD5-839F-051C3DAF6A39}" type="pres">
-      <dgm:prSet presAssocID="{0E70C1FF-71B2-424F-B47F-AB7512B0ED18}" presName="connectorText" presStyleLbl="sibTrans2D1" presStyleIdx="0" presStyleCnt="6"/>
-      <dgm:spPr/>
-    </dgm:pt>
-    <dgm:pt modelId="{39B6DCBB-71CA-4223-B0D3-607C3277F876}" type="pres">
-      <dgm:prSet presAssocID="{282C7160-1280-4C38-8D62-C833D2079100}" presName="node" presStyleLbl="node1" presStyleIdx="1" presStyleCnt="7">
-        <dgm:presLayoutVars>
-          <dgm:bulletEnabled val="1"/>
-        </dgm:presLayoutVars>
-      </dgm:prSet>
-      <dgm:spPr/>
-    </dgm:pt>
-    <dgm:pt modelId="{C064154F-0AF2-4AF0-B11A-FB237C2BF60F}" type="pres">
-      <dgm:prSet presAssocID="{75AFCF26-CA80-4FDF-B1D0-944AA24934A1}" presName="sibTrans" presStyleLbl="sibTrans2D1" presStyleIdx="1" presStyleCnt="6"/>
-      <dgm:spPr/>
-    </dgm:pt>
-    <dgm:pt modelId="{26053658-5444-4A21-8A39-8A85D705578F}" type="pres">
-      <dgm:prSet presAssocID="{75AFCF26-CA80-4FDF-B1D0-944AA24934A1}" presName="connectorText" presStyleLbl="sibTrans2D1" presStyleIdx="1" presStyleCnt="6"/>
-      <dgm:spPr/>
-    </dgm:pt>
-    <dgm:pt modelId="{401DDB35-9780-4897-A309-73A84EABE41F}" type="pres">
-      <dgm:prSet presAssocID="{B3DFF331-5D87-4A57-B8A1-9677CB2F7E3D}" presName="node" presStyleLbl="node1" presStyleIdx="2" presStyleCnt="7">
-        <dgm:presLayoutVars>
-          <dgm:bulletEnabled val="1"/>
-        </dgm:presLayoutVars>
-      </dgm:prSet>
-      <dgm:spPr/>
-    </dgm:pt>
-    <dgm:pt modelId="{3D056114-0484-4EDF-86EC-D5D9428A7BF9}" type="pres">
-      <dgm:prSet presAssocID="{4ECD1AEB-78AE-4737-9B6F-3BB73DF99A15}" presName="sibTrans" presStyleLbl="sibTrans2D1" presStyleIdx="2" presStyleCnt="6"/>
-      <dgm:spPr/>
-    </dgm:pt>
-    <dgm:pt modelId="{892CE5D1-ABBB-48EA-9D08-056C49FF4520}" type="pres">
-      <dgm:prSet presAssocID="{4ECD1AEB-78AE-4737-9B6F-3BB73DF99A15}" presName="connectorText" presStyleLbl="sibTrans2D1" presStyleIdx="2" presStyleCnt="6"/>
-      <dgm:spPr/>
-    </dgm:pt>
-    <dgm:pt modelId="{7253D03E-F494-4FA9-A711-DCC6F06178F0}" type="pres">
-      <dgm:prSet presAssocID="{BF9D835E-EA28-4516-AE6A-792A2F646325}" presName="node" presStyleLbl="node1" presStyleIdx="3" presStyleCnt="7">
-        <dgm:presLayoutVars>
-          <dgm:bulletEnabled val="1"/>
-        </dgm:presLayoutVars>
-      </dgm:prSet>
-      <dgm:spPr/>
-    </dgm:pt>
-    <dgm:pt modelId="{634B6EAC-C545-413B-B32E-0393E60FE0F9}" type="pres">
-      <dgm:prSet presAssocID="{BF3901B3-AD6A-471A-AB52-3D67542E3943}" presName="sibTrans" presStyleLbl="sibTrans2D1" presStyleIdx="3" presStyleCnt="6"/>
-      <dgm:spPr/>
-    </dgm:pt>
-    <dgm:pt modelId="{413DA36F-D69B-4D7C-887F-BA5627E17695}" type="pres">
-      <dgm:prSet presAssocID="{BF3901B3-AD6A-471A-AB52-3D67542E3943}" presName="connectorText" presStyleLbl="sibTrans2D1" presStyleIdx="3" presStyleCnt="6"/>
-      <dgm:spPr/>
-    </dgm:pt>
-    <dgm:pt modelId="{B149C04E-7AEB-4A78-B7D7-AC20C233D7B6}" type="pres">
-      <dgm:prSet presAssocID="{990B93BB-6BE9-4EC9-9698-FEB9E398E329}" presName="node" presStyleLbl="node1" presStyleIdx="4" presStyleCnt="7">
-        <dgm:presLayoutVars>
-          <dgm:bulletEnabled val="1"/>
-        </dgm:presLayoutVars>
-      </dgm:prSet>
-      <dgm:spPr/>
-    </dgm:pt>
-    <dgm:pt modelId="{876973CB-19C6-4A07-8E92-BB7965FAF234}" type="pres">
-      <dgm:prSet presAssocID="{90517755-3A29-42CA-A139-F2A2ABDE6D51}" presName="sibTrans" presStyleLbl="sibTrans2D1" presStyleIdx="4" presStyleCnt="6"/>
-      <dgm:spPr/>
-    </dgm:pt>
-    <dgm:pt modelId="{AF3E0FD6-7AC6-4380-9318-F7806A575B51}" type="pres">
-      <dgm:prSet presAssocID="{90517755-3A29-42CA-A139-F2A2ABDE6D51}" presName="connectorText" presStyleLbl="sibTrans2D1" presStyleIdx="4" presStyleCnt="6"/>
-      <dgm:spPr/>
-    </dgm:pt>
-    <dgm:pt modelId="{23263FBF-5528-4109-B2ED-87E1E7DCEB63}" type="pres">
-      <dgm:prSet presAssocID="{3C921E30-5C7F-42BF-A1B0-80E33D445967}" presName="node" presStyleLbl="node1" presStyleIdx="5" presStyleCnt="7">
-        <dgm:presLayoutVars>
-          <dgm:bulletEnabled val="1"/>
-        </dgm:presLayoutVars>
-      </dgm:prSet>
-      <dgm:spPr/>
-    </dgm:pt>
-    <dgm:pt modelId="{18D4A096-9F13-44E4-A778-EFE42993CB0B}" type="pres">
-      <dgm:prSet presAssocID="{8F37F1D1-EB65-424A-9F2C-5A6C01FF88FD}" presName="sibTrans" presStyleLbl="sibTrans2D1" presStyleIdx="5" presStyleCnt="6"/>
-      <dgm:spPr/>
-    </dgm:pt>
-    <dgm:pt modelId="{2BF24C72-41C7-4320-ABBA-D92FFB025B7F}" type="pres">
-      <dgm:prSet presAssocID="{8F37F1D1-EB65-424A-9F2C-5A6C01FF88FD}" presName="connectorText" presStyleLbl="sibTrans2D1" presStyleIdx="5" presStyleCnt="6"/>
-      <dgm:spPr/>
-    </dgm:pt>
-    <dgm:pt modelId="{A576E462-304F-490D-BE6C-4E5A74D8E0F1}" type="pres">
-      <dgm:prSet presAssocID="{0760C2DF-2177-47DA-855B-8BE580B99E96}" presName="node" presStyleLbl="node1" presStyleIdx="6" presStyleCnt="7">
-        <dgm:presLayoutVars>
-          <dgm:bulletEnabled val="1"/>
-        </dgm:presLayoutVars>
-      </dgm:prSet>
-      <dgm:spPr/>
-    </dgm:pt>
-  </dgm:ptLst>
-  <dgm:cxnLst>
-    <dgm:cxn modelId="{05E23329-57F2-472A-A75C-94A5F74576E6}" type="presOf" srcId="{0E70C1FF-71B2-424F-B47F-AB7512B0ED18}" destId="{EAB550B0-8B66-4FD5-AA39-3877AE739144}" srcOrd="0" destOrd="0" presId="urn:microsoft.com/office/officeart/2005/8/layout/process2"/>
-    <dgm:cxn modelId="{11A9705D-B7EB-4230-B682-B1D3B48A77FD}" type="presOf" srcId="{4ECD1AEB-78AE-4737-9B6F-3BB73DF99A15}" destId="{892CE5D1-ABBB-48EA-9D08-056C49FF4520}" srcOrd="1" destOrd="0" presId="urn:microsoft.com/office/officeart/2005/8/layout/process2"/>
-    <dgm:cxn modelId="{FFFBD641-ABF8-469B-9896-FB642BAD7128}" srcId="{D142EE24-A998-424A-BA28-CAF4949ECFAF}" destId="{282C7160-1280-4C38-8D62-C833D2079100}" srcOrd="1" destOrd="0" parTransId="{48BA8B2D-B219-40B2-A9C8-AC1FBE7114E7}" sibTransId="{75AFCF26-CA80-4FDF-B1D0-944AA24934A1}"/>
-    <dgm:cxn modelId="{CD8DF443-F476-4DD3-BC33-9542B376595F}" srcId="{D142EE24-A998-424A-BA28-CAF4949ECFAF}" destId="{FCFB28AA-E588-44ED-98EE-784789F81932}" srcOrd="0" destOrd="0" parTransId="{F618B8E0-D4D3-4E55-B918-6507C8BF99BB}" sibTransId="{0E70C1FF-71B2-424F-B47F-AB7512B0ED18}"/>
-    <dgm:cxn modelId="{2620F264-3B68-4C2C-B487-B77CF3106862}" type="presOf" srcId="{90517755-3A29-42CA-A139-F2A2ABDE6D51}" destId="{AF3E0FD6-7AC6-4380-9318-F7806A575B51}" srcOrd="1" destOrd="0" presId="urn:microsoft.com/office/officeart/2005/8/layout/process2"/>
-    <dgm:cxn modelId="{C83A4B6A-ADF1-4772-8C76-DC5A1C056673}" type="presOf" srcId="{D142EE24-A998-424A-BA28-CAF4949ECFAF}" destId="{AAF068EB-C2BA-4E4C-941C-A230B9E551D1}" srcOrd="0" destOrd="0" presId="urn:microsoft.com/office/officeart/2005/8/layout/process2"/>
-    <dgm:cxn modelId="{62F2764A-2126-4C6E-B31D-80772F44A88C}" type="presOf" srcId="{8F37F1D1-EB65-424A-9F2C-5A6C01FF88FD}" destId="{2BF24C72-41C7-4320-ABBA-D92FFB025B7F}" srcOrd="1" destOrd="0" presId="urn:microsoft.com/office/officeart/2005/8/layout/process2"/>
-    <dgm:cxn modelId="{CB8A144B-1B5B-40BE-A5E6-DF3603EB6B54}" type="presOf" srcId="{90517755-3A29-42CA-A139-F2A2ABDE6D51}" destId="{876973CB-19C6-4A07-8E92-BB7965FAF234}" srcOrd="0" destOrd="0" presId="urn:microsoft.com/office/officeart/2005/8/layout/process2"/>
-    <dgm:cxn modelId="{4561437A-89D3-49A1-8717-7ECDECDCDF56}" type="presOf" srcId="{282C7160-1280-4C38-8D62-C833D2079100}" destId="{39B6DCBB-71CA-4223-B0D3-607C3277F876}" srcOrd="0" destOrd="0" presId="urn:microsoft.com/office/officeart/2005/8/layout/process2"/>
-    <dgm:cxn modelId="{2410317D-5619-4729-A8A1-27C2E1CAC85C}" type="presOf" srcId="{990B93BB-6BE9-4EC9-9698-FEB9E398E329}" destId="{B149C04E-7AEB-4A78-B7D7-AC20C233D7B6}" srcOrd="0" destOrd="0" presId="urn:microsoft.com/office/officeart/2005/8/layout/process2"/>
-    <dgm:cxn modelId="{CAFE1595-BA33-4153-8650-A4BDF150CB52}" type="presOf" srcId="{BF3901B3-AD6A-471A-AB52-3D67542E3943}" destId="{634B6EAC-C545-413B-B32E-0393E60FE0F9}" srcOrd="0" destOrd="0" presId="urn:microsoft.com/office/officeart/2005/8/layout/process2"/>
-    <dgm:cxn modelId="{2EF438A0-F9B0-4CE0-AA76-DCCA40A047EC}" type="presOf" srcId="{0760C2DF-2177-47DA-855B-8BE580B99E96}" destId="{A576E462-304F-490D-BE6C-4E5A74D8E0F1}" srcOrd="0" destOrd="0" presId="urn:microsoft.com/office/officeart/2005/8/layout/process2"/>
-    <dgm:cxn modelId="{E52515A1-04EA-4176-8778-24C0FE9C5339}" type="presOf" srcId="{BF3901B3-AD6A-471A-AB52-3D67542E3943}" destId="{413DA36F-D69B-4D7C-887F-BA5627E17695}" srcOrd="1" destOrd="0" presId="urn:microsoft.com/office/officeart/2005/8/layout/process2"/>
-    <dgm:cxn modelId="{1FA246A7-D533-451E-8A43-2B5ACBFE7DAA}" srcId="{D142EE24-A998-424A-BA28-CAF4949ECFAF}" destId="{BF9D835E-EA28-4516-AE6A-792A2F646325}" srcOrd="3" destOrd="0" parTransId="{07F76D7C-12F3-4A74-B7B8-54AAFAE3A7EB}" sibTransId="{BF3901B3-AD6A-471A-AB52-3D67542E3943}"/>
-    <dgm:cxn modelId="{014CB6AC-9B21-4B0F-B5D3-1F9731D95D1E}" type="presOf" srcId="{8F37F1D1-EB65-424A-9F2C-5A6C01FF88FD}" destId="{18D4A096-9F13-44E4-A778-EFE42993CB0B}" srcOrd="0" destOrd="0" presId="urn:microsoft.com/office/officeart/2005/8/layout/process2"/>
-    <dgm:cxn modelId="{8A9136AE-F05C-45D7-873E-78DC1EAA1553}" type="presOf" srcId="{BF9D835E-EA28-4516-AE6A-792A2F646325}" destId="{7253D03E-F494-4FA9-A711-DCC6F06178F0}" srcOrd="0" destOrd="0" presId="urn:microsoft.com/office/officeart/2005/8/layout/process2"/>
-    <dgm:cxn modelId="{3533B7B3-4893-47CD-8427-884CF21962CF}" srcId="{D142EE24-A998-424A-BA28-CAF4949ECFAF}" destId="{3C921E30-5C7F-42BF-A1B0-80E33D445967}" srcOrd="5" destOrd="0" parTransId="{665E943C-0F96-4EF2-BB3F-FDDEC980B70B}" sibTransId="{8F37F1D1-EB65-424A-9F2C-5A6C01FF88FD}"/>
-    <dgm:cxn modelId="{DC7812C0-24DF-404C-8B09-6735A909A090}" type="presOf" srcId="{FCFB28AA-E588-44ED-98EE-784789F81932}" destId="{2E1175F2-C1BC-4312-B787-E37F965D2F17}" srcOrd="0" destOrd="0" presId="urn:microsoft.com/office/officeart/2005/8/layout/process2"/>
-    <dgm:cxn modelId="{5A1477C0-7BC2-4F7F-A474-3457E0277643}" srcId="{D142EE24-A998-424A-BA28-CAF4949ECFAF}" destId="{0760C2DF-2177-47DA-855B-8BE580B99E96}" srcOrd="6" destOrd="0" parTransId="{C86175C8-6BEE-4233-87A0-AC9D97431754}" sibTransId="{829E4281-4D91-494B-B459-20A27C7D5AE6}"/>
-    <dgm:cxn modelId="{D1785FC3-5F4B-4E14-B4F6-E6F4FD7865EE}" type="presOf" srcId="{B3DFF331-5D87-4A57-B8A1-9677CB2F7E3D}" destId="{401DDB35-9780-4897-A309-73A84EABE41F}" srcOrd="0" destOrd="0" presId="urn:microsoft.com/office/officeart/2005/8/layout/process2"/>
-    <dgm:cxn modelId="{060039CF-A021-42CA-97CB-C5C2ED4819B0}" srcId="{D142EE24-A998-424A-BA28-CAF4949ECFAF}" destId="{B3DFF331-5D87-4A57-B8A1-9677CB2F7E3D}" srcOrd="2" destOrd="0" parTransId="{097EE1FF-EC01-4E8E-BC06-6070EFCA437D}" sibTransId="{4ECD1AEB-78AE-4737-9B6F-3BB73DF99A15}"/>
-    <dgm:cxn modelId="{BD784ED7-C8E1-40DA-B68D-269C3C574944}" type="presOf" srcId="{75AFCF26-CA80-4FDF-B1D0-944AA24934A1}" destId="{26053658-5444-4A21-8A39-8A85D705578F}" srcOrd="1" destOrd="0" presId="urn:microsoft.com/office/officeart/2005/8/layout/process2"/>
-    <dgm:cxn modelId="{4CA9A1D7-3F76-4E1B-9E2B-585812FA3FF9}" srcId="{D142EE24-A998-424A-BA28-CAF4949ECFAF}" destId="{990B93BB-6BE9-4EC9-9698-FEB9E398E329}" srcOrd="4" destOrd="0" parTransId="{531E1E88-68A7-41D3-83A7-48290602AC12}" sibTransId="{90517755-3A29-42CA-A139-F2A2ABDE6D51}"/>
-    <dgm:cxn modelId="{75A086E2-DC1F-44C8-976C-9E4C64619FCD}" type="presOf" srcId="{4ECD1AEB-78AE-4737-9B6F-3BB73DF99A15}" destId="{3D056114-0484-4EDF-86EC-D5D9428A7BF9}" srcOrd="0" destOrd="0" presId="urn:microsoft.com/office/officeart/2005/8/layout/process2"/>
-    <dgm:cxn modelId="{48E946F8-E6C1-4238-8F07-031EFE928911}" type="presOf" srcId="{75AFCF26-CA80-4FDF-B1D0-944AA24934A1}" destId="{C064154F-0AF2-4AF0-B11A-FB237C2BF60F}" srcOrd="0" destOrd="0" presId="urn:microsoft.com/office/officeart/2005/8/layout/process2"/>
-    <dgm:cxn modelId="{8C0685F8-60B6-401B-A08E-61E99A8E1E47}" type="presOf" srcId="{0E70C1FF-71B2-424F-B47F-AB7512B0ED18}" destId="{EC5E3B44-AFAB-4DD5-839F-051C3DAF6A39}" srcOrd="1" destOrd="0" presId="urn:microsoft.com/office/officeart/2005/8/layout/process2"/>
-    <dgm:cxn modelId="{73671DFC-F6B5-4911-85B8-F2020505D0B5}" type="presOf" srcId="{3C921E30-5C7F-42BF-A1B0-80E33D445967}" destId="{23263FBF-5528-4109-B2ED-87E1E7DCEB63}" srcOrd="0" destOrd="0" presId="urn:microsoft.com/office/officeart/2005/8/layout/process2"/>
-    <dgm:cxn modelId="{B352ACE2-2259-46B4-9685-D95667DBA5DE}" type="presParOf" srcId="{AAF068EB-C2BA-4E4C-941C-A230B9E551D1}" destId="{2E1175F2-C1BC-4312-B787-E37F965D2F17}" srcOrd="0" destOrd="0" presId="urn:microsoft.com/office/officeart/2005/8/layout/process2"/>
-    <dgm:cxn modelId="{6EF519F9-E46A-4B58-BCC8-22D1552CAE81}" type="presParOf" srcId="{AAF068EB-C2BA-4E4C-941C-A230B9E551D1}" destId="{EAB550B0-8B66-4FD5-AA39-3877AE739144}" srcOrd="1" destOrd="0" presId="urn:microsoft.com/office/officeart/2005/8/layout/process2"/>
-    <dgm:cxn modelId="{B8204CC0-7BE6-4122-8924-C5F8D5DF4A24}" type="presParOf" srcId="{EAB550B0-8B66-4FD5-AA39-3877AE739144}" destId="{EC5E3B44-AFAB-4DD5-839F-051C3DAF6A39}" srcOrd="0" destOrd="0" presId="urn:microsoft.com/office/officeart/2005/8/layout/process2"/>
-    <dgm:cxn modelId="{0B8A6702-528C-4C5E-AC55-AE85878E1B81}" type="presParOf" srcId="{AAF068EB-C2BA-4E4C-941C-A230B9E551D1}" destId="{39B6DCBB-71CA-4223-B0D3-607C3277F876}" srcOrd="2" destOrd="0" presId="urn:microsoft.com/office/officeart/2005/8/layout/process2"/>
-    <dgm:cxn modelId="{0DF6D502-BCCA-4646-8E2D-93E465974AC3}" type="presParOf" srcId="{AAF068EB-C2BA-4E4C-941C-A230B9E551D1}" destId="{C064154F-0AF2-4AF0-B11A-FB237C2BF60F}" srcOrd="3" destOrd="0" presId="urn:microsoft.com/office/officeart/2005/8/layout/process2"/>
-    <dgm:cxn modelId="{EEAB82E5-8358-4F79-840A-0D1C154D69D0}" type="presParOf" srcId="{C064154F-0AF2-4AF0-B11A-FB237C2BF60F}" destId="{26053658-5444-4A21-8A39-8A85D705578F}" srcOrd="0" destOrd="0" presId="urn:microsoft.com/office/officeart/2005/8/layout/process2"/>
-    <dgm:cxn modelId="{BC69718C-2763-45D4-A737-C2082B7EE16E}" type="presParOf" srcId="{AAF068EB-C2BA-4E4C-941C-A230B9E551D1}" destId="{401DDB35-9780-4897-A309-73A84EABE41F}" srcOrd="4" destOrd="0" presId="urn:microsoft.com/office/officeart/2005/8/layout/process2"/>
-    <dgm:cxn modelId="{969CACB5-C435-411F-A4EF-C4C1563C40C8}" type="presParOf" srcId="{AAF068EB-C2BA-4E4C-941C-A230B9E551D1}" destId="{3D056114-0484-4EDF-86EC-D5D9428A7BF9}" srcOrd="5" destOrd="0" presId="urn:microsoft.com/office/officeart/2005/8/layout/process2"/>
-    <dgm:cxn modelId="{AB32202E-2FAE-44FD-BE6C-82A214D4D2F3}" type="presParOf" srcId="{3D056114-0484-4EDF-86EC-D5D9428A7BF9}" destId="{892CE5D1-ABBB-48EA-9D08-056C49FF4520}" srcOrd="0" destOrd="0" presId="urn:microsoft.com/office/officeart/2005/8/layout/process2"/>
-    <dgm:cxn modelId="{17F0C14A-34DB-4019-BFAC-55A014719886}" type="presParOf" srcId="{AAF068EB-C2BA-4E4C-941C-A230B9E551D1}" destId="{7253D03E-F494-4FA9-A711-DCC6F06178F0}" srcOrd="6" destOrd="0" presId="urn:microsoft.com/office/officeart/2005/8/layout/process2"/>
-    <dgm:cxn modelId="{2E95F82D-9B16-4EF5-998A-6C0045592B41}" type="presParOf" srcId="{AAF068EB-C2BA-4E4C-941C-A230B9E551D1}" destId="{634B6EAC-C545-413B-B32E-0393E60FE0F9}" srcOrd="7" destOrd="0" presId="urn:microsoft.com/office/officeart/2005/8/layout/process2"/>
-    <dgm:cxn modelId="{7456D71C-3AFF-4CEB-9868-8C9C063AC88E}" type="presParOf" srcId="{634B6EAC-C545-413B-B32E-0393E60FE0F9}" destId="{413DA36F-D69B-4D7C-887F-BA5627E17695}" srcOrd="0" destOrd="0" presId="urn:microsoft.com/office/officeart/2005/8/layout/process2"/>
-    <dgm:cxn modelId="{92E84F24-DA46-44E5-AFAA-7D216D816CE9}" type="presParOf" srcId="{AAF068EB-C2BA-4E4C-941C-A230B9E551D1}" destId="{B149C04E-7AEB-4A78-B7D7-AC20C233D7B6}" srcOrd="8" destOrd="0" presId="urn:microsoft.com/office/officeart/2005/8/layout/process2"/>
-    <dgm:cxn modelId="{ADC66C68-DB4C-4354-8410-2067A0245D51}" type="presParOf" srcId="{AAF068EB-C2BA-4E4C-941C-A230B9E551D1}" destId="{876973CB-19C6-4A07-8E92-BB7965FAF234}" srcOrd="9" destOrd="0" presId="urn:microsoft.com/office/officeart/2005/8/layout/process2"/>
-    <dgm:cxn modelId="{0EEA4ADF-D446-4F40-A763-622D826DA19B}" type="presParOf" srcId="{876973CB-19C6-4A07-8E92-BB7965FAF234}" destId="{AF3E0FD6-7AC6-4380-9318-F7806A575B51}" srcOrd="0" destOrd="0" presId="urn:microsoft.com/office/officeart/2005/8/layout/process2"/>
-    <dgm:cxn modelId="{DF6F6119-D684-4892-9FC3-A2245AC7EB1E}" type="presParOf" srcId="{AAF068EB-C2BA-4E4C-941C-A230B9E551D1}" destId="{23263FBF-5528-4109-B2ED-87E1E7DCEB63}" srcOrd="10" destOrd="0" presId="urn:microsoft.com/office/officeart/2005/8/layout/process2"/>
-    <dgm:cxn modelId="{31B7EA4E-3E09-4018-BF31-2C5625FB986F}" type="presParOf" srcId="{AAF068EB-C2BA-4E4C-941C-A230B9E551D1}" destId="{18D4A096-9F13-44E4-A778-EFE42993CB0B}" srcOrd="11" destOrd="0" presId="urn:microsoft.com/office/officeart/2005/8/layout/process2"/>
-    <dgm:cxn modelId="{FE381250-13D7-496C-8484-2C2EEC48935B}" type="presParOf" srcId="{18D4A096-9F13-44E4-A778-EFE42993CB0B}" destId="{2BF24C72-41C7-4320-ABBA-D92FFB025B7F}" srcOrd="0" destOrd="0" presId="urn:microsoft.com/office/officeart/2005/8/layout/process2"/>
-    <dgm:cxn modelId="{68A457CC-5482-41FF-A1E6-0D8F82C83736}" type="presParOf" srcId="{AAF068EB-C2BA-4E4C-941C-A230B9E551D1}" destId="{A576E462-304F-490D-BE6C-4E5A74D8E0F1}" srcOrd="12" destOrd="0" presId="urn:microsoft.com/office/officeart/2005/8/layout/process2"/>
-  </dgm:cxnLst>
-  <dgm:bg/>
-  <dgm:whole/>
-  <dgm:extLst>
-    <a:ext uri="http://schemas.microsoft.com/office/drawing/2008/diagram">
-      <dsp:dataModelExt xmlns:dsp="http://schemas.microsoft.com/office/drawing/2008/diagram" relId="rId6" minVer="http://schemas.openxmlformats.org/drawingml/2006/diagram"/>
-    </a:ext>
-  </dgm:extLst>
-</dgm:dataModel>
-</file>
-
-<file path=ppt/diagrams/data2.xml><?xml version="1.0" encoding="utf-8"?>
 <dgm:dataModel xmlns:dgm="http://schemas.openxmlformats.org/drawingml/2006/diagram" xmlns:a="http://schemas.openxmlformats.org/drawingml/2006/main">
   <dgm:ptLst>
     <dgm:pt modelId="{D142EE24-A998-424A-BA28-CAF4949ECFAF}" type="doc">
@@ -4385,1286 +3173,7 @@
 </dsp:drawing>
 </file>
 
-<file path=ppt/diagrams/drawing2.xml><?xml version="1.0" encoding="utf-8"?>
-<dsp:drawing xmlns:dgm="http://schemas.openxmlformats.org/drawingml/2006/diagram" xmlns:dsp="http://schemas.microsoft.com/office/drawing/2008/diagram" xmlns:a="http://schemas.openxmlformats.org/drawingml/2006/main">
-  <dsp:spTree>
-    <dsp:nvGrpSpPr>
-      <dsp:cNvPr id="0" name=""/>
-      <dsp:cNvGrpSpPr/>
-    </dsp:nvGrpSpPr>
-    <dsp:grpSpPr/>
-    <dsp:sp modelId="{2E1175F2-C1BC-4312-B787-E37F965D2F17}">
-      <dsp:nvSpPr>
-        <dsp:cNvPr id="0" name=""/>
-        <dsp:cNvSpPr/>
-      </dsp:nvSpPr>
-      <dsp:spPr>
-        <a:xfrm>
-          <a:off x="1335195" y="1674"/>
-          <a:ext cx="3655546" cy="1371265"/>
-        </a:xfrm>
-        <a:prstGeom prst="roundRect">
-          <a:avLst>
-            <a:gd name="adj" fmla="val 10000"/>
-          </a:avLst>
-        </a:prstGeom>
-        <a:solidFill>
-          <a:schemeClr val="lt1">
-            <a:hueOff val="0"/>
-            <a:satOff val="0"/>
-            <a:lumOff val="0"/>
-            <a:alphaOff val="0"/>
-          </a:schemeClr>
-        </a:solidFill>
-        <a:ln w="12700" cap="flat" cmpd="sng" algn="ctr">
-          <a:solidFill>
-            <a:schemeClr val="dk1">
-              <a:shade val="80000"/>
-              <a:hueOff val="0"/>
-              <a:satOff val="0"/>
-              <a:lumOff val="0"/>
-              <a:alphaOff val="0"/>
-            </a:schemeClr>
-          </a:solidFill>
-          <a:prstDash val="solid"/>
-          <a:miter lim="800000"/>
-        </a:ln>
-        <a:effectLst/>
-      </dsp:spPr>
-      <dsp:style>
-        <a:lnRef idx="2">
-          <a:scrgbClr r="0" g="0" b="0"/>
-        </a:lnRef>
-        <a:fillRef idx="1">
-          <a:scrgbClr r="0" g="0" b="0"/>
-        </a:fillRef>
-        <a:effectRef idx="0">
-          <a:scrgbClr r="0" g="0" b="0"/>
-        </a:effectRef>
-        <a:fontRef idx="minor">
-          <a:schemeClr val="lt1"/>
-        </a:fontRef>
-      </dsp:style>
-      <dsp:txBody>
-        <a:bodyPr spcFirstLastPara="0" vert="horz" wrap="square" lIns="57150" tIns="57150" rIns="57150" bIns="57150" numCol="1" spcCol="1270" anchor="ctr" anchorCtr="0">
-          <a:noAutofit/>
-        </a:bodyPr>
-        <a:lstStyle/>
-        <a:p>
-          <a:pPr marL="0" lvl="0" indent="0" algn="ctr" defTabSz="666750">
-            <a:lnSpc>
-              <a:spcPct val="90000"/>
-            </a:lnSpc>
-            <a:spcBef>
-              <a:spcPct val="0"/>
-            </a:spcBef>
-            <a:spcAft>
-              <a:spcPct val="35000"/>
-            </a:spcAft>
-            <a:buFont typeface="+mj-lt"/>
-            <a:buNone/>
-          </a:pPr>
-          <a:r>
-            <a:rPr kumimoji="1" lang="en-US" altLang="ja-JP" sz="1500" kern="1200" dirty="0" err="1"/>
-            <a:t>ImageFlux</a:t>
-          </a:r>
-          <a:r>
-            <a:rPr kumimoji="1" lang="ja-JP" altLang="en-US" sz="1500" kern="1200" dirty="0"/>
-            <a:t>が</a:t>
-          </a:r>
-          <a:r>
-            <a:rPr kumimoji="1" lang="en-US" altLang="ja-JP" sz="1500" kern="1200" dirty="0" err="1"/>
-            <a:t>AppRun</a:t>
-          </a:r>
-          <a:r>
-            <a:rPr kumimoji="1" lang="ja-JP" altLang="en-US" sz="1500" kern="1200" dirty="0"/>
-            <a:t>共用型に</a:t>
-          </a:r>
-          <a:br>
-            <a:rPr kumimoji="1" lang="en-US" altLang="ja-JP" sz="1500" kern="1200" dirty="0"/>
-          </a:br>
-          <a:r>
-            <a:rPr kumimoji="1" lang="ja-JP" altLang="en-US" sz="1500" kern="1200" dirty="0"/>
-            <a:t>アーカイブ保存完了のイベント</a:t>
-          </a:r>
-          <a:r>
-            <a:rPr kumimoji="1" lang="en-US" altLang="ja-JP" sz="1500" kern="1200" dirty="0"/>
-            <a:t>Webhook</a:t>
-          </a:r>
-          <a:r>
-            <a:rPr kumimoji="1" lang="ja-JP" altLang="en-US" sz="1500" kern="1200" dirty="0"/>
-            <a:t>通知を送信</a:t>
-          </a:r>
-        </a:p>
-      </dsp:txBody>
-      <dsp:txXfrm>
-        <a:off x="1375358" y="41837"/>
-        <a:ext cx="3575220" cy="1290939"/>
-      </dsp:txXfrm>
-    </dsp:sp>
-    <dsp:sp modelId="{EAB550B0-8B66-4FD5-AA39-3877AE739144}">
-      <dsp:nvSpPr>
-        <dsp:cNvPr id="0" name=""/>
-        <dsp:cNvSpPr/>
-      </dsp:nvSpPr>
-      <dsp:spPr>
-        <a:xfrm rot="5400000">
-          <a:off x="2905856" y="1407221"/>
-          <a:ext cx="514224" cy="617069"/>
-        </a:xfrm>
-        <a:prstGeom prst="rightArrow">
-          <a:avLst>
-            <a:gd name="adj1" fmla="val 60000"/>
-            <a:gd name="adj2" fmla="val 50000"/>
-          </a:avLst>
-        </a:prstGeom>
-        <a:solidFill>
-          <a:schemeClr val="dk1">
-            <a:tint val="60000"/>
-            <a:hueOff val="0"/>
-            <a:satOff val="0"/>
-            <a:lumOff val="0"/>
-            <a:alphaOff val="0"/>
-          </a:schemeClr>
-        </a:solidFill>
-        <a:ln>
-          <a:noFill/>
-        </a:ln>
-        <a:effectLst/>
-      </dsp:spPr>
-      <dsp:style>
-        <a:lnRef idx="0">
-          <a:scrgbClr r="0" g="0" b="0"/>
-        </a:lnRef>
-        <a:fillRef idx="1">
-          <a:scrgbClr r="0" g="0" b="0"/>
-        </a:fillRef>
-        <a:effectRef idx="0">
-          <a:scrgbClr r="0" g="0" b="0"/>
-        </a:effectRef>
-        <a:fontRef idx="minor">
-          <a:schemeClr val="lt1"/>
-        </a:fontRef>
-      </dsp:style>
-      <dsp:txBody>
-        <a:bodyPr spcFirstLastPara="0" vert="horz" wrap="square" lIns="0" tIns="0" rIns="0" bIns="0" numCol="1" spcCol="1270" anchor="ctr" anchorCtr="0">
-          <a:noAutofit/>
-        </a:bodyPr>
-        <a:lstStyle/>
-        <a:p>
-          <a:pPr marL="0" lvl="0" indent="0" algn="ctr" defTabSz="533400">
-            <a:lnSpc>
-              <a:spcPct val="90000"/>
-            </a:lnSpc>
-            <a:spcBef>
-              <a:spcPct val="0"/>
-            </a:spcBef>
-            <a:spcAft>
-              <a:spcPct val="35000"/>
-            </a:spcAft>
-            <a:buNone/>
-          </a:pPr>
-          <a:endParaRPr kumimoji="1" lang="ja-JP" altLang="en-US" sz="1200" kern="1200"/>
-        </a:p>
-      </dsp:txBody>
-      <dsp:txXfrm rot="-5400000">
-        <a:off x="2977848" y="1458644"/>
-        <a:ext cx="370241" cy="359957"/>
-      </dsp:txXfrm>
-    </dsp:sp>
-    <dsp:sp modelId="{39B6DCBB-71CA-4223-B0D3-607C3277F876}">
-      <dsp:nvSpPr>
-        <dsp:cNvPr id="0" name=""/>
-        <dsp:cNvSpPr/>
-      </dsp:nvSpPr>
-      <dsp:spPr>
-        <a:xfrm>
-          <a:off x="1335195" y="2058572"/>
-          <a:ext cx="3655546" cy="1371265"/>
-        </a:xfrm>
-        <a:prstGeom prst="roundRect">
-          <a:avLst>
-            <a:gd name="adj" fmla="val 10000"/>
-          </a:avLst>
-        </a:prstGeom>
-        <a:solidFill>
-          <a:schemeClr val="lt1">
-            <a:hueOff val="0"/>
-            <a:satOff val="0"/>
-            <a:lumOff val="0"/>
-            <a:alphaOff val="0"/>
-          </a:schemeClr>
-        </a:solidFill>
-        <a:ln w="12700" cap="flat" cmpd="sng" algn="ctr">
-          <a:solidFill>
-            <a:schemeClr val="dk1">
-              <a:shade val="80000"/>
-              <a:hueOff val="0"/>
-              <a:satOff val="0"/>
-              <a:lumOff val="0"/>
-              <a:alphaOff val="0"/>
-            </a:schemeClr>
-          </a:solidFill>
-          <a:prstDash val="solid"/>
-          <a:miter lim="800000"/>
-        </a:ln>
-        <a:effectLst/>
-      </dsp:spPr>
-      <dsp:style>
-        <a:lnRef idx="2">
-          <a:scrgbClr r="0" g="0" b="0"/>
-        </a:lnRef>
-        <a:fillRef idx="1">
-          <a:scrgbClr r="0" g="0" b="0"/>
-        </a:fillRef>
-        <a:effectRef idx="0">
-          <a:scrgbClr r="0" g="0" b="0"/>
-        </a:effectRef>
-        <a:fontRef idx="minor">
-          <a:schemeClr val="lt1"/>
-        </a:fontRef>
-      </dsp:style>
-      <dsp:txBody>
-        <a:bodyPr spcFirstLastPara="0" vert="horz" wrap="square" lIns="57150" tIns="57150" rIns="57150" bIns="57150" numCol="1" spcCol="1270" anchor="ctr" anchorCtr="0">
-          <a:noAutofit/>
-        </a:bodyPr>
-        <a:lstStyle/>
-        <a:p>
-          <a:pPr marL="0" lvl="0" indent="0" algn="ctr" defTabSz="666750">
-            <a:lnSpc>
-              <a:spcPct val="90000"/>
-            </a:lnSpc>
-            <a:spcBef>
-              <a:spcPct val="0"/>
-            </a:spcBef>
-            <a:spcAft>
-              <a:spcPct val="35000"/>
-            </a:spcAft>
-            <a:buFont typeface="+mj-lt"/>
-            <a:buNone/>
-          </a:pPr>
-          <a:r>
-            <a:rPr kumimoji="1" lang="en-US" altLang="ja-JP" sz="1500" kern="1200" dirty="0" err="1"/>
-            <a:t>AppRun</a:t>
-          </a:r>
-          <a:r>
-            <a:rPr kumimoji="1" lang="ja-JP" altLang="en-US" sz="1500" kern="1200" dirty="0"/>
-            <a:t>共用型はシンプル</a:t>
-          </a:r>
-          <a:r>
-            <a:rPr kumimoji="1" lang="en-US" altLang="ja-JP" sz="1500" kern="1200" dirty="0"/>
-            <a:t>MQ</a:t>
-          </a:r>
-          <a:r>
-            <a:rPr kumimoji="1" lang="ja-JP" altLang="en-US" sz="1500" kern="1200" dirty="0"/>
-            <a:t>に</a:t>
-          </a:r>
-          <a:br>
-            <a:rPr kumimoji="1" lang="en-US" altLang="ja-JP" sz="1500" kern="1200" dirty="0"/>
-          </a:br>
-          <a:r>
-            <a:rPr kumimoji="1" lang="en-US" altLang="ja-JP" sz="1500" kern="1200" dirty="0"/>
-            <a:t>.m3u8</a:t>
-          </a:r>
-          <a:r>
-            <a:rPr kumimoji="1" lang="ja-JP" altLang="en-US" sz="1500" kern="1200" dirty="0"/>
-            <a:t>のパスと通知日時を送信</a:t>
-          </a:r>
-          <a:endParaRPr kumimoji="1" lang="en-US" altLang="ja-JP" sz="1500" kern="1200" dirty="0"/>
-        </a:p>
-        <a:p>
-          <a:pPr marL="0" lvl="0" indent="0" algn="ctr" defTabSz="666750">
-            <a:lnSpc>
-              <a:spcPct val="90000"/>
-            </a:lnSpc>
-            <a:spcBef>
-              <a:spcPct val="0"/>
-            </a:spcBef>
-            <a:spcAft>
-              <a:spcPct val="35000"/>
-            </a:spcAft>
-            <a:buFont typeface="+mj-lt"/>
-            <a:buNone/>
-          </a:pPr>
-          <a:r>
-            <a:rPr kumimoji="1" lang="ja-JP" altLang="en-US" sz="1500" kern="1200" dirty="0"/>
-            <a:t>（モニタリングスイートにもログ連携）</a:t>
-          </a:r>
-        </a:p>
-      </dsp:txBody>
-      <dsp:txXfrm>
-        <a:off x="1375358" y="2098735"/>
-        <a:ext cx="3575220" cy="1290939"/>
-      </dsp:txXfrm>
-    </dsp:sp>
-    <dsp:sp modelId="{C064154F-0AF2-4AF0-B11A-FB237C2BF60F}">
-      <dsp:nvSpPr>
-        <dsp:cNvPr id="0" name=""/>
-        <dsp:cNvSpPr/>
-      </dsp:nvSpPr>
-      <dsp:spPr>
-        <a:xfrm rot="5400000">
-          <a:off x="2905856" y="3464118"/>
-          <a:ext cx="514224" cy="617069"/>
-        </a:xfrm>
-        <a:prstGeom prst="rightArrow">
-          <a:avLst>
-            <a:gd name="adj1" fmla="val 60000"/>
-            <a:gd name="adj2" fmla="val 50000"/>
-          </a:avLst>
-        </a:prstGeom>
-        <a:solidFill>
-          <a:schemeClr val="dk1">
-            <a:tint val="60000"/>
-            <a:hueOff val="0"/>
-            <a:satOff val="0"/>
-            <a:lumOff val="0"/>
-            <a:alphaOff val="0"/>
-          </a:schemeClr>
-        </a:solidFill>
-        <a:ln>
-          <a:noFill/>
-        </a:ln>
-        <a:effectLst/>
-      </dsp:spPr>
-      <dsp:style>
-        <a:lnRef idx="0">
-          <a:scrgbClr r="0" g="0" b="0"/>
-        </a:lnRef>
-        <a:fillRef idx="1">
-          <a:scrgbClr r="0" g="0" b="0"/>
-        </a:fillRef>
-        <a:effectRef idx="0">
-          <a:scrgbClr r="0" g="0" b="0"/>
-        </a:effectRef>
-        <a:fontRef idx="minor">
-          <a:schemeClr val="lt1"/>
-        </a:fontRef>
-      </dsp:style>
-      <dsp:txBody>
-        <a:bodyPr spcFirstLastPara="0" vert="horz" wrap="square" lIns="0" tIns="0" rIns="0" bIns="0" numCol="1" spcCol="1270" anchor="ctr" anchorCtr="0">
-          <a:noAutofit/>
-        </a:bodyPr>
-        <a:lstStyle/>
-        <a:p>
-          <a:pPr marL="0" lvl="0" indent="0" algn="ctr" defTabSz="533400">
-            <a:lnSpc>
-              <a:spcPct val="90000"/>
-            </a:lnSpc>
-            <a:spcBef>
-              <a:spcPct val="0"/>
-            </a:spcBef>
-            <a:spcAft>
-              <a:spcPct val="35000"/>
-            </a:spcAft>
-            <a:buNone/>
-          </a:pPr>
-          <a:endParaRPr kumimoji="1" lang="ja-JP" altLang="en-US" sz="1200" kern="1200"/>
-        </a:p>
-      </dsp:txBody>
-      <dsp:txXfrm rot="-5400000">
-        <a:off x="2977848" y="3515541"/>
-        <a:ext cx="370241" cy="359957"/>
-      </dsp:txXfrm>
-    </dsp:sp>
-    <dsp:sp modelId="{401DDB35-9780-4897-A309-73A84EABE41F}">
-      <dsp:nvSpPr>
-        <dsp:cNvPr id="0" name=""/>
-        <dsp:cNvSpPr/>
-      </dsp:nvSpPr>
-      <dsp:spPr>
-        <a:xfrm>
-          <a:off x="1335195" y="4115469"/>
-          <a:ext cx="3655546" cy="1371265"/>
-        </a:xfrm>
-        <a:prstGeom prst="roundRect">
-          <a:avLst>
-            <a:gd name="adj" fmla="val 10000"/>
-          </a:avLst>
-        </a:prstGeom>
-        <a:solidFill>
-          <a:schemeClr val="lt1">
-            <a:hueOff val="0"/>
-            <a:satOff val="0"/>
-            <a:lumOff val="0"/>
-            <a:alphaOff val="0"/>
-          </a:schemeClr>
-        </a:solidFill>
-        <a:ln w="12700" cap="flat" cmpd="sng" algn="ctr">
-          <a:solidFill>
-            <a:schemeClr val="dk1">
-              <a:shade val="80000"/>
-              <a:hueOff val="0"/>
-              <a:satOff val="0"/>
-              <a:lumOff val="0"/>
-              <a:alphaOff val="0"/>
-            </a:schemeClr>
-          </a:solidFill>
-          <a:prstDash val="solid"/>
-          <a:miter lim="800000"/>
-        </a:ln>
-        <a:effectLst/>
-      </dsp:spPr>
-      <dsp:style>
-        <a:lnRef idx="2">
-          <a:scrgbClr r="0" g="0" b="0"/>
-        </a:lnRef>
-        <a:fillRef idx="1">
-          <a:scrgbClr r="0" g="0" b="0"/>
-        </a:fillRef>
-        <a:effectRef idx="0">
-          <a:scrgbClr r="0" g="0" b="0"/>
-        </a:effectRef>
-        <a:fontRef idx="minor">
-          <a:schemeClr val="lt1"/>
-        </a:fontRef>
-      </dsp:style>
-      <dsp:txBody>
-        <a:bodyPr spcFirstLastPara="0" vert="horz" wrap="square" lIns="57150" tIns="57150" rIns="57150" bIns="57150" numCol="1" spcCol="1270" anchor="ctr" anchorCtr="0">
-          <a:noAutofit/>
-        </a:bodyPr>
-        <a:lstStyle/>
-        <a:p>
-          <a:pPr marL="0" lvl="0" indent="0" algn="ctr" defTabSz="666750">
-            <a:lnSpc>
-              <a:spcPct val="90000"/>
-            </a:lnSpc>
-            <a:spcBef>
-              <a:spcPct val="0"/>
-            </a:spcBef>
-            <a:spcAft>
-              <a:spcPct val="35000"/>
-            </a:spcAft>
-            <a:buNone/>
-          </a:pPr>
-          <a:r>
-            <a:rPr kumimoji="1" lang="ja-JP" altLang="en-US" sz="1500" kern="1200" dirty="0"/>
-            <a:t>サーバの常駐プロセスが順次</a:t>
-          </a:r>
-          <a:br>
-            <a:rPr kumimoji="1" lang="en-US" altLang="ja-JP" sz="1500" kern="1200" dirty="0"/>
-          </a:br>
-          <a:r>
-            <a:rPr kumimoji="1" lang="ja-JP" altLang="en-US" sz="1500" kern="1200" dirty="0"/>
-            <a:t>シンプル</a:t>
-          </a:r>
-          <a:r>
-            <a:rPr kumimoji="1" lang="en-US" altLang="ja-JP" sz="1500" kern="1200" dirty="0"/>
-            <a:t>MQ</a:t>
-          </a:r>
-          <a:r>
-            <a:rPr kumimoji="1" lang="ja-JP" altLang="en-US" sz="1500" kern="1200" dirty="0"/>
-            <a:t>からメッセージを受領</a:t>
-          </a:r>
-        </a:p>
-      </dsp:txBody>
-      <dsp:txXfrm>
-        <a:off x="1375358" y="4155632"/>
-        <a:ext cx="3575220" cy="1290939"/>
-      </dsp:txXfrm>
-    </dsp:sp>
-    <dsp:sp modelId="{3D056114-0484-4EDF-86EC-D5D9428A7BF9}">
-      <dsp:nvSpPr>
-        <dsp:cNvPr id="0" name=""/>
-        <dsp:cNvSpPr/>
-      </dsp:nvSpPr>
-      <dsp:spPr>
-        <a:xfrm rot="5400000">
-          <a:off x="2905856" y="5521016"/>
-          <a:ext cx="514224" cy="617069"/>
-        </a:xfrm>
-        <a:prstGeom prst="rightArrow">
-          <a:avLst>
-            <a:gd name="adj1" fmla="val 60000"/>
-            <a:gd name="adj2" fmla="val 50000"/>
-          </a:avLst>
-        </a:prstGeom>
-        <a:solidFill>
-          <a:schemeClr val="dk1">
-            <a:tint val="60000"/>
-            <a:hueOff val="0"/>
-            <a:satOff val="0"/>
-            <a:lumOff val="0"/>
-            <a:alphaOff val="0"/>
-          </a:schemeClr>
-        </a:solidFill>
-        <a:ln>
-          <a:noFill/>
-        </a:ln>
-        <a:effectLst/>
-      </dsp:spPr>
-      <dsp:style>
-        <a:lnRef idx="0">
-          <a:scrgbClr r="0" g="0" b="0"/>
-        </a:lnRef>
-        <a:fillRef idx="1">
-          <a:scrgbClr r="0" g="0" b="0"/>
-        </a:fillRef>
-        <a:effectRef idx="0">
-          <a:scrgbClr r="0" g="0" b="0"/>
-        </a:effectRef>
-        <a:fontRef idx="minor">
-          <a:schemeClr val="lt1"/>
-        </a:fontRef>
-      </dsp:style>
-      <dsp:txBody>
-        <a:bodyPr spcFirstLastPara="0" vert="horz" wrap="square" lIns="0" tIns="0" rIns="0" bIns="0" numCol="1" spcCol="1270" anchor="ctr" anchorCtr="0">
-          <a:noAutofit/>
-        </a:bodyPr>
-        <a:lstStyle/>
-        <a:p>
-          <a:pPr marL="0" lvl="0" indent="0" algn="ctr" defTabSz="533400">
-            <a:lnSpc>
-              <a:spcPct val="90000"/>
-            </a:lnSpc>
-            <a:spcBef>
-              <a:spcPct val="0"/>
-            </a:spcBef>
-            <a:spcAft>
-              <a:spcPct val="35000"/>
-            </a:spcAft>
-            <a:buNone/>
-          </a:pPr>
-          <a:endParaRPr kumimoji="1" lang="ja-JP" altLang="en-US" sz="1200" kern="1200"/>
-        </a:p>
-      </dsp:txBody>
-      <dsp:txXfrm rot="-5400000">
-        <a:off x="2977848" y="5572439"/>
-        <a:ext cx="370241" cy="359957"/>
-      </dsp:txXfrm>
-    </dsp:sp>
-    <dsp:sp modelId="{7253D03E-F494-4FA9-A711-DCC6F06178F0}">
-      <dsp:nvSpPr>
-        <dsp:cNvPr id="0" name=""/>
-        <dsp:cNvSpPr/>
-      </dsp:nvSpPr>
-      <dsp:spPr>
-        <a:xfrm>
-          <a:off x="1335195" y="6172367"/>
-          <a:ext cx="3655546" cy="1371265"/>
-        </a:xfrm>
-        <a:prstGeom prst="roundRect">
-          <a:avLst>
-            <a:gd name="adj" fmla="val 10000"/>
-          </a:avLst>
-        </a:prstGeom>
-        <a:solidFill>
-          <a:schemeClr val="lt1">
-            <a:hueOff val="0"/>
-            <a:satOff val="0"/>
-            <a:lumOff val="0"/>
-            <a:alphaOff val="0"/>
-          </a:schemeClr>
-        </a:solidFill>
-        <a:ln w="12700" cap="flat" cmpd="sng" algn="ctr">
-          <a:solidFill>
-            <a:schemeClr val="dk1">
-              <a:shade val="80000"/>
-              <a:hueOff val="0"/>
-              <a:satOff val="0"/>
-              <a:lumOff val="0"/>
-              <a:alphaOff val="0"/>
-            </a:schemeClr>
-          </a:solidFill>
-          <a:prstDash val="solid"/>
-          <a:miter lim="800000"/>
-        </a:ln>
-        <a:effectLst/>
-      </dsp:spPr>
-      <dsp:style>
-        <a:lnRef idx="2">
-          <a:scrgbClr r="0" g="0" b="0"/>
-        </a:lnRef>
-        <a:fillRef idx="1">
-          <a:scrgbClr r="0" g="0" b="0"/>
-        </a:fillRef>
-        <a:effectRef idx="0">
-          <a:scrgbClr r="0" g="0" b="0"/>
-        </a:effectRef>
-        <a:fontRef idx="minor">
-          <a:schemeClr val="lt1"/>
-        </a:fontRef>
-      </dsp:style>
-      <dsp:txBody>
-        <a:bodyPr spcFirstLastPara="0" vert="horz" wrap="square" lIns="57150" tIns="57150" rIns="57150" bIns="57150" numCol="1" spcCol="1270" anchor="ctr" anchorCtr="0">
-          <a:noAutofit/>
-        </a:bodyPr>
-        <a:lstStyle/>
-        <a:p>
-          <a:pPr marL="0" lvl="0" indent="0" algn="ctr" defTabSz="666750">
-            <a:lnSpc>
-              <a:spcPct val="90000"/>
-            </a:lnSpc>
-            <a:spcBef>
-              <a:spcPct val="0"/>
-            </a:spcBef>
-            <a:spcAft>
-              <a:spcPct val="35000"/>
-            </a:spcAft>
-            <a:buNone/>
-          </a:pPr>
-          <a:r>
-            <a:rPr kumimoji="1" lang="ja-JP" altLang="en-US" sz="1500" kern="1200" dirty="0"/>
-            <a:t>サーバの常駐プロセスが録画データを</a:t>
-          </a:r>
-          <a:br>
-            <a:rPr kumimoji="1" lang="en-US" altLang="ja-JP" sz="1500" kern="1200" dirty="0"/>
-          </a:br>
-          <a:r>
-            <a:rPr kumimoji="1" lang="ja-JP" altLang="en-US" sz="1500" kern="1200" dirty="0"/>
-            <a:t>取得＆音声エンコードし、</a:t>
-          </a:r>
-          <a:br>
-            <a:rPr kumimoji="1" lang="en-US" altLang="ja-JP" sz="1500" kern="1200" dirty="0"/>
-          </a:br>
-          <a:r>
-            <a:rPr kumimoji="1" lang="ja-JP" altLang="en-US" sz="1500" kern="1200" dirty="0"/>
-            <a:t>さくらの</a:t>
-          </a:r>
-          <a:r>
-            <a:rPr kumimoji="1" lang="en-US" altLang="ja-JP" sz="1500" kern="1200" dirty="0"/>
-            <a:t>AI Engine</a:t>
-          </a:r>
-          <a:r>
-            <a:rPr kumimoji="1" lang="ja-JP" altLang="en-US" sz="1500" kern="1200" dirty="0"/>
-            <a:t>呼び出し</a:t>
-          </a:r>
-        </a:p>
-      </dsp:txBody>
-      <dsp:txXfrm>
-        <a:off x="1375358" y="6212530"/>
-        <a:ext cx="3575220" cy="1290939"/>
-      </dsp:txXfrm>
-    </dsp:sp>
-    <dsp:sp modelId="{634B6EAC-C545-413B-B32E-0393E60FE0F9}">
-      <dsp:nvSpPr>
-        <dsp:cNvPr id="0" name=""/>
-        <dsp:cNvSpPr/>
-      </dsp:nvSpPr>
-      <dsp:spPr>
-        <a:xfrm rot="5400000">
-          <a:off x="2905856" y="7577914"/>
-          <a:ext cx="514224" cy="617069"/>
-        </a:xfrm>
-        <a:prstGeom prst="rightArrow">
-          <a:avLst>
-            <a:gd name="adj1" fmla="val 60000"/>
-            <a:gd name="adj2" fmla="val 50000"/>
-          </a:avLst>
-        </a:prstGeom>
-        <a:solidFill>
-          <a:schemeClr val="dk1">
-            <a:tint val="60000"/>
-            <a:hueOff val="0"/>
-            <a:satOff val="0"/>
-            <a:lumOff val="0"/>
-            <a:alphaOff val="0"/>
-          </a:schemeClr>
-        </a:solidFill>
-        <a:ln>
-          <a:noFill/>
-        </a:ln>
-        <a:effectLst/>
-      </dsp:spPr>
-      <dsp:style>
-        <a:lnRef idx="0">
-          <a:scrgbClr r="0" g="0" b="0"/>
-        </a:lnRef>
-        <a:fillRef idx="1">
-          <a:scrgbClr r="0" g="0" b="0"/>
-        </a:fillRef>
-        <a:effectRef idx="0">
-          <a:scrgbClr r="0" g="0" b="0"/>
-        </a:effectRef>
-        <a:fontRef idx="minor">
-          <a:schemeClr val="lt1"/>
-        </a:fontRef>
-      </dsp:style>
-      <dsp:txBody>
-        <a:bodyPr spcFirstLastPara="0" vert="horz" wrap="square" lIns="0" tIns="0" rIns="0" bIns="0" numCol="1" spcCol="1270" anchor="ctr" anchorCtr="0">
-          <a:noAutofit/>
-        </a:bodyPr>
-        <a:lstStyle/>
-        <a:p>
-          <a:pPr marL="0" lvl="0" indent="0" algn="ctr" defTabSz="533400">
-            <a:lnSpc>
-              <a:spcPct val="90000"/>
-            </a:lnSpc>
-            <a:spcBef>
-              <a:spcPct val="0"/>
-            </a:spcBef>
-            <a:spcAft>
-              <a:spcPct val="35000"/>
-            </a:spcAft>
-            <a:buNone/>
-          </a:pPr>
-          <a:endParaRPr kumimoji="1" lang="ja-JP" altLang="en-US" sz="1200" kern="1200"/>
-        </a:p>
-      </dsp:txBody>
-      <dsp:txXfrm rot="-5400000">
-        <a:off x="2977848" y="7629337"/>
-        <a:ext cx="370241" cy="359957"/>
-      </dsp:txXfrm>
-    </dsp:sp>
-    <dsp:sp modelId="{B149C04E-7AEB-4A78-B7D7-AC20C233D7B6}">
-      <dsp:nvSpPr>
-        <dsp:cNvPr id="0" name=""/>
-        <dsp:cNvSpPr/>
-      </dsp:nvSpPr>
-      <dsp:spPr>
-        <a:xfrm>
-          <a:off x="1335195" y="8229265"/>
-          <a:ext cx="3655546" cy="1371265"/>
-        </a:xfrm>
-        <a:prstGeom prst="roundRect">
-          <a:avLst>
-            <a:gd name="adj" fmla="val 10000"/>
-          </a:avLst>
-        </a:prstGeom>
-        <a:solidFill>
-          <a:schemeClr val="lt1">
-            <a:hueOff val="0"/>
-            <a:satOff val="0"/>
-            <a:lumOff val="0"/>
-            <a:alphaOff val="0"/>
-          </a:schemeClr>
-        </a:solidFill>
-        <a:ln w="12700" cap="flat" cmpd="sng" algn="ctr">
-          <a:solidFill>
-            <a:schemeClr val="dk1">
-              <a:shade val="80000"/>
-              <a:hueOff val="0"/>
-              <a:satOff val="0"/>
-              <a:lumOff val="0"/>
-              <a:alphaOff val="0"/>
-            </a:schemeClr>
-          </a:solidFill>
-          <a:prstDash val="solid"/>
-          <a:miter lim="800000"/>
-        </a:ln>
-        <a:effectLst/>
-      </dsp:spPr>
-      <dsp:style>
-        <a:lnRef idx="2">
-          <a:scrgbClr r="0" g="0" b="0"/>
-        </a:lnRef>
-        <a:fillRef idx="1">
-          <a:scrgbClr r="0" g="0" b="0"/>
-        </a:fillRef>
-        <a:effectRef idx="0">
-          <a:scrgbClr r="0" g="0" b="0"/>
-        </a:effectRef>
-        <a:fontRef idx="minor">
-          <a:schemeClr val="lt1"/>
-        </a:fontRef>
-      </dsp:style>
-      <dsp:txBody>
-        <a:bodyPr spcFirstLastPara="0" vert="horz" wrap="square" lIns="57150" tIns="57150" rIns="57150" bIns="57150" numCol="1" spcCol="1270" anchor="ctr" anchorCtr="0">
-          <a:noAutofit/>
-        </a:bodyPr>
-        <a:lstStyle/>
-        <a:p>
-          <a:pPr marL="0" lvl="0" indent="0" algn="ctr" defTabSz="666750">
-            <a:lnSpc>
-              <a:spcPct val="90000"/>
-            </a:lnSpc>
-            <a:spcBef>
-              <a:spcPct val="0"/>
-            </a:spcBef>
-            <a:spcAft>
-              <a:spcPct val="35000"/>
-            </a:spcAft>
-            <a:buNone/>
-          </a:pPr>
-          <a:r>
-            <a:rPr kumimoji="1" lang="ja-JP" altLang="en-US" sz="1500" kern="1200" dirty="0"/>
-            <a:t>さくらの</a:t>
-          </a:r>
-          <a:r>
-            <a:rPr kumimoji="1" lang="en-US" altLang="ja-JP" sz="1500" kern="1200" dirty="0"/>
-            <a:t>AI Engine</a:t>
-          </a:r>
-          <a:r>
-            <a:rPr kumimoji="1" lang="ja-JP" altLang="en-US" sz="1500" kern="1200" dirty="0"/>
-            <a:t>は文字起こし・要約を行い、結果をサーバに返却</a:t>
-          </a:r>
-        </a:p>
-      </dsp:txBody>
-      <dsp:txXfrm>
-        <a:off x="1375358" y="8269428"/>
-        <a:ext cx="3575220" cy="1290939"/>
-      </dsp:txXfrm>
-    </dsp:sp>
-    <dsp:sp modelId="{876973CB-19C6-4A07-8E92-BB7965FAF234}">
-      <dsp:nvSpPr>
-        <dsp:cNvPr id="0" name=""/>
-        <dsp:cNvSpPr/>
-      </dsp:nvSpPr>
-      <dsp:spPr>
-        <a:xfrm rot="5400000">
-          <a:off x="2905856" y="9634811"/>
-          <a:ext cx="514224" cy="617069"/>
-        </a:xfrm>
-        <a:prstGeom prst="rightArrow">
-          <a:avLst>
-            <a:gd name="adj1" fmla="val 60000"/>
-            <a:gd name="adj2" fmla="val 50000"/>
-          </a:avLst>
-        </a:prstGeom>
-        <a:solidFill>
-          <a:schemeClr val="dk1">
-            <a:tint val="60000"/>
-            <a:hueOff val="0"/>
-            <a:satOff val="0"/>
-            <a:lumOff val="0"/>
-            <a:alphaOff val="0"/>
-          </a:schemeClr>
-        </a:solidFill>
-        <a:ln>
-          <a:noFill/>
-        </a:ln>
-        <a:effectLst/>
-      </dsp:spPr>
-      <dsp:style>
-        <a:lnRef idx="0">
-          <a:scrgbClr r="0" g="0" b="0"/>
-        </a:lnRef>
-        <a:fillRef idx="1">
-          <a:scrgbClr r="0" g="0" b="0"/>
-        </a:fillRef>
-        <a:effectRef idx="0">
-          <a:scrgbClr r="0" g="0" b="0"/>
-        </a:effectRef>
-        <a:fontRef idx="minor">
-          <a:schemeClr val="lt1"/>
-        </a:fontRef>
-      </dsp:style>
-      <dsp:txBody>
-        <a:bodyPr spcFirstLastPara="0" vert="horz" wrap="square" lIns="0" tIns="0" rIns="0" bIns="0" numCol="1" spcCol="1270" anchor="ctr" anchorCtr="0">
-          <a:noAutofit/>
-        </a:bodyPr>
-        <a:lstStyle/>
-        <a:p>
-          <a:pPr marL="0" lvl="0" indent="0" algn="ctr" defTabSz="533400">
-            <a:lnSpc>
-              <a:spcPct val="90000"/>
-            </a:lnSpc>
-            <a:spcBef>
-              <a:spcPct val="0"/>
-            </a:spcBef>
-            <a:spcAft>
-              <a:spcPct val="35000"/>
-            </a:spcAft>
-            <a:buNone/>
-          </a:pPr>
-          <a:endParaRPr kumimoji="1" lang="ja-JP" altLang="en-US" sz="1200" kern="1200"/>
-        </a:p>
-      </dsp:txBody>
-      <dsp:txXfrm rot="-5400000">
-        <a:off x="2977848" y="9686234"/>
-        <a:ext cx="370241" cy="359957"/>
-      </dsp:txXfrm>
-    </dsp:sp>
-    <dsp:sp modelId="{23263FBF-5528-4109-B2ED-87E1E7DCEB63}">
-      <dsp:nvSpPr>
-        <dsp:cNvPr id="0" name=""/>
-        <dsp:cNvSpPr/>
-      </dsp:nvSpPr>
-      <dsp:spPr>
-        <a:xfrm>
-          <a:off x="1335195" y="10286162"/>
-          <a:ext cx="3655546" cy="1371265"/>
-        </a:xfrm>
-        <a:prstGeom prst="roundRect">
-          <a:avLst>
-            <a:gd name="adj" fmla="val 10000"/>
-          </a:avLst>
-        </a:prstGeom>
-        <a:solidFill>
-          <a:schemeClr val="lt1">
-            <a:hueOff val="0"/>
-            <a:satOff val="0"/>
-            <a:lumOff val="0"/>
-            <a:alphaOff val="0"/>
-          </a:schemeClr>
-        </a:solidFill>
-        <a:ln w="12700" cap="flat" cmpd="sng" algn="ctr">
-          <a:solidFill>
-            <a:schemeClr val="dk1">
-              <a:shade val="80000"/>
-              <a:hueOff val="0"/>
-              <a:satOff val="0"/>
-              <a:lumOff val="0"/>
-              <a:alphaOff val="0"/>
-            </a:schemeClr>
-          </a:solidFill>
-          <a:prstDash val="solid"/>
-          <a:miter lim="800000"/>
-        </a:ln>
-        <a:effectLst/>
-      </dsp:spPr>
-      <dsp:style>
-        <a:lnRef idx="2">
-          <a:scrgbClr r="0" g="0" b="0"/>
-        </a:lnRef>
-        <a:fillRef idx="1">
-          <a:scrgbClr r="0" g="0" b="0"/>
-        </a:fillRef>
-        <a:effectRef idx="0">
-          <a:scrgbClr r="0" g="0" b="0"/>
-        </a:effectRef>
-        <a:fontRef idx="minor">
-          <a:schemeClr val="lt1"/>
-        </a:fontRef>
-      </dsp:style>
-      <dsp:txBody>
-        <a:bodyPr spcFirstLastPara="0" vert="horz" wrap="square" lIns="57150" tIns="57150" rIns="57150" bIns="57150" numCol="1" spcCol="1270" anchor="ctr" anchorCtr="0">
-          <a:noAutofit/>
-        </a:bodyPr>
-        <a:lstStyle/>
-        <a:p>
-          <a:pPr marL="0" lvl="0" indent="0" algn="ctr" defTabSz="666750">
-            <a:lnSpc>
-              <a:spcPct val="90000"/>
-            </a:lnSpc>
-            <a:spcBef>
-              <a:spcPct val="0"/>
-            </a:spcBef>
-            <a:spcAft>
-              <a:spcPct val="35000"/>
-            </a:spcAft>
-            <a:buNone/>
-          </a:pPr>
-          <a:r>
-            <a:rPr kumimoji="1" lang="ja-JP" altLang="en-US" sz="1500" kern="1200" dirty="0"/>
-            <a:t>サーバは文字起こしデータを</a:t>
-          </a:r>
-          <a:br>
-            <a:rPr kumimoji="1" lang="en-US" altLang="ja-JP" sz="1500" kern="1200" dirty="0"/>
-          </a:br>
-          <a:r>
-            <a:rPr kumimoji="1" lang="ja-JP" altLang="en-US" sz="1500" kern="1200" dirty="0"/>
-            <a:t>オブジェクトストレージに反映</a:t>
-          </a:r>
-        </a:p>
-      </dsp:txBody>
-      <dsp:txXfrm>
-        <a:off x="1375358" y="10326325"/>
-        <a:ext cx="3575220" cy="1290939"/>
-      </dsp:txXfrm>
-    </dsp:sp>
-    <dsp:sp modelId="{18D4A096-9F13-44E4-A778-EFE42993CB0B}">
-      <dsp:nvSpPr>
-        <dsp:cNvPr id="0" name=""/>
-        <dsp:cNvSpPr/>
-      </dsp:nvSpPr>
-      <dsp:spPr>
-        <a:xfrm rot="5400000">
-          <a:off x="2905856" y="11691709"/>
-          <a:ext cx="514224" cy="617069"/>
-        </a:xfrm>
-        <a:prstGeom prst="rightArrow">
-          <a:avLst>
-            <a:gd name="adj1" fmla="val 60000"/>
-            <a:gd name="adj2" fmla="val 50000"/>
-          </a:avLst>
-        </a:prstGeom>
-        <a:solidFill>
-          <a:schemeClr val="dk1">
-            <a:tint val="60000"/>
-            <a:hueOff val="0"/>
-            <a:satOff val="0"/>
-            <a:lumOff val="0"/>
-            <a:alphaOff val="0"/>
-          </a:schemeClr>
-        </a:solidFill>
-        <a:ln>
-          <a:noFill/>
-        </a:ln>
-        <a:effectLst/>
-      </dsp:spPr>
-      <dsp:style>
-        <a:lnRef idx="0">
-          <a:scrgbClr r="0" g="0" b="0"/>
-        </a:lnRef>
-        <a:fillRef idx="1">
-          <a:scrgbClr r="0" g="0" b="0"/>
-        </a:fillRef>
-        <a:effectRef idx="0">
-          <a:scrgbClr r="0" g="0" b="0"/>
-        </a:effectRef>
-        <a:fontRef idx="minor">
-          <a:schemeClr val="lt1"/>
-        </a:fontRef>
-      </dsp:style>
-      <dsp:txBody>
-        <a:bodyPr spcFirstLastPara="0" vert="horz" wrap="square" lIns="0" tIns="0" rIns="0" bIns="0" numCol="1" spcCol="1270" anchor="ctr" anchorCtr="0">
-          <a:noAutofit/>
-        </a:bodyPr>
-        <a:lstStyle/>
-        <a:p>
-          <a:pPr marL="0" lvl="0" indent="0" algn="ctr" defTabSz="533400">
-            <a:lnSpc>
-              <a:spcPct val="90000"/>
-            </a:lnSpc>
-            <a:spcBef>
-              <a:spcPct val="0"/>
-            </a:spcBef>
-            <a:spcAft>
-              <a:spcPct val="35000"/>
-            </a:spcAft>
-            <a:buNone/>
-          </a:pPr>
-          <a:endParaRPr kumimoji="1" lang="ja-JP" altLang="en-US" sz="1200" kern="1200"/>
-        </a:p>
-      </dsp:txBody>
-      <dsp:txXfrm rot="-5400000">
-        <a:off x="2977848" y="11743132"/>
-        <a:ext cx="370241" cy="359957"/>
-      </dsp:txXfrm>
-    </dsp:sp>
-    <dsp:sp modelId="{A576E462-304F-490D-BE6C-4E5A74D8E0F1}">
-      <dsp:nvSpPr>
-        <dsp:cNvPr id="0" name=""/>
-        <dsp:cNvSpPr/>
-      </dsp:nvSpPr>
-      <dsp:spPr>
-        <a:xfrm>
-          <a:off x="1335195" y="12343060"/>
-          <a:ext cx="3655546" cy="1371265"/>
-        </a:xfrm>
-        <a:prstGeom prst="roundRect">
-          <a:avLst>
-            <a:gd name="adj" fmla="val 10000"/>
-          </a:avLst>
-        </a:prstGeom>
-        <a:solidFill>
-          <a:schemeClr val="lt1">
-            <a:hueOff val="0"/>
-            <a:satOff val="0"/>
-            <a:lumOff val="0"/>
-            <a:alphaOff val="0"/>
-          </a:schemeClr>
-        </a:solidFill>
-        <a:ln w="12700" cap="flat" cmpd="sng" algn="ctr">
-          <a:solidFill>
-            <a:schemeClr val="dk1">
-              <a:shade val="80000"/>
-              <a:hueOff val="0"/>
-              <a:satOff val="0"/>
-              <a:lumOff val="0"/>
-              <a:alphaOff val="0"/>
-            </a:schemeClr>
-          </a:solidFill>
-          <a:prstDash val="solid"/>
-          <a:miter lim="800000"/>
-        </a:ln>
-        <a:effectLst/>
-      </dsp:spPr>
-      <dsp:style>
-        <a:lnRef idx="2">
-          <a:scrgbClr r="0" g="0" b="0"/>
-        </a:lnRef>
-        <a:fillRef idx="1">
-          <a:scrgbClr r="0" g="0" b="0"/>
-        </a:fillRef>
-        <a:effectRef idx="0">
-          <a:scrgbClr r="0" g="0" b="0"/>
-        </a:effectRef>
-        <a:fontRef idx="minor">
-          <a:schemeClr val="lt1"/>
-        </a:fontRef>
-      </dsp:style>
-      <dsp:txBody>
-        <a:bodyPr spcFirstLastPara="0" vert="horz" wrap="square" lIns="57150" tIns="57150" rIns="57150" bIns="57150" numCol="1" spcCol="1270" anchor="ctr" anchorCtr="0">
-          <a:noAutofit/>
-        </a:bodyPr>
-        <a:lstStyle/>
-        <a:p>
-          <a:pPr marL="0" lvl="0" indent="0" algn="ctr" defTabSz="666750">
-            <a:lnSpc>
-              <a:spcPct val="90000"/>
-            </a:lnSpc>
-            <a:spcBef>
-              <a:spcPct val="0"/>
-            </a:spcBef>
-            <a:spcAft>
-              <a:spcPct val="35000"/>
-            </a:spcAft>
-            <a:buNone/>
-          </a:pPr>
-          <a:r>
-            <a:rPr kumimoji="1" lang="ja-JP" altLang="en-US" sz="1500" kern="1200" dirty="0"/>
-            <a:t>サーバはシンプル通知を通じて</a:t>
-          </a:r>
-          <a:br>
-            <a:rPr kumimoji="1" lang="en-US" altLang="ja-JP" sz="1500" kern="1200" dirty="0"/>
-          </a:br>
-          <a:r>
-            <a:rPr kumimoji="1" lang="ja-JP" altLang="en-US" sz="1500" kern="1200" dirty="0"/>
-            <a:t>処理完了を通知</a:t>
-          </a:r>
-        </a:p>
-      </dsp:txBody>
-      <dsp:txXfrm>
-        <a:off x="1375358" y="12383223"/>
-        <a:ext cx="3575220" cy="1290939"/>
-      </dsp:txXfrm>
-    </dsp:sp>
-  </dsp:spTree>
-</dsp:drawing>
-</file>
-
 <file path=ppt/diagrams/layout1.xml><?xml version="1.0" encoding="utf-8"?>
-<dgm:layoutDef xmlns:dgm="http://schemas.openxmlformats.org/drawingml/2006/diagram" xmlns:a="http://schemas.openxmlformats.org/drawingml/2006/main" uniqueId="urn:microsoft.com/office/officeart/2005/8/layout/process2">
-  <dgm:title val=""/>
-  <dgm:desc val=""/>
-  <dgm:catLst>
-    <dgm:cat type="process" pri="13000"/>
-  </dgm:catLst>
-  <dgm:sampData useDef="1">
-    <dgm:dataModel>
-      <dgm:ptLst/>
-      <dgm:bg/>
-      <dgm:whole/>
-    </dgm:dataModel>
-  </dgm:sampData>
-  <dgm:styleData>
-    <dgm:dataModel>
-      <dgm:ptLst>
-        <dgm:pt modelId="0" type="doc"/>
-        <dgm:pt modelId="1"/>
-        <dgm:pt modelId="2"/>
-      </dgm:ptLst>
-      <dgm:cxnLst>
-        <dgm:cxn modelId="3" srcId="0" destId="1" srcOrd="0" destOrd="0"/>
-        <dgm:cxn modelId="4" srcId="0" destId="2" srcOrd="1" destOrd="0"/>
-      </dgm:cxnLst>
-      <dgm:bg/>
-      <dgm:whole/>
-    </dgm:dataModel>
-  </dgm:styleData>
-  <dgm:clrData>
-    <dgm:dataModel>
-      <dgm:ptLst>
-        <dgm:pt modelId="0" type="doc"/>
-        <dgm:pt modelId="1"/>
-        <dgm:pt modelId="2"/>
-        <dgm:pt modelId="3"/>
-        <dgm:pt modelId="4"/>
-      </dgm:ptLst>
-      <dgm:cxnLst>
-        <dgm:cxn modelId="5" srcId="0" destId="1" srcOrd="0" destOrd="0"/>
-        <dgm:cxn modelId="6" srcId="0" destId="2" srcOrd="1" destOrd="0"/>
-        <dgm:cxn modelId="7" srcId="0" destId="3" srcOrd="2" destOrd="0"/>
-        <dgm:cxn modelId="8" srcId="0" destId="4" srcOrd="3" destOrd="0"/>
-      </dgm:cxnLst>
-      <dgm:bg/>
-      <dgm:whole/>
-    </dgm:dataModel>
-  </dgm:clrData>
-  <dgm:layoutNode name="linearFlow">
-    <dgm:varLst>
-      <dgm:resizeHandles val="exact"/>
-    </dgm:varLst>
-    <dgm:alg type="lin">
-      <dgm:param type="linDir" val="fromT"/>
-    </dgm:alg>
-    <dgm:shape xmlns:r="http://schemas.openxmlformats.org/officeDocument/2006/relationships" r:blip="">
-      <dgm:adjLst/>
-    </dgm:shape>
-    <dgm:presOf/>
-    <dgm:constrLst>
-      <dgm:constr type="h" for="ch" ptType="node" refType="h"/>
-      <dgm:constr type="h" for="ch" ptType="sibTrans" refType="h" refFor="ch" refPtType="node" fact="0.5"/>
-      <dgm:constr type="w" for="ch" ptType="node" op="equ"/>
-      <dgm:constr type="primFontSz" for="ch" ptType="node" op="equ" val="65"/>
-      <dgm:constr type="primFontSz" for="des" forName="connectorText" op="equ" val="55"/>
-      <dgm:constr type="primFontSz" for="des" forName="connectorText" refType="primFontSz" refFor="ch" refPtType="node" op="lte" fact="0.8"/>
-    </dgm:constrLst>
-    <dgm:ruleLst/>
-    <dgm:forEach name="nodesForEach" axis="ch" ptType="node">
-      <dgm:layoutNode name="node">
-        <dgm:varLst>
-          <dgm:bulletEnabled val="1"/>
-        </dgm:varLst>
-        <dgm:choose name="Name0">
-          <dgm:if name="Name1" axis="root des" ptType="all node" func="maxDepth" op="gt" val="1">
-            <dgm:alg type="tx">
-              <dgm:param type="parTxLTRAlign" val="l"/>
-              <dgm:param type="parTxRTLAlign" val="r"/>
-              <dgm:param type="txAnchorVertCh" val="mid"/>
-            </dgm:alg>
-          </dgm:if>
-          <dgm:else name="Name2">
-            <dgm:alg type="tx"/>
-          </dgm:else>
-        </dgm:choose>
-        <dgm:shape xmlns:r="http://schemas.openxmlformats.org/officeDocument/2006/relationships" type="roundRect" r:blip="">
-          <dgm:adjLst>
-            <dgm:adj idx="1" val="0.1"/>
-          </dgm:adjLst>
-        </dgm:shape>
-        <dgm:presOf axis="desOrSelf" ptType="node"/>
-        <dgm:constrLst>
-          <dgm:constr type="w" refType="h" fact="1.8"/>
-          <dgm:constr type="tMarg" refType="primFontSz" fact="0.3"/>
-          <dgm:constr type="bMarg" refType="primFontSz" fact="0.3"/>
-          <dgm:constr type="lMarg" refType="primFontSz" fact="0.3"/>
-          <dgm:constr type="rMarg" refType="primFontSz" fact="0.3"/>
-        </dgm:constrLst>
-        <dgm:ruleLst>
-          <dgm:rule type="primFontSz" val="18" fact="NaN" max="NaN"/>
-          <dgm:rule type="w" val="NaN" fact="4" max="NaN"/>
-          <dgm:rule type="primFontSz" val="5" fact="NaN" max="NaN"/>
-        </dgm:ruleLst>
-      </dgm:layoutNode>
-      <dgm:forEach name="sibTransForEach" axis="followSib" ptType="sibTrans" cnt="1">
-        <dgm:layoutNode name="sibTrans">
-          <dgm:alg type="conn">
-            <dgm:param type="begPts" val="auto"/>
-            <dgm:param type="endPts" val="auto"/>
-          </dgm:alg>
-          <dgm:shape xmlns:r="http://schemas.openxmlformats.org/officeDocument/2006/relationships" type="conn" r:blip="">
-            <dgm:adjLst/>
-          </dgm:shape>
-          <dgm:presOf axis="self"/>
-          <dgm:constrLst>
-            <dgm:constr type="w" refType="h" fact="0.9"/>
-            <dgm:constr type="connDist"/>
-            <dgm:constr type="wArH" refType="w" fact="0.5"/>
-            <dgm:constr type="hArH" refType="w"/>
-            <dgm:constr type="stemThick" refType="w" fact="0.6"/>
-            <dgm:constr type="begPad" refType="connDist" fact="0.125"/>
-            <dgm:constr type="endPad" refType="connDist" fact="0.125"/>
-          </dgm:constrLst>
-          <dgm:ruleLst/>
-          <dgm:layoutNode name="connectorText">
-            <dgm:alg type="tx">
-              <dgm:param type="autoTxRot" val="upr"/>
-            </dgm:alg>
-            <dgm:shape xmlns:r="http://schemas.openxmlformats.org/officeDocument/2006/relationships" type="conn" r:blip="" hideGeom="1">
-              <dgm:adjLst/>
-            </dgm:shape>
-            <dgm:presOf axis="self"/>
-            <dgm:constrLst>
-              <dgm:constr type="lMarg"/>
-              <dgm:constr type="rMarg"/>
-              <dgm:constr type="tMarg"/>
-              <dgm:constr type="bMarg"/>
-            </dgm:constrLst>
-            <dgm:ruleLst>
-              <dgm:rule type="primFontSz" val="5" fact="NaN" max="NaN"/>
-            </dgm:ruleLst>
-          </dgm:layoutNode>
-        </dgm:layoutNode>
-      </dgm:forEach>
-    </dgm:forEach>
-  </dgm:layoutNode>
-</dgm:layoutDef>
-</file>
-
-<file path=ppt/diagrams/layout2.xml><?xml version="1.0" encoding="utf-8"?>
 <dgm:layoutDef xmlns:dgm="http://schemas.openxmlformats.org/drawingml/2006/diagram" xmlns:a="http://schemas.openxmlformats.org/drawingml/2006/main" uniqueId="urn:microsoft.com/office/officeart/2005/8/layout/process2">
   <dgm:title val=""/>
   <dgm:desc val=""/>
@@ -6847,1040 +4356,6 @@
 </dgm:styleDef>
 </file>
 
-<file path=ppt/diagrams/quickStyle2.xml><?xml version="1.0" encoding="utf-8"?>
-<dgm:styleDef xmlns:dgm="http://schemas.openxmlformats.org/drawingml/2006/diagram" xmlns:a="http://schemas.openxmlformats.org/drawingml/2006/main" uniqueId="urn:microsoft.com/office/officeart/2005/8/quickstyle/simple1">
-  <dgm:title val=""/>
-  <dgm:desc val=""/>
-  <dgm:catLst>
-    <dgm:cat type="simple" pri="10100"/>
-  </dgm:catLst>
-  <dgm:scene3d>
-    <a:camera prst="orthographicFront"/>
-    <a:lightRig rig="threePt" dir="t"/>
-  </dgm:scene3d>
-  <dgm:styleLbl name="node0">
-    <dgm:scene3d>
-      <a:camera prst="orthographicFront"/>
-      <a:lightRig rig="threePt" dir="t"/>
-    </dgm:scene3d>
-    <dgm:sp3d/>
-    <dgm:txPr/>
-    <dgm:style>
-      <a:lnRef idx="2">
-        <a:scrgbClr r="0" g="0" b="0"/>
-      </a:lnRef>
-      <a:fillRef idx="1">
-        <a:scrgbClr r="0" g="0" b="0"/>
-      </a:fillRef>
-      <a:effectRef idx="0">
-        <a:scrgbClr r="0" g="0" b="0"/>
-      </a:effectRef>
-      <a:fontRef idx="minor">
-        <a:schemeClr val="lt1"/>
-      </a:fontRef>
-    </dgm:style>
-  </dgm:styleLbl>
-  <dgm:styleLbl name="lnNode1">
-    <dgm:scene3d>
-      <a:camera prst="orthographicFront"/>
-      <a:lightRig rig="threePt" dir="t"/>
-    </dgm:scene3d>
-    <dgm:sp3d/>
-    <dgm:txPr/>
-    <dgm:style>
-      <a:lnRef idx="2">
-        <a:scrgbClr r="0" g="0" b="0"/>
-      </a:lnRef>
-      <a:fillRef idx="1">
-        <a:scrgbClr r="0" g="0" b="0"/>
-      </a:fillRef>
-      <a:effectRef idx="0">
-        <a:scrgbClr r="0" g="0" b="0"/>
-      </a:effectRef>
-      <a:fontRef idx="minor">
-        <a:schemeClr val="lt1"/>
-      </a:fontRef>
-    </dgm:style>
-  </dgm:styleLbl>
-  <dgm:styleLbl name="vennNode1">
-    <dgm:scene3d>
-      <a:camera prst="orthographicFront"/>
-      <a:lightRig rig="threePt" dir="t"/>
-    </dgm:scene3d>
-    <dgm:sp3d/>
-    <dgm:txPr/>
-    <dgm:style>
-      <a:lnRef idx="2">
-        <a:scrgbClr r="0" g="0" b="0"/>
-      </a:lnRef>
-      <a:fillRef idx="1">
-        <a:scrgbClr r="0" g="0" b="0"/>
-      </a:fillRef>
-      <a:effectRef idx="0">
-        <a:scrgbClr r="0" g="0" b="0"/>
-      </a:effectRef>
-      <a:fontRef idx="minor">
-        <a:schemeClr val="tx1"/>
-      </a:fontRef>
-    </dgm:style>
-  </dgm:styleLbl>
-  <dgm:styleLbl name="alignNode1">
-    <dgm:scene3d>
-      <a:camera prst="orthographicFront"/>
-      <a:lightRig rig="threePt" dir="t"/>
-    </dgm:scene3d>
-    <dgm:sp3d/>
-    <dgm:txPr/>
-    <dgm:style>
-      <a:lnRef idx="2">
-        <a:scrgbClr r="0" g="0" b="0"/>
-      </a:lnRef>
-      <a:fillRef idx="1">
-        <a:scrgbClr r="0" g="0" b="0"/>
-      </a:fillRef>
-      <a:effectRef idx="0">
-        <a:scrgbClr r="0" g="0" b="0"/>
-      </a:effectRef>
-      <a:fontRef idx="minor">
-        <a:schemeClr val="lt1"/>
-      </a:fontRef>
-    </dgm:style>
-  </dgm:styleLbl>
-  <dgm:styleLbl name="node1">
-    <dgm:scene3d>
-      <a:camera prst="orthographicFront"/>
-      <a:lightRig rig="threePt" dir="t"/>
-    </dgm:scene3d>
-    <dgm:sp3d/>
-    <dgm:txPr/>
-    <dgm:style>
-      <a:lnRef idx="2">
-        <a:scrgbClr r="0" g="0" b="0"/>
-      </a:lnRef>
-      <a:fillRef idx="1">
-        <a:scrgbClr r="0" g="0" b="0"/>
-      </a:fillRef>
-      <a:effectRef idx="0">
-        <a:scrgbClr r="0" g="0" b="0"/>
-      </a:effectRef>
-      <a:fontRef idx="minor">
-        <a:schemeClr val="lt1"/>
-      </a:fontRef>
-    </dgm:style>
-  </dgm:styleLbl>
-  <dgm:styleLbl name="node2">
-    <dgm:scene3d>
-      <a:camera prst="orthographicFront"/>
-      <a:lightRig rig="threePt" dir="t"/>
-    </dgm:scene3d>
-    <dgm:sp3d/>
-    <dgm:txPr/>
-    <dgm:style>
-      <a:lnRef idx="2">
-        <a:scrgbClr r="0" g="0" b="0"/>
-      </a:lnRef>
-      <a:fillRef idx="1">
-        <a:scrgbClr r="0" g="0" b="0"/>
-      </a:fillRef>
-      <a:effectRef idx="0">
-        <a:scrgbClr r="0" g="0" b="0"/>
-      </a:effectRef>
-      <a:fontRef idx="minor">
-        <a:schemeClr val="lt1"/>
-      </a:fontRef>
-    </dgm:style>
-  </dgm:styleLbl>
-  <dgm:styleLbl name="node3">
-    <dgm:scene3d>
-      <a:camera prst="orthographicFront"/>
-      <a:lightRig rig="threePt" dir="t"/>
-    </dgm:scene3d>
-    <dgm:sp3d/>
-    <dgm:txPr/>
-    <dgm:style>
-      <a:lnRef idx="2">
-        <a:scrgbClr r="0" g="0" b="0"/>
-      </a:lnRef>
-      <a:fillRef idx="1">
-        <a:scrgbClr r="0" g="0" b="0"/>
-      </a:fillRef>
-      <a:effectRef idx="0">
-        <a:scrgbClr r="0" g="0" b="0"/>
-      </a:effectRef>
-      <a:fontRef idx="minor">
-        <a:schemeClr val="lt1"/>
-      </a:fontRef>
-    </dgm:style>
-  </dgm:styleLbl>
-  <dgm:styleLbl name="node4">
-    <dgm:scene3d>
-      <a:camera prst="orthographicFront"/>
-      <a:lightRig rig="threePt" dir="t"/>
-    </dgm:scene3d>
-    <dgm:sp3d/>
-    <dgm:txPr/>
-    <dgm:style>
-      <a:lnRef idx="2">
-        <a:scrgbClr r="0" g="0" b="0"/>
-      </a:lnRef>
-      <a:fillRef idx="1">
-        <a:scrgbClr r="0" g="0" b="0"/>
-      </a:fillRef>
-      <a:effectRef idx="0">
-        <a:scrgbClr r="0" g="0" b="0"/>
-      </a:effectRef>
-      <a:fontRef idx="minor">
-        <a:schemeClr val="lt1"/>
-      </a:fontRef>
-    </dgm:style>
-  </dgm:styleLbl>
-  <dgm:styleLbl name="fgImgPlace1">
-    <dgm:scene3d>
-      <a:camera prst="orthographicFront"/>
-      <a:lightRig rig="threePt" dir="t"/>
-    </dgm:scene3d>
-    <dgm:sp3d/>
-    <dgm:txPr/>
-    <dgm:style>
-      <a:lnRef idx="2">
-        <a:scrgbClr r="0" g="0" b="0"/>
-      </a:lnRef>
-      <a:fillRef idx="1">
-        <a:scrgbClr r="0" g="0" b="0"/>
-      </a:fillRef>
-      <a:effectRef idx="0">
-        <a:scrgbClr r="0" g="0" b="0"/>
-      </a:effectRef>
-      <a:fontRef idx="minor"/>
-    </dgm:style>
-  </dgm:styleLbl>
-  <dgm:styleLbl name="alignImgPlace1">
-    <dgm:scene3d>
-      <a:camera prst="orthographicFront"/>
-      <a:lightRig rig="threePt" dir="t"/>
-    </dgm:scene3d>
-    <dgm:sp3d/>
-    <dgm:txPr/>
-    <dgm:style>
-      <a:lnRef idx="2">
-        <a:scrgbClr r="0" g="0" b="0"/>
-      </a:lnRef>
-      <a:fillRef idx="1">
-        <a:scrgbClr r="0" g="0" b="0"/>
-      </a:fillRef>
-      <a:effectRef idx="0">
-        <a:scrgbClr r="0" g="0" b="0"/>
-      </a:effectRef>
-      <a:fontRef idx="minor"/>
-    </dgm:style>
-  </dgm:styleLbl>
-  <dgm:styleLbl name="bgImgPlace1">
-    <dgm:scene3d>
-      <a:camera prst="orthographicFront"/>
-      <a:lightRig rig="threePt" dir="t"/>
-    </dgm:scene3d>
-    <dgm:sp3d/>
-    <dgm:txPr/>
-    <dgm:style>
-      <a:lnRef idx="2">
-        <a:scrgbClr r="0" g="0" b="0"/>
-      </a:lnRef>
-      <a:fillRef idx="1">
-        <a:scrgbClr r="0" g="0" b="0"/>
-      </a:fillRef>
-      <a:effectRef idx="0">
-        <a:scrgbClr r="0" g="0" b="0"/>
-      </a:effectRef>
-      <a:fontRef idx="minor"/>
-    </dgm:style>
-  </dgm:styleLbl>
-  <dgm:styleLbl name="sibTrans2D1">
-    <dgm:scene3d>
-      <a:camera prst="orthographicFront"/>
-      <a:lightRig rig="threePt" dir="t"/>
-    </dgm:scene3d>
-    <dgm:sp3d/>
-    <dgm:txPr/>
-    <dgm:style>
-      <a:lnRef idx="0">
-        <a:scrgbClr r="0" g="0" b="0"/>
-      </a:lnRef>
-      <a:fillRef idx="1">
-        <a:scrgbClr r="0" g="0" b="0"/>
-      </a:fillRef>
-      <a:effectRef idx="0">
-        <a:scrgbClr r="0" g="0" b="0"/>
-      </a:effectRef>
-      <a:fontRef idx="minor">
-        <a:schemeClr val="lt1"/>
-      </a:fontRef>
-    </dgm:style>
-  </dgm:styleLbl>
-  <dgm:styleLbl name="fgSibTrans2D1">
-    <dgm:scene3d>
-      <a:camera prst="orthographicFront"/>
-      <a:lightRig rig="threePt" dir="t"/>
-    </dgm:scene3d>
-    <dgm:sp3d/>
-    <dgm:txPr/>
-    <dgm:style>
-      <a:lnRef idx="0">
-        <a:scrgbClr r="0" g="0" b="0"/>
-      </a:lnRef>
-      <a:fillRef idx="1">
-        <a:scrgbClr r="0" g="0" b="0"/>
-      </a:fillRef>
-      <a:effectRef idx="0">
-        <a:scrgbClr r="0" g="0" b="0"/>
-      </a:effectRef>
-      <a:fontRef idx="minor">
-        <a:schemeClr val="lt1"/>
-      </a:fontRef>
-    </dgm:style>
-  </dgm:styleLbl>
-  <dgm:styleLbl name="bgSibTrans2D1">
-    <dgm:scene3d>
-      <a:camera prst="orthographicFront"/>
-      <a:lightRig rig="threePt" dir="t"/>
-    </dgm:scene3d>
-    <dgm:sp3d/>
-    <dgm:txPr/>
-    <dgm:style>
-      <a:lnRef idx="0">
-        <a:scrgbClr r="0" g="0" b="0"/>
-      </a:lnRef>
-      <a:fillRef idx="1">
-        <a:scrgbClr r="0" g="0" b="0"/>
-      </a:fillRef>
-      <a:effectRef idx="0">
-        <a:scrgbClr r="0" g="0" b="0"/>
-      </a:effectRef>
-      <a:fontRef idx="minor">
-        <a:schemeClr val="lt1"/>
-      </a:fontRef>
-    </dgm:style>
-  </dgm:styleLbl>
-  <dgm:styleLbl name="sibTrans1D1">
-    <dgm:scene3d>
-      <a:camera prst="orthographicFront"/>
-      <a:lightRig rig="threePt" dir="t"/>
-    </dgm:scene3d>
-    <dgm:sp3d/>
-    <dgm:txPr/>
-    <dgm:style>
-      <a:lnRef idx="1">
-        <a:scrgbClr r="0" g="0" b="0"/>
-      </a:lnRef>
-      <a:fillRef idx="0">
-        <a:scrgbClr r="0" g="0" b="0"/>
-      </a:fillRef>
-      <a:effectRef idx="0">
-        <a:scrgbClr r="0" g="0" b="0"/>
-      </a:effectRef>
-      <a:fontRef idx="minor"/>
-    </dgm:style>
-  </dgm:styleLbl>
-  <dgm:styleLbl name="callout">
-    <dgm:scene3d>
-      <a:camera prst="orthographicFront"/>
-      <a:lightRig rig="threePt" dir="t"/>
-    </dgm:scene3d>
-    <dgm:sp3d/>
-    <dgm:txPr/>
-    <dgm:style>
-      <a:lnRef idx="2">
-        <a:scrgbClr r="0" g="0" b="0"/>
-      </a:lnRef>
-      <a:fillRef idx="1">
-        <a:scrgbClr r="0" g="0" b="0"/>
-      </a:fillRef>
-      <a:effectRef idx="0">
-        <a:scrgbClr r="0" g="0" b="0"/>
-      </a:effectRef>
-      <a:fontRef idx="minor"/>
-    </dgm:style>
-  </dgm:styleLbl>
-  <dgm:styleLbl name="asst0">
-    <dgm:scene3d>
-      <a:camera prst="orthographicFront"/>
-      <a:lightRig rig="threePt" dir="t"/>
-    </dgm:scene3d>
-    <dgm:sp3d/>
-    <dgm:txPr/>
-    <dgm:style>
-      <a:lnRef idx="2">
-        <a:scrgbClr r="0" g="0" b="0"/>
-      </a:lnRef>
-      <a:fillRef idx="1">
-        <a:scrgbClr r="0" g="0" b="0"/>
-      </a:fillRef>
-      <a:effectRef idx="0">
-        <a:scrgbClr r="0" g="0" b="0"/>
-      </a:effectRef>
-      <a:fontRef idx="minor">
-        <a:schemeClr val="lt1"/>
-      </a:fontRef>
-    </dgm:style>
-  </dgm:styleLbl>
-  <dgm:styleLbl name="asst1">
-    <dgm:scene3d>
-      <a:camera prst="orthographicFront"/>
-      <a:lightRig rig="threePt" dir="t"/>
-    </dgm:scene3d>
-    <dgm:sp3d/>
-    <dgm:txPr/>
-    <dgm:style>
-      <a:lnRef idx="2">
-        <a:scrgbClr r="0" g="0" b="0"/>
-      </a:lnRef>
-      <a:fillRef idx="1">
-        <a:scrgbClr r="0" g="0" b="0"/>
-      </a:fillRef>
-      <a:effectRef idx="0">
-        <a:scrgbClr r="0" g="0" b="0"/>
-      </a:effectRef>
-      <a:fontRef idx="minor">
-        <a:schemeClr val="lt1"/>
-      </a:fontRef>
-    </dgm:style>
-  </dgm:styleLbl>
-  <dgm:styleLbl name="asst2">
-    <dgm:scene3d>
-      <a:camera prst="orthographicFront"/>
-      <a:lightRig rig="threePt" dir="t"/>
-    </dgm:scene3d>
-    <dgm:sp3d/>
-    <dgm:txPr/>
-    <dgm:style>
-      <a:lnRef idx="2">
-        <a:scrgbClr r="0" g="0" b="0"/>
-      </a:lnRef>
-      <a:fillRef idx="1">
-        <a:scrgbClr r="0" g="0" b="0"/>
-      </a:fillRef>
-      <a:effectRef idx="0">
-        <a:scrgbClr r="0" g="0" b="0"/>
-      </a:effectRef>
-      <a:fontRef idx="minor">
-        <a:schemeClr val="lt1"/>
-      </a:fontRef>
-    </dgm:style>
-  </dgm:styleLbl>
-  <dgm:styleLbl name="asst3">
-    <dgm:scene3d>
-      <a:camera prst="orthographicFront"/>
-      <a:lightRig rig="threePt" dir="t"/>
-    </dgm:scene3d>
-    <dgm:sp3d/>
-    <dgm:txPr/>
-    <dgm:style>
-      <a:lnRef idx="2">
-        <a:scrgbClr r="0" g="0" b="0"/>
-      </a:lnRef>
-      <a:fillRef idx="1">
-        <a:scrgbClr r="0" g="0" b="0"/>
-      </a:fillRef>
-      <a:effectRef idx="0">
-        <a:scrgbClr r="0" g="0" b="0"/>
-      </a:effectRef>
-      <a:fontRef idx="minor">
-        <a:schemeClr val="lt1"/>
-      </a:fontRef>
-    </dgm:style>
-  </dgm:styleLbl>
-  <dgm:styleLbl name="asst4">
-    <dgm:scene3d>
-      <a:camera prst="orthographicFront"/>
-      <a:lightRig rig="threePt" dir="t"/>
-    </dgm:scene3d>
-    <dgm:sp3d/>
-    <dgm:txPr/>
-    <dgm:style>
-      <a:lnRef idx="2">
-        <a:scrgbClr r="0" g="0" b="0"/>
-      </a:lnRef>
-      <a:fillRef idx="1">
-        <a:scrgbClr r="0" g="0" b="0"/>
-      </a:fillRef>
-      <a:effectRef idx="0">
-        <a:scrgbClr r="0" g="0" b="0"/>
-      </a:effectRef>
-      <a:fontRef idx="minor">
-        <a:schemeClr val="lt1"/>
-      </a:fontRef>
-    </dgm:style>
-  </dgm:styleLbl>
-  <dgm:styleLbl name="parChTrans2D1">
-    <dgm:scene3d>
-      <a:camera prst="orthographicFront"/>
-      <a:lightRig rig="threePt" dir="t"/>
-    </dgm:scene3d>
-    <dgm:sp3d/>
-    <dgm:txPr/>
-    <dgm:style>
-      <a:lnRef idx="2">
-        <a:scrgbClr r="0" g="0" b="0"/>
-      </a:lnRef>
-      <a:fillRef idx="1">
-        <a:scrgbClr r="0" g="0" b="0"/>
-      </a:fillRef>
-      <a:effectRef idx="0">
-        <a:scrgbClr r="0" g="0" b="0"/>
-      </a:effectRef>
-      <a:fontRef idx="minor">
-        <a:schemeClr val="lt1"/>
-      </a:fontRef>
-    </dgm:style>
-  </dgm:styleLbl>
-  <dgm:styleLbl name="parChTrans2D2">
-    <dgm:scene3d>
-      <a:camera prst="orthographicFront"/>
-      <a:lightRig rig="threePt" dir="t"/>
-    </dgm:scene3d>
-    <dgm:sp3d/>
-    <dgm:txPr/>
-    <dgm:style>
-      <a:lnRef idx="2">
-        <a:scrgbClr r="0" g="0" b="0"/>
-      </a:lnRef>
-      <a:fillRef idx="1">
-        <a:scrgbClr r="0" g="0" b="0"/>
-      </a:fillRef>
-      <a:effectRef idx="0">
-        <a:scrgbClr r="0" g="0" b="0"/>
-      </a:effectRef>
-      <a:fontRef idx="minor">
-        <a:schemeClr val="lt1"/>
-      </a:fontRef>
-    </dgm:style>
-  </dgm:styleLbl>
-  <dgm:styleLbl name="parChTrans2D3">
-    <dgm:scene3d>
-      <a:camera prst="orthographicFront"/>
-      <a:lightRig rig="threePt" dir="t"/>
-    </dgm:scene3d>
-    <dgm:sp3d/>
-    <dgm:txPr/>
-    <dgm:style>
-      <a:lnRef idx="2">
-        <a:scrgbClr r="0" g="0" b="0"/>
-      </a:lnRef>
-      <a:fillRef idx="1">
-        <a:scrgbClr r="0" g="0" b="0"/>
-      </a:fillRef>
-      <a:effectRef idx="0">
-        <a:scrgbClr r="0" g="0" b="0"/>
-      </a:effectRef>
-      <a:fontRef idx="minor">
-        <a:schemeClr val="lt1"/>
-      </a:fontRef>
-    </dgm:style>
-  </dgm:styleLbl>
-  <dgm:styleLbl name="parChTrans2D4">
-    <dgm:scene3d>
-      <a:camera prst="orthographicFront"/>
-      <a:lightRig rig="threePt" dir="t"/>
-    </dgm:scene3d>
-    <dgm:sp3d/>
-    <dgm:txPr/>
-    <dgm:style>
-      <a:lnRef idx="2">
-        <a:scrgbClr r="0" g="0" b="0"/>
-      </a:lnRef>
-      <a:fillRef idx="1">
-        <a:scrgbClr r="0" g="0" b="0"/>
-      </a:fillRef>
-      <a:effectRef idx="0">
-        <a:scrgbClr r="0" g="0" b="0"/>
-      </a:effectRef>
-      <a:fontRef idx="minor">
-        <a:schemeClr val="lt1"/>
-      </a:fontRef>
-    </dgm:style>
-  </dgm:styleLbl>
-  <dgm:styleLbl name="parChTrans1D1">
-    <dgm:scene3d>
-      <a:camera prst="orthographicFront"/>
-      <a:lightRig rig="threePt" dir="t"/>
-    </dgm:scene3d>
-    <dgm:sp3d/>
-    <dgm:txPr/>
-    <dgm:style>
-      <a:lnRef idx="2">
-        <a:scrgbClr r="0" g="0" b="0"/>
-      </a:lnRef>
-      <a:fillRef idx="0">
-        <a:scrgbClr r="0" g="0" b="0"/>
-      </a:fillRef>
-      <a:effectRef idx="0">
-        <a:scrgbClr r="0" g="0" b="0"/>
-      </a:effectRef>
-      <a:fontRef idx="minor"/>
-    </dgm:style>
-  </dgm:styleLbl>
-  <dgm:styleLbl name="parChTrans1D2">
-    <dgm:scene3d>
-      <a:camera prst="orthographicFront"/>
-      <a:lightRig rig="threePt" dir="t"/>
-    </dgm:scene3d>
-    <dgm:sp3d/>
-    <dgm:txPr/>
-    <dgm:style>
-      <a:lnRef idx="2">
-        <a:scrgbClr r="0" g="0" b="0"/>
-      </a:lnRef>
-      <a:fillRef idx="0">
-        <a:scrgbClr r="0" g="0" b="0"/>
-      </a:fillRef>
-      <a:effectRef idx="0">
-        <a:scrgbClr r="0" g="0" b="0"/>
-      </a:effectRef>
-      <a:fontRef idx="minor"/>
-    </dgm:style>
-  </dgm:styleLbl>
-  <dgm:styleLbl name="parChTrans1D3">
-    <dgm:scene3d>
-      <a:camera prst="orthographicFront"/>
-      <a:lightRig rig="threePt" dir="t"/>
-    </dgm:scene3d>
-    <dgm:sp3d/>
-    <dgm:txPr/>
-    <dgm:style>
-      <a:lnRef idx="2">
-        <a:scrgbClr r="0" g="0" b="0"/>
-      </a:lnRef>
-      <a:fillRef idx="0">
-        <a:scrgbClr r="0" g="0" b="0"/>
-      </a:fillRef>
-      <a:effectRef idx="0">
-        <a:scrgbClr r="0" g="0" b="0"/>
-      </a:effectRef>
-      <a:fontRef idx="minor"/>
-    </dgm:style>
-  </dgm:styleLbl>
-  <dgm:styleLbl name="parChTrans1D4">
-    <dgm:scene3d>
-      <a:camera prst="orthographicFront"/>
-      <a:lightRig rig="threePt" dir="t"/>
-    </dgm:scene3d>
-    <dgm:sp3d/>
-    <dgm:txPr/>
-    <dgm:style>
-      <a:lnRef idx="2">
-        <a:scrgbClr r="0" g="0" b="0"/>
-      </a:lnRef>
-      <a:fillRef idx="0">
-        <a:scrgbClr r="0" g="0" b="0"/>
-      </a:fillRef>
-      <a:effectRef idx="0">
-        <a:scrgbClr r="0" g="0" b="0"/>
-      </a:effectRef>
-      <a:fontRef idx="minor"/>
-    </dgm:style>
-  </dgm:styleLbl>
-  <dgm:styleLbl name="fgAcc1">
-    <dgm:scene3d>
-      <a:camera prst="orthographicFront"/>
-      <a:lightRig rig="threePt" dir="t"/>
-    </dgm:scene3d>
-    <dgm:sp3d/>
-    <dgm:txPr/>
-    <dgm:style>
-      <a:lnRef idx="2">
-        <a:scrgbClr r="0" g="0" b="0"/>
-      </a:lnRef>
-      <a:fillRef idx="1">
-        <a:scrgbClr r="0" g="0" b="0"/>
-      </a:fillRef>
-      <a:effectRef idx="0">
-        <a:scrgbClr r="0" g="0" b="0"/>
-      </a:effectRef>
-      <a:fontRef idx="minor"/>
-    </dgm:style>
-  </dgm:styleLbl>
-  <dgm:styleLbl name="conFgAcc1">
-    <dgm:scene3d>
-      <a:camera prst="orthographicFront"/>
-      <a:lightRig rig="threePt" dir="t"/>
-    </dgm:scene3d>
-    <dgm:sp3d/>
-    <dgm:txPr/>
-    <dgm:style>
-      <a:lnRef idx="2">
-        <a:scrgbClr r="0" g="0" b="0"/>
-      </a:lnRef>
-      <a:fillRef idx="1">
-        <a:scrgbClr r="0" g="0" b="0"/>
-      </a:fillRef>
-      <a:effectRef idx="0">
-        <a:scrgbClr r="0" g="0" b="0"/>
-      </a:effectRef>
-      <a:fontRef idx="minor"/>
-    </dgm:style>
-  </dgm:styleLbl>
-  <dgm:styleLbl name="alignAcc1">
-    <dgm:scene3d>
-      <a:camera prst="orthographicFront"/>
-      <a:lightRig rig="threePt" dir="t"/>
-    </dgm:scene3d>
-    <dgm:sp3d/>
-    <dgm:txPr/>
-    <dgm:style>
-      <a:lnRef idx="2">
-        <a:scrgbClr r="0" g="0" b="0"/>
-      </a:lnRef>
-      <a:fillRef idx="1">
-        <a:scrgbClr r="0" g="0" b="0"/>
-      </a:fillRef>
-      <a:effectRef idx="0">
-        <a:scrgbClr r="0" g="0" b="0"/>
-      </a:effectRef>
-      <a:fontRef idx="minor"/>
-    </dgm:style>
-  </dgm:styleLbl>
-  <dgm:styleLbl name="trAlignAcc1">
-    <dgm:scene3d>
-      <a:camera prst="orthographicFront"/>
-      <a:lightRig rig="threePt" dir="t"/>
-    </dgm:scene3d>
-    <dgm:sp3d/>
-    <dgm:txPr/>
-    <dgm:style>
-      <a:lnRef idx="1">
-        <a:scrgbClr r="0" g="0" b="0"/>
-      </a:lnRef>
-      <a:fillRef idx="1">
-        <a:scrgbClr r="0" g="0" b="0"/>
-      </a:fillRef>
-      <a:effectRef idx="0">
-        <a:scrgbClr r="0" g="0" b="0"/>
-      </a:effectRef>
-      <a:fontRef idx="minor"/>
-    </dgm:style>
-  </dgm:styleLbl>
-  <dgm:styleLbl name="bgAcc1">
-    <dgm:scene3d>
-      <a:camera prst="orthographicFront"/>
-      <a:lightRig rig="threePt" dir="t"/>
-    </dgm:scene3d>
-    <dgm:sp3d/>
-    <dgm:txPr/>
-    <dgm:style>
-      <a:lnRef idx="2">
-        <a:scrgbClr r="0" g="0" b="0"/>
-      </a:lnRef>
-      <a:fillRef idx="1">
-        <a:scrgbClr r="0" g="0" b="0"/>
-      </a:fillRef>
-      <a:effectRef idx="0">
-        <a:scrgbClr r="0" g="0" b="0"/>
-      </a:effectRef>
-      <a:fontRef idx="minor"/>
-    </dgm:style>
-  </dgm:styleLbl>
-  <dgm:styleLbl name="solidFgAcc1">
-    <dgm:scene3d>
-      <a:camera prst="orthographicFront"/>
-      <a:lightRig rig="threePt" dir="t"/>
-    </dgm:scene3d>
-    <dgm:sp3d/>
-    <dgm:txPr/>
-    <dgm:style>
-      <a:lnRef idx="2">
-        <a:scrgbClr r="0" g="0" b="0"/>
-      </a:lnRef>
-      <a:fillRef idx="1">
-        <a:scrgbClr r="0" g="0" b="0"/>
-      </a:fillRef>
-      <a:effectRef idx="0">
-        <a:scrgbClr r="0" g="0" b="0"/>
-      </a:effectRef>
-      <a:fontRef idx="minor"/>
-    </dgm:style>
-  </dgm:styleLbl>
-  <dgm:styleLbl name="solidAlignAcc1">
-    <dgm:scene3d>
-      <a:camera prst="orthographicFront"/>
-      <a:lightRig rig="threePt" dir="t"/>
-    </dgm:scene3d>
-    <dgm:sp3d/>
-    <dgm:txPr/>
-    <dgm:style>
-      <a:lnRef idx="2">
-        <a:scrgbClr r="0" g="0" b="0"/>
-      </a:lnRef>
-      <a:fillRef idx="1">
-        <a:scrgbClr r="0" g="0" b="0"/>
-      </a:fillRef>
-      <a:effectRef idx="0">
-        <a:scrgbClr r="0" g="0" b="0"/>
-      </a:effectRef>
-      <a:fontRef idx="minor"/>
-    </dgm:style>
-  </dgm:styleLbl>
-  <dgm:styleLbl name="solidBgAcc1">
-    <dgm:scene3d>
-      <a:camera prst="orthographicFront"/>
-      <a:lightRig rig="threePt" dir="t"/>
-    </dgm:scene3d>
-    <dgm:sp3d/>
-    <dgm:txPr/>
-    <dgm:style>
-      <a:lnRef idx="2">
-        <a:scrgbClr r="0" g="0" b="0"/>
-      </a:lnRef>
-      <a:fillRef idx="1">
-        <a:scrgbClr r="0" g="0" b="0"/>
-      </a:fillRef>
-      <a:effectRef idx="0">
-        <a:scrgbClr r="0" g="0" b="0"/>
-      </a:effectRef>
-      <a:fontRef idx="minor"/>
-    </dgm:style>
-  </dgm:styleLbl>
-  <dgm:styleLbl name="fgAccFollowNode1">
-    <dgm:scene3d>
-      <a:camera prst="orthographicFront"/>
-      <a:lightRig rig="threePt" dir="t"/>
-    </dgm:scene3d>
-    <dgm:sp3d/>
-    <dgm:txPr/>
-    <dgm:style>
-      <a:lnRef idx="2">
-        <a:scrgbClr r="0" g="0" b="0"/>
-      </a:lnRef>
-      <a:fillRef idx="1">
-        <a:scrgbClr r="0" g="0" b="0"/>
-      </a:fillRef>
-      <a:effectRef idx="0">
-        <a:scrgbClr r="0" g="0" b="0"/>
-      </a:effectRef>
-      <a:fontRef idx="minor"/>
-    </dgm:style>
-  </dgm:styleLbl>
-  <dgm:styleLbl name="alignAccFollowNode1">
-    <dgm:scene3d>
-      <a:camera prst="orthographicFront"/>
-      <a:lightRig rig="threePt" dir="t"/>
-    </dgm:scene3d>
-    <dgm:sp3d/>
-    <dgm:txPr/>
-    <dgm:style>
-      <a:lnRef idx="2">
-        <a:scrgbClr r="0" g="0" b="0"/>
-      </a:lnRef>
-      <a:fillRef idx="1">
-        <a:scrgbClr r="0" g="0" b="0"/>
-      </a:fillRef>
-      <a:effectRef idx="0">
-        <a:scrgbClr r="0" g="0" b="0"/>
-      </a:effectRef>
-      <a:fontRef idx="minor"/>
-    </dgm:style>
-  </dgm:styleLbl>
-  <dgm:styleLbl name="bgAccFollowNode1">
-    <dgm:scene3d>
-      <a:camera prst="orthographicFront"/>
-      <a:lightRig rig="threePt" dir="t"/>
-    </dgm:scene3d>
-    <dgm:sp3d/>
-    <dgm:txPr/>
-    <dgm:style>
-      <a:lnRef idx="2">
-        <a:scrgbClr r="0" g="0" b="0"/>
-      </a:lnRef>
-      <a:fillRef idx="1">
-        <a:scrgbClr r="0" g="0" b="0"/>
-      </a:fillRef>
-      <a:effectRef idx="0">
-        <a:scrgbClr r="0" g="0" b="0"/>
-      </a:effectRef>
-      <a:fontRef idx="minor"/>
-    </dgm:style>
-  </dgm:styleLbl>
-  <dgm:styleLbl name="fgAcc0">
-    <dgm:scene3d>
-      <a:camera prst="orthographicFront"/>
-      <a:lightRig rig="threePt" dir="t"/>
-    </dgm:scene3d>
-    <dgm:sp3d/>
-    <dgm:txPr/>
-    <dgm:style>
-      <a:lnRef idx="2">
-        <a:scrgbClr r="0" g="0" b="0"/>
-      </a:lnRef>
-      <a:fillRef idx="1">
-        <a:scrgbClr r="0" g="0" b="0"/>
-      </a:fillRef>
-      <a:effectRef idx="0">
-        <a:scrgbClr r="0" g="0" b="0"/>
-      </a:effectRef>
-      <a:fontRef idx="minor"/>
-    </dgm:style>
-  </dgm:styleLbl>
-  <dgm:styleLbl name="fgAcc2">
-    <dgm:scene3d>
-      <a:camera prst="orthographicFront"/>
-      <a:lightRig rig="threePt" dir="t"/>
-    </dgm:scene3d>
-    <dgm:sp3d/>
-    <dgm:txPr/>
-    <dgm:style>
-      <a:lnRef idx="2">
-        <a:scrgbClr r="0" g="0" b="0"/>
-      </a:lnRef>
-      <a:fillRef idx="1">
-        <a:scrgbClr r="0" g="0" b="0"/>
-      </a:fillRef>
-      <a:effectRef idx="0">
-        <a:scrgbClr r="0" g="0" b="0"/>
-      </a:effectRef>
-      <a:fontRef idx="minor"/>
-    </dgm:style>
-  </dgm:styleLbl>
-  <dgm:styleLbl name="fgAcc3">
-    <dgm:scene3d>
-      <a:camera prst="orthographicFront"/>
-      <a:lightRig rig="threePt" dir="t"/>
-    </dgm:scene3d>
-    <dgm:sp3d/>
-    <dgm:txPr/>
-    <dgm:style>
-      <a:lnRef idx="2">
-        <a:scrgbClr r="0" g="0" b="0"/>
-      </a:lnRef>
-      <a:fillRef idx="1">
-        <a:scrgbClr r="0" g="0" b="0"/>
-      </a:fillRef>
-      <a:effectRef idx="0">
-        <a:scrgbClr r="0" g="0" b="0"/>
-      </a:effectRef>
-      <a:fontRef idx="minor"/>
-    </dgm:style>
-  </dgm:styleLbl>
-  <dgm:styleLbl name="fgAcc4">
-    <dgm:scene3d>
-      <a:camera prst="orthographicFront"/>
-      <a:lightRig rig="threePt" dir="t"/>
-    </dgm:scene3d>
-    <dgm:sp3d/>
-    <dgm:txPr/>
-    <dgm:style>
-      <a:lnRef idx="2">
-        <a:scrgbClr r="0" g="0" b="0"/>
-      </a:lnRef>
-      <a:fillRef idx="1">
-        <a:scrgbClr r="0" g="0" b="0"/>
-      </a:fillRef>
-      <a:effectRef idx="0">
-        <a:scrgbClr r="0" g="0" b="0"/>
-      </a:effectRef>
-      <a:fontRef idx="minor"/>
-    </dgm:style>
-  </dgm:styleLbl>
-  <dgm:styleLbl name="bgShp">
-    <dgm:scene3d>
-      <a:camera prst="orthographicFront"/>
-      <a:lightRig rig="threePt" dir="t"/>
-    </dgm:scene3d>
-    <dgm:sp3d/>
-    <dgm:txPr/>
-    <dgm:style>
-      <a:lnRef idx="0">
-        <a:scrgbClr r="0" g="0" b="0"/>
-      </a:lnRef>
-      <a:fillRef idx="1">
-        <a:scrgbClr r="0" g="0" b="0"/>
-      </a:fillRef>
-      <a:effectRef idx="0">
-        <a:scrgbClr r="0" g="0" b="0"/>
-      </a:effectRef>
-      <a:fontRef idx="minor"/>
-    </dgm:style>
-  </dgm:styleLbl>
-  <dgm:styleLbl name="dkBgShp">
-    <dgm:scene3d>
-      <a:camera prst="orthographicFront"/>
-      <a:lightRig rig="threePt" dir="t"/>
-    </dgm:scene3d>
-    <dgm:sp3d/>
-    <dgm:txPr/>
-    <dgm:style>
-      <a:lnRef idx="0">
-        <a:scrgbClr r="0" g="0" b="0"/>
-      </a:lnRef>
-      <a:fillRef idx="1">
-        <a:scrgbClr r="0" g="0" b="0"/>
-      </a:fillRef>
-      <a:effectRef idx="0">
-        <a:scrgbClr r="0" g="0" b="0"/>
-      </a:effectRef>
-      <a:fontRef idx="minor"/>
-    </dgm:style>
-  </dgm:styleLbl>
-  <dgm:styleLbl name="trBgShp">
-    <dgm:scene3d>
-      <a:camera prst="orthographicFront"/>
-      <a:lightRig rig="threePt" dir="t"/>
-    </dgm:scene3d>
-    <dgm:sp3d/>
-    <dgm:txPr/>
-    <dgm:style>
-      <a:lnRef idx="0">
-        <a:scrgbClr r="0" g="0" b="0"/>
-      </a:lnRef>
-      <a:fillRef idx="1">
-        <a:scrgbClr r="0" g="0" b="0"/>
-      </a:fillRef>
-      <a:effectRef idx="0">
-        <a:scrgbClr r="0" g="0" b="0"/>
-      </a:effectRef>
-      <a:fontRef idx="minor"/>
-    </dgm:style>
-  </dgm:styleLbl>
-  <dgm:styleLbl name="fgShp">
-    <dgm:scene3d>
-      <a:camera prst="orthographicFront"/>
-      <a:lightRig rig="threePt" dir="t"/>
-    </dgm:scene3d>
-    <dgm:sp3d/>
-    <dgm:txPr/>
-    <dgm:style>
-      <a:lnRef idx="2">
-        <a:scrgbClr r="0" g="0" b="0"/>
-      </a:lnRef>
-      <a:fillRef idx="1">
-        <a:scrgbClr r="0" g="0" b="0"/>
-      </a:fillRef>
-      <a:effectRef idx="0">
-        <a:scrgbClr r="0" g="0" b="0"/>
-      </a:effectRef>
-      <a:fontRef idx="minor"/>
-    </dgm:style>
-  </dgm:styleLbl>
-  <dgm:styleLbl name="revTx">
-    <dgm:scene3d>
-      <a:camera prst="orthographicFront"/>
-      <a:lightRig rig="threePt" dir="t"/>
-    </dgm:scene3d>
-    <dgm:sp3d/>
-    <dgm:txPr/>
-    <dgm:style>
-      <a:lnRef idx="0">
-        <a:scrgbClr r="0" g="0" b="0"/>
-      </a:lnRef>
-      <a:fillRef idx="0">
-        <a:scrgbClr r="0" g="0" b="0"/>
-      </a:fillRef>
-      <a:effectRef idx="0">
-        <a:scrgbClr r="0" g="0" b="0"/>
-      </a:effectRef>
-      <a:fontRef idx="minor"/>
-    </dgm:style>
-  </dgm:styleLbl>
-</dgm:styleDef>
-</file>
-
 <file path=ppt/notesMasters/notesMaster1.xml><?xml version="1.0" encoding="utf-8"?>
 <p:notesMaster xmlns:a="http://schemas.openxmlformats.org/drawingml/2006/main" xmlns:r="http://schemas.openxmlformats.org/officeDocument/2006/relationships" xmlns:p="http://schemas.openxmlformats.org/presentationml/2006/main">
   <p:cSld>
@@ -21190,28 +17665,6 @@
           </a:p>
         </p:txBody>
       </p:sp>
-      <p:graphicFrame>
-        <p:nvGraphicFramePr>
-          <p:cNvPr id="106" name="図表 105">
-            <a:extLst>
-              <a:ext uri="{FF2B5EF4-FFF2-40B4-BE49-F238E27FC236}">
-                <a16:creationId xmlns:a16="http://schemas.microsoft.com/office/drawing/2014/main" id="{5BF50787-5C3B-B46C-8F8C-78D7E531CC6B}"/>
-              </a:ext>
-            </a:extLst>
-          </p:cNvPr>
-          <p:cNvGraphicFramePr/>
-          <p:nvPr/>
-        </p:nvGraphicFramePr>
-        <p:xfrm>
-          <a:off x="18056475" y="0"/>
-          <a:ext cx="6325938" cy="13716000"/>
-        </p:xfrm>
-        <a:graphic>
-          <a:graphicData uri="http://schemas.openxmlformats.org/drawingml/2006/diagram">
-            <dgm:relIds xmlns:dgm="http://schemas.openxmlformats.org/drawingml/2006/diagram" xmlns:r="http://schemas.openxmlformats.org/officeDocument/2006/relationships" r:dm="rId2" r:lo="rId3" r:qs="rId4" r:cs="rId5"/>
-          </a:graphicData>
-        </a:graphic>
-      </p:graphicFrame>
       <p:grpSp>
         <p:nvGrpSpPr>
           <p:cNvPr id="102" name="グループ化 101">
@@ -21351,7 +17804,7 @@
           <a:blip>
             <a:extLst>
               <a:ext uri="{96DAC541-7B7A-43D3-8B79-37D633B846F1}">
-                <asvg:svgBlip xmlns:asvg="http://schemas.microsoft.com/office/drawing/2016/SVG/main" r:embed="rId7"/>
+                <asvg:svgBlip xmlns:asvg="http://schemas.microsoft.com/office/drawing/2016/SVG/main" r:embed="rId2"/>
               </a:ext>
             </a:extLst>
           </a:blip>
@@ -21387,7 +17840,7 @@
           <a:blip>
             <a:extLst>
               <a:ext uri="{96DAC541-7B7A-43D3-8B79-37D633B846F1}">
-                <asvg:svgBlip xmlns:asvg="http://schemas.microsoft.com/office/drawing/2016/SVG/main" r:embed="rId8"/>
+                <asvg:svgBlip xmlns:asvg="http://schemas.microsoft.com/office/drawing/2016/SVG/main" r:embed="rId3"/>
               </a:ext>
             </a:extLst>
           </a:blip>
@@ -21423,7 +17876,7 @@
           <a:blip>
             <a:extLst>
               <a:ext uri="{96DAC541-7B7A-43D3-8B79-37D633B846F1}">
-                <asvg:svgBlip xmlns:asvg="http://schemas.microsoft.com/office/drawing/2016/SVG/main" r:embed="rId9"/>
+                <asvg:svgBlip xmlns:asvg="http://schemas.microsoft.com/office/drawing/2016/SVG/main" r:embed="rId4"/>
               </a:ext>
             </a:extLst>
           </a:blip>
@@ -21456,7 +17909,7 @@
           <p:nvPr/>
         </p:nvPicPr>
         <p:blipFill>
-          <a:blip r:embed="rId10"/>
+          <a:blip r:embed="rId5"/>
           <a:stretch>
             <a:fillRect/>
           </a:stretch>
@@ -21489,7 +17942,7 @@
           <a:blip>
             <a:extLst>
               <a:ext uri="{96DAC541-7B7A-43D3-8B79-37D633B846F1}">
-                <asvg:svgBlip xmlns:asvg="http://schemas.microsoft.com/office/drawing/2016/SVG/main" r:embed="rId11"/>
+                <asvg:svgBlip xmlns:asvg="http://schemas.microsoft.com/office/drawing/2016/SVG/main" r:embed="rId6"/>
               </a:ext>
             </a:extLst>
           </a:blip>
@@ -21525,7 +17978,7 @@
           <a:blip>
             <a:extLst>
               <a:ext uri="{96DAC541-7B7A-43D3-8B79-37D633B846F1}">
-                <asvg:svgBlip xmlns:asvg="http://schemas.microsoft.com/office/drawing/2016/SVG/main" r:embed="rId12"/>
+                <asvg:svgBlip xmlns:asvg="http://schemas.microsoft.com/office/drawing/2016/SVG/main" r:embed="rId7"/>
               </a:ext>
             </a:extLst>
           </a:blip>
@@ -21561,7 +18014,7 @@
           <a:blip>
             <a:extLst>
               <a:ext uri="{96DAC541-7B7A-43D3-8B79-37D633B846F1}">
-                <asvg:svgBlip xmlns:asvg="http://schemas.microsoft.com/office/drawing/2016/SVG/main" r:embed="rId13"/>
+                <asvg:svgBlip xmlns:asvg="http://schemas.microsoft.com/office/drawing/2016/SVG/main" r:embed="rId8"/>
               </a:ext>
             </a:extLst>
           </a:blip>
@@ -21597,7 +18050,7 @@
           <a:blip>
             <a:extLst>
               <a:ext uri="{96DAC541-7B7A-43D3-8B79-37D633B846F1}">
-                <asvg:svgBlip xmlns:asvg="http://schemas.microsoft.com/office/drawing/2016/SVG/main" r:embed="rId9"/>
+                <asvg:svgBlip xmlns:asvg="http://schemas.microsoft.com/office/drawing/2016/SVG/main" r:embed="rId4"/>
               </a:ext>
             </a:extLst>
           </a:blip>
@@ -21633,7 +18086,7 @@
           <a:blip>
             <a:extLst>
               <a:ext uri="{96DAC541-7B7A-43D3-8B79-37D633B846F1}">
-                <asvg:svgBlip xmlns:asvg="http://schemas.microsoft.com/office/drawing/2016/SVG/main" r:embed="rId14"/>
+                <asvg:svgBlip xmlns:asvg="http://schemas.microsoft.com/office/drawing/2016/SVG/main" r:embed="rId9"/>
               </a:ext>
             </a:extLst>
           </a:blip>
@@ -21669,7 +18122,7 @@
           <a:blip>
             <a:extLst>
               <a:ext uri="{96DAC541-7B7A-43D3-8B79-37D633B846F1}">
-                <asvg:svgBlip xmlns:asvg="http://schemas.microsoft.com/office/drawing/2016/SVG/main" r:embed="rId15"/>
+                <asvg:svgBlip xmlns:asvg="http://schemas.microsoft.com/office/drawing/2016/SVG/main" r:embed="rId10"/>
               </a:ext>
             </a:extLst>
           </a:blip>
@@ -22089,7 +18542,7 @@
             <a:blip>
               <a:extLst>
                 <a:ext uri="{96DAC541-7B7A-43D3-8B79-37D633B846F1}">
-                  <asvg:svgBlip xmlns:asvg="http://schemas.microsoft.com/office/drawing/2016/SVG/main" r:embed="rId16"/>
+                  <asvg:svgBlip xmlns:asvg="http://schemas.microsoft.com/office/drawing/2016/SVG/main" r:embed="rId11"/>
                 </a:ext>
               </a:extLst>
             </a:blip>
@@ -22711,7 +19164,7 @@
           <a:blip>
             <a:extLst>
               <a:ext uri="{96DAC541-7B7A-43D3-8B79-37D633B846F1}">
-                <asvg:svgBlip xmlns:asvg="http://schemas.microsoft.com/office/drawing/2016/SVG/main" r:embed="rId7"/>
+                <asvg:svgBlip xmlns:asvg="http://schemas.microsoft.com/office/drawing/2016/SVG/main" r:embed="rId2"/>
               </a:ext>
             </a:extLst>
           </a:blip>
@@ -22741,13 +19194,14 @@
           <p:cNvCxnSpPr>
             <a:cxnSpLocks/>
             <a:stCxn id="17" idx="0"/>
+            <a:endCxn id="35" idx="2"/>
           </p:cNvCxnSpPr>
           <p:nvPr/>
         </p:nvCxnSpPr>
         <p:spPr>
           <a:xfrm rot="5400000" flipH="1" flipV="1">
-            <a:off x="11571708" y="5801317"/>
-            <a:ext cx="1446938" cy="2880000"/>
+            <a:off x="11892938" y="6131631"/>
+            <a:ext cx="795394" cy="2870917"/>
           </a:xfrm>
           <a:prstGeom prst="bentConnector3">
             <a:avLst>
@@ -22841,7 +19295,7 @@
           <a:blip>
             <a:extLst>
               <a:ext uri="{96DAC541-7B7A-43D3-8B79-37D633B846F1}">
-                <asvg:svgBlip xmlns:asvg="http://schemas.microsoft.com/office/drawing/2016/SVG/main" r:embed="rId17"/>
+                <asvg:svgBlip xmlns:asvg="http://schemas.microsoft.com/office/drawing/2016/SVG/main" r:embed="rId12"/>
               </a:ext>
             </a:extLst>
           </a:blip>
@@ -22877,7 +19331,7 @@
           <a:blip>
             <a:extLst>
               <a:ext uri="{96DAC541-7B7A-43D3-8B79-37D633B846F1}">
-                <asvg:svgBlip xmlns:asvg="http://schemas.microsoft.com/office/drawing/2016/SVG/main" r:embed="rId18"/>
+                <asvg:svgBlip xmlns:asvg="http://schemas.microsoft.com/office/drawing/2016/SVG/main" r:embed="rId13"/>
               </a:ext>
             </a:extLst>
           </a:blip>
@@ -23260,7 +19714,7 @@
         </p:nvSpPr>
         <p:spPr>
           <a:xfrm>
-            <a:off x="10790322" y="7389751"/>
+            <a:off x="10790322" y="7173596"/>
             <a:ext cx="854323" cy="369332"/>
           </a:xfrm>
           <a:prstGeom prst="rect">
@@ -23326,36 +19780,107 @@
           </a:p>
         </p:txBody>
       </p:sp>
-      <p:pic>
-        <p:nvPicPr>
-          <p:cNvPr id="35" name="図 34">
-            <a:extLst>
-              <a:ext uri="{FF2B5EF4-FFF2-40B4-BE49-F238E27FC236}">
-                <a16:creationId xmlns:a16="http://schemas.microsoft.com/office/drawing/2014/main" id="{64C8996C-730A-7EAB-9F8B-48B002CCA8D1}"/>
-              </a:ext>
-            </a:extLst>
-          </p:cNvPr>
-          <p:cNvPicPr>
-            <a:picLocks noChangeAspect="1"/>
-          </p:cNvPicPr>
+      <p:grpSp>
+        <p:nvGrpSpPr>
+          <p:cNvPr id="38" name="グループ化 37">
+            <a:extLst>
+              <a:ext uri="{FF2B5EF4-FFF2-40B4-BE49-F238E27FC236}">
+                <a16:creationId xmlns:a16="http://schemas.microsoft.com/office/drawing/2014/main" id="{B9C5C9E4-FACA-F829-1722-53D71918ADCD}"/>
+              </a:ext>
+            </a:extLst>
+          </p:cNvPr>
+          <p:cNvGrpSpPr/>
           <p:nvPr/>
-        </p:nvPicPr>
-        <p:blipFill>
-          <a:blip r:embed="rId19"/>
-          <a:stretch>
-            <a:fillRect/>
-          </a:stretch>
-        </p:blipFill>
-        <p:spPr>
-          <a:xfrm>
-            <a:off x="12839278" y="5077848"/>
-            <a:ext cx="1794392" cy="1440000"/>
-          </a:xfrm>
-          <a:prstGeom prst="rect">
-            <a:avLst/>
-          </a:prstGeom>
-        </p:spPr>
-      </p:pic>
+        </p:nvGrpSpPr>
+        <p:grpSpPr>
+          <a:xfrm>
+            <a:off x="12283067" y="4372665"/>
+            <a:ext cx="2882018" cy="2796727"/>
+            <a:chOff x="12283067" y="4372665"/>
+            <a:chExt cx="2882018" cy="2796727"/>
+          </a:xfrm>
+        </p:grpSpPr>
+        <p:pic>
+          <p:nvPicPr>
+            <p:cNvPr id="16" name="図 15">
+              <a:extLst>
+                <a:ext uri="{FF2B5EF4-FFF2-40B4-BE49-F238E27FC236}">
+                  <a16:creationId xmlns:a16="http://schemas.microsoft.com/office/drawing/2014/main" id="{A26DD222-CDC2-C27B-16F7-6D9A08F52DEF}"/>
+                </a:ext>
+              </a:extLst>
+            </p:cNvPr>
+            <p:cNvPicPr>
+              <a:picLocks noChangeAspect="1"/>
+            </p:cNvPicPr>
+            <p:nvPr/>
+          </p:nvPicPr>
+          <p:blipFill>
+            <a:blip r:embed="rId14"/>
+            <a:stretch>
+              <a:fillRect/>
+            </a:stretch>
+          </p:blipFill>
+          <p:spPr>
+            <a:xfrm>
+              <a:off x="12283067" y="4372665"/>
+              <a:ext cx="2880000" cy="2581200"/>
+            </a:xfrm>
+            <a:prstGeom prst="rect">
+              <a:avLst/>
+            </a:prstGeom>
+          </p:spPr>
+        </p:pic>
+        <p:sp>
+          <p:nvSpPr>
+            <p:cNvPr id="35" name="正方形/長方形 34">
+              <a:extLst>
+                <a:ext uri="{FF2B5EF4-FFF2-40B4-BE49-F238E27FC236}">
+                  <a16:creationId xmlns:a16="http://schemas.microsoft.com/office/drawing/2014/main" id="{5A1DAF6F-29E7-954E-7F60-6BE71360E768}"/>
+                </a:ext>
+              </a:extLst>
+            </p:cNvPr>
+            <p:cNvSpPr/>
+            <p:nvPr/>
+          </p:nvSpPr>
+          <p:spPr>
+            <a:xfrm>
+              <a:off x="12287103" y="4417896"/>
+              <a:ext cx="2877982" cy="2751496"/>
+            </a:xfrm>
+            <a:prstGeom prst="rect">
+              <a:avLst/>
+            </a:prstGeom>
+            <a:noFill/>
+            <a:ln>
+              <a:noFill/>
+            </a:ln>
+          </p:spPr>
+          <p:style>
+            <a:lnRef idx="2">
+              <a:schemeClr val="accent1">
+                <a:shade val="15000"/>
+              </a:schemeClr>
+            </a:lnRef>
+            <a:fillRef idx="1">
+              <a:schemeClr val="accent1"/>
+            </a:fillRef>
+            <a:effectRef idx="0">
+              <a:schemeClr val="accent1"/>
+            </a:effectRef>
+            <a:fontRef idx="minor">
+              <a:schemeClr val="lt1"/>
+            </a:fontRef>
+          </p:style>
+          <p:txBody>
+            <a:bodyPr rtlCol="0" anchor="ctr"/>
+            <a:lstStyle/>
+            <a:p>
+              <a:pPr algn="ctr"/>
+              <a:endParaRPr kumimoji="1" lang="ja-JP" altLang="en-US"/>
+            </a:p>
+          </p:txBody>
+        </p:sp>
+      </p:grpSp>
     </p:spTree>
     <p:extLst>
       <p:ext uri="{BB962C8B-B14F-4D97-AF65-F5344CB8AC3E}">
@@ -23370,7 +19895,7 @@
 </file>
 
 <file path=ppt/slides/slide3.xml><?xml version="1.0" encoding="utf-8"?>
-<p:sld xmlns:a="http://schemas.openxmlformats.org/drawingml/2006/main" xmlns:r="http://schemas.openxmlformats.org/officeDocument/2006/relationships" xmlns:p="http://schemas.openxmlformats.org/presentationml/2006/main">
+<p:sld xmlns:a="http://schemas.openxmlformats.org/drawingml/2006/main" xmlns:r="http://schemas.openxmlformats.org/officeDocument/2006/relationships" xmlns:p="http://schemas.openxmlformats.org/presentationml/2006/main" show="0">
   <p:cSld>
     <p:spTree>
       <p:nvGrpSpPr>
